--- a/1. ML first 28.pptx
+++ b/1. ML first 28.pptx
@@ -37,6 +37,12 @@
     <p:sldId id="330" r:id="rId31"/>
     <p:sldId id="331" r:id="rId32"/>
     <p:sldId id="332" r:id="rId33"/>
+    <p:sldId id="333" r:id="rId34"/>
+    <p:sldId id="334" r:id="rId35"/>
+    <p:sldId id="335" r:id="rId36"/>
+    <p:sldId id="336" r:id="rId37"/>
+    <p:sldId id="337" r:id="rId38"/>
+    <p:sldId id="338" r:id="rId39"/>
   </p:sldIdLst>
   <p:sldSz cx="14630400" cy="8229600"/>
   <p:notesSz cx="6858000" cy="9144000"/>
@@ -333,7 +339,7 @@
           <a:p>
             <a:fld id="{5BCAD085-E8A6-8845-BD4E-CB4CCA059FC4}" type="datetimeFigureOut">
               <a:rPr lang="en-US" smtClean="0"/>
-              <a:t>2/28/2026</a:t>
+              <a:t>3/21/2026</a:t>
             </a:fld>
             <a:endParaRPr lang="en-US"/>
           </a:p>
@@ -501,7 +507,7 @@
           <a:p>
             <a:fld id="{5BCAD085-E8A6-8845-BD4E-CB4CCA059FC4}" type="datetimeFigureOut">
               <a:rPr lang="en-US" smtClean="0"/>
-              <a:t>2/28/2026</a:t>
+              <a:t>3/21/2026</a:t>
             </a:fld>
             <a:endParaRPr lang="en-US"/>
           </a:p>
@@ -679,7 +685,7 @@
           <a:p>
             <a:fld id="{5BCAD085-E8A6-8845-BD4E-CB4CCA059FC4}" type="datetimeFigureOut">
               <a:rPr lang="en-US" smtClean="0"/>
-              <a:t>2/28/2026</a:t>
+              <a:t>3/21/2026</a:t>
             </a:fld>
             <a:endParaRPr lang="en-US"/>
           </a:p>
@@ -847,7 +853,7 @@
           <a:p>
             <a:fld id="{5BCAD085-E8A6-8845-BD4E-CB4CCA059FC4}" type="datetimeFigureOut">
               <a:rPr lang="en-US" smtClean="0"/>
-              <a:t>2/28/2026</a:t>
+              <a:t>3/21/2026</a:t>
             </a:fld>
             <a:endParaRPr lang="en-US"/>
           </a:p>
@@ -1092,7 +1098,7 @@
           <a:p>
             <a:fld id="{5BCAD085-E8A6-8845-BD4E-CB4CCA059FC4}" type="datetimeFigureOut">
               <a:rPr lang="en-US" smtClean="0"/>
-              <a:t>2/28/2026</a:t>
+              <a:t>3/21/2026</a:t>
             </a:fld>
             <a:endParaRPr lang="en-US"/>
           </a:p>
@@ -1377,7 +1383,7 @@
           <a:p>
             <a:fld id="{5BCAD085-E8A6-8845-BD4E-CB4CCA059FC4}" type="datetimeFigureOut">
               <a:rPr lang="en-US" smtClean="0"/>
-              <a:t>2/28/2026</a:t>
+              <a:t>3/21/2026</a:t>
             </a:fld>
             <a:endParaRPr lang="en-US"/>
           </a:p>
@@ -1796,7 +1802,7 @@
           <a:p>
             <a:fld id="{5BCAD085-E8A6-8845-BD4E-CB4CCA059FC4}" type="datetimeFigureOut">
               <a:rPr lang="en-US" smtClean="0"/>
-              <a:t>2/28/2026</a:t>
+              <a:t>3/21/2026</a:t>
             </a:fld>
             <a:endParaRPr lang="en-US"/>
           </a:p>
@@ -1913,7 +1919,7 @@
           <a:p>
             <a:fld id="{5BCAD085-E8A6-8845-BD4E-CB4CCA059FC4}" type="datetimeFigureOut">
               <a:rPr lang="en-US" smtClean="0"/>
-              <a:t>2/28/2026</a:t>
+              <a:t>3/21/2026</a:t>
             </a:fld>
             <a:endParaRPr lang="en-US"/>
           </a:p>
@@ -2008,7 +2014,7 @@
           <a:p>
             <a:fld id="{5BCAD085-E8A6-8845-BD4E-CB4CCA059FC4}" type="datetimeFigureOut">
               <a:rPr lang="en-US" smtClean="0"/>
-              <a:t>2/28/2026</a:t>
+              <a:t>3/21/2026</a:t>
             </a:fld>
             <a:endParaRPr lang="en-US"/>
           </a:p>
@@ -2283,7 +2289,7 @@
           <a:p>
             <a:fld id="{5BCAD085-E8A6-8845-BD4E-CB4CCA059FC4}" type="datetimeFigureOut">
               <a:rPr lang="en-US" smtClean="0"/>
-              <a:t>2/28/2026</a:t>
+              <a:t>3/21/2026</a:t>
             </a:fld>
             <a:endParaRPr lang="en-US"/>
           </a:p>
@@ -2535,7 +2541,7 @@
           <a:p>
             <a:fld id="{5BCAD085-E8A6-8845-BD4E-CB4CCA059FC4}" type="datetimeFigureOut">
               <a:rPr lang="en-US" smtClean="0"/>
-              <a:t>2/28/2026</a:t>
+              <a:t>3/21/2026</a:t>
             </a:fld>
             <a:endParaRPr lang="en-US"/>
           </a:p>
@@ -2746,7 +2752,7 @@
           <a:p>
             <a:fld id="{5BCAD085-E8A6-8845-BD4E-CB4CCA059FC4}" type="datetimeFigureOut">
               <a:rPr lang="en-US" smtClean="0"/>
-              <a:t>2/28/2026</a:t>
+              <a:t>3/21/2026</a:t>
             </a:fld>
             <a:endParaRPr lang="en-US"/>
           </a:p>
@@ -25391,6 +25397,3861 @@
 </p:sld>
 </file>
 
+<file path=ppt/slides/slide33.xml><?xml version="1.0" encoding="utf-8"?>
+<p:sld xmlns:a="http://schemas.openxmlformats.org/drawingml/2006/main" xmlns:r="http://schemas.openxmlformats.org/officeDocument/2006/relationships" xmlns:p="http://schemas.openxmlformats.org/presentationml/2006/main">
+  <p:cSld>
+    <p:bg>
+      <p:bgPr>
+        <a:solidFill>
+          <a:srgbClr val="972996"/>
+        </a:solidFill>
+        <a:effectLst/>
+      </p:bgPr>
+    </p:bg>
+    <p:spTree>
+      <p:nvGrpSpPr>
+        <p:cNvPr id="1" name=""/>
+        <p:cNvGrpSpPr/>
+        <p:nvPr/>
+      </p:nvGrpSpPr>
+      <p:grpSpPr>
+        <a:xfrm>
+          <a:off x="0" y="0"/>
+          <a:ext cx="0" cy="0"/>
+          <a:chOff x="0" y="0"/>
+          <a:chExt cx="0" cy="0"/>
+        </a:xfrm>
+      </p:grpSpPr>
+      <p:pic>
+        <p:nvPicPr>
+          <p:cNvPr id="4" name="Picture 3" descr="logo.png"/>
+          <p:cNvPicPr>
+            <a:picLocks noChangeAspect="1"/>
+          </p:cNvPicPr>
+          <p:nvPr/>
+        </p:nvPicPr>
+        <p:blipFill>
+          <a:blip r:embed="rId2"/>
+          <a:stretch>
+            <a:fillRect/>
+          </a:stretch>
+        </p:blipFill>
+        <p:spPr>
+          <a:xfrm>
+            <a:off x="12344400" y="274320"/>
+            <a:ext cx="1097280" cy="1080473"/>
+          </a:xfrm>
+          <a:prstGeom prst="rect">
+            <a:avLst/>
+          </a:prstGeom>
+        </p:spPr>
+      </p:pic>
+      <p:sp>
+        <p:nvSpPr>
+          <p:cNvPr id="5" name="Rectangle 4"/>
+          <p:cNvSpPr/>
+          <p:nvPr/>
+        </p:nvSpPr>
+        <p:spPr>
+          <a:xfrm>
+            <a:off x="0" y="7772400"/>
+            <a:ext cx="14630400" cy="457200"/>
+          </a:xfrm>
+          <a:prstGeom prst="rect">
+            <a:avLst/>
+          </a:prstGeom>
+          <a:solidFill>
+            <a:srgbClr val="E6E6E6"/>
+          </a:solidFill>
+          <a:ln>
+            <a:noFill/>
+          </a:ln>
+        </p:spPr>
+        <p:style>
+          <a:lnRef idx="1">
+            <a:schemeClr val="accent1"/>
+          </a:lnRef>
+          <a:fillRef idx="3">
+            <a:schemeClr val="accent1"/>
+          </a:fillRef>
+          <a:effectRef idx="2">
+            <a:schemeClr val="accent1"/>
+          </a:effectRef>
+          <a:fontRef idx="minor">
+            <a:schemeClr val="lt1"/>
+          </a:fontRef>
+        </p:style>
+        <p:txBody>
+          <a:bodyPr rtlCol="0" anchor="ctr"/>
+          <a:lstStyle/>
+          <a:p>
+            <a:pPr algn="ctr"/>
+            <a:endParaRPr/>
+          </a:p>
+        </p:txBody>
+      </p:sp>
+      <p:sp>
+        <p:nvSpPr>
+          <p:cNvPr id="3" name="TextBox 2">
+            <a:extLst>
+              <a:ext uri="{FF2B5EF4-FFF2-40B4-BE49-F238E27FC236}">
+                <a16:creationId xmlns:a16="http://schemas.microsoft.com/office/drawing/2014/main" id="{C315D28A-F529-C361-6B0C-54FC6D10368B}"/>
+              </a:ext>
+            </a:extLst>
+          </p:cNvPr>
+          <p:cNvSpPr txBox="1"/>
+          <p:nvPr/>
+        </p:nvSpPr>
+        <p:spPr>
+          <a:xfrm>
+            <a:off x="625737" y="289929"/>
+            <a:ext cx="10491334" cy="769441"/>
+          </a:xfrm>
+          <a:prstGeom prst="rect">
+            <a:avLst/>
+          </a:prstGeom>
+          <a:noFill/>
+        </p:spPr>
+        <p:txBody>
+          <a:bodyPr wrap="none">
+            <a:spAutoFit/>
+          </a:bodyPr>
+          <a:lstStyle/>
+          <a:p>
+            <a:r>
+              <a:rPr lang="ru-RU" sz="4400" dirty="0">
+                <a:solidFill>
+                  <a:schemeClr val="bg1"/>
+                </a:solidFill>
+              </a:rPr>
+              <a:t>1 вход 1 нейрон 1 вес и градиентный спуск</a:t>
+            </a:r>
+            <a:endParaRPr lang="ru-RU" sz="4400" b="1" dirty="0">
+              <a:solidFill>
+                <a:schemeClr val="bg1"/>
+              </a:solidFill>
+            </a:endParaRPr>
+          </a:p>
+        </p:txBody>
+      </p:sp>
+      <p:sp>
+        <p:nvSpPr>
+          <p:cNvPr id="2" name="TextBox 1">
+            <a:extLst>
+              <a:ext uri="{FF2B5EF4-FFF2-40B4-BE49-F238E27FC236}">
+                <a16:creationId xmlns:a16="http://schemas.microsoft.com/office/drawing/2014/main" id="{2DCBC596-FBD8-97DD-BA0D-10095D714FDB}"/>
+              </a:ext>
+            </a:extLst>
+          </p:cNvPr>
+          <p:cNvSpPr txBox="1"/>
+          <p:nvPr/>
+        </p:nvSpPr>
+        <p:spPr>
+          <a:xfrm>
+            <a:off x="1083346" y="1138064"/>
+            <a:ext cx="12853238" cy="523220"/>
+          </a:xfrm>
+          <a:prstGeom prst="rect">
+            <a:avLst/>
+          </a:prstGeom>
+          <a:noFill/>
+        </p:spPr>
+        <p:txBody>
+          <a:bodyPr wrap="square">
+            <a:spAutoFit/>
+          </a:bodyPr>
+          <a:lstStyle/>
+          <a:p>
+            <a:pPr algn="just"/>
+            <a:r>
+              <a:rPr lang="ru-RU" sz="2800" b="0" dirty="0">
+                <a:solidFill>
+                  <a:schemeClr val="bg1"/>
+                </a:solidFill>
+                <a:effectLst/>
+                <a:latin typeface="+mj-lt"/>
+              </a:rPr>
+              <a:t>Измерим ошибку и определим направление и величину изменения!</a:t>
+            </a:r>
+          </a:p>
+        </p:txBody>
+      </p:sp>
+      <p:sp>
+        <p:nvSpPr>
+          <p:cNvPr id="7" name="TextBox 6">
+            <a:extLst>
+              <a:ext uri="{FF2B5EF4-FFF2-40B4-BE49-F238E27FC236}">
+                <a16:creationId xmlns:a16="http://schemas.microsoft.com/office/drawing/2014/main" id="{14942CA4-3D3C-AE19-4620-3267BAAE18F5}"/>
+              </a:ext>
+            </a:extLst>
+          </p:cNvPr>
+          <p:cNvSpPr txBox="1"/>
+          <p:nvPr/>
+        </p:nvSpPr>
+        <p:spPr>
+          <a:xfrm>
+            <a:off x="1083345" y="1483378"/>
+            <a:ext cx="10033725" cy="2862322"/>
+          </a:xfrm>
+          <a:prstGeom prst="rect">
+            <a:avLst/>
+          </a:prstGeom>
+          <a:noFill/>
+        </p:spPr>
+        <p:txBody>
+          <a:bodyPr wrap="square">
+            <a:spAutoFit/>
+          </a:bodyPr>
+          <a:lstStyle/>
+          <a:p>
+            <a:br>
+              <a:rPr lang="en-US" b="0" dirty="0">
+                <a:solidFill>
+                  <a:srgbClr val="CCCCCC"/>
+                </a:solidFill>
+                <a:effectLst/>
+                <a:latin typeface="Consolas" panose="020B0609020204030204" pitchFamily="49" charset="0"/>
+              </a:rPr>
+            </a:br>
+            <a:r>
+              <a:rPr lang="en-US" b="0" dirty="0">
+                <a:solidFill>
+                  <a:srgbClr val="9CDCFE"/>
+                </a:solidFill>
+                <a:effectLst/>
+                <a:latin typeface="Consolas" panose="020B0609020204030204" pitchFamily="49" charset="0"/>
+              </a:rPr>
+              <a:t>weight</a:t>
+            </a:r>
+            <a:r>
+              <a:rPr lang="en-US" b="0" dirty="0">
+                <a:solidFill>
+                  <a:srgbClr val="CCCCCC"/>
+                </a:solidFill>
+                <a:effectLst/>
+                <a:latin typeface="Consolas" panose="020B0609020204030204" pitchFamily="49" charset="0"/>
+              </a:rPr>
+              <a:t> </a:t>
+            </a:r>
+            <a:r>
+              <a:rPr lang="en-US" b="0" dirty="0">
+                <a:solidFill>
+                  <a:srgbClr val="D4D4D4"/>
+                </a:solidFill>
+                <a:effectLst/>
+                <a:latin typeface="Consolas" panose="020B0609020204030204" pitchFamily="49" charset="0"/>
+              </a:rPr>
+              <a:t>=</a:t>
+            </a:r>
+            <a:r>
+              <a:rPr lang="en-US" b="0" dirty="0">
+                <a:solidFill>
+                  <a:srgbClr val="B5CEA8"/>
+                </a:solidFill>
+                <a:effectLst/>
+                <a:latin typeface="Consolas" panose="020B0609020204030204" pitchFamily="49" charset="0"/>
+              </a:rPr>
+              <a:t>0.5</a:t>
+            </a:r>
+            <a:endParaRPr lang="en-US" b="0" dirty="0">
+              <a:solidFill>
+                <a:srgbClr val="CCCCCC"/>
+              </a:solidFill>
+              <a:effectLst/>
+              <a:latin typeface="Consolas" panose="020B0609020204030204" pitchFamily="49" charset="0"/>
+            </a:endParaRPr>
+          </a:p>
+          <a:p>
+            <a:r>
+              <a:rPr lang="en-US" b="0" dirty="0" err="1">
+                <a:solidFill>
+                  <a:srgbClr val="9CDCFE"/>
+                </a:solidFill>
+                <a:effectLst/>
+                <a:latin typeface="Consolas" panose="020B0609020204030204" pitchFamily="49" charset="0"/>
+              </a:rPr>
+              <a:t>goal_pred</a:t>
+            </a:r>
+            <a:r>
+              <a:rPr lang="en-US" b="0" dirty="0">
+                <a:solidFill>
+                  <a:srgbClr val="CCCCCC"/>
+                </a:solidFill>
+                <a:effectLst/>
+                <a:latin typeface="Consolas" panose="020B0609020204030204" pitchFamily="49" charset="0"/>
+              </a:rPr>
+              <a:t> </a:t>
+            </a:r>
+            <a:r>
+              <a:rPr lang="en-US" b="0" dirty="0">
+                <a:solidFill>
+                  <a:srgbClr val="D4D4D4"/>
+                </a:solidFill>
+                <a:effectLst/>
+                <a:latin typeface="Consolas" panose="020B0609020204030204" pitchFamily="49" charset="0"/>
+              </a:rPr>
+              <a:t>=</a:t>
+            </a:r>
+            <a:r>
+              <a:rPr lang="en-US" b="0" dirty="0">
+                <a:solidFill>
+                  <a:srgbClr val="B5CEA8"/>
+                </a:solidFill>
+                <a:effectLst/>
+                <a:latin typeface="Consolas" panose="020B0609020204030204" pitchFamily="49" charset="0"/>
+              </a:rPr>
+              <a:t>0.8</a:t>
+            </a:r>
+            <a:endParaRPr lang="en-US" b="0" dirty="0">
+              <a:solidFill>
+                <a:srgbClr val="CCCCCC"/>
+              </a:solidFill>
+              <a:effectLst/>
+              <a:latin typeface="Consolas" panose="020B0609020204030204" pitchFamily="49" charset="0"/>
+            </a:endParaRPr>
+          </a:p>
+          <a:p>
+            <a:r>
+              <a:rPr lang="en-US" b="0" dirty="0">
+                <a:solidFill>
+                  <a:srgbClr val="9CDCFE"/>
+                </a:solidFill>
+                <a:effectLst/>
+                <a:latin typeface="Consolas" panose="020B0609020204030204" pitchFamily="49" charset="0"/>
+              </a:rPr>
+              <a:t>input</a:t>
+            </a:r>
+            <a:r>
+              <a:rPr lang="en-US" b="0" dirty="0">
+                <a:solidFill>
+                  <a:srgbClr val="CCCCCC"/>
+                </a:solidFill>
+                <a:effectLst/>
+                <a:latin typeface="Consolas" panose="020B0609020204030204" pitchFamily="49" charset="0"/>
+              </a:rPr>
+              <a:t> </a:t>
+            </a:r>
+            <a:r>
+              <a:rPr lang="en-US" b="0" dirty="0">
+                <a:solidFill>
+                  <a:srgbClr val="D4D4D4"/>
+                </a:solidFill>
+                <a:effectLst/>
+                <a:latin typeface="Consolas" panose="020B0609020204030204" pitchFamily="49" charset="0"/>
+              </a:rPr>
+              <a:t>=</a:t>
+            </a:r>
+            <a:r>
+              <a:rPr lang="en-US" b="0" dirty="0">
+                <a:solidFill>
+                  <a:srgbClr val="B5CEA8"/>
+                </a:solidFill>
+                <a:effectLst/>
+                <a:latin typeface="Consolas" panose="020B0609020204030204" pitchFamily="49" charset="0"/>
+              </a:rPr>
+              <a:t>0.5</a:t>
+            </a:r>
+            <a:endParaRPr lang="en-US" b="0" dirty="0">
+              <a:solidFill>
+                <a:srgbClr val="CCCCCC"/>
+              </a:solidFill>
+              <a:effectLst/>
+              <a:latin typeface="Consolas" panose="020B0609020204030204" pitchFamily="49" charset="0"/>
+            </a:endParaRPr>
+          </a:p>
+          <a:p>
+            <a:r>
+              <a:rPr lang="en-US" b="0" dirty="0">
+                <a:solidFill>
+                  <a:srgbClr val="C586C0"/>
+                </a:solidFill>
+                <a:effectLst/>
+                <a:latin typeface="Consolas" panose="020B0609020204030204" pitchFamily="49" charset="0"/>
+              </a:rPr>
+              <a:t>for</a:t>
+            </a:r>
+            <a:r>
+              <a:rPr lang="en-US" b="0" dirty="0">
+                <a:solidFill>
+                  <a:srgbClr val="CCCCCC"/>
+                </a:solidFill>
+                <a:effectLst/>
+                <a:latin typeface="Consolas" panose="020B0609020204030204" pitchFamily="49" charset="0"/>
+              </a:rPr>
+              <a:t> </a:t>
+            </a:r>
+            <a:r>
+              <a:rPr lang="en-US" b="0" dirty="0">
+                <a:solidFill>
+                  <a:srgbClr val="9CDCFE"/>
+                </a:solidFill>
+                <a:effectLst/>
+                <a:latin typeface="Consolas" panose="020B0609020204030204" pitchFamily="49" charset="0"/>
+              </a:rPr>
+              <a:t>iteration</a:t>
+            </a:r>
+            <a:r>
+              <a:rPr lang="en-US" b="0" dirty="0">
+                <a:solidFill>
+                  <a:srgbClr val="CCCCCC"/>
+                </a:solidFill>
+                <a:effectLst/>
+                <a:latin typeface="Consolas" panose="020B0609020204030204" pitchFamily="49" charset="0"/>
+              </a:rPr>
+              <a:t> </a:t>
+            </a:r>
+            <a:r>
+              <a:rPr lang="en-US" b="0" dirty="0">
+                <a:solidFill>
+                  <a:srgbClr val="C586C0"/>
+                </a:solidFill>
+                <a:effectLst/>
+                <a:latin typeface="Consolas" panose="020B0609020204030204" pitchFamily="49" charset="0"/>
+              </a:rPr>
+              <a:t>in</a:t>
+            </a:r>
+            <a:r>
+              <a:rPr lang="en-US" b="0" dirty="0">
+                <a:solidFill>
+                  <a:srgbClr val="CCCCCC"/>
+                </a:solidFill>
+                <a:effectLst/>
+                <a:latin typeface="Consolas" panose="020B0609020204030204" pitchFamily="49" charset="0"/>
+              </a:rPr>
+              <a:t> </a:t>
+            </a:r>
+            <a:r>
+              <a:rPr lang="en-US" b="0" dirty="0">
+                <a:solidFill>
+                  <a:srgbClr val="4EC9B0"/>
+                </a:solidFill>
+                <a:effectLst/>
+                <a:latin typeface="Consolas" panose="020B0609020204030204" pitchFamily="49" charset="0"/>
+              </a:rPr>
+              <a:t>range</a:t>
+            </a:r>
+            <a:r>
+              <a:rPr lang="en-US" b="0" dirty="0">
+                <a:solidFill>
+                  <a:srgbClr val="CCCCCC"/>
+                </a:solidFill>
+                <a:effectLst/>
+                <a:latin typeface="Consolas" panose="020B0609020204030204" pitchFamily="49" charset="0"/>
+              </a:rPr>
+              <a:t>(</a:t>
+            </a:r>
+            <a:r>
+              <a:rPr lang="en-US" b="0" dirty="0">
+                <a:solidFill>
+                  <a:srgbClr val="B5CEA8"/>
+                </a:solidFill>
+                <a:effectLst/>
+                <a:latin typeface="Consolas" panose="020B0609020204030204" pitchFamily="49" charset="0"/>
+              </a:rPr>
+              <a:t>20</a:t>
+            </a:r>
+            <a:r>
+              <a:rPr lang="en-US" b="0" dirty="0">
+                <a:solidFill>
+                  <a:srgbClr val="CCCCCC"/>
+                </a:solidFill>
+                <a:effectLst/>
+                <a:latin typeface="Consolas" panose="020B0609020204030204" pitchFamily="49" charset="0"/>
+              </a:rPr>
+              <a:t>):</a:t>
+            </a:r>
+          </a:p>
+          <a:p>
+            <a:r>
+              <a:rPr lang="en-US" b="0" dirty="0">
+                <a:solidFill>
+                  <a:srgbClr val="CCCCCC"/>
+                </a:solidFill>
+                <a:effectLst/>
+                <a:latin typeface="Consolas" panose="020B0609020204030204" pitchFamily="49" charset="0"/>
+              </a:rPr>
+              <a:t>    </a:t>
+            </a:r>
+            <a:r>
+              <a:rPr lang="en-US" b="0" dirty="0">
+                <a:solidFill>
+                  <a:srgbClr val="9CDCFE"/>
+                </a:solidFill>
+                <a:effectLst/>
+                <a:latin typeface="Consolas" panose="020B0609020204030204" pitchFamily="49" charset="0"/>
+              </a:rPr>
+              <a:t>pred</a:t>
+            </a:r>
+            <a:r>
+              <a:rPr lang="en-US" b="0" dirty="0">
+                <a:solidFill>
+                  <a:srgbClr val="CCCCCC"/>
+                </a:solidFill>
+                <a:effectLst/>
+                <a:latin typeface="Consolas" panose="020B0609020204030204" pitchFamily="49" charset="0"/>
+              </a:rPr>
+              <a:t> </a:t>
+            </a:r>
+            <a:r>
+              <a:rPr lang="en-US" b="0" dirty="0">
+                <a:solidFill>
+                  <a:srgbClr val="D4D4D4"/>
+                </a:solidFill>
+                <a:effectLst/>
+                <a:latin typeface="Consolas" panose="020B0609020204030204" pitchFamily="49" charset="0"/>
+              </a:rPr>
+              <a:t>=</a:t>
+            </a:r>
+            <a:r>
+              <a:rPr lang="en-US" b="0" dirty="0">
+                <a:solidFill>
+                  <a:srgbClr val="CCCCCC"/>
+                </a:solidFill>
+                <a:effectLst/>
+                <a:latin typeface="Consolas" panose="020B0609020204030204" pitchFamily="49" charset="0"/>
+              </a:rPr>
+              <a:t> </a:t>
+            </a:r>
+            <a:r>
+              <a:rPr lang="en-US" b="0" dirty="0">
+                <a:solidFill>
+                  <a:srgbClr val="9CDCFE"/>
+                </a:solidFill>
+                <a:effectLst/>
+                <a:latin typeface="Consolas" panose="020B0609020204030204" pitchFamily="49" charset="0"/>
+              </a:rPr>
+              <a:t>input</a:t>
+            </a:r>
+            <a:r>
+              <a:rPr lang="en-US" b="0" dirty="0">
+                <a:solidFill>
+                  <a:srgbClr val="CCCCCC"/>
+                </a:solidFill>
+                <a:effectLst/>
+                <a:latin typeface="Consolas" panose="020B0609020204030204" pitchFamily="49" charset="0"/>
+              </a:rPr>
+              <a:t> </a:t>
+            </a:r>
+            <a:r>
+              <a:rPr lang="en-US" b="0" dirty="0">
+                <a:solidFill>
+                  <a:srgbClr val="D4D4D4"/>
+                </a:solidFill>
+                <a:effectLst/>
+                <a:latin typeface="Consolas" panose="020B0609020204030204" pitchFamily="49" charset="0"/>
+              </a:rPr>
+              <a:t>*</a:t>
+            </a:r>
+            <a:r>
+              <a:rPr lang="en-US" b="0" dirty="0">
+                <a:solidFill>
+                  <a:srgbClr val="CCCCCC"/>
+                </a:solidFill>
+                <a:effectLst/>
+                <a:latin typeface="Consolas" panose="020B0609020204030204" pitchFamily="49" charset="0"/>
+              </a:rPr>
+              <a:t> </a:t>
+            </a:r>
+            <a:r>
+              <a:rPr lang="en-US" b="0" dirty="0">
+                <a:solidFill>
+                  <a:srgbClr val="9CDCFE"/>
+                </a:solidFill>
+                <a:effectLst/>
+                <a:latin typeface="Consolas" panose="020B0609020204030204" pitchFamily="49" charset="0"/>
+              </a:rPr>
+              <a:t>weight</a:t>
+            </a:r>
+            <a:endParaRPr lang="en-US" b="0" dirty="0">
+              <a:solidFill>
+                <a:srgbClr val="CCCCCC"/>
+              </a:solidFill>
+              <a:effectLst/>
+              <a:latin typeface="Consolas" panose="020B0609020204030204" pitchFamily="49" charset="0"/>
+            </a:endParaRPr>
+          </a:p>
+          <a:p>
+            <a:r>
+              <a:rPr lang="en-US" b="0" dirty="0">
+                <a:solidFill>
+                  <a:srgbClr val="CCCCCC"/>
+                </a:solidFill>
+                <a:effectLst/>
+                <a:latin typeface="Consolas" panose="020B0609020204030204" pitchFamily="49" charset="0"/>
+              </a:rPr>
+              <a:t>    </a:t>
+            </a:r>
+            <a:r>
+              <a:rPr lang="en-US" b="0" dirty="0">
+                <a:solidFill>
+                  <a:srgbClr val="9CDCFE"/>
+                </a:solidFill>
+                <a:effectLst/>
+                <a:latin typeface="Consolas" panose="020B0609020204030204" pitchFamily="49" charset="0"/>
+              </a:rPr>
+              <a:t>error</a:t>
+            </a:r>
+            <a:r>
+              <a:rPr lang="en-US" b="0" dirty="0">
+                <a:solidFill>
+                  <a:srgbClr val="CCCCCC"/>
+                </a:solidFill>
+                <a:effectLst/>
+                <a:latin typeface="Consolas" panose="020B0609020204030204" pitchFamily="49" charset="0"/>
+              </a:rPr>
+              <a:t> </a:t>
+            </a:r>
+            <a:r>
+              <a:rPr lang="en-US" b="0" dirty="0">
+                <a:solidFill>
+                  <a:srgbClr val="D4D4D4"/>
+                </a:solidFill>
+                <a:effectLst/>
+                <a:latin typeface="Consolas" panose="020B0609020204030204" pitchFamily="49" charset="0"/>
+              </a:rPr>
+              <a:t>=</a:t>
+            </a:r>
+            <a:r>
+              <a:rPr lang="en-US" b="0" dirty="0">
+                <a:solidFill>
+                  <a:srgbClr val="CCCCCC"/>
+                </a:solidFill>
+                <a:effectLst/>
+                <a:latin typeface="Consolas" panose="020B0609020204030204" pitchFamily="49" charset="0"/>
+              </a:rPr>
+              <a:t> (</a:t>
+            </a:r>
+            <a:r>
+              <a:rPr lang="en-US" b="0" dirty="0">
+                <a:solidFill>
+                  <a:srgbClr val="9CDCFE"/>
+                </a:solidFill>
+                <a:effectLst/>
+                <a:latin typeface="Consolas" panose="020B0609020204030204" pitchFamily="49" charset="0"/>
+              </a:rPr>
+              <a:t>pred</a:t>
+            </a:r>
+            <a:r>
+              <a:rPr lang="en-US" b="0" dirty="0">
+                <a:solidFill>
+                  <a:srgbClr val="CCCCCC"/>
+                </a:solidFill>
+                <a:effectLst/>
+                <a:latin typeface="Consolas" panose="020B0609020204030204" pitchFamily="49" charset="0"/>
+              </a:rPr>
+              <a:t> </a:t>
+            </a:r>
+            <a:r>
+              <a:rPr lang="en-US" b="0" dirty="0">
+                <a:solidFill>
+                  <a:srgbClr val="D4D4D4"/>
+                </a:solidFill>
+                <a:effectLst/>
+                <a:latin typeface="Consolas" panose="020B0609020204030204" pitchFamily="49" charset="0"/>
+              </a:rPr>
+              <a:t>-</a:t>
+            </a:r>
+            <a:r>
+              <a:rPr lang="en-US" b="0" dirty="0">
+                <a:solidFill>
+                  <a:srgbClr val="CCCCCC"/>
+                </a:solidFill>
+                <a:effectLst/>
+                <a:latin typeface="Consolas" panose="020B0609020204030204" pitchFamily="49" charset="0"/>
+              </a:rPr>
+              <a:t> </a:t>
+            </a:r>
+            <a:r>
+              <a:rPr lang="en-US" b="0" dirty="0" err="1">
+                <a:solidFill>
+                  <a:srgbClr val="9CDCFE"/>
+                </a:solidFill>
+                <a:effectLst/>
+                <a:latin typeface="Consolas" panose="020B0609020204030204" pitchFamily="49" charset="0"/>
+              </a:rPr>
+              <a:t>goal_pred</a:t>
+            </a:r>
+            <a:r>
+              <a:rPr lang="en-US" b="0" dirty="0">
+                <a:solidFill>
+                  <a:srgbClr val="CCCCCC"/>
+                </a:solidFill>
+                <a:effectLst/>
+                <a:latin typeface="Consolas" panose="020B0609020204030204" pitchFamily="49" charset="0"/>
+              </a:rPr>
+              <a:t>) </a:t>
+            </a:r>
+            <a:r>
+              <a:rPr lang="en-US" b="0" dirty="0">
+                <a:solidFill>
+                  <a:srgbClr val="D4D4D4"/>
+                </a:solidFill>
+                <a:effectLst/>
+                <a:latin typeface="Consolas" panose="020B0609020204030204" pitchFamily="49" charset="0"/>
+              </a:rPr>
+              <a:t>**</a:t>
+            </a:r>
+            <a:r>
+              <a:rPr lang="en-US" b="0" dirty="0">
+                <a:solidFill>
+                  <a:srgbClr val="CCCCCC"/>
+                </a:solidFill>
+                <a:effectLst/>
+                <a:latin typeface="Consolas" panose="020B0609020204030204" pitchFamily="49" charset="0"/>
+              </a:rPr>
+              <a:t> </a:t>
+            </a:r>
+            <a:r>
+              <a:rPr lang="en-US" b="0" dirty="0">
+                <a:solidFill>
+                  <a:srgbClr val="B5CEA8"/>
+                </a:solidFill>
+                <a:effectLst/>
+                <a:latin typeface="Consolas" panose="020B0609020204030204" pitchFamily="49" charset="0"/>
+              </a:rPr>
+              <a:t>2</a:t>
+            </a:r>
+            <a:endParaRPr lang="en-US" b="0" dirty="0">
+              <a:solidFill>
+                <a:srgbClr val="CCCCCC"/>
+              </a:solidFill>
+              <a:effectLst/>
+              <a:latin typeface="Consolas" panose="020B0609020204030204" pitchFamily="49" charset="0"/>
+            </a:endParaRPr>
+          </a:p>
+          <a:p>
+            <a:r>
+              <a:rPr lang="en-US" b="0" dirty="0">
+                <a:solidFill>
+                  <a:srgbClr val="CCCCCC"/>
+                </a:solidFill>
+                <a:effectLst/>
+                <a:latin typeface="Consolas" panose="020B0609020204030204" pitchFamily="49" charset="0"/>
+              </a:rPr>
+              <a:t>    </a:t>
+            </a:r>
+            <a:r>
+              <a:rPr lang="en-US" b="0" dirty="0" err="1">
+                <a:solidFill>
+                  <a:srgbClr val="9CDCFE"/>
+                </a:solidFill>
+                <a:effectLst/>
+                <a:latin typeface="Consolas" panose="020B0609020204030204" pitchFamily="49" charset="0"/>
+              </a:rPr>
+              <a:t>direction_and_amount</a:t>
+            </a:r>
+            <a:r>
+              <a:rPr lang="en-US" b="0" dirty="0">
+                <a:solidFill>
+                  <a:srgbClr val="CCCCCC"/>
+                </a:solidFill>
+                <a:effectLst/>
+                <a:latin typeface="Consolas" panose="020B0609020204030204" pitchFamily="49" charset="0"/>
+              </a:rPr>
+              <a:t> </a:t>
+            </a:r>
+            <a:r>
+              <a:rPr lang="en-US" b="0" dirty="0">
+                <a:solidFill>
+                  <a:srgbClr val="D4D4D4"/>
+                </a:solidFill>
+                <a:effectLst/>
+                <a:latin typeface="Consolas" panose="020B0609020204030204" pitchFamily="49" charset="0"/>
+              </a:rPr>
+              <a:t>=</a:t>
+            </a:r>
+            <a:r>
+              <a:rPr lang="en-US" b="0" dirty="0">
+                <a:solidFill>
+                  <a:srgbClr val="CCCCCC"/>
+                </a:solidFill>
+                <a:effectLst/>
+                <a:latin typeface="Consolas" panose="020B0609020204030204" pitchFamily="49" charset="0"/>
+              </a:rPr>
+              <a:t> (</a:t>
+            </a:r>
+            <a:r>
+              <a:rPr lang="en-US" b="0" dirty="0">
+                <a:solidFill>
+                  <a:srgbClr val="9CDCFE"/>
+                </a:solidFill>
+                <a:effectLst/>
+                <a:latin typeface="Consolas" panose="020B0609020204030204" pitchFamily="49" charset="0"/>
+              </a:rPr>
+              <a:t>pred</a:t>
+            </a:r>
+            <a:r>
+              <a:rPr lang="en-US" b="0" dirty="0">
+                <a:solidFill>
+                  <a:srgbClr val="CCCCCC"/>
+                </a:solidFill>
+                <a:effectLst/>
+                <a:latin typeface="Consolas" panose="020B0609020204030204" pitchFamily="49" charset="0"/>
+              </a:rPr>
+              <a:t> </a:t>
+            </a:r>
+            <a:r>
+              <a:rPr lang="en-US" b="0" dirty="0">
+                <a:solidFill>
+                  <a:srgbClr val="D4D4D4"/>
+                </a:solidFill>
+                <a:effectLst/>
+                <a:latin typeface="Consolas" panose="020B0609020204030204" pitchFamily="49" charset="0"/>
+              </a:rPr>
+              <a:t>-</a:t>
+            </a:r>
+            <a:r>
+              <a:rPr lang="en-US" b="0" dirty="0">
+                <a:solidFill>
+                  <a:srgbClr val="CCCCCC"/>
+                </a:solidFill>
+                <a:effectLst/>
+                <a:latin typeface="Consolas" panose="020B0609020204030204" pitchFamily="49" charset="0"/>
+              </a:rPr>
+              <a:t> </a:t>
+            </a:r>
+            <a:r>
+              <a:rPr lang="en-US" b="0" dirty="0" err="1">
+                <a:solidFill>
+                  <a:srgbClr val="9CDCFE"/>
+                </a:solidFill>
+                <a:effectLst/>
+                <a:latin typeface="Consolas" panose="020B0609020204030204" pitchFamily="49" charset="0"/>
+              </a:rPr>
+              <a:t>goal_pred</a:t>
+            </a:r>
+            <a:r>
+              <a:rPr lang="en-US" b="0" dirty="0">
+                <a:solidFill>
+                  <a:srgbClr val="CCCCCC"/>
+                </a:solidFill>
+                <a:effectLst/>
+                <a:latin typeface="Consolas" panose="020B0609020204030204" pitchFamily="49" charset="0"/>
+              </a:rPr>
+              <a:t>) </a:t>
+            </a:r>
+            <a:r>
+              <a:rPr lang="en-US" b="0" dirty="0">
+                <a:solidFill>
+                  <a:srgbClr val="D4D4D4"/>
+                </a:solidFill>
+                <a:effectLst/>
+                <a:latin typeface="Consolas" panose="020B0609020204030204" pitchFamily="49" charset="0"/>
+              </a:rPr>
+              <a:t>*</a:t>
+            </a:r>
+            <a:r>
+              <a:rPr lang="en-US" b="0" dirty="0">
+                <a:solidFill>
+                  <a:srgbClr val="CCCCCC"/>
+                </a:solidFill>
+                <a:effectLst/>
+                <a:latin typeface="Consolas" panose="020B0609020204030204" pitchFamily="49" charset="0"/>
+              </a:rPr>
+              <a:t> </a:t>
+            </a:r>
+            <a:r>
+              <a:rPr lang="en-US" b="0" dirty="0">
+                <a:solidFill>
+                  <a:srgbClr val="9CDCFE"/>
+                </a:solidFill>
+                <a:effectLst/>
+                <a:latin typeface="Consolas" panose="020B0609020204030204" pitchFamily="49" charset="0"/>
+              </a:rPr>
+              <a:t>input</a:t>
+            </a:r>
+            <a:r>
+              <a:rPr lang="ru-RU" b="0" dirty="0">
+                <a:solidFill>
+                  <a:srgbClr val="9CDCFE"/>
+                </a:solidFill>
+                <a:effectLst/>
+                <a:latin typeface="Consolas" panose="020B0609020204030204" pitchFamily="49" charset="0"/>
+              </a:rPr>
+              <a:t>  </a:t>
+            </a:r>
+            <a:r>
+              <a:rPr lang="en-US" b="0" dirty="0">
+                <a:solidFill>
+                  <a:srgbClr val="9CDCFE"/>
+                </a:solidFill>
+                <a:effectLst/>
+                <a:latin typeface="Consolas" panose="020B0609020204030204" pitchFamily="49" charset="0"/>
+                <a:sym typeface="Wingdings" panose="05000000000000000000" pitchFamily="2" charset="2"/>
+              </a:rPr>
+              <a:t>----</a:t>
+            </a:r>
+            <a:endParaRPr lang="en-US" b="0" dirty="0">
+              <a:solidFill>
+                <a:srgbClr val="CCCCCC"/>
+              </a:solidFill>
+              <a:effectLst/>
+              <a:latin typeface="Consolas" panose="020B0609020204030204" pitchFamily="49" charset="0"/>
+            </a:endParaRPr>
+          </a:p>
+          <a:p>
+            <a:r>
+              <a:rPr lang="en-US" b="0" dirty="0">
+                <a:solidFill>
+                  <a:srgbClr val="CCCCCC"/>
+                </a:solidFill>
+                <a:effectLst/>
+                <a:latin typeface="Consolas" panose="020B0609020204030204" pitchFamily="49" charset="0"/>
+              </a:rPr>
+              <a:t>    </a:t>
+            </a:r>
+            <a:r>
+              <a:rPr lang="en-US" b="0" dirty="0">
+                <a:solidFill>
+                  <a:srgbClr val="9CDCFE"/>
+                </a:solidFill>
+                <a:effectLst/>
+                <a:latin typeface="Consolas" panose="020B0609020204030204" pitchFamily="49" charset="0"/>
+              </a:rPr>
+              <a:t>weight</a:t>
+            </a:r>
+            <a:r>
+              <a:rPr lang="en-US" b="0" dirty="0">
+                <a:solidFill>
+                  <a:srgbClr val="CCCCCC"/>
+                </a:solidFill>
+                <a:effectLst/>
+                <a:latin typeface="Consolas" panose="020B0609020204030204" pitchFamily="49" charset="0"/>
+              </a:rPr>
+              <a:t> </a:t>
+            </a:r>
+            <a:r>
+              <a:rPr lang="en-US" b="0" dirty="0">
+                <a:solidFill>
+                  <a:srgbClr val="D4D4D4"/>
+                </a:solidFill>
+                <a:effectLst/>
+                <a:latin typeface="Consolas" panose="020B0609020204030204" pitchFamily="49" charset="0"/>
+              </a:rPr>
+              <a:t>=</a:t>
+            </a:r>
+            <a:r>
+              <a:rPr lang="en-US" b="0" dirty="0">
+                <a:solidFill>
+                  <a:srgbClr val="CCCCCC"/>
+                </a:solidFill>
+                <a:effectLst/>
+                <a:latin typeface="Consolas" panose="020B0609020204030204" pitchFamily="49" charset="0"/>
+              </a:rPr>
+              <a:t> </a:t>
+            </a:r>
+            <a:r>
+              <a:rPr lang="en-US" b="0" dirty="0">
+                <a:solidFill>
+                  <a:srgbClr val="9CDCFE"/>
+                </a:solidFill>
+                <a:effectLst/>
+                <a:latin typeface="Consolas" panose="020B0609020204030204" pitchFamily="49" charset="0"/>
+              </a:rPr>
+              <a:t>weight</a:t>
+            </a:r>
+            <a:r>
+              <a:rPr lang="en-US" b="0" dirty="0">
+                <a:solidFill>
+                  <a:srgbClr val="CCCCCC"/>
+                </a:solidFill>
+                <a:effectLst/>
+                <a:latin typeface="Consolas" panose="020B0609020204030204" pitchFamily="49" charset="0"/>
+              </a:rPr>
+              <a:t> </a:t>
+            </a:r>
+            <a:r>
+              <a:rPr lang="en-US" b="0" dirty="0">
+                <a:solidFill>
+                  <a:srgbClr val="D4D4D4"/>
+                </a:solidFill>
+                <a:effectLst/>
+                <a:latin typeface="Consolas" panose="020B0609020204030204" pitchFamily="49" charset="0"/>
+              </a:rPr>
+              <a:t>-</a:t>
+            </a:r>
+            <a:r>
+              <a:rPr lang="en-US" b="0" dirty="0">
+                <a:solidFill>
+                  <a:srgbClr val="CCCCCC"/>
+                </a:solidFill>
+                <a:effectLst/>
+                <a:latin typeface="Consolas" panose="020B0609020204030204" pitchFamily="49" charset="0"/>
+              </a:rPr>
+              <a:t> </a:t>
+            </a:r>
+            <a:r>
+              <a:rPr lang="en-US" b="0" dirty="0" err="1">
+                <a:solidFill>
+                  <a:srgbClr val="9CDCFE"/>
+                </a:solidFill>
+                <a:effectLst/>
+                <a:latin typeface="Consolas" panose="020B0609020204030204" pitchFamily="49" charset="0"/>
+              </a:rPr>
+              <a:t>direction_and_amount</a:t>
+            </a:r>
+            <a:endParaRPr lang="en-US" b="0" dirty="0">
+              <a:solidFill>
+                <a:srgbClr val="CCCCCC"/>
+              </a:solidFill>
+              <a:effectLst/>
+              <a:latin typeface="Consolas" panose="020B0609020204030204" pitchFamily="49" charset="0"/>
+            </a:endParaRPr>
+          </a:p>
+          <a:p>
+            <a:r>
+              <a:rPr lang="en-US" b="0" dirty="0">
+                <a:solidFill>
+                  <a:srgbClr val="CCCCCC"/>
+                </a:solidFill>
+                <a:effectLst/>
+                <a:latin typeface="Consolas" panose="020B0609020204030204" pitchFamily="49" charset="0"/>
+              </a:rPr>
+              <a:t>    </a:t>
+            </a:r>
+            <a:r>
+              <a:rPr lang="en-US" b="0" dirty="0">
+                <a:solidFill>
+                  <a:srgbClr val="DCDCAA"/>
+                </a:solidFill>
+                <a:effectLst/>
+                <a:latin typeface="Consolas" panose="020B0609020204030204" pitchFamily="49" charset="0"/>
+              </a:rPr>
+              <a:t>print</a:t>
+            </a:r>
+            <a:r>
+              <a:rPr lang="en-US" b="0" dirty="0">
+                <a:solidFill>
+                  <a:srgbClr val="CCCCCC"/>
+                </a:solidFill>
+                <a:effectLst/>
+                <a:latin typeface="Consolas" panose="020B0609020204030204" pitchFamily="49" charset="0"/>
+              </a:rPr>
+              <a:t>(</a:t>
+            </a:r>
+            <a:r>
+              <a:rPr lang="en-US" b="0" dirty="0">
+                <a:solidFill>
+                  <a:srgbClr val="CE9178"/>
+                </a:solidFill>
+                <a:effectLst/>
+                <a:latin typeface="Consolas" panose="020B0609020204030204" pitchFamily="49" charset="0"/>
+              </a:rPr>
+              <a:t>"Error:"</a:t>
+            </a:r>
+            <a:r>
+              <a:rPr lang="en-US" b="0" dirty="0">
+                <a:solidFill>
+                  <a:srgbClr val="CCCCCC"/>
+                </a:solidFill>
+                <a:effectLst/>
+                <a:latin typeface="Consolas" panose="020B0609020204030204" pitchFamily="49" charset="0"/>
+              </a:rPr>
+              <a:t> </a:t>
+            </a:r>
+            <a:r>
+              <a:rPr lang="en-US" b="0" dirty="0">
+                <a:solidFill>
+                  <a:srgbClr val="D4D4D4"/>
+                </a:solidFill>
+                <a:effectLst/>
+                <a:latin typeface="Consolas" panose="020B0609020204030204" pitchFamily="49" charset="0"/>
+              </a:rPr>
+              <a:t>+</a:t>
+            </a:r>
+            <a:r>
+              <a:rPr lang="en-US" b="0" dirty="0">
+                <a:solidFill>
+                  <a:srgbClr val="CCCCCC"/>
+                </a:solidFill>
+                <a:effectLst/>
+                <a:latin typeface="Consolas" panose="020B0609020204030204" pitchFamily="49" charset="0"/>
+              </a:rPr>
+              <a:t> </a:t>
+            </a:r>
+            <a:r>
+              <a:rPr lang="en-US" b="0" dirty="0">
+                <a:solidFill>
+                  <a:srgbClr val="4EC9B0"/>
+                </a:solidFill>
+                <a:effectLst/>
+                <a:latin typeface="Consolas" panose="020B0609020204030204" pitchFamily="49" charset="0"/>
+              </a:rPr>
+              <a:t>str</a:t>
+            </a:r>
+            <a:r>
+              <a:rPr lang="en-US" b="0" dirty="0">
+                <a:solidFill>
+                  <a:srgbClr val="CCCCCC"/>
+                </a:solidFill>
+                <a:effectLst/>
+                <a:latin typeface="Consolas" panose="020B0609020204030204" pitchFamily="49" charset="0"/>
+              </a:rPr>
+              <a:t>(</a:t>
+            </a:r>
+            <a:r>
+              <a:rPr lang="en-US" b="0" dirty="0">
+                <a:solidFill>
+                  <a:srgbClr val="9CDCFE"/>
+                </a:solidFill>
+                <a:effectLst/>
+                <a:latin typeface="Consolas" panose="020B0609020204030204" pitchFamily="49" charset="0"/>
+              </a:rPr>
+              <a:t>error</a:t>
+            </a:r>
+            <a:r>
+              <a:rPr lang="en-US" b="0" dirty="0">
+                <a:solidFill>
+                  <a:srgbClr val="CCCCCC"/>
+                </a:solidFill>
+                <a:effectLst/>
+                <a:latin typeface="Consolas" panose="020B0609020204030204" pitchFamily="49" charset="0"/>
+              </a:rPr>
+              <a:t>) </a:t>
+            </a:r>
+            <a:r>
+              <a:rPr lang="en-US" b="0" dirty="0">
+                <a:solidFill>
+                  <a:srgbClr val="D4D4D4"/>
+                </a:solidFill>
+                <a:effectLst/>
+                <a:latin typeface="Consolas" panose="020B0609020204030204" pitchFamily="49" charset="0"/>
+              </a:rPr>
+              <a:t>+</a:t>
+            </a:r>
+            <a:r>
+              <a:rPr lang="en-US" b="0" dirty="0">
+                <a:solidFill>
+                  <a:srgbClr val="CCCCCC"/>
+                </a:solidFill>
+                <a:effectLst/>
+                <a:latin typeface="Consolas" panose="020B0609020204030204" pitchFamily="49" charset="0"/>
+              </a:rPr>
+              <a:t> </a:t>
+            </a:r>
+            <a:r>
+              <a:rPr lang="en-US" b="0" dirty="0">
+                <a:solidFill>
+                  <a:srgbClr val="CE9178"/>
+                </a:solidFill>
+                <a:effectLst/>
+                <a:latin typeface="Consolas" panose="020B0609020204030204" pitchFamily="49" charset="0"/>
+              </a:rPr>
+              <a:t>" Prediction:"</a:t>
+            </a:r>
+            <a:r>
+              <a:rPr lang="en-US" b="0" dirty="0">
+                <a:solidFill>
+                  <a:srgbClr val="CCCCCC"/>
+                </a:solidFill>
+                <a:effectLst/>
+                <a:latin typeface="Consolas" panose="020B0609020204030204" pitchFamily="49" charset="0"/>
+              </a:rPr>
+              <a:t> </a:t>
+            </a:r>
+            <a:r>
+              <a:rPr lang="en-US" b="0" dirty="0">
+                <a:solidFill>
+                  <a:srgbClr val="D4D4D4"/>
+                </a:solidFill>
+                <a:effectLst/>
+                <a:latin typeface="Consolas" panose="020B0609020204030204" pitchFamily="49" charset="0"/>
+              </a:rPr>
+              <a:t>+</a:t>
+            </a:r>
+            <a:r>
+              <a:rPr lang="en-US" b="0" dirty="0">
+                <a:solidFill>
+                  <a:srgbClr val="CCCCCC"/>
+                </a:solidFill>
+                <a:effectLst/>
+                <a:latin typeface="Consolas" panose="020B0609020204030204" pitchFamily="49" charset="0"/>
+              </a:rPr>
+              <a:t> </a:t>
+            </a:r>
+            <a:r>
+              <a:rPr lang="en-US" b="0" dirty="0">
+                <a:solidFill>
+                  <a:srgbClr val="4EC9B0"/>
+                </a:solidFill>
+                <a:effectLst/>
+                <a:latin typeface="Consolas" panose="020B0609020204030204" pitchFamily="49" charset="0"/>
+              </a:rPr>
+              <a:t>str</a:t>
+            </a:r>
+            <a:r>
+              <a:rPr lang="en-US" b="0" dirty="0">
+                <a:solidFill>
+                  <a:srgbClr val="CCCCCC"/>
+                </a:solidFill>
+                <a:effectLst/>
+                <a:latin typeface="Consolas" panose="020B0609020204030204" pitchFamily="49" charset="0"/>
+              </a:rPr>
+              <a:t>(</a:t>
+            </a:r>
+            <a:r>
+              <a:rPr lang="en-US" b="0" dirty="0">
+                <a:solidFill>
+                  <a:srgbClr val="9CDCFE"/>
+                </a:solidFill>
+                <a:effectLst/>
+                <a:latin typeface="Consolas" panose="020B0609020204030204" pitchFamily="49" charset="0"/>
+              </a:rPr>
+              <a:t>pred</a:t>
+            </a:r>
+            <a:r>
+              <a:rPr lang="en-US" b="0" dirty="0">
+                <a:solidFill>
+                  <a:srgbClr val="CCCCCC"/>
+                </a:solidFill>
+                <a:effectLst/>
+                <a:latin typeface="Consolas" panose="020B0609020204030204" pitchFamily="49" charset="0"/>
+              </a:rPr>
+              <a:t>))</a:t>
+            </a:r>
+          </a:p>
+        </p:txBody>
+      </p:sp>
+      <p:sp>
+        <p:nvSpPr>
+          <p:cNvPr id="12" name="TextBox 11">
+            <a:extLst>
+              <a:ext uri="{FF2B5EF4-FFF2-40B4-BE49-F238E27FC236}">
+                <a16:creationId xmlns:a16="http://schemas.microsoft.com/office/drawing/2014/main" id="{7F9C5501-86CA-956D-DEB2-950273680EED}"/>
+              </a:ext>
+            </a:extLst>
+          </p:cNvPr>
+          <p:cNvSpPr txBox="1"/>
+          <p:nvPr/>
+        </p:nvSpPr>
+        <p:spPr>
+          <a:xfrm>
+            <a:off x="790340" y="5016403"/>
+            <a:ext cx="12853238" cy="1815882"/>
+          </a:xfrm>
+          <a:prstGeom prst="rect">
+            <a:avLst/>
+          </a:prstGeom>
+          <a:noFill/>
+        </p:spPr>
+        <p:txBody>
+          <a:bodyPr wrap="square">
+            <a:spAutoFit/>
+          </a:bodyPr>
+          <a:lstStyle/>
+          <a:p>
+            <a:pPr algn="ctr"/>
+            <a:r>
+              <a:rPr lang="ru-RU" sz="2800" b="0" dirty="0">
+                <a:solidFill>
+                  <a:schemeClr val="bg1"/>
+                </a:solidFill>
+                <a:effectLst/>
+                <a:latin typeface="+mj-lt"/>
+              </a:rPr>
+              <a:t>Перед вами более эффективный метод обучения, известный как градиентный</a:t>
+            </a:r>
+          </a:p>
+          <a:p>
+            <a:pPr algn="ctr"/>
+            <a:r>
+              <a:rPr lang="ru-RU" sz="2800" b="0" dirty="0">
+                <a:solidFill>
+                  <a:schemeClr val="bg1"/>
+                </a:solidFill>
+                <a:effectLst/>
+                <a:latin typeface="+mj-lt"/>
+              </a:rPr>
+              <a:t>спуск. Этот метод позволяет в одной строке кода (выделена стрелкой) вычислить сразу и направление, и величину изменения веса </a:t>
+            </a:r>
+            <a:r>
+              <a:rPr lang="ru-RU" sz="2800" b="0" dirty="0" err="1">
+                <a:solidFill>
+                  <a:schemeClr val="bg1"/>
+                </a:solidFill>
+                <a:effectLst/>
+                <a:latin typeface="+mj-lt"/>
+              </a:rPr>
+              <a:t>weight</a:t>
+            </a:r>
+            <a:r>
+              <a:rPr lang="ru-RU" sz="2800" b="0" dirty="0">
+                <a:solidFill>
+                  <a:schemeClr val="bg1"/>
+                </a:solidFill>
+                <a:effectLst/>
+                <a:latin typeface="+mj-lt"/>
+              </a:rPr>
+              <a:t> для уменьшения</a:t>
+            </a:r>
+          </a:p>
+          <a:p>
+            <a:pPr algn="ctr"/>
+            <a:r>
+              <a:rPr lang="ru-RU" sz="2800" b="0" dirty="0">
+                <a:solidFill>
+                  <a:schemeClr val="bg1"/>
+                </a:solidFill>
+                <a:effectLst/>
+                <a:latin typeface="+mj-lt"/>
+              </a:rPr>
+              <a:t>ошибки </a:t>
+            </a:r>
+            <a:r>
+              <a:rPr lang="ru-RU" sz="2800" b="0" dirty="0" err="1">
+                <a:solidFill>
+                  <a:schemeClr val="bg1"/>
+                </a:solidFill>
+                <a:effectLst/>
+                <a:latin typeface="+mj-lt"/>
+              </a:rPr>
+              <a:t>error</a:t>
+            </a:r>
+            <a:r>
+              <a:rPr lang="ru-RU" sz="2800" b="0" dirty="0">
+                <a:solidFill>
+                  <a:schemeClr val="bg1"/>
+                </a:solidFill>
+                <a:effectLst/>
+                <a:latin typeface="+mj-lt"/>
+              </a:rPr>
+              <a:t>.</a:t>
+            </a:r>
+          </a:p>
+        </p:txBody>
+      </p:sp>
+    </p:spTree>
+    <p:extLst>
+      <p:ext uri="{BB962C8B-B14F-4D97-AF65-F5344CB8AC3E}">
+        <p14:creationId xmlns:p14="http://schemas.microsoft.com/office/powerpoint/2010/main" val="4104318606"/>
+      </p:ext>
+    </p:extLst>
+  </p:cSld>
+  <p:clrMapOvr>
+    <a:masterClrMapping/>
+  </p:clrMapOvr>
+</p:sld>
+</file>
+
+<file path=ppt/slides/slide34.xml><?xml version="1.0" encoding="utf-8"?>
+<p:sld xmlns:a="http://schemas.openxmlformats.org/drawingml/2006/main" xmlns:r="http://schemas.openxmlformats.org/officeDocument/2006/relationships" xmlns:p="http://schemas.openxmlformats.org/presentationml/2006/main">
+  <p:cSld>
+    <p:spTree>
+      <p:nvGrpSpPr>
+        <p:cNvPr id="1" name=""/>
+        <p:cNvGrpSpPr/>
+        <p:nvPr/>
+      </p:nvGrpSpPr>
+      <p:grpSpPr>
+        <a:xfrm>
+          <a:off x="0" y="0"/>
+          <a:ext cx="0" cy="0"/>
+          <a:chOff x="0" y="0"/>
+          <a:chExt cx="0" cy="0"/>
+        </a:xfrm>
+      </p:grpSpPr>
+      <p:pic>
+        <p:nvPicPr>
+          <p:cNvPr id="4" name="Picture 3" descr="logo.png"/>
+          <p:cNvPicPr>
+            <a:picLocks noChangeAspect="1"/>
+          </p:cNvPicPr>
+          <p:nvPr/>
+        </p:nvPicPr>
+        <p:blipFill>
+          <a:blip r:embed="rId2"/>
+          <a:stretch>
+            <a:fillRect/>
+          </a:stretch>
+        </p:blipFill>
+        <p:spPr>
+          <a:xfrm>
+            <a:off x="12344400" y="274320"/>
+            <a:ext cx="1097280" cy="1080473"/>
+          </a:xfrm>
+          <a:prstGeom prst="rect">
+            <a:avLst/>
+          </a:prstGeom>
+        </p:spPr>
+      </p:pic>
+      <p:sp>
+        <p:nvSpPr>
+          <p:cNvPr id="5" name="Rectangle 4"/>
+          <p:cNvSpPr/>
+          <p:nvPr/>
+        </p:nvSpPr>
+        <p:spPr>
+          <a:xfrm>
+            <a:off x="0" y="7772400"/>
+            <a:ext cx="14630400" cy="457200"/>
+          </a:xfrm>
+          <a:prstGeom prst="rect">
+            <a:avLst/>
+          </a:prstGeom>
+          <a:solidFill>
+            <a:srgbClr val="640064"/>
+          </a:solidFill>
+          <a:ln>
+            <a:noFill/>
+          </a:ln>
+        </p:spPr>
+        <p:style>
+          <a:lnRef idx="1">
+            <a:schemeClr val="accent1"/>
+          </a:lnRef>
+          <a:fillRef idx="3">
+            <a:schemeClr val="accent1"/>
+          </a:fillRef>
+          <a:effectRef idx="2">
+            <a:schemeClr val="accent1"/>
+          </a:effectRef>
+          <a:fontRef idx="minor">
+            <a:schemeClr val="lt1"/>
+          </a:fontRef>
+        </p:style>
+        <p:txBody>
+          <a:bodyPr rtlCol="0" anchor="ctr"/>
+          <a:lstStyle/>
+          <a:p>
+            <a:pPr algn="ctr"/>
+            <a:endParaRPr>
+              <a:solidFill>
+                <a:schemeClr val="tx1"/>
+              </a:solidFill>
+            </a:endParaRPr>
+          </a:p>
+        </p:txBody>
+      </p:sp>
+      <p:sp>
+        <p:nvSpPr>
+          <p:cNvPr id="3" name="TextBox 2">
+            <a:extLst>
+              <a:ext uri="{FF2B5EF4-FFF2-40B4-BE49-F238E27FC236}">
+                <a16:creationId xmlns:a16="http://schemas.microsoft.com/office/drawing/2014/main" id="{C9D803A3-C3E3-EFC9-3CEE-F2A45AAA6CB0}"/>
+              </a:ext>
+            </a:extLst>
+          </p:cNvPr>
+          <p:cNvSpPr txBox="1"/>
+          <p:nvPr/>
+        </p:nvSpPr>
+        <p:spPr>
+          <a:xfrm>
+            <a:off x="509010" y="2094191"/>
+            <a:ext cx="7735703" cy="2862322"/>
+          </a:xfrm>
+          <a:prstGeom prst="rect">
+            <a:avLst/>
+          </a:prstGeom>
+          <a:noFill/>
+        </p:spPr>
+        <p:txBody>
+          <a:bodyPr wrap="square">
+            <a:spAutoFit/>
+          </a:bodyPr>
+          <a:lstStyle/>
+          <a:p>
+            <a:pPr algn="just"/>
+            <a:r>
+              <a:rPr lang="ru-RU" dirty="0"/>
+              <a:t>Переменная </a:t>
+            </a:r>
+            <a:r>
+              <a:rPr lang="ru-RU" dirty="0" err="1"/>
+              <a:t>direction_and_amount</a:t>
+            </a:r>
+            <a:r>
+              <a:rPr lang="ru-RU" dirty="0"/>
+              <a:t> представляет, как должен измениться вес. Чтобы получить ее значение, код сначала О вычисляет чистую ошибку (</a:t>
+            </a:r>
+            <a:r>
+              <a:rPr lang="ru-RU" dirty="0" err="1"/>
+              <a:t>pred</a:t>
+            </a:r>
+            <a:r>
+              <a:rPr lang="ru-RU" dirty="0"/>
+              <a:t> - </a:t>
+            </a:r>
+            <a:r>
+              <a:rPr lang="ru-RU" dirty="0" err="1"/>
+              <a:t>goal_pred</a:t>
+            </a:r>
+            <a:r>
+              <a:rPr lang="ru-RU" dirty="0"/>
+              <a:t>). А затем О умножает ее на </a:t>
+            </a:r>
+            <a:r>
+              <a:rPr lang="ru-RU" dirty="0" err="1"/>
+              <a:t>input</a:t>
+            </a:r>
+            <a:r>
+              <a:rPr lang="ru-RU" dirty="0"/>
+              <a:t>, чтобы выполнить масштабирование, обращение знака и остановку, превращая чистую ошибку в значение, пригодное для изменения </a:t>
+            </a:r>
+            <a:r>
+              <a:rPr lang="ru-RU" dirty="0" err="1"/>
+              <a:t>weight</a:t>
+            </a:r>
+            <a:r>
+              <a:rPr lang="ru-RU" dirty="0"/>
+              <a:t>.</a:t>
+            </a:r>
+          </a:p>
+          <a:p>
+            <a:pPr algn="just"/>
+            <a:endParaRPr lang="ru-RU" dirty="0"/>
+          </a:p>
+          <a:p>
+            <a:pPr algn="just"/>
+            <a:r>
+              <a:rPr lang="ru-RU" dirty="0"/>
+              <a:t>Чистая ошибка — это разность (</a:t>
+            </a:r>
+            <a:r>
+              <a:rPr lang="ru-RU" dirty="0" err="1"/>
+              <a:t>pred</a:t>
+            </a:r>
+            <a:r>
+              <a:rPr lang="ru-RU" dirty="0"/>
+              <a:t> - </a:t>
+            </a:r>
+            <a:r>
+              <a:rPr lang="ru-RU" dirty="0" err="1"/>
+              <a:t>goal_pred</a:t>
+            </a:r>
+            <a:r>
+              <a:rPr lang="ru-RU" dirty="0"/>
+              <a:t>), определяющая направление и величину промаха. Если это положительное число, значит, прогноз слишком велик, и наоборот. Если это большое число, значит, вы сильно промахнулись, и так далее.</a:t>
+            </a:r>
+          </a:p>
+        </p:txBody>
+      </p:sp>
+      <p:sp>
+        <p:nvSpPr>
+          <p:cNvPr id="2" name="TextBox 1">
+            <a:extLst>
+              <a:ext uri="{FF2B5EF4-FFF2-40B4-BE49-F238E27FC236}">
+                <a16:creationId xmlns:a16="http://schemas.microsoft.com/office/drawing/2014/main" id="{B9EAFE1C-5211-4893-C6F7-170188F30290}"/>
+              </a:ext>
+            </a:extLst>
+          </p:cNvPr>
+          <p:cNvSpPr txBox="1"/>
+          <p:nvPr/>
+        </p:nvSpPr>
+        <p:spPr>
+          <a:xfrm>
+            <a:off x="8753371" y="2373801"/>
+            <a:ext cx="5381867" cy="1938992"/>
+          </a:xfrm>
+          <a:prstGeom prst="rect">
+            <a:avLst/>
+          </a:prstGeom>
+          <a:noFill/>
+        </p:spPr>
+        <p:txBody>
+          <a:bodyPr wrap="square">
+            <a:spAutoFit/>
+          </a:bodyPr>
+          <a:lstStyle/>
+          <a:p>
+            <a:br>
+              <a:rPr lang="en-US" sz="1200" b="0" dirty="0">
+                <a:effectLst/>
+                <a:latin typeface="Consolas" panose="020B0609020204030204" pitchFamily="49" charset="0"/>
+              </a:rPr>
+            </a:br>
+            <a:r>
+              <a:rPr lang="en-US" sz="1200" b="0" dirty="0">
+                <a:effectLst/>
+                <a:latin typeface="Consolas" panose="020B0609020204030204" pitchFamily="49" charset="0"/>
+              </a:rPr>
+              <a:t>weight =0.5</a:t>
+            </a:r>
+          </a:p>
+          <a:p>
+            <a:r>
+              <a:rPr lang="en-US" sz="1200" b="0" dirty="0" err="1">
+                <a:effectLst/>
+                <a:latin typeface="Consolas" panose="020B0609020204030204" pitchFamily="49" charset="0"/>
+              </a:rPr>
+              <a:t>goal_pred</a:t>
+            </a:r>
+            <a:r>
+              <a:rPr lang="en-US" sz="1200" b="0" dirty="0">
+                <a:effectLst/>
+                <a:latin typeface="Consolas" panose="020B0609020204030204" pitchFamily="49" charset="0"/>
+              </a:rPr>
+              <a:t> =0.8</a:t>
+            </a:r>
+          </a:p>
+          <a:p>
+            <a:r>
+              <a:rPr lang="en-US" sz="1200" b="0" dirty="0">
+                <a:effectLst/>
+                <a:latin typeface="Consolas" panose="020B0609020204030204" pitchFamily="49" charset="0"/>
+              </a:rPr>
+              <a:t>input =0.5</a:t>
+            </a:r>
+          </a:p>
+          <a:p>
+            <a:r>
+              <a:rPr lang="en-US" sz="1200" b="0" dirty="0">
+                <a:effectLst/>
+                <a:latin typeface="Consolas" panose="020B0609020204030204" pitchFamily="49" charset="0"/>
+              </a:rPr>
+              <a:t>for iteration in range(20):</a:t>
+            </a:r>
+          </a:p>
+          <a:p>
+            <a:r>
+              <a:rPr lang="en-US" sz="1200" b="0" dirty="0">
+                <a:effectLst/>
+                <a:latin typeface="Consolas" panose="020B0609020204030204" pitchFamily="49" charset="0"/>
+              </a:rPr>
+              <a:t>    pred = input * weight</a:t>
+            </a:r>
+          </a:p>
+          <a:p>
+            <a:r>
+              <a:rPr lang="en-US" sz="1200" b="0" dirty="0">
+                <a:effectLst/>
+                <a:latin typeface="Consolas" panose="020B0609020204030204" pitchFamily="49" charset="0"/>
+              </a:rPr>
+              <a:t>    error = (pred - </a:t>
+            </a:r>
+            <a:r>
+              <a:rPr lang="en-US" sz="1200" b="0" dirty="0" err="1">
+                <a:effectLst/>
+                <a:latin typeface="Consolas" panose="020B0609020204030204" pitchFamily="49" charset="0"/>
+              </a:rPr>
+              <a:t>goal_pred</a:t>
+            </a:r>
+            <a:r>
+              <a:rPr lang="en-US" sz="1200" b="0" dirty="0">
+                <a:effectLst/>
+                <a:latin typeface="Consolas" panose="020B0609020204030204" pitchFamily="49" charset="0"/>
+              </a:rPr>
+              <a:t>) ** 2</a:t>
+            </a:r>
+          </a:p>
+          <a:p>
+            <a:r>
+              <a:rPr lang="en-US" sz="1200" b="0" dirty="0">
+                <a:effectLst/>
+                <a:latin typeface="Consolas" panose="020B0609020204030204" pitchFamily="49" charset="0"/>
+              </a:rPr>
+              <a:t>    </a:t>
+            </a:r>
+            <a:r>
+              <a:rPr lang="en-US" sz="1200" b="0" dirty="0" err="1">
+                <a:effectLst/>
+                <a:latin typeface="Consolas" panose="020B0609020204030204" pitchFamily="49" charset="0"/>
+              </a:rPr>
+              <a:t>direction_and_amount</a:t>
+            </a:r>
+            <a:r>
+              <a:rPr lang="en-US" sz="1200" b="0" dirty="0">
+                <a:effectLst/>
+                <a:latin typeface="Consolas" panose="020B0609020204030204" pitchFamily="49" charset="0"/>
+              </a:rPr>
+              <a:t> = (pred - </a:t>
+            </a:r>
+            <a:r>
+              <a:rPr lang="en-US" sz="1200" b="0" dirty="0" err="1">
+                <a:effectLst/>
+                <a:latin typeface="Consolas" panose="020B0609020204030204" pitchFamily="49" charset="0"/>
+              </a:rPr>
+              <a:t>goal_pred</a:t>
+            </a:r>
+            <a:r>
+              <a:rPr lang="en-US" sz="1200" b="0" dirty="0">
+                <a:effectLst/>
+                <a:latin typeface="Consolas" panose="020B0609020204030204" pitchFamily="49" charset="0"/>
+              </a:rPr>
+              <a:t>) * input</a:t>
+            </a:r>
+          </a:p>
+          <a:p>
+            <a:r>
+              <a:rPr lang="en-US" sz="1200" b="0" dirty="0">
+                <a:effectLst/>
+                <a:latin typeface="Consolas" panose="020B0609020204030204" pitchFamily="49" charset="0"/>
+              </a:rPr>
+              <a:t>    weight = weight - </a:t>
+            </a:r>
+            <a:r>
+              <a:rPr lang="en-US" sz="1200" b="0" dirty="0" err="1">
+                <a:effectLst/>
+                <a:latin typeface="Consolas" panose="020B0609020204030204" pitchFamily="49" charset="0"/>
+              </a:rPr>
+              <a:t>direction_and_amount</a:t>
+            </a:r>
+            <a:endParaRPr lang="en-US" sz="1200" b="0" dirty="0">
+              <a:effectLst/>
+              <a:latin typeface="Consolas" panose="020B0609020204030204" pitchFamily="49" charset="0"/>
+            </a:endParaRPr>
+          </a:p>
+          <a:p>
+            <a:r>
+              <a:rPr lang="en-US" sz="1200" b="0" dirty="0">
+                <a:effectLst/>
+                <a:latin typeface="Consolas" panose="020B0609020204030204" pitchFamily="49" charset="0"/>
+              </a:rPr>
+              <a:t>    print("Error:" + str(error) + " Prediction:" + str(pred))</a:t>
+            </a:r>
+          </a:p>
+        </p:txBody>
+      </p:sp>
+    </p:spTree>
+    <p:extLst>
+      <p:ext uri="{BB962C8B-B14F-4D97-AF65-F5344CB8AC3E}">
+        <p14:creationId xmlns:p14="http://schemas.microsoft.com/office/powerpoint/2010/main" val="1617020752"/>
+      </p:ext>
+    </p:extLst>
+  </p:cSld>
+  <p:clrMapOvr>
+    <a:masterClrMapping/>
+  </p:clrMapOvr>
+</p:sld>
+</file>
+
+<file path=ppt/slides/slide35.xml><?xml version="1.0" encoding="utf-8"?>
+<p:sld xmlns:a="http://schemas.openxmlformats.org/drawingml/2006/main" xmlns:r="http://schemas.openxmlformats.org/officeDocument/2006/relationships" xmlns:p="http://schemas.openxmlformats.org/presentationml/2006/main">
+  <p:cSld>
+    <p:bg>
+      <p:bgPr>
+        <a:solidFill>
+          <a:srgbClr val="972996"/>
+        </a:solidFill>
+        <a:effectLst/>
+      </p:bgPr>
+    </p:bg>
+    <p:spTree>
+      <p:nvGrpSpPr>
+        <p:cNvPr id="1" name=""/>
+        <p:cNvGrpSpPr/>
+        <p:nvPr/>
+      </p:nvGrpSpPr>
+      <p:grpSpPr>
+        <a:xfrm>
+          <a:off x="0" y="0"/>
+          <a:ext cx="0" cy="0"/>
+          <a:chOff x="0" y="0"/>
+          <a:chExt cx="0" cy="0"/>
+        </a:xfrm>
+      </p:grpSpPr>
+      <p:pic>
+        <p:nvPicPr>
+          <p:cNvPr id="4" name="Picture 3" descr="logo.png"/>
+          <p:cNvPicPr>
+            <a:picLocks noChangeAspect="1"/>
+          </p:cNvPicPr>
+          <p:nvPr/>
+        </p:nvPicPr>
+        <p:blipFill>
+          <a:blip r:embed="rId2"/>
+          <a:stretch>
+            <a:fillRect/>
+          </a:stretch>
+        </p:blipFill>
+        <p:spPr>
+          <a:xfrm>
+            <a:off x="12344400" y="274320"/>
+            <a:ext cx="1097280" cy="1080473"/>
+          </a:xfrm>
+          <a:prstGeom prst="rect">
+            <a:avLst/>
+          </a:prstGeom>
+        </p:spPr>
+      </p:pic>
+      <p:sp>
+        <p:nvSpPr>
+          <p:cNvPr id="5" name="Rectangle 4"/>
+          <p:cNvSpPr/>
+          <p:nvPr/>
+        </p:nvSpPr>
+        <p:spPr>
+          <a:xfrm>
+            <a:off x="0" y="7772400"/>
+            <a:ext cx="14630400" cy="457200"/>
+          </a:xfrm>
+          <a:prstGeom prst="rect">
+            <a:avLst/>
+          </a:prstGeom>
+          <a:solidFill>
+            <a:srgbClr val="E6E6E6"/>
+          </a:solidFill>
+          <a:ln>
+            <a:noFill/>
+          </a:ln>
+        </p:spPr>
+        <p:style>
+          <a:lnRef idx="1">
+            <a:schemeClr val="accent1"/>
+          </a:lnRef>
+          <a:fillRef idx="3">
+            <a:schemeClr val="accent1"/>
+          </a:fillRef>
+          <a:effectRef idx="2">
+            <a:schemeClr val="accent1"/>
+          </a:effectRef>
+          <a:fontRef idx="minor">
+            <a:schemeClr val="lt1"/>
+          </a:fontRef>
+        </p:style>
+        <p:txBody>
+          <a:bodyPr rtlCol="0" anchor="ctr"/>
+          <a:lstStyle/>
+          <a:p>
+            <a:pPr algn="ctr"/>
+            <a:endParaRPr/>
+          </a:p>
+        </p:txBody>
+      </p:sp>
+      <p:sp>
+        <p:nvSpPr>
+          <p:cNvPr id="3" name="TextBox 2">
+            <a:extLst>
+              <a:ext uri="{FF2B5EF4-FFF2-40B4-BE49-F238E27FC236}">
+                <a16:creationId xmlns:a16="http://schemas.microsoft.com/office/drawing/2014/main" id="{C315D28A-F529-C361-6B0C-54FC6D10368B}"/>
+              </a:ext>
+            </a:extLst>
+          </p:cNvPr>
+          <p:cNvSpPr txBox="1"/>
+          <p:nvPr/>
+        </p:nvSpPr>
+        <p:spPr>
+          <a:xfrm>
+            <a:off x="625737" y="289929"/>
+            <a:ext cx="12170961" cy="769441"/>
+          </a:xfrm>
+          <a:prstGeom prst="rect">
+            <a:avLst/>
+          </a:prstGeom>
+          <a:noFill/>
+        </p:spPr>
+        <p:txBody>
+          <a:bodyPr wrap="none">
+            <a:spAutoFit/>
+          </a:bodyPr>
+          <a:lstStyle/>
+          <a:p>
+            <a:r>
+              <a:rPr lang="ru-RU" sz="4400" dirty="0">
+                <a:solidFill>
+                  <a:schemeClr val="bg1"/>
+                </a:solidFill>
+              </a:rPr>
+              <a:t>Масштабирование, обращение знака и остановка</a:t>
+            </a:r>
+            <a:endParaRPr lang="ru-RU" sz="4400" b="1" dirty="0">
+              <a:solidFill>
+                <a:schemeClr val="bg1"/>
+              </a:solidFill>
+            </a:endParaRPr>
+          </a:p>
+        </p:txBody>
+      </p:sp>
+      <p:sp>
+        <p:nvSpPr>
+          <p:cNvPr id="2" name="TextBox 1">
+            <a:extLst>
+              <a:ext uri="{FF2B5EF4-FFF2-40B4-BE49-F238E27FC236}">
+                <a16:creationId xmlns:a16="http://schemas.microsoft.com/office/drawing/2014/main" id="{2DCBC596-FBD8-97DD-BA0D-10095D714FDB}"/>
+              </a:ext>
+            </a:extLst>
+          </p:cNvPr>
+          <p:cNvSpPr txBox="1"/>
+          <p:nvPr/>
+        </p:nvSpPr>
+        <p:spPr>
+          <a:xfrm>
+            <a:off x="588442" y="1573752"/>
+            <a:ext cx="12853238" cy="5693866"/>
+          </a:xfrm>
+          <a:prstGeom prst="rect">
+            <a:avLst/>
+          </a:prstGeom>
+          <a:noFill/>
+        </p:spPr>
+        <p:txBody>
+          <a:bodyPr wrap="square">
+            <a:spAutoFit/>
+          </a:bodyPr>
+          <a:lstStyle/>
+          <a:p>
+            <a:pPr algn="just"/>
+            <a:r>
+              <a:rPr lang="ru-RU" sz="2800" b="0" dirty="0" err="1">
+                <a:solidFill>
+                  <a:schemeClr val="bg1"/>
+                </a:solidFill>
+                <a:effectLst/>
+                <a:latin typeface="+mj-lt"/>
+              </a:rPr>
+              <a:t>Масшабирование</a:t>
+            </a:r>
+            <a:endParaRPr lang="ru-RU" sz="2800" b="0" dirty="0">
+              <a:solidFill>
+                <a:schemeClr val="bg1"/>
+              </a:solidFill>
+              <a:effectLst/>
+              <a:latin typeface="+mj-lt"/>
+            </a:endParaRPr>
+          </a:p>
+          <a:p>
+            <a:r>
+              <a:rPr lang="ru-RU" sz="2800" dirty="0">
+                <a:solidFill>
+                  <a:schemeClr val="bg1"/>
+                </a:solidFill>
+                <a:latin typeface="+mj-lt"/>
+              </a:rPr>
+              <a:t>Это означает </a:t>
+            </a:r>
+            <a:r>
+              <a:rPr lang="ru-RU" sz="2800" b="1" dirty="0">
+                <a:solidFill>
+                  <a:schemeClr val="bg1"/>
+                </a:solidFill>
+                <a:latin typeface="+mj-lt"/>
+              </a:rPr>
+              <a:t>насколько сильно менять вес</a:t>
+            </a:r>
+            <a:r>
+              <a:rPr lang="ru-RU" sz="2800" dirty="0">
+                <a:solidFill>
+                  <a:schemeClr val="bg1"/>
+                </a:solidFill>
+                <a:latin typeface="+mj-lt"/>
+              </a:rPr>
+              <a:t>.</a:t>
+            </a:r>
+          </a:p>
+          <a:p>
+            <a:r>
+              <a:rPr lang="ru-RU" sz="2800" dirty="0">
+                <a:solidFill>
+                  <a:schemeClr val="bg1"/>
+                </a:solidFill>
+                <a:latin typeface="+mj-lt"/>
+              </a:rPr>
+              <a:t>В градиентном спуске это делает </a:t>
+            </a:r>
+            <a:r>
+              <a:rPr lang="ru-RU" sz="2800" b="1" dirty="0">
+                <a:solidFill>
+                  <a:schemeClr val="bg1"/>
+                </a:solidFill>
+                <a:latin typeface="+mj-lt"/>
+              </a:rPr>
+              <a:t>вход (</a:t>
+            </a:r>
+            <a:r>
+              <a:rPr lang="ru-RU" sz="2800" b="1" dirty="0" err="1">
+                <a:solidFill>
+                  <a:schemeClr val="bg1"/>
+                </a:solidFill>
+                <a:latin typeface="+mj-lt"/>
+              </a:rPr>
+              <a:t>input</a:t>
+            </a:r>
+            <a:r>
+              <a:rPr lang="ru-RU" sz="2800" b="1" dirty="0">
+                <a:solidFill>
+                  <a:schemeClr val="bg1"/>
+                </a:solidFill>
+                <a:latin typeface="+mj-lt"/>
+              </a:rPr>
+              <a:t>).</a:t>
+            </a:r>
+          </a:p>
+          <a:p>
+            <a:endParaRPr lang="ru-RU" sz="2800" b="1" dirty="0">
+              <a:solidFill>
+                <a:schemeClr val="bg1"/>
+              </a:solidFill>
+              <a:latin typeface="+mj-lt"/>
+            </a:endParaRPr>
+          </a:p>
+          <a:p>
+            <a:r>
+              <a:rPr lang="en-US" sz="2800" dirty="0">
+                <a:solidFill>
+                  <a:schemeClr val="bg1"/>
+                </a:solidFill>
+                <a:latin typeface="+mj-lt"/>
+              </a:rPr>
+              <a:t>gradient = (pred - </a:t>
+            </a:r>
+            <a:r>
+              <a:rPr lang="en-US" sz="2800" dirty="0" err="1">
+                <a:solidFill>
+                  <a:schemeClr val="bg1"/>
+                </a:solidFill>
+                <a:latin typeface="+mj-lt"/>
+              </a:rPr>
+              <a:t>goal_pred</a:t>
+            </a:r>
+            <a:r>
+              <a:rPr lang="en-US" sz="2800" dirty="0">
+                <a:solidFill>
+                  <a:schemeClr val="bg1"/>
+                </a:solidFill>
+                <a:latin typeface="+mj-lt"/>
+              </a:rPr>
+              <a:t>) * input</a:t>
+            </a:r>
+            <a:endParaRPr lang="ru-RU" sz="2800" dirty="0">
+              <a:solidFill>
+                <a:schemeClr val="bg1"/>
+              </a:solidFill>
+              <a:latin typeface="+mj-lt"/>
+            </a:endParaRPr>
+          </a:p>
+          <a:p>
+            <a:endParaRPr lang="ru-RU" sz="2800" b="1" dirty="0">
+              <a:solidFill>
+                <a:schemeClr val="bg1"/>
+              </a:solidFill>
+              <a:latin typeface="+mj-lt"/>
+            </a:endParaRPr>
+          </a:p>
+          <a:p>
+            <a:r>
+              <a:rPr lang="ru-RU" sz="2800" b="0" dirty="0">
+                <a:solidFill>
+                  <a:schemeClr val="bg1"/>
+                </a:solidFill>
+                <a:effectLst/>
+                <a:latin typeface="+mj-lt"/>
+              </a:rPr>
+              <a:t>Если </a:t>
+            </a:r>
+            <a:r>
+              <a:rPr lang="ru-RU" sz="2800" b="0" dirty="0" err="1">
+                <a:solidFill>
+                  <a:schemeClr val="bg1"/>
+                </a:solidFill>
+                <a:effectLst/>
+                <a:latin typeface="+mj-lt"/>
+              </a:rPr>
+              <a:t>input</a:t>
+            </a:r>
+            <a:r>
+              <a:rPr lang="ru-RU" sz="2800" b="0" dirty="0">
+                <a:solidFill>
+                  <a:schemeClr val="bg1"/>
+                </a:solidFill>
+                <a:effectLst/>
+                <a:latin typeface="+mj-lt"/>
+              </a:rPr>
+              <a:t> большой → изменение веса будет большим.</a:t>
+            </a:r>
+          </a:p>
+          <a:p>
+            <a:r>
+              <a:rPr lang="ru-RU" sz="2800" b="0" dirty="0">
+                <a:solidFill>
+                  <a:schemeClr val="bg1"/>
+                </a:solidFill>
+                <a:effectLst/>
+                <a:latin typeface="+mj-lt"/>
+              </a:rPr>
+              <a:t>Если </a:t>
+            </a:r>
+            <a:r>
+              <a:rPr lang="ru-RU" sz="2800" b="0" dirty="0" err="1">
+                <a:solidFill>
+                  <a:schemeClr val="bg1"/>
+                </a:solidFill>
+                <a:effectLst/>
+                <a:latin typeface="+mj-lt"/>
+              </a:rPr>
+              <a:t>input</a:t>
+            </a:r>
+            <a:r>
+              <a:rPr lang="ru-RU" sz="2800" b="0" dirty="0">
+                <a:solidFill>
+                  <a:schemeClr val="bg1"/>
+                </a:solidFill>
+                <a:effectLst/>
+                <a:latin typeface="+mj-lt"/>
+              </a:rPr>
+              <a:t> маленький → изменение веса будет маленьким.</a:t>
+            </a:r>
+          </a:p>
+          <a:p>
+            <a:r>
+              <a:rPr lang="ru-RU" sz="2800" b="0" dirty="0" err="1">
+                <a:solidFill>
+                  <a:schemeClr val="bg1"/>
+                </a:solidFill>
+                <a:effectLst/>
+                <a:latin typeface="+mj-lt"/>
+              </a:rPr>
+              <a:t>input</a:t>
+            </a:r>
+            <a:r>
+              <a:rPr lang="ru-RU" sz="2800" b="0" dirty="0">
+                <a:solidFill>
+                  <a:schemeClr val="bg1"/>
+                </a:solidFill>
+                <a:effectLst/>
+                <a:latin typeface="+mj-lt"/>
+              </a:rPr>
+              <a:t> = 0.1 → маленькое изменение веса</a:t>
+            </a:r>
+          </a:p>
+          <a:p>
+            <a:r>
+              <a:rPr lang="ru-RU" sz="2800" b="0" dirty="0" err="1">
+                <a:solidFill>
+                  <a:schemeClr val="bg1"/>
+                </a:solidFill>
+                <a:effectLst/>
+                <a:latin typeface="+mj-lt"/>
+              </a:rPr>
+              <a:t>input</a:t>
+            </a:r>
+            <a:r>
+              <a:rPr lang="ru-RU" sz="2800" b="0" dirty="0">
+                <a:solidFill>
+                  <a:schemeClr val="bg1"/>
+                </a:solidFill>
+                <a:effectLst/>
+                <a:latin typeface="+mj-lt"/>
+              </a:rPr>
+              <a:t> = 10  → большое изменение веса</a:t>
+            </a:r>
+          </a:p>
+          <a:p>
+            <a:r>
+              <a:rPr lang="ru-RU" sz="2800" dirty="0">
+                <a:solidFill>
+                  <a:schemeClr val="bg1"/>
+                </a:solidFill>
+                <a:latin typeface="+mj-lt"/>
+              </a:rPr>
+              <a:t>То есть </a:t>
+            </a:r>
+            <a:r>
+              <a:rPr lang="ru-RU" sz="2800" b="1" dirty="0" err="1">
+                <a:solidFill>
+                  <a:schemeClr val="bg1"/>
+                </a:solidFill>
+                <a:latin typeface="+mj-lt"/>
+              </a:rPr>
+              <a:t>input</a:t>
+            </a:r>
+            <a:r>
+              <a:rPr lang="ru-RU" sz="2800" b="1" dirty="0">
+                <a:solidFill>
+                  <a:schemeClr val="bg1"/>
+                </a:solidFill>
+                <a:latin typeface="+mj-lt"/>
+              </a:rPr>
+              <a:t> масштабирует изменение веса</a:t>
+            </a:r>
+            <a:r>
+              <a:rPr lang="ru-RU" sz="2800" dirty="0">
+                <a:solidFill>
+                  <a:schemeClr val="bg1"/>
+                </a:solidFill>
+                <a:latin typeface="+mj-lt"/>
+              </a:rPr>
+              <a:t>.</a:t>
+            </a:r>
+          </a:p>
+          <a:p>
+            <a:r>
+              <a:rPr lang="ru-RU" sz="2800" dirty="0">
+                <a:solidFill>
+                  <a:schemeClr val="bg1"/>
+                </a:solidFill>
+                <a:latin typeface="+mj-lt"/>
+              </a:rPr>
+              <a:t>Поэтому это называют </a:t>
+            </a:r>
+            <a:r>
+              <a:rPr lang="ru-RU" sz="2800" b="1" dirty="0">
+                <a:solidFill>
+                  <a:schemeClr val="bg1"/>
+                </a:solidFill>
+                <a:latin typeface="+mj-lt"/>
+              </a:rPr>
+              <a:t>масштабирование</a:t>
+            </a:r>
+            <a:r>
+              <a:rPr lang="ru-RU" sz="2800" dirty="0">
+                <a:solidFill>
+                  <a:schemeClr val="bg1"/>
+                </a:solidFill>
+                <a:latin typeface="+mj-lt"/>
+              </a:rPr>
+              <a:t>.</a:t>
+            </a:r>
+          </a:p>
+          <a:p>
+            <a:endParaRPr lang="ru-RU" sz="2800" b="0" dirty="0">
+              <a:solidFill>
+                <a:schemeClr val="bg1"/>
+              </a:solidFill>
+              <a:effectLst/>
+              <a:latin typeface="+mj-lt"/>
+            </a:endParaRPr>
+          </a:p>
+        </p:txBody>
+      </p:sp>
+    </p:spTree>
+    <p:extLst>
+      <p:ext uri="{BB962C8B-B14F-4D97-AF65-F5344CB8AC3E}">
+        <p14:creationId xmlns:p14="http://schemas.microsoft.com/office/powerpoint/2010/main" val="745263155"/>
+      </p:ext>
+    </p:extLst>
+  </p:cSld>
+  <p:clrMapOvr>
+    <a:masterClrMapping/>
+  </p:clrMapOvr>
+</p:sld>
+</file>
+
+<file path=ppt/slides/slide36.xml><?xml version="1.0" encoding="utf-8"?>
+<p:sld xmlns:a="http://schemas.openxmlformats.org/drawingml/2006/main" xmlns:r="http://schemas.openxmlformats.org/officeDocument/2006/relationships" xmlns:p="http://schemas.openxmlformats.org/presentationml/2006/main">
+  <p:cSld>
+    <p:spTree>
+      <p:nvGrpSpPr>
+        <p:cNvPr id="1" name=""/>
+        <p:cNvGrpSpPr/>
+        <p:nvPr/>
+      </p:nvGrpSpPr>
+      <p:grpSpPr>
+        <a:xfrm>
+          <a:off x="0" y="0"/>
+          <a:ext cx="0" cy="0"/>
+          <a:chOff x="0" y="0"/>
+          <a:chExt cx="0" cy="0"/>
+        </a:xfrm>
+      </p:grpSpPr>
+      <p:pic>
+        <p:nvPicPr>
+          <p:cNvPr id="4" name="Picture 3" descr="logo.png"/>
+          <p:cNvPicPr>
+            <a:picLocks noChangeAspect="1"/>
+          </p:cNvPicPr>
+          <p:nvPr/>
+        </p:nvPicPr>
+        <p:blipFill>
+          <a:blip r:embed="rId2"/>
+          <a:stretch>
+            <a:fillRect/>
+          </a:stretch>
+        </p:blipFill>
+        <p:spPr>
+          <a:xfrm>
+            <a:off x="12344400" y="274320"/>
+            <a:ext cx="1097280" cy="1080473"/>
+          </a:xfrm>
+          <a:prstGeom prst="rect">
+            <a:avLst/>
+          </a:prstGeom>
+        </p:spPr>
+      </p:pic>
+      <p:sp>
+        <p:nvSpPr>
+          <p:cNvPr id="5" name="Rectangle 4"/>
+          <p:cNvSpPr/>
+          <p:nvPr/>
+        </p:nvSpPr>
+        <p:spPr>
+          <a:xfrm>
+            <a:off x="0" y="7772400"/>
+            <a:ext cx="14630400" cy="457200"/>
+          </a:xfrm>
+          <a:prstGeom prst="rect">
+            <a:avLst/>
+          </a:prstGeom>
+          <a:solidFill>
+            <a:srgbClr val="640064"/>
+          </a:solidFill>
+          <a:ln>
+            <a:noFill/>
+          </a:ln>
+        </p:spPr>
+        <p:style>
+          <a:lnRef idx="1">
+            <a:schemeClr val="accent1"/>
+          </a:lnRef>
+          <a:fillRef idx="3">
+            <a:schemeClr val="accent1"/>
+          </a:fillRef>
+          <a:effectRef idx="2">
+            <a:schemeClr val="accent1"/>
+          </a:effectRef>
+          <a:fontRef idx="minor">
+            <a:schemeClr val="lt1"/>
+          </a:fontRef>
+        </p:style>
+        <p:txBody>
+          <a:bodyPr rtlCol="0" anchor="ctr"/>
+          <a:lstStyle/>
+          <a:p>
+            <a:pPr algn="ctr"/>
+            <a:endParaRPr>
+              <a:solidFill>
+                <a:schemeClr val="tx1"/>
+              </a:solidFill>
+            </a:endParaRPr>
+          </a:p>
+        </p:txBody>
+      </p:sp>
+      <p:sp>
+        <p:nvSpPr>
+          <p:cNvPr id="7" name="TextBox 6">
+            <a:extLst>
+              <a:ext uri="{FF2B5EF4-FFF2-40B4-BE49-F238E27FC236}">
+                <a16:creationId xmlns:a16="http://schemas.microsoft.com/office/drawing/2014/main" id="{EA77F26D-0F9B-DFF5-2FB4-9E508F48AFC7}"/>
+              </a:ext>
+            </a:extLst>
+          </p:cNvPr>
+          <p:cNvSpPr txBox="1"/>
+          <p:nvPr/>
+        </p:nvSpPr>
+        <p:spPr>
+          <a:xfrm>
+            <a:off x="297412" y="407076"/>
+            <a:ext cx="12625099" cy="769441"/>
+          </a:xfrm>
+          <a:prstGeom prst="rect">
+            <a:avLst/>
+          </a:prstGeom>
+          <a:noFill/>
+        </p:spPr>
+        <p:txBody>
+          <a:bodyPr wrap="square">
+            <a:spAutoFit/>
+          </a:bodyPr>
+          <a:lstStyle/>
+          <a:p>
+            <a:r>
+              <a:rPr lang="ru-RU" sz="4400" dirty="0"/>
+              <a:t>Масштабирование, обращение знака и остановка</a:t>
+            </a:r>
+            <a:endParaRPr lang="ru-RU" sz="4400" b="1" dirty="0"/>
+          </a:p>
+        </p:txBody>
+      </p:sp>
+      <p:sp>
+        <p:nvSpPr>
+          <p:cNvPr id="8" name="TextBox 7">
+            <a:extLst>
+              <a:ext uri="{FF2B5EF4-FFF2-40B4-BE49-F238E27FC236}">
+                <a16:creationId xmlns:a16="http://schemas.microsoft.com/office/drawing/2014/main" id="{8BCB2A4C-0964-68F5-75E3-8DFAC52581C6}"/>
+              </a:ext>
+            </a:extLst>
+          </p:cNvPr>
+          <p:cNvSpPr txBox="1"/>
+          <p:nvPr/>
+        </p:nvSpPr>
+        <p:spPr>
+          <a:xfrm>
+            <a:off x="588442" y="1573752"/>
+            <a:ext cx="12853238" cy="5693866"/>
+          </a:xfrm>
+          <a:prstGeom prst="rect">
+            <a:avLst/>
+          </a:prstGeom>
+          <a:noFill/>
+        </p:spPr>
+        <p:txBody>
+          <a:bodyPr wrap="square">
+            <a:spAutoFit/>
+          </a:bodyPr>
+          <a:lstStyle/>
+          <a:p>
+            <a:r>
+              <a:rPr lang="ru-RU" sz="2800" dirty="0"/>
+              <a:t>Это отвечает за направление движения веса.</a:t>
+            </a:r>
+          </a:p>
+          <a:p>
+            <a:r>
+              <a:rPr lang="ru-RU" sz="2800" dirty="0"/>
+              <a:t>Посмотрим на часть формулы:</a:t>
+            </a:r>
+          </a:p>
+          <a:p>
+            <a:endParaRPr lang="ru-RU" sz="2800" dirty="0"/>
+          </a:p>
+          <a:p>
+            <a:r>
+              <a:rPr lang="de-DE" sz="2800" dirty="0"/>
+              <a:t>(</a:t>
+            </a:r>
+            <a:r>
+              <a:rPr lang="de-DE" sz="2800" dirty="0" err="1"/>
+              <a:t>pred</a:t>
+            </a:r>
+            <a:r>
+              <a:rPr lang="de-DE" sz="2800" dirty="0"/>
+              <a:t> - </a:t>
+            </a:r>
+            <a:r>
+              <a:rPr lang="de-DE" sz="2800" dirty="0" err="1"/>
+              <a:t>goal_pred</a:t>
+            </a:r>
+            <a:r>
+              <a:rPr lang="de-DE" sz="2800" dirty="0"/>
+              <a:t>)</a:t>
+            </a:r>
+            <a:endParaRPr lang="ru-RU" sz="2800" dirty="0"/>
+          </a:p>
+          <a:p>
+            <a:r>
+              <a:rPr lang="ru-RU" sz="2800" dirty="0"/>
+              <a:t>Возможны два случая.</a:t>
+            </a:r>
+          </a:p>
+          <a:p>
+            <a:r>
+              <a:rPr lang="ru-RU" sz="2800" dirty="0"/>
+              <a:t>Случай 1 — предсказание слишком большое – вес уменьшается</a:t>
+            </a:r>
+          </a:p>
+          <a:p>
+            <a:endParaRPr lang="ru-RU" sz="2800" dirty="0"/>
+          </a:p>
+          <a:p>
+            <a:endParaRPr lang="ru-RU" sz="2800" dirty="0"/>
+          </a:p>
+          <a:p>
+            <a:r>
+              <a:rPr lang="ru-RU" sz="2800" dirty="0"/>
+              <a:t>Случай 2 — предсказание слишком маленькое – вес увеличивается</a:t>
+            </a:r>
+          </a:p>
+          <a:p>
+            <a:endParaRPr lang="ru-RU" sz="2800" dirty="0"/>
+          </a:p>
+          <a:p>
+            <a:r>
+              <a:rPr lang="ru-RU" sz="2800" dirty="0"/>
+              <a:t>То есть знак ошибки переворачивает направление движения веса.</a:t>
+            </a:r>
+          </a:p>
+          <a:p>
+            <a:r>
+              <a:rPr lang="ru-RU" sz="2800" dirty="0"/>
+              <a:t>Это и называют обращение знака.</a:t>
+            </a:r>
+          </a:p>
+          <a:p>
+            <a:endParaRPr lang="ru-RU" sz="2800" dirty="0"/>
+          </a:p>
+        </p:txBody>
+      </p:sp>
+      <p:sp>
+        <p:nvSpPr>
+          <p:cNvPr id="10" name="TextBox 9">
+            <a:extLst>
+              <a:ext uri="{FF2B5EF4-FFF2-40B4-BE49-F238E27FC236}">
+                <a16:creationId xmlns:a16="http://schemas.microsoft.com/office/drawing/2014/main" id="{CE2C0D62-A878-39FA-44BB-19947D9ECA54}"/>
+              </a:ext>
+            </a:extLst>
+          </p:cNvPr>
+          <p:cNvSpPr txBox="1"/>
+          <p:nvPr/>
+        </p:nvSpPr>
+        <p:spPr>
+          <a:xfrm>
+            <a:off x="11222182" y="3416280"/>
+            <a:ext cx="2042286" cy="923330"/>
+          </a:xfrm>
+          <a:prstGeom prst="rect">
+            <a:avLst/>
+          </a:prstGeom>
+          <a:noFill/>
+        </p:spPr>
+        <p:txBody>
+          <a:bodyPr wrap="square">
+            <a:spAutoFit/>
+          </a:bodyPr>
+          <a:lstStyle/>
+          <a:p>
+            <a:r>
+              <a:rPr lang="ru-RU" dirty="0" err="1"/>
+              <a:t>pred</a:t>
+            </a:r>
+            <a:r>
+              <a:rPr lang="ru-RU" dirty="0"/>
+              <a:t> = 1.2</a:t>
+            </a:r>
+          </a:p>
+          <a:p>
+            <a:r>
+              <a:rPr lang="ru-RU" dirty="0" err="1"/>
+              <a:t>goal</a:t>
+            </a:r>
+            <a:r>
+              <a:rPr lang="ru-RU" dirty="0"/>
+              <a:t> = 1.0</a:t>
+            </a:r>
+          </a:p>
+          <a:p>
+            <a:r>
+              <a:rPr lang="ru-RU" dirty="0" err="1"/>
+              <a:t>pred</a:t>
+            </a:r>
+            <a:r>
+              <a:rPr lang="ru-RU" dirty="0"/>
+              <a:t> - </a:t>
+            </a:r>
+            <a:r>
+              <a:rPr lang="ru-RU" dirty="0" err="1"/>
+              <a:t>goal</a:t>
+            </a:r>
+            <a:r>
+              <a:rPr lang="ru-RU" dirty="0"/>
+              <a:t> = +0.2</a:t>
+            </a:r>
+          </a:p>
+        </p:txBody>
+      </p:sp>
+      <p:sp>
+        <p:nvSpPr>
+          <p:cNvPr id="14" name="TextBox 13">
+            <a:extLst>
+              <a:ext uri="{FF2B5EF4-FFF2-40B4-BE49-F238E27FC236}">
+                <a16:creationId xmlns:a16="http://schemas.microsoft.com/office/drawing/2014/main" id="{B1291A78-DB7D-15C3-C86C-09EFA8046150}"/>
+              </a:ext>
+            </a:extLst>
+          </p:cNvPr>
+          <p:cNvSpPr txBox="1"/>
+          <p:nvPr/>
+        </p:nvSpPr>
+        <p:spPr>
+          <a:xfrm>
+            <a:off x="11214625" y="4736845"/>
+            <a:ext cx="2042286" cy="923330"/>
+          </a:xfrm>
+          <a:prstGeom prst="rect">
+            <a:avLst/>
+          </a:prstGeom>
+          <a:noFill/>
+        </p:spPr>
+        <p:txBody>
+          <a:bodyPr wrap="square">
+            <a:spAutoFit/>
+          </a:bodyPr>
+          <a:lstStyle/>
+          <a:p>
+            <a:r>
+              <a:rPr lang="ru-RU" dirty="0" err="1"/>
+              <a:t>pred</a:t>
+            </a:r>
+            <a:r>
+              <a:rPr lang="ru-RU" dirty="0"/>
+              <a:t> = 0.5</a:t>
+            </a:r>
+          </a:p>
+          <a:p>
+            <a:r>
+              <a:rPr lang="ru-RU" dirty="0" err="1"/>
+              <a:t>goal</a:t>
+            </a:r>
+            <a:r>
+              <a:rPr lang="ru-RU" dirty="0"/>
+              <a:t> = 1.0</a:t>
+            </a:r>
+          </a:p>
+          <a:p>
+            <a:r>
+              <a:rPr lang="ru-RU" dirty="0" err="1"/>
+              <a:t>pred</a:t>
+            </a:r>
+            <a:r>
+              <a:rPr lang="ru-RU" dirty="0"/>
+              <a:t> - </a:t>
+            </a:r>
+            <a:r>
+              <a:rPr lang="ru-RU" dirty="0" err="1"/>
+              <a:t>goal</a:t>
+            </a:r>
+            <a:r>
+              <a:rPr lang="ru-RU" dirty="0"/>
+              <a:t> = -0.5</a:t>
+            </a:r>
+          </a:p>
+        </p:txBody>
+      </p:sp>
+    </p:spTree>
+    <p:extLst>
+      <p:ext uri="{BB962C8B-B14F-4D97-AF65-F5344CB8AC3E}">
+        <p14:creationId xmlns:p14="http://schemas.microsoft.com/office/powerpoint/2010/main" val="1021326179"/>
+      </p:ext>
+    </p:extLst>
+  </p:cSld>
+  <p:clrMapOvr>
+    <a:masterClrMapping/>
+  </p:clrMapOvr>
+</p:sld>
+</file>
+
+<file path=ppt/slides/slide37.xml><?xml version="1.0" encoding="utf-8"?>
+<p:sld xmlns:a="http://schemas.openxmlformats.org/drawingml/2006/main" xmlns:r="http://schemas.openxmlformats.org/officeDocument/2006/relationships" xmlns:p="http://schemas.openxmlformats.org/presentationml/2006/main">
+  <p:cSld>
+    <p:bg>
+      <p:bgPr>
+        <a:solidFill>
+          <a:srgbClr val="972996"/>
+        </a:solidFill>
+        <a:effectLst/>
+      </p:bgPr>
+    </p:bg>
+    <p:spTree>
+      <p:nvGrpSpPr>
+        <p:cNvPr id="1" name=""/>
+        <p:cNvGrpSpPr/>
+        <p:nvPr/>
+      </p:nvGrpSpPr>
+      <p:grpSpPr>
+        <a:xfrm>
+          <a:off x="0" y="0"/>
+          <a:ext cx="0" cy="0"/>
+          <a:chOff x="0" y="0"/>
+          <a:chExt cx="0" cy="0"/>
+        </a:xfrm>
+      </p:grpSpPr>
+      <p:pic>
+        <p:nvPicPr>
+          <p:cNvPr id="4" name="Picture 3" descr="logo.png"/>
+          <p:cNvPicPr>
+            <a:picLocks noChangeAspect="1"/>
+          </p:cNvPicPr>
+          <p:nvPr/>
+        </p:nvPicPr>
+        <p:blipFill>
+          <a:blip r:embed="rId2"/>
+          <a:stretch>
+            <a:fillRect/>
+          </a:stretch>
+        </p:blipFill>
+        <p:spPr>
+          <a:xfrm>
+            <a:off x="12344400" y="274320"/>
+            <a:ext cx="1097280" cy="1080473"/>
+          </a:xfrm>
+          <a:prstGeom prst="rect">
+            <a:avLst/>
+          </a:prstGeom>
+        </p:spPr>
+      </p:pic>
+      <p:sp>
+        <p:nvSpPr>
+          <p:cNvPr id="5" name="Rectangle 4"/>
+          <p:cNvSpPr/>
+          <p:nvPr/>
+        </p:nvSpPr>
+        <p:spPr>
+          <a:xfrm>
+            <a:off x="0" y="7772400"/>
+            <a:ext cx="14630400" cy="457200"/>
+          </a:xfrm>
+          <a:prstGeom prst="rect">
+            <a:avLst/>
+          </a:prstGeom>
+          <a:solidFill>
+            <a:srgbClr val="E6E6E6"/>
+          </a:solidFill>
+          <a:ln>
+            <a:noFill/>
+          </a:ln>
+        </p:spPr>
+        <p:style>
+          <a:lnRef idx="1">
+            <a:schemeClr val="accent1"/>
+          </a:lnRef>
+          <a:fillRef idx="3">
+            <a:schemeClr val="accent1"/>
+          </a:fillRef>
+          <a:effectRef idx="2">
+            <a:schemeClr val="accent1"/>
+          </a:effectRef>
+          <a:fontRef idx="minor">
+            <a:schemeClr val="lt1"/>
+          </a:fontRef>
+        </p:style>
+        <p:txBody>
+          <a:bodyPr rtlCol="0" anchor="ctr"/>
+          <a:lstStyle/>
+          <a:p>
+            <a:pPr algn="ctr"/>
+            <a:endParaRPr/>
+          </a:p>
+        </p:txBody>
+      </p:sp>
+      <p:sp>
+        <p:nvSpPr>
+          <p:cNvPr id="3" name="TextBox 2">
+            <a:extLst>
+              <a:ext uri="{FF2B5EF4-FFF2-40B4-BE49-F238E27FC236}">
+                <a16:creationId xmlns:a16="http://schemas.microsoft.com/office/drawing/2014/main" id="{C315D28A-F529-C361-6B0C-54FC6D10368B}"/>
+              </a:ext>
+            </a:extLst>
+          </p:cNvPr>
+          <p:cNvSpPr txBox="1"/>
+          <p:nvPr/>
+        </p:nvSpPr>
+        <p:spPr>
+          <a:xfrm>
+            <a:off x="625737" y="289929"/>
+            <a:ext cx="12170961" cy="769441"/>
+          </a:xfrm>
+          <a:prstGeom prst="rect">
+            <a:avLst/>
+          </a:prstGeom>
+          <a:noFill/>
+        </p:spPr>
+        <p:txBody>
+          <a:bodyPr wrap="none">
+            <a:spAutoFit/>
+          </a:bodyPr>
+          <a:lstStyle/>
+          <a:p>
+            <a:r>
+              <a:rPr lang="ru-RU" sz="4400" dirty="0">
+                <a:solidFill>
+                  <a:schemeClr val="bg1"/>
+                </a:solidFill>
+              </a:rPr>
+              <a:t>Масштабирование, обращение знака и остановка</a:t>
+            </a:r>
+            <a:endParaRPr lang="ru-RU" sz="4400" b="1" dirty="0">
+              <a:solidFill>
+                <a:schemeClr val="bg1"/>
+              </a:solidFill>
+            </a:endParaRPr>
+          </a:p>
+        </p:txBody>
+      </p:sp>
+      <p:sp>
+        <p:nvSpPr>
+          <p:cNvPr id="2" name="TextBox 1">
+            <a:extLst>
+              <a:ext uri="{FF2B5EF4-FFF2-40B4-BE49-F238E27FC236}">
+                <a16:creationId xmlns:a16="http://schemas.microsoft.com/office/drawing/2014/main" id="{2DCBC596-FBD8-97DD-BA0D-10095D714FDB}"/>
+              </a:ext>
+            </a:extLst>
+          </p:cNvPr>
+          <p:cNvSpPr txBox="1"/>
+          <p:nvPr/>
+        </p:nvSpPr>
+        <p:spPr>
+          <a:xfrm>
+            <a:off x="625737" y="1698754"/>
+            <a:ext cx="12853238" cy="5262979"/>
+          </a:xfrm>
+          <a:prstGeom prst="rect">
+            <a:avLst/>
+          </a:prstGeom>
+          <a:noFill/>
+        </p:spPr>
+        <p:txBody>
+          <a:bodyPr wrap="square">
+            <a:spAutoFit/>
+          </a:bodyPr>
+          <a:lstStyle/>
+          <a:p>
+            <a:pPr algn="just"/>
+            <a:r>
+              <a:rPr lang="ru-RU" sz="2800" dirty="0">
+                <a:solidFill>
+                  <a:schemeClr val="bg1"/>
+                </a:solidFill>
+                <a:latin typeface="+mj-lt"/>
+              </a:rPr>
+              <a:t>Остановка (</a:t>
+            </a:r>
+            <a:r>
+              <a:rPr lang="de-DE" sz="2800" dirty="0" err="1">
+                <a:solidFill>
+                  <a:schemeClr val="bg1"/>
+                </a:solidFill>
+                <a:latin typeface="+mj-lt"/>
+              </a:rPr>
+              <a:t>stopping</a:t>
+            </a:r>
+            <a:r>
+              <a:rPr lang="de-DE" sz="2800" dirty="0">
+                <a:solidFill>
+                  <a:schemeClr val="bg1"/>
+                </a:solidFill>
+                <a:latin typeface="+mj-lt"/>
+              </a:rPr>
+              <a:t>)</a:t>
+            </a:r>
+            <a:endParaRPr lang="ru-RU" sz="2800" dirty="0">
+              <a:solidFill>
+                <a:schemeClr val="bg1"/>
+              </a:solidFill>
+              <a:latin typeface="+mj-lt"/>
+            </a:endParaRPr>
+          </a:p>
+          <a:p>
+            <a:r>
+              <a:rPr lang="ru-RU" sz="2800" dirty="0">
+                <a:solidFill>
+                  <a:schemeClr val="bg1"/>
+                </a:solidFill>
+                <a:latin typeface="+mj-lt"/>
+              </a:rPr>
+              <a:t>Это происходит, когда ошибка становится нулевой.</a:t>
+            </a:r>
+          </a:p>
+          <a:p>
+            <a:r>
+              <a:rPr lang="ru-RU" sz="2800" dirty="0">
+                <a:solidFill>
+                  <a:schemeClr val="bg1"/>
+                </a:solidFill>
+                <a:latin typeface="+mj-lt"/>
+              </a:rPr>
+              <a:t>Например:</a:t>
+            </a:r>
+          </a:p>
+          <a:p>
+            <a:pPr algn="just"/>
+            <a:r>
+              <a:rPr lang="de-DE" sz="2800" dirty="0" err="1">
+                <a:solidFill>
+                  <a:schemeClr val="bg1"/>
+                </a:solidFill>
+                <a:effectLst/>
+                <a:latin typeface="+mj-lt"/>
+              </a:rPr>
+              <a:t>pred</a:t>
+            </a:r>
+            <a:r>
+              <a:rPr lang="de-DE" sz="2800" dirty="0">
+                <a:solidFill>
+                  <a:schemeClr val="bg1"/>
+                </a:solidFill>
+                <a:effectLst/>
+                <a:latin typeface="+mj-lt"/>
+              </a:rPr>
+              <a:t> = </a:t>
+            </a:r>
+            <a:r>
+              <a:rPr lang="de-DE" sz="2800" dirty="0" err="1">
+                <a:solidFill>
+                  <a:schemeClr val="bg1"/>
+                </a:solidFill>
+                <a:effectLst/>
+                <a:latin typeface="+mj-lt"/>
+              </a:rPr>
+              <a:t>goal_pred</a:t>
+            </a:r>
+            <a:endParaRPr lang="ru-RU" sz="2800" dirty="0">
+              <a:solidFill>
+                <a:schemeClr val="bg1"/>
+              </a:solidFill>
+              <a:effectLst/>
+              <a:latin typeface="+mj-lt"/>
+            </a:endParaRPr>
+          </a:p>
+          <a:p>
+            <a:pPr algn="just"/>
+            <a:r>
+              <a:rPr lang="en-US" sz="2800" dirty="0">
+                <a:solidFill>
+                  <a:schemeClr val="bg1"/>
+                </a:solidFill>
+                <a:effectLst/>
+                <a:latin typeface="+mj-lt"/>
+              </a:rPr>
+              <a:t>gradient = (pred - </a:t>
+            </a:r>
+            <a:r>
+              <a:rPr lang="en-US" sz="2800" dirty="0" err="1">
+                <a:solidFill>
+                  <a:schemeClr val="bg1"/>
+                </a:solidFill>
+                <a:effectLst/>
+                <a:latin typeface="+mj-lt"/>
+              </a:rPr>
+              <a:t>goal_pred</a:t>
+            </a:r>
+            <a:r>
+              <a:rPr lang="en-US" sz="2800" dirty="0">
+                <a:solidFill>
+                  <a:schemeClr val="bg1"/>
+                </a:solidFill>
+                <a:effectLst/>
+                <a:latin typeface="+mj-lt"/>
+              </a:rPr>
+              <a:t>) * input</a:t>
+            </a:r>
+            <a:endParaRPr lang="ru-RU" sz="2800" dirty="0">
+              <a:solidFill>
+                <a:schemeClr val="bg1"/>
+              </a:solidFill>
+              <a:effectLst/>
+              <a:latin typeface="+mj-lt"/>
+            </a:endParaRPr>
+          </a:p>
+          <a:p>
+            <a:pPr algn="just"/>
+            <a:r>
+              <a:rPr lang="en-US" sz="2800" dirty="0">
+                <a:solidFill>
+                  <a:schemeClr val="bg1"/>
+                </a:solidFill>
+                <a:effectLst/>
+                <a:latin typeface="+mj-lt"/>
+              </a:rPr>
+              <a:t>gradient = 0</a:t>
+            </a:r>
+            <a:endParaRPr lang="ru-RU" sz="2800" dirty="0">
+              <a:solidFill>
+                <a:schemeClr val="bg1"/>
+              </a:solidFill>
+              <a:effectLst/>
+              <a:latin typeface="+mj-lt"/>
+            </a:endParaRPr>
+          </a:p>
+          <a:p>
+            <a:pPr algn="just"/>
+            <a:endParaRPr lang="ru-RU" sz="2800" dirty="0">
+              <a:solidFill>
+                <a:schemeClr val="bg1"/>
+              </a:solidFill>
+              <a:effectLst/>
+              <a:latin typeface="+mj-lt"/>
+            </a:endParaRPr>
+          </a:p>
+          <a:p>
+            <a:pPr algn="just"/>
+            <a:r>
+              <a:rPr lang="ru-RU" sz="2800" dirty="0">
+                <a:solidFill>
+                  <a:schemeClr val="bg1"/>
+                </a:solidFill>
+                <a:latin typeface="+mj-lt"/>
+              </a:rPr>
+              <a:t>И обновление веса:</a:t>
+            </a:r>
+          </a:p>
+          <a:p>
+            <a:pPr algn="just"/>
+            <a:r>
+              <a:rPr lang="de-DE" sz="2800" dirty="0" err="1">
+                <a:solidFill>
+                  <a:schemeClr val="bg1"/>
+                </a:solidFill>
+                <a:effectLst/>
+                <a:latin typeface="+mj-lt"/>
+              </a:rPr>
+              <a:t>weight</a:t>
+            </a:r>
+            <a:r>
+              <a:rPr lang="de-DE" sz="2800" dirty="0">
+                <a:solidFill>
+                  <a:schemeClr val="bg1"/>
+                </a:solidFill>
+                <a:effectLst/>
+                <a:latin typeface="+mj-lt"/>
+              </a:rPr>
+              <a:t> = </a:t>
+            </a:r>
+            <a:r>
+              <a:rPr lang="de-DE" sz="2800" dirty="0" err="1">
+                <a:solidFill>
+                  <a:schemeClr val="bg1"/>
+                </a:solidFill>
+                <a:effectLst/>
+                <a:latin typeface="+mj-lt"/>
+              </a:rPr>
+              <a:t>weight</a:t>
+            </a:r>
+            <a:r>
+              <a:rPr lang="de-DE" sz="2800" dirty="0">
+                <a:solidFill>
+                  <a:schemeClr val="bg1"/>
+                </a:solidFill>
+                <a:effectLst/>
+                <a:latin typeface="+mj-lt"/>
+              </a:rPr>
+              <a:t> – 0</a:t>
+            </a:r>
+            <a:endParaRPr lang="ru-RU" sz="2800" dirty="0">
+              <a:solidFill>
+                <a:schemeClr val="bg1"/>
+              </a:solidFill>
+              <a:effectLst/>
+              <a:latin typeface="+mj-lt"/>
+            </a:endParaRPr>
+          </a:p>
+          <a:p>
+            <a:r>
+              <a:rPr lang="ru-RU" sz="2800" dirty="0">
+                <a:solidFill>
+                  <a:schemeClr val="bg1"/>
+                </a:solidFill>
+                <a:latin typeface="+mj-lt"/>
+              </a:rPr>
+              <a:t>Вес перестаёт меняться.</a:t>
+            </a:r>
+          </a:p>
+          <a:p>
+            <a:r>
+              <a:rPr lang="ru-RU" sz="2800" dirty="0">
+                <a:solidFill>
+                  <a:schemeClr val="bg1"/>
+                </a:solidFill>
+                <a:latin typeface="+mj-lt"/>
+              </a:rPr>
+              <a:t>Обучение автоматически останавливается.</a:t>
+            </a:r>
+          </a:p>
+          <a:p>
+            <a:pPr algn="just"/>
+            <a:endParaRPr lang="ru-RU" sz="2800" dirty="0">
+              <a:solidFill>
+                <a:schemeClr val="bg1"/>
+              </a:solidFill>
+              <a:effectLst/>
+              <a:latin typeface="+mj-lt"/>
+            </a:endParaRPr>
+          </a:p>
+        </p:txBody>
+      </p:sp>
+    </p:spTree>
+    <p:extLst>
+      <p:ext uri="{BB962C8B-B14F-4D97-AF65-F5344CB8AC3E}">
+        <p14:creationId xmlns:p14="http://schemas.microsoft.com/office/powerpoint/2010/main" val="2576464204"/>
+      </p:ext>
+    </p:extLst>
+  </p:cSld>
+  <p:clrMapOvr>
+    <a:masterClrMapping/>
+  </p:clrMapOvr>
+</p:sld>
+</file>
+
+<file path=ppt/slides/slide38.xml><?xml version="1.0" encoding="utf-8"?>
+<p:sld xmlns:a="http://schemas.openxmlformats.org/drawingml/2006/main" xmlns:r="http://schemas.openxmlformats.org/officeDocument/2006/relationships" xmlns:p="http://schemas.openxmlformats.org/presentationml/2006/main">
+  <p:cSld>
+    <p:spTree>
+      <p:nvGrpSpPr>
+        <p:cNvPr id="1" name=""/>
+        <p:cNvGrpSpPr/>
+        <p:nvPr/>
+      </p:nvGrpSpPr>
+      <p:grpSpPr>
+        <a:xfrm>
+          <a:off x="0" y="0"/>
+          <a:ext cx="0" cy="0"/>
+          <a:chOff x="0" y="0"/>
+          <a:chExt cx="0" cy="0"/>
+        </a:xfrm>
+      </p:grpSpPr>
+      <p:pic>
+        <p:nvPicPr>
+          <p:cNvPr id="4" name="Picture 3" descr="logo.png"/>
+          <p:cNvPicPr>
+            <a:picLocks noChangeAspect="1"/>
+          </p:cNvPicPr>
+          <p:nvPr/>
+        </p:nvPicPr>
+        <p:blipFill>
+          <a:blip r:embed="rId2"/>
+          <a:stretch>
+            <a:fillRect/>
+          </a:stretch>
+        </p:blipFill>
+        <p:spPr>
+          <a:xfrm>
+            <a:off x="12344400" y="274320"/>
+            <a:ext cx="1097280" cy="1080473"/>
+          </a:xfrm>
+          <a:prstGeom prst="rect">
+            <a:avLst/>
+          </a:prstGeom>
+        </p:spPr>
+      </p:pic>
+      <p:sp>
+        <p:nvSpPr>
+          <p:cNvPr id="5" name="Rectangle 4"/>
+          <p:cNvSpPr/>
+          <p:nvPr/>
+        </p:nvSpPr>
+        <p:spPr>
+          <a:xfrm>
+            <a:off x="0" y="7772400"/>
+            <a:ext cx="14630400" cy="457200"/>
+          </a:xfrm>
+          <a:prstGeom prst="rect">
+            <a:avLst/>
+          </a:prstGeom>
+          <a:solidFill>
+            <a:srgbClr val="640064"/>
+          </a:solidFill>
+          <a:ln>
+            <a:noFill/>
+          </a:ln>
+        </p:spPr>
+        <p:style>
+          <a:lnRef idx="1">
+            <a:schemeClr val="accent1"/>
+          </a:lnRef>
+          <a:fillRef idx="3">
+            <a:schemeClr val="accent1"/>
+          </a:fillRef>
+          <a:effectRef idx="2">
+            <a:schemeClr val="accent1"/>
+          </a:effectRef>
+          <a:fontRef idx="minor">
+            <a:schemeClr val="lt1"/>
+          </a:fontRef>
+        </p:style>
+        <p:txBody>
+          <a:bodyPr rtlCol="0" anchor="ctr"/>
+          <a:lstStyle/>
+          <a:p>
+            <a:pPr algn="ctr"/>
+            <a:endParaRPr>
+              <a:solidFill>
+                <a:schemeClr val="tx1"/>
+              </a:solidFill>
+            </a:endParaRPr>
+          </a:p>
+        </p:txBody>
+      </p:sp>
+      <p:sp>
+        <p:nvSpPr>
+          <p:cNvPr id="7" name="TextBox 6">
+            <a:extLst>
+              <a:ext uri="{FF2B5EF4-FFF2-40B4-BE49-F238E27FC236}">
+                <a16:creationId xmlns:a16="http://schemas.microsoft.com/office/drawing/2014/main" id="{EA77F26D-0F9B-DFF5-2FB4-9E508F48AFC7}"/>
+              </a:ext>
+            </a:extLst>
+          </p:cNvPr>
+          <p:cNvSpPr txBox="1"/>
+          <p:nvPr/>
+        </p:nvSpPr>
+        <p:spPr>
+          <a:xfrm>
+            <a:off x="705492" y="330403"/>
+            <a:ext cx="5944690" cy="769441"/>
+          </a:xfrm>
+          <a:prstGeom prst="rect">
+            <a:avLst/>
+          </a:prstGeom>
+          <a:noFill/>
+        </p:spPr>
+        <p:txBody>
+          <a:bodyPr wrap="square">
+            <a:spAutoFit/>
+          </a:bodyPr>
+          <a:lstStyle/>
+          <a:p>
+            <a:r>
+              <a:rPr lang="ru-RU" sz="4400" dirty="0"/>
+              <a:t>Всё в одной строке</a:t>
+            </a:r>
+            <a:endParaRPr lang="ru-RU" sz="4400" b="1" dirty="0"/>
+          </a:p>
+        </p:txBody>
+      </p:sp>
+      <p:sp>
+        <p:nvSpPr>
+          <p:cNvPr id="8" name="TextBox 7">
+            <a:extLst>
+              <a:ext uri="{FF2B5EF4-FFF2-40B4-BE49-F238E27FC236}">
+                <a16:creationId xmlns:a16="http://schemas.microsoft.com/office/drawing/2014/main" id="{8BCB2A4C-0964-68F5-75E3-8DFAC52581C6}"/>
+              </a:ext>
+            </a:extLst>
+          </p:cNvPr>
+          <p:cNvSpPr txBox="1"/>
+          <p:nvPr/>
+        </p:nvSpPr>
+        <p:spPr>
+          <a:xfrm>
+            <a:off x="588442" y="1573752"/>
+            <a:ext cx="12853238" cy="1384995"/>
+          </a:xfrm>
+          <a:prstGeom prst="rect">
+            <a:avLst/>
+          </a:prstGeom>
+          <a:noFill/>
+        </p:spPr>
+        <p:txBody>
+          <a:bodyPr wrap="square">
+            <a:spAutoFit/>
+          </a:bodyPr>
+          <a:lstStyle/>
+          <a:p>
+            <a:r>
+              <a:rPr lang="de-DE" sz="2800" dirty="0" err="1"/>
+              <a:t>gradient</a:t>
+            </a:r>
+            <a:r>
+              <a:rPr lang="de-DE" sz="2800" dirty="0"/>
+              <a:t> = (</a:t>
+            </a:r>
+            <a:r>
+              <a:rPr lang="de-DE" sz="2800" dirty="0" err="1"/>
+              <a:t>pred</a:t>
+            </a:r>
+            <a:r>
+              <a:rPr lang="de-DE" sz="2800" dirty="0"/>
+              <a:t> - </a:t>
+            </a:r>
+            <a:r>
+              <a:rPr lang="de-DE" sz="2800" dirty="0" err="1"/>
+              <a:t>goal</a:t>
+            </a:r>
+            <a:r>
+              <a:rPr lang="de-DE" sz="2800" dirty="0"/>
+              <a:t>) * </a:t>
+            </a:r>
+            <a:r>
+              <a:rPr lang="de-DE" sz="2800" dirty="0" err="1"/>
+              <a:t>input</a:t>
+            </a:r>
+            <a:endParaRPr lang="ru-RU" sz="2800" dirty="0"/>
+          </a:p>
+          <a:p>
+            <a:endParaRPr lang="ru-RU" sz="2800" dirty="0"/>
+          </a:p>
+          <a:p>
+            <a:endParaRPr lang="ru-RU" sz="2800" dirty="0"/>
+          </a:p>
+        </p:txBody>
+      </p:sp>
+      <p:graphicFrame>
+        <p:nvGraphicFramePr>
+          <p:cNvPr id="2" name="Таблица 1">
+            <a:extLst>
+              <a:ext uri="{FF2B5EF4-FFF2-40B4-BE49-F238E27FC236}">
+                <a16:creationId xmlns:a16="http://schemas.microsoft.com/office/drawing/2014/main" id="{85EB9F25-9073-EC58-E2F8-73DB10012881}"/>
+              </a:ext>
+            </a:extLst>
+          </p:cNvPr>
+          <p:cNvGraphicFramePr>
+            <a:graphicFrameLocks noGrp="1"/>
+          </p:cNvGraphicFramePr>
+          <p:nvPr>
+            <p:extLst>
+              <p:ext uri="{D42A27DB-BD31-4B8C-83A1-F6EECF244321}">
+                <p14:modId xmlns:p14="http://schemas.microsoft.com/office/powerpoint/2010/main" val="1945441366"/>
+              </p:ext>
+            </p:extLst>
+          </p:nvPr>
+        </p:nvGraphicFramePr>
+        <p:xfrm>
+          <a:off x="2900261" y="3199654"/>
+          <a:ext cx="8229600" cy="2011680"/>
+        </p:xfrm>
+        <a:graphic>
+          <a:graphicData uri="http://schemas.openxmlformats.org/drawingml/2006/table">
+            <a:tbl>
+              <a:tblPr/>
+              <a:tblGrid>
+                <a:gridCol w="4114800">
+                  <a:extLst>
+                    <a:ext uri="{9D8B030D-6E8A-4147-A177-3AD203B41FA5}">
+                      <a16:colId xmlns:a16="http://schemas.microsoft.com/office/drawing/2014/main" val="3204630794"/>
+                    </a:ext>
+                  </a:extLst>
+                </a:gridCol>
+                <a:gridCol w="4114800">
+                  <a:extLst>
+                    <a:ext uri="{9D8B030D-6E8A-4147-A177-3AD203B41FA5}">
+                      <a16:colId xmlns:a16="http://schemas.microsoft.com/office/drawing/2014/main" val="712279895"/>
+                    </a:ext>
+                  </a:extLst>
+                </a:gridCol>
+              </a:tblGrid>
+              <a:tr h="0">
+                <a:tc>
+                  <a:txBody>
+                    <a:bodyPr/>
+                    <a:lstStyle/>
+                    <a:p>
+                      <a:pPr algn="ctr"/>
+                      <a:r>
+                        <a:rPr lang="ru-RU" dirty="0"/>
+                        <a:t>Часть</a:t>
+                      </a:r>
+                    </a:p>
+                  </a:txBody>
+                  <a:tcPr anchor="ctr">
+                    <a:lnL w="12700" cap="flat" cmpd="sng" algn="ctr">
+                      <a:solidFill>
+                        <a:schemeClr val="tx1"/>
+                      </a:solidFill>
+                      <a:prstDash val="solid"/>
+                      <a:round/>
+                      <a:headEnd type="none" w="med" len="med"/>
+                      <a:tailEnd type="none" w="med" len="med"/>
+                    </a:lnL>
+                    <a:lnR w="12700" cap="flat" cmpd="sng" algn="ctr">
+                      <a:solidFill>
+                        <a:schemeClr val="tx1"/>
+                      </a:solidFill>
+                      <a:prstDash val="solid"/>
+                      <a:round/>
+                      <a:headEnd type="none" w="med" len="med"/>
+                      <a:tailEnd type="none" w="med" len="med"/>
+                    </a:lnR>
+                    <a:lnT w="12700" cap="flat" cmpd="sng" algn="ctr">
+                      <a:solidFill>
+                        <a:schemeClr val="tx1"/>
+                      </a:solidFill>
+                      <a:prstDash val="solid"/>
+                      <a:round/>
+                      <a:headEnd type="none" w="med" len="med"/>
+                      <a:tailEnd type="none" w="med" len="med"/>
+                    </a:lnT>
+                    <a:lnB w="12700" cap="flat" cmpd="sng" algn="ctr">
+                      <a:solidFill>
+                        <a:schemeClr val="tx1"/>
+                      </a:solidFill>
+                      <a:prstDash val="solid"/>
+                      <a:round/>
+                      <a:headEnd type="none" w="med" len="med"/>
+                      <a:tailEnd type="none" w="med" len="med"/>
+                    </a:lnB>
+                    <a:noFill/>
+                  </a:tcPr>
+                </a:tc>
+                <a:tc>
+                  <a:txBody>
+                    <a:bodyPr/>
+                    <a:lstStyle/>
+                    <a:p>
+                      <a:pPr algn="ctr"/>
+                      <a:r>
+                        <a:rPr lang="ru-RU" dirty="0"/>
+                        <a:t>что делает</a:t>
+                      </a:r>
+                    </a:p>
+                  </a:txBody>
+                  <a:tcPr anchor="ctr">
+                    <a:lnL w="12700" cap="flat" cmpd="sng" algn="ctr">
+                      <a:solidFill>
+                        <a:schemeClr val="tx1"/>
+                      </a:solidFill>
+                      <a:prstDash val="solid"/>
+                      <a:round/>
+                      <a:headEnd type="none" w="med" len="med"/>
+                      <a:tailEnd type="none" w="med" len="med"/>
+                    </a:lnL>
+                    <a:lnR w="12700" cap="flat" cmpd="sng" algn="ctr">
+                      <a:solidFill>
+                        <a:schemeClr val="tx1"/>
+                      </a:solidFill>
+                      <a:prstDash val="solid"/>
+                      <a:round/>
+                      <a:headEnd type="none" w="med" len="med"/>
+                      <a:tailEnd type="none" w="med" len="med"/>
+                    </a:lnR>
+                    <a:lnT w="12700" cap="flat" cmpd="sng" algn="ctr">
+                      <a:solidFill>
+                        <a:schemeClr val="tx1"/>
+                      </a:solidFill>
+                      <a:prstDash val="solid"/>
+                      <a:round/>
+                      <a:headEnd type="none" w="med" len="med"/>
+                      <a:tailEnd type="none" w="med" len="med"/>
+                    </a:lnT>
+                    <a:lnB w="12700" cap="flat" cmpd="sng" algn="ctr">
+                      <a:solidFill>
+                        <a:schemeClr val="tx1"/>
+                      </a:solidFill>
+                      <a:prstDash val="solid"/>
+                      <a:round/>
+                      <a:headEnd type="none" w="med" len="med"/>
+                      <a:tailEnd type="none" w="med" len="med"/>
+                    </a:lnB>
+                    <a:noFill/>
+                  </a:tcPr>
+                </a:tc>
+                <a:extLst>
+                  <a:ext uri="{0D108BD9-81ED-4DB2-BD59-A6C34878D82A}">
+                    <a16:rowId xmlns:a16="http://schemas.microsoft.com/office/drawing/2014/main" val="1226391955"/>
+                  </a:ext>
+                </a:extLst>
+              </a:tr>
+              <a:tr h="0">
+                <a:tc>
+                  <a:txBody>
+                    <a:bodyPr/>
+                    <a:lstStyle/>
+                    <a:p>
+                      <a:r>
+                        <a:rPr lang="de-DE"/>
+                        <a:t>(pred - goal)</a:t>
+                      </a:r>
+                    </a:p>
+                  </a:txBody>
+                  <a:tcPr anchor="ctr">
+                    <a:lnL w="12700" cap="flat" cmpd="sng" algn="ctr">
+                      <a:solidFill>
+                        <a:schemeClr val="tx1"/>
+                      </a:solidFill>
+                      <a:prstDash val="solid"/>
+                      <a:round/>
+                      <a:headEnd type="none" w="med" len="med"/>
+                      <a:tailEnd type="none" w="med" len="med"/>
+                    </a:lnL>
+                    <a:lnR w="12700" cap="flat" cmpd="sng" algn="ctr">
+                      <a:solidFill>
+                        <a:schemeClr val="tx1"/>
+                      </a:solidFill>
+                      <a:prstDash val="solid"/>
+                      <a:round/>
+                      <a:headEnd type="none" w="med" len="med"/>
+                      <a:tailEnd type="none" w="med" len="med"/>
+                    </a:lnR>
+                    <a:lnT w="12700" cap="flat" cmpd="sng" algn="ctr">
+                      <a:solidFill>
+                        <a:schemeClr val="tx1"/>
+                      </a:solidFill>
+                      <a:prstDash val="solid"/>
+                      <a:round/>
+                      <a:headEnd type="none" w="med" len="med"/>
+                      <a:tailEnd type="none" w="med" len="med"/>
+                    </a:lnT>
+                    <a:lnB w="12700" cap="flat" cmpd="sng" algn="ctr">
+                      <a:solidFill>
+                        <a:schemeClr val="tx1"/>
+                      </a:solidFill>
+                      <a:prstDash val="solid"/>
+                      <a:round/>
+                      <a:headEnd type="none" w="med" len="med"/>
+                      <a:tailEnd type="none" w="med" len="med"/>
+                    </a:lnB>
+                    <a:noFill/>
+                  </a:tcPr>
+                </a:tc>
+                <a:tc>
+                  <a:txBody>
+                    <a:bodyPr/>
+                    <a:lstStyle/>
+                    <a:p>
+                      <a:r>
+                        <a:rPr lang="ru-RU" dirty="0"/>
+                        <a:t>выбирает направление (обращение знака)</a:t>
+                      </a:r>
+                    </a:p>
+                  </a:txBody>
+                  <a:tcPr anchor="ctr">
+                    <a:lnL w="12700" cap="flat" cmpd="sng" algn="ctr">
+                      <a:solidFill>
+                        <a:schemeClr val="tx1"/>
+                      </a:solidFill>
+                      <a:prstDash val="solid"/>
+                      <a:round/>
+                      <a:headEnd type="none" w="med" len="med"/>
+                      <a:tailEnd type="none" w="med" len="med"/>
+                    </a:lnL>
+                    <a:lnR w="12700" cap="flat" cmpd="sng" algn="ctr">
+                      <a:solidFill>
+                        <a:schemeClr val="tx1"/>
+                      </a:solidFill>
+                      <a:prstDash val="solid"/>
+                      <a:round/>
+                      <a:headEnd type="none" w="med" len="med"/>
+                      <a:tailEnd type="none" w="med" len="med"/>
+                    </a:lnR>
+                    <a:lnT w="12700" cap="flat" cmpd="sng" algn="ctr">
+                      <a:solidFill>
+                        <a:schemeClr val="tx1"/>
+                      </a:solidFill>
+                      <a:prstDash val="solid"/>
+                      <a:round/>
+                      <a:headEnd type="none" w="med" len="med"/>
+                      <a:tailEnd type="none" w="med" len="med"/>
+                    </a:lnT>
+                    <a:lnB w="12700" cap="flat" cmpd="sng" algn="ctr">
+                      <a:solidFill>
+                        <a:schemeClr val="tx1"/>
+                      </a:solidFill>
+                      <a:prstDash val="solid"/>
+                      <a:round/>
+                      <a:headEnd type="none" w="med" len="med"/>
+                      <a:tailEnd type="none" w="med" len="med"/>
+                    </a:lnB>
+                    <a:noFill/>
+                  </a:tcPr>
+                </a:tc>
+                <a:extLst>
+                  <a:ext uri="{0D108BD9-81ED-4DB2-BD59-A6C34878D82A}">
+                    <a16:rowId xmlns:a16="http://schemas.microsoft.com/office/drawing/2014/main" val="3649852919"/>
+                  </a:ext>
+                </a:extLst>
+              </a:tr>
+              <a:tr h="0">
+                <a:tc>
+                  <a:txBody>
+                    <a:bodyPr/>
+                    <a:lstStyle/>
+                    <a:p>
+                      <a:r>
+                        <a:rPr lang="de-DE"/>
+                        <a:t>input</a:t>
+                      </a:r>
+                    </a:p>
+                  </a:txBody>
+                  <a:tcPr anchor="ctr">
+                    <a:lnL w="12700" cap="flat" cmpd="sng" algn="ctr">
+                      <a:solidFill>
+                        <a:schemeClr val="tx1"/>
+                      </a:solidFill>
+                      <a:prstDash val="solid"/>
+                      <a:round/>
+                      <a:headEnd type="none" w="med" len="med"/>
+                      <a:tailEnd type="none" w="med" len="med"/>
+                    </a:lnL>
+                    <a:lnR w="12700" cap="flat" cmpd="sng" algn="ctr">
+                      <a:solidFill>
+                        <a:schemeClr val="tx1"/>
+                      </a:solidFill>
+                      <a:prstDash val="solid"/>
+                      <a:round/>
+                      <a:headEnd type="none" w="med" len="med"/>
+                      <a:tailEnd type="none" w="med" len="med"/>
+                    </a:lnR>
+                    <a:lnT w="12700" cap="flat" cmpd="sng" algn="ctr">
+                      <a:solidFill>
+                        <a:schemeClr val="tx1"/>
+                      </a:solidFill>
+                      <a:prstDash val="solid"/>
+                      <a:round/>
+                      <a:headEnd type="none" w="med" len="med"/>
+                      <a:tailEnd type="none" w="med" len="med"/>
+                    </a:lnT>
+                    <a:lnB w="12700" cap="flat" cmpd="sng" algn="ctr">
+                      <a:solidFill>
+                        <a:schemeClr val="tx1"/>
+                      </a:solidFill>
+                      <a:prstDash val="solid"/>
+                      <a:round/>
+                      <a:headEnd type="none" w="med" len="med"/>
+                      <a:tailEnd type="none" w="med" len="med"/>
+                    </a:lnB>
+                    <a:noFill/>
+                  </a:tcPr>
+                </a:tc>
+                <a:tc>
+                  <a:txBody>
+                    <a:bodyPr/>
+                    <a:lstStyle/>
+                    <a:p>
+                      <a:r>
+                        <a:rPr lang="ru-RU"/>
+                        <a:t>определяет размер шага (масштабирование)</a:t>
+                      </a:r>
+                    </a:p>
+                  </a:txBody>
+                  <a:tcPr anchor="ctr">
+                    <a:lnL w="12700" cap="flat" cmpd="sng" algn="ctr">
+                      <a:solidFill>
+                        <a:schemeClr val="tx1"/>
+                      </a:solidFill>
+                      <a:prstDash val="solid"/>
+                      <a:round/>
+                      <a:headEnd type="none" w="med" len="med"/>
+                      <a:tailEnd type="none" w="med" len="med"/>
+                    </a:lnL>
+                    <a:lnR w="12700" cap="flat" cmpd="sng" algn="ctr">
+                      <a:solidFill>
+                        <a:schemeClr val="tx1"/>
+                      </a:solidFill>
+                      <a:prstDash val="solid"/>
+                      <a:round/>
+                      <a:headEnd type="none" w="med" len="med"/>
+                      <a:tailEnd type="none" w="med" len="med"/>
+                    </a:lnR>
+                    <a:lnT w="12700" cap="flat" cmpd="sng" algn="ctr">
+                      <a:solidFill>
+                        <a:schemeClr val="tx1"/>
+                      </a:solidFill>
+                      <a:prstDash val="solid"/>
+                      <a:round/>
+                      <a:headEnd type="none" w="med" len="med"/>
+                      <a:tailEnd type="none" w="med" len="med"/>
+                    </a:lnT>
+                    <a:lnB w="12700" cap="flat" cmpd="sng" algn="ctr">
+                      <a:solidFill>
+                        <a:schemeClr val="tx1"/>
+                      </a:solidFill>
+                      <a:prstDash val="solid"/>
+                      <a:round/>
+                      <a:headEnd type="none" w="med" len="med"/>
+                      <a:tailEnd type="none" w="med" len="med"/>
+                    </a:lnB>
+                    <a:noFill/>
+                  </a:tcPr>
+                </a:tc>
+                <a:extLst>
+                  <a:ext uri="{0D108BD9-81ED-4DB2-BD59-A6C34878D82A}">
+                    <a16:rowId xmlns:a16="http://schemas.microsoft.com/office/drawing/2014/main" val="3914615735"/>
+                  </a:ext>
+                </a:extLst>
+              </a:tr>
+              <a:tr h="0">
+                <a:tc>
+                  <a:txBody>
+                    <a:bodyPr/>
+                    <a:lstStyle/>
+                    <a:p>
+                      <a:r>
+                        <a:rPr lang="de-DE"/>
+                        <a:t>pred = goal</a:t>
+                      </a:r>
+                    </a:p>
+                  </a:txBody>
+                  <a:tcPr anchor="ctr">
+                    <a:lnL w="12700" cap="flat" cmpd="sng" algn="ctr">
+                      <a:solidFill>
+                        <a:schemeClr val="tx1"/>
+                      </a:solidFill>
+                      <a:prstDash val="solid"/>
+                      <a:round/>
+                      <a:headEnd type="none" w="med" len="med"/>
+                      <a:tailEnd type="none" w="med" len="med"/>
+                    </a:lnL>
+                    <a:lnR w="12700" cap="flat" cmpd="sng" algn="ctr">
+                      <a:solidFill>
+                        <a:schemeClr val="tx1"/>
+                      </a:solidFill>
+                      <a:prstDash val="solid"/>
+                      <a:round/>
+                      <a:headEnd type="none" w="med" len="med"/>
+                      <a:tailEnd type="none" w="med" len="med"/>
+                    </a:lnR>
+                    <a:lnT w="12700" cap="flat" cmpd="sng" algn="ctr">
+                      <a:solidFill>
+                        <a:schemeClr val="tx1"/>
+                      </a:solidFill>
+                      <a:prstDash val="solid"/>
+                      <a:round/>
+                      <a:headEnd type="none" w="med" len="med"/>
+                      <a:tailEnd type="none" w="med" len="med"/>
+                    </a:lnT>
+                    <a:lnB w="12700" cap="flat" cmpd="sng" algn="ctr">
+                      <a:solidFill>
+                        <a:schemeClr val="tx1"/>
+                      </a:solidFill>
+                      <a:prstDash val="solid"/>
+                      <a:round/>
+                      <a:headEnd type="none" w="med" len="med"/>
+                      <a:tailEnd type="none" w="med" len="med"/>
+                    </a:lnB>
+                    <a:noFill/>
+                  </a:tcPr>
+                </a:tc>
+                <a:tc>
+                  <a:txBody>
+                    <a:bodyPr/>
+                    <a:lstStyle/>
+                    <a:p>
+                      <a:r>
+                        <a:rPr lang="ru-RU" dirty="0"/>
+                        <a:t>обучение останавливается</a:t>
+                      </a:r>
+                    </a:p>
+                  </a:txBody>
+                  <a:tcPr anchor="ctr">
+                    <a:lnL w="12700" cap="flat" cmpd="sng" algn="ctr">
+                      <a:solidFill>
+                        <a:schemeClr val="tx1"/>
+                      </a:solidFill>
+                      <a:prstDash val="solid"/>
+                      <a:round/>
+                      <a:headEnd type="none" w="med" len="med"/>
+                      <a:tailEnd type="none" w="med" len="med"/>
+                    </a:lnL>
+                    <a:lnR w="12700" cap="flat" cmpd="sng" algn="ctr">
+                      <a:solidFill>
+                        <a:schemeClr val="tx1"/>
+                      </a:solidFill>
+                      <a:prstDash val="solid"/>
+                      <a:round/>
+                      <a:headEnd type="none" w="med" len="med"/>
+                      <a:tailEnd type="none" w="med" len="med"/>
+                    </a:lnR>
+                    <a:lnT w="12700" cap="flat" cmpd="sng" algn="ctr">
+                      <a:solidFill>
+                        <a:schemeClr val="tx1"/>
+                      </a:solidFill>
+                      <a:prstDash val="solid"/>
+                      <a:round/>
+                      <a:headEnd type="none" w="med" len="med"/>
+                      <a:tailEnd type="none" w="med" len="med"/>
+                    </a:lnT>
+                    <a:lnB w="12700" cap="flat" cmpd="sng" algn="ctr">
+                      <a:solidFill>
+                        <a:schemeClr val="tx1"/>
+                      </a:solidFill>
+                      <a:prstDash val="solid"/>
+                      <a:round/>
+                      <a:headEnd type="none" w="med" len="med"/>
+                      <a:tailEnd type="none" w="med" len="med"/>
+                    </a:lnB>
+                    <a:noFill/>
+                  </a:tcPr>
+                </a:tc>
+                <a:extLst>
+                  <a:ext uri="{0D108BD9-81ED-4DB2-BD59-A6C34878D82A}">
+                    <a16:rowId xmlns:a16="http://schemas.microsoft.com/office/drawing/2014/main" val="539277307"/>
+                  </a:ext>
+                </a:extLst>
+              </a:tr>
+            </a:tbl>
+          </a:graphicData>
+        </a:graphic>
+      </p:graphicFrame>
+      <p:sp>
+        <p:nvSpPr>
+          <p:cNvPr id="3" name="Rectangle 1">
+            <a:extLst>
+              <a:ext uri="{FF2B5EF4-FFF2-40B4-BE49-F238E27FC236}">
+                <a16:creationId xmlns:a16="http://schemas.microsoft.com/office/drawing/2014/main" id="{58A5F25A-55C4-BCA7-7199-BBFE016FAA06}"/>
+              </a:ext>
+            </a:extLst>
+          </p:cNvPr>
+          <p:cNvSpPr>
+            <a:spLocks noChangeArrowheads="1"/>
+          </p:cNvSpPr>
+          <p:nvPr/>
+        </p:nvSpPr>
+        <p:spPr bwMode="auto">
+          <a:xfrm>
+            <a:off x="593227" y="2116604"/>
+            <a:ext cx="6056955" cy="646331"/>
+          </a:xfrm>
+          <a:prstGeom prst="rect">
+            <a:avLst/>
+          </a:prstGeom>
+          <a:noFill/>
+          <a:ln>
+            <a:noFill/>
+          </a:ln>
+          <a:effectLst/>
+          <a:extLst>
+            <a:ext uri="{909E8E84-426E-40DD-AFC4-6F175D3DCCD1}">
+              <a14:hiddenFill xmlns:a14="http://schemas.microsoft.com/office/drawing/2010/main">
+                <a:solidFill>
+                  <a:schemeClr val="accent1"/>
+                </a:solidFill>
+              </a14:hiddenFill>
+            </a:ext>
+            <a:ext uri="{91240B29-F687-4F45-9708-019B960494DF}">
+              <a14:hiddenLine xmlns:a14="http://schemas.microsoft.com/office/drawing/2010/main" w="9525">
+                <a:solidFill>
+                  <a:schemeClr val="tx1"/>
+                </a:solidFill>
+                <a:miter lim="800000"/>
+                <a:headEnd/>
+                <a:tailEnd/>
+              </a14:hiddenLine>
+            </a:ext>
+            <a:ext uri="{AF507438-7753-43E0-B8FC-AC1667EBCBE1}">
+              <a14:hiddenEffects xmlns:a14="http://schemas.microsoft.com/office/drawing/2010/main">
+                <a:effectLst>
+                  <a:outerShdw dist="35921" dir="2700000" algn="ctr" rotWithShape="0">
+                    <a:schemeClr val="bg2"/>
+                  </a:outerShdw>
+                </a:effectLst>
+              </a14:hiddenEffects>
+            </a:ext>
+          </a:extLst>
+        </p:spPr>
+        <p:txBody>
+          <a:bodyPr vert="horz" wrap="square" lIns="91440" tIns="45720" rIns="91440" bIns="45720" numCol="1" anchor="ctr" anchorCtr="0" compatLnSpc="1">
+            <a:prstTxWarp prst="textNoShape">
+              <a:avLst/>
+            </a:prstTxWarp>
+            <a:spAutoFit/>
+          </a:bodyPr>
+          <a:lstStyle/>
+          <a:p>
+            <a:pPr marL="0" marR="0" lvl="0" indent="0" algn="l" defTabSz="914400" rtl="0" eaLnBrk="0" fontAlgn="base" latinLnBrk="0" hangingPunct="0">
+              <a:lnSpc>
+                <a:spcPct val="100000"/>
+              </a:lnSpc>
+              <a:spcBef>
+                <a:spcPct val="0"/>
+              </a:spcBef>
+              <a:spcAft>
+                <a:spcPct val="0"/>
+              </a:spcAft>
+              <a:buClrTx/>
+              <a:buSzTx/>
+              <a:buFontTx/>
+              <a:buNone/>
+              <a:tabLst/>
+            </a:pPr>
+            <a:r>
+              <a:rPr kumimoji="0" lang="ru-RU" altLang="ru-RU" sz="1800" b="0" i="0" u="none" strike="noStrike" cap="none" normalizeH="0" baseline="0" dirty="0">
+                <a:ln>
+                  <a:noFill/>
+                </a:ln>
+                <a:solidFill>
+                  <a:schemeClr val="tx1"/>
+                </a:solidFill>
+                <a:effectLst/>
+                <a:latin typeface="Arial" panose="020B0604020202020204" pitchFamily="34" charset="0"/>
+              </a:rPr>
+              <a:t>делает сразу три вещи:</a:t>
+            </a:r>
+          </a:p>
+          <a:p>
+            <a:pPr marL="0" marR="0" lvl="0" indent="0" algn="l" defTabSz="914400" rtl="0" eaLnBrk="0" fontAlgn="base" latinLnBrk="0" hangingPunct="0">
+              <a:lnSpc>
+                <a:spcPct val="100000"/>
+              </a:lnSpc>
+              <a:spcBef>
+                <a:spcPct val="0"/>
+              </a:spcBef>
+              <a:spcAft>
+                <a:spcPct val="0"/>
+              </a:spcAft>
+              <a:buClrTx/>
+              <a:buSzTx/>
+              <a:buFontTx/>
+              <a:buNone/>
+              <a:tabLst/>
+            </a:pPr>
+            <a:endParaRPr kumimoji="0" lang="ru-RU" altLang="ru-RU" sz="1800" b="0" i="0" u="none" strike="noStrike" cap="none" normalizeH="0" baseline="0" dirty="0">
+              <a:ln>
+                <a:noFill/>
+              </a:ln>
+              <a:solidFill>
+                <a:schemeClr val="tx1"/>
+              </a:solidFill>
+              <a:effectLst/>
+              <a:latin typeface="Arial" panose="020B0604020202020204" pitchFamily="34" charset="0"/>
+            </a:endParaRPr>
+          </a:p>
+        </p:txBody>
+      </p:sp>
+    </p:spTree>
+    <p:extLst>
+      <p:ext uri="{BB962C8B-B14F-4D97-AF65-F5344CB8AC3E}">
+        <p14:creationId xmlns:p14="http://schemas.microsoft.com/office/powerpoint/2010/main" val="333656402"/>
+      </p:ext>
+    </p:extLst>
+  </p:cSld>
+  <p:clrMapOvr>
+    <a:masterClrMapping/>
+  </p:clrMapOvr>
+</p:sld>
+</file>
+
 <file path=ppt/slides/slide4.xml><?xml version="1.0" encoding="utf-8"?>
 <p:sld xmlns:a="http://schemas.openxmlformats.org/drawingml/2006/main" xmlns:r="http://schemas.openxmlformats.org/officeDocument/2006/relationships" xmlns:p="http://schemas.openxmlformats.org/presentationml/2006/main">
   <p:cSld>

--- a/1. ML first 28.pptx
+++ b/1. ML first 28.pptx
@@ -43,6 +43,12 @@
     <p:sldId id="336" r:id="rId37"/>
     <p:sldId id="337" r:id="rId38"/>
     <p:sldId id="338" r:id="rId39"/>
+    <p:sldId id="339" r:id="rId40"/>
+    <p:sldId id="340" r:id="rId41"/>
+    <p:sldId id="341" r:id="rId42"/>
+    <p:sldId id="342" r:id="rId43"/>
+    <p:sldId id="343" r:id="rId44"/>
+    <p:sldId id="344" r:id="rId45"/>
   </p:sldIdLst>
   <p:sldSz cx="14630400" cy="8229600"/>
   <p:notesSz cx="6858000" cy="9144000"/>
@@ -339,7 +345,7 @@
           <a:p>
             <a:fld id="{5BCAD085-E8A6-8845-BD4E-CB4CCA059FC4}" type="datetimeFigureOut">
               <a:rPr lang="en-US" smtClean="0"/>
-              <a:t>3/21/2026</a:t>
+              <a:t>3/28/2026</a:t>
             </a:fld>
             <a:endParaRPr lang="en-US"/>
           </a:p>
@@ -507,7 +513,7 @@
           <a:p>
             <a:fld id="{5BCAD085-E8A6-8845-BD4E-CB4CCA059FC4}" type="datetimeFigureOut">
               <a:rPr lang="en-US" smtClean="0"/>
-              <a:t>3/21/2026</a:t>
+              <a:t>3/28/2026</a:t>
             </a:fld>
             <a:endParaRPr lang="en-US"/>
           </a:p>
@@ -685,7 +691,7 @@
           <a:p>
             <a:fld id="{5BCAD085-E8A6-8845-BD4E-CB4CCA059FC4}" type="datetimeFigureOut">
               <a:rPr lang="en-US" smtClean="0"/>
-              <a:t>3/21/2026</a:t>
+              <a:t>3/28/2026</a:t>
             </a:fld>
             <a:endParaRPr lang="en-US"/>
           </a:p>
@@ -853,7 +859,7 @@
           <a:p>
             <a:fld id="{5BCAD085-E8A6-8845-BD4E-CB4CCA059FC4}" type="datetimeFigureOut">
               <a:rPr lang="en-US" smtClean="0"/>
-              <a:t>3/21/2026</a:t>
+              <a:t>3/28/2026</a:t>
             </a:fld>
             <a:endParaRPr lang="en-US"/>
           </a:p>
@@ -1098,7 +1104,7 @@
           <a:p>
             <a:fld id="{5BCAD085-E8A6-8845-BD4E-CB4CCA059FC4}" type="datetimeFigureOut">
               <a:rPr lang="en-US" smtClean="0"/>
-              <a:t>3/21/2026</a:t>
+              <a:t>3/28/2026</a:t>
             </a:fld>
             <a:endParaRPr lang="en-US"/>
           </a:p>
@@ -1383,7 +1389,7 @@
           <a:p>
             <a:fld id="{5BCAD085-E8A6-8845-BD4E-CB4CCA059FC4}" type="datetimeFigureOut">
               <a:rPr lang="en-US" smtClean="0"/>
-              <a:t>3/21/2026</a:t>
+              <a:t>3/28/2026</a:t>
             </a:fld>
             <a:endParaRPr lang="en-US"/>
           </a:p>
@@ -1802,7 +1808,7 @@
           <a:p>
             <a:fld id="{5BCAD085-E8A6-8845-BD4E-CB4CCA059FC4}" type="datetimeFigureOut">
               <a:rPr lang="en-US" smtClean="0"/>
-              <a:t>3/21/2026</a:t>
+              <a:t>3/28/2026</a:t>
             </a:fld>
             <a:endParaRPr lang="en-US"/>
           </a:p>
@@ -1919,7 +1925,7 @@
           <a:p>
             <a:fld id="{5BCAD085-E8A6-8845-BD4E-CB4CCA059FC4}" type="datetimeFigureOut">
               <a:rPr lang="en-US" smtClean="0"/>
-              <a:t>3/21/2026</a:t>
+              <a:t>3/28/2026</a:t>
             </a:fld>
             <a:endParaRPr lang="en-US"/>
           </a:p>
@@ -2014,7 +2020,7 @@
           <a:p>
             <a:fld id="{5BCAD085-E8A6-8845-BD4E-CB4CCA059FC4}" type="datetimeFigureOut">
               <a:rPr lang="en-US" smtClean="0"/>
-              <a:t>3/21/2026</a:t>
+              <a:t>3/28/2026</a:t>
             </a:fld>
             <a:endParaRPr lang="en-US"/>
           </a:p>
@@ -2289,7 +2295,7 @@
           <a:p>
             <a:fld id="{5BCAD085-E8A6-8845-BD4E-CB4CCA059FC4}" type="datetimeFigureOut">
               <a:rPr lang="en-US" smtClean="0"/>
-              <a:t>3/21/2026</a:t>
+              <a:t>3/28/2026</a:t>
             </a:fld>
             <a:endParaRPr lang="en-US"/>
           </a:p>
@@ -2541,7 +2547,7 @@
           <a:p>
             <a:fld id="{5BCAD085-E8A6-8845-BD4E-CB4CCA059FC4}" type="datetimeFigureOut">
               <a:rPr lang="en-US" smtClean="0"/>
-              <a:t>3/21/2026</a:t>
+              <a:t>3/28/2026</a:t>
             </a:fld>
             <a:endParaRPr lang="en-US"/>
           </a:p>
@@ -2752,7 +2758,7 @@
           <a:p>
             <a:fld id="{5BCAD085-E8A6-8845-BD4E-CB4CCA059FC4}" type="datetimeFigureOut">
               <a:rPr lang="en-US" smtClean="0"/>
-              <a:t>3/21/2026</a:t>
+              <a:t>3/28/2026</a:t>
             </a:fld>
             <a:endParaRPr lang="en-US"/>
           </a:p>
@@ -29252,6 +29258,349 @@
 </p:sld>
 </file>
 
+<file path=ppt/slides/slide39.xml><?xml version="1.0" encoding="utf-8"?>
+<p:sld xmlns:a="http://schemas.openxmlformats.org/drawingml/2006/main" xmlns:r="http://schemas.openxmlformats.org/officeDocument/2006/relationships" xmlns:p="http://schemas.openxmlformats.org/presentationml/2006/main">
+  <p:cSld>
+    <p:bg>
+      <p:bgPr>
+        <a:solidFill>
+          <a:srgbClr val="972996"/>
+        </a:solidFill>
+        <a:effectLst/>
+      </p:bgPr>
+    </p:bg>
+    <p:spTree>
+      <p:nvGrpSpPr>
+        <p:cNvPr id="1" name=""/>
+        <p:cNvGrpSpPr/>
+        <p:nvPr/>
+      </p:nvGrpSpPr>
+      <p:grpSpPr>
+        <a:xfrm>
+          <a:off x="0" y="0"/>
+          <a:ext cx="0" cy="0"/>
+          <a:chOff x="0" y="0"/>
+          <a:chExt cx="0" cy="0"/>
+        </a:xfrm>
+      </p:grpSpPr>
+      <p:pic>
+        <p:nvPicPr>
+          <p:cNvPr id="4" name="Picture 3" descr="logo.png"/>
+          <p:cNvPicPr>
+            <a:picLocks noChangeAspect="1"/>
+          </p:cNvPicPr>
+          <p:nvPr/>
+        </p:nvPicPr>
+        <p:blipFill>
+          <a:blip r:embed="rId2"/>
+          <a:stretch>
+            <a:fillRect/>
+          </a:stretch>
+        </p:blipFill>
+        <p:spPr>
+          <a:xfrm>
+            <a:off x="12344400" y="274320"/>
+            <a:ext cx="1097280" cy="1080473"/>
+          </a:xfrm>
+          <a:prstGeom prst="rect">
+            <a:avLst/>
+          </a:prstGeom>
+        </p:spPr>
+      </p:pic>
+      <p:sp>
+        <p:nvSpPr>
+          <p:cNvPr id="5" name="Rectangle 4"/>
+          <p:cNvSpPr/>
+          <p:nvPr/>
+        </p:nvSpPr>
+        <p:spPr>
+          <a:xfrm>
+            <a:off x="0" y="7772400"/>
+            <a:ext cx="14630400" cy="457200"/>
+          </a:xfrm>
+          <a:prstGeom prst="rect">
+            <a:avLst/>
+          </a:prstGeom>
+          <a:solidFill>
+            <a:srgbClr val="E6E6E6"/>
+          </a:solidFill>
+          <a:ln>
+            <a:noFill/>
+          </a:ln>
+        </p:spPr>
+        <p:style>
+          <a:lnRef idx="1">
+            <a:schemeClr val="accent1"/>
+          </a:lnRef>
+          <a:fillRef idx="3">
+            <a:schemeClr val="accent1"/>
+          </a:fillRef>
+          <a:effectRef idx="2">
+            <a:schemeClr val="accent1"/>
+          </a:effectRef>
+          <a:fontRef idx="minor">
+            <a:schemeClr val="lt1"/>
+          </a:fontRef>
+        </p:style>
+        <p:txBody>
+          <a:bodyPr rtlCol="0" anchor="ctr"/>
+          <a:lstStyle/>
+          <a:p>
+            <a:pPr algn="ctr"/>
+            <a:endParaRPr/>
+          </a:p>
+        </p:txBody>
+      </p:sp>
+      <p:sp>
+        <p:nvSpPr>
+          <p:cNvPr id="3" name="TextBox 2">
+            <a:extLst>
+              <a:ext uri="{FF2B5EF4-FFF2-40B4-BE49-F238E27FC236}">
+                <a16:creationId xmlns:a16="http://schemas.microsoft.com/office/drawing/2014/main" id="{C315D28A-F529-C361-6B0C-54FC6D10368B}"/>
+              </a:ext>
+            </a:extLst>
+          </p:cNvPr>
+          <p:cNvSpPr txBox="1"/>
+          <p:nvPr/>
+        </p:nvSpPr>
+        <p:spPr>
+          <a:xfrm>
+            <a:off x="625737" y="289929"/>
+            <a:ext cx="7687746" cy="769441"/>
+          </a:xfrm>
+          <a:prstGeom prst="rect">
+            <a:avLst/>
+          </a:prstGeom>
+          <a:noFill/>
+        </p:spPr>
+        <p:txBody>
+          <a:bodyPr wrap="none">
+            <a:spAutoFit/>
+          </a:bodyPr>
+          <a:lstStyle/>
+          <a:p>
+            <a:r>
+              <a:rPr lang="ru-RU" sz="4400" dirty="0">
+                <a:solidFill>
+                  <a:schemeClr val="bg1"/>
+                </a:solidFill>
+              </a:rPr>
+              <a:t>Сломанные градиентный спуск</a:t>
+            </a:r>
+            <a:endParaRPr lang="ru-RU" sz="4400" b="1" dirty="0">
+              <a:solidFill>
+                <a:schemeClr val="bg1"/>
+              </a:solidFill>
+            </a:endParaRPr>
+          </a:p>
+        </p:txBody>
+      </p:sp>
+      <p:sp>
+        <p:nvSpPr>
+          <p:cNvPr id="2" name="TextBox 1">
+            <a:extLst>
+              <a:ext uri="{FF2B5EF4-FFF2-40B4-BE49-F238E27FC236}">
+                <a16:creationId xmlns:a16="http://schemas.microsoft.com/office/drawing/2014/main" id="{2DCBC596-FBD8-97DD-BA0D-10095D714FDB}"/>
+              </a:ext>
+            </a:extLst>
+          </p:cNvPr>
+          <p:cNvSpPr txBox="1"/>
+          <p:nvPr/>
+        </p:nvSpPr>
+        <p:spPr>
+          <a:xfrm rot="1123665">
+            <a:off x="10903291" y="1093184"/>
+            <a:ext cx="3349258" cy="523220"/>
+          </a:xfrm>
+          <a:prstGeom prst="rect">
+            <a:avLst/>
+          </a:prstGeom>
+          <a:noFill/>
+        </p:spPr>
+        <p:txBody>
+          <a:bodyPr wrap="square">
+            <a:spAutoFit/>
+          </a:bodyPr>
+          <a:lstStyle/>
+          <a:p>
+            <a:r>
+              <a:rPr lang="en-US" sz="2800" b="0" dirty="0">
+                <a:solidFill>
+                  <a:srgbClr val="BBBEBF"/>
+                </a:solidFill>
+                <a:effectLst/>
+                <a:latin typeface="Consolas" panose="020B0609020204030204" pitchFamily="49" charset="0"/>
+              </a:rPr>
+              <a:t>Result too large</a:t>
+            </a:r>
+          </a:p>
+        </p:txBody>
+      </p:sp>
+      <p:sp>
+        <p:nvSpPr>
+          <p:cNvPr id="6" name="TextBox 5">
+            <a:extLst>
+              <a:ext uri="{FF2B5EF4-FFF2-40B4-BE49-F238E27FC236}">
+                <a16:creationId xmlns:a16="http://schemas.microsoft.com/office/drawing/2014/main" id="{37DEF13E-1348-A107-CAB6-C1C6A4588BF2}"/>
+              </a:ext>
+            </a:extLst>
+          </p:cNvPr>
+          <p:cNvSpPr txBox="1"/>
+          <p:nvPr/>
+        </p:nvSpPr>
+        <p:spPr>
+          <a:xfrm>
+            <a:off x="625737" y="1256632"/>
+            <a:ext cx="12853238" cy="5262979"/>
+          </a:xfrm>
+          <a:prstGeom prst="rect">
+            <a:avLst/>
+          </a:prstGeom>
+          <a:noFill/>
+        </p:spPr>
+        <p:txBody>
+          <a:bodyPr wrap="square">
+            <a:spAutoFit/>
+          </a:bodyPr>
+          <a:lstStyle/>
+          <a:p>
+            <a:pPr algn="just"/>
+            <a:r>
+              <a:rPr lang="es-ES" sz="2800" b="0" dirty="0">
+                <a:solidFill>
+                  <a:schemeClr val="bg1"/>
+                </a:solidFill>
+                <a:effectLst/>
+                <a:latin typeface="Consolas" panose="020B0609020204030204" pitchFamily="49" charset="0"/>
+              </a:rPr>
+              <a:t>Error:6.67087267987e+14 Prediction:-25828031.8</a:t>
+            </a:r>
+          </a:p>
+          <a:p>
+            <a:pPr algn="just"/>
+            <a:r>
+              <a:rPr lang="es-ES" sz="2800" b="0" dirty="0">
+                <a:solidFill>
+                  <a:schemeClr val="bg1"/>
+                </a:solidFill>
+                <a:effectLst/>
+                <a:latin typeface="Consolas" panose="020B0609020204030204" pitchFamily="49" charset="0"/>
+              </a:rPr>
+              <a:t>Error:6.00378541188e+15 Prediction:77484098.6</a:t>
+            </a:r>
+          </a:p>
+          <a:p>
+            <a:pPr algn="just"/>
+            <a:r>
+              <a:rPr lang="es-ES" sz="2800" b="0" dirty="0">
+                <a:solidFill>
+                  <a:schemeClr val="bg1"/>
+                </a:solidFill>
+                <a:effectLst/>
+                <a:latin typeface="Consolas" panose="020B0609020204030204" pitchFamily="49" charset="0"/>
+              </a:rPr>
+              <a:t>Error:5.40340687069e+16 Prediction:-232452292.6</a:t>
+            </a:r>
+            <a:endParaRPr lang="ru-RU" sz="2800" b="0" dirty="0">
+              <a:solidFill>
+                <a:schemeClr val="bg1"/>
+              </a:solidFill>
+              <a:effectLst/>
+              <a:latin typeface="Consolas" panose="020B0609020204030204" pitchFamily="49" charset="0"/>
+            </a:endParaRPr>
+          </a:p>
+          <a:p>
+            <a:pPr algn="just"/>
+            <a:endParaRPr lang="ru-RU" sz="2800" dirty="0">
+              <a:solidFill>
+                <a:schemeClr val="bg1"/>
+              </a:solidFill>
+              <a:latin typeface="Consolas" panose="020B0609020204030204" pitchFamily="49" charset="0"/>
+            </a:endParaRPr>
+          </a:p>
+          <a:p>
+            <a:pPr algn="just"/>
+            <a:endParaRPr lang="ru-RU" sz="2800" dirty="0">
+              <a:solidFill>
+                <a:schemeClr val="bg1"/>
+              </a:solidFill>
+              <a:latin typeface="Consolas" panose="020B0609020204030204" pitchFamily="49" charset="0"/>
+            </a:endParaRPr>
+          </a:p>
+          <a:p>
+            <a:pPr algn="just"/>
+            <a:r>
+              <a:rPr lang="ru-RU" sz="2800" b="0" dirty="0">
+                <a:solidFill>
+                  <a:schemeClr val="bg1"/>
+                </a:solidFill>
+                <a:effectLst/>
+                <a:latin typeface="Consolas" panose="020B0609020204030204" pitchFamily="49" charset="0"/>
+              </a:rPr>
+              <a:t>Результаты прыгают из отрицательных значений в положительные и из положительных в отрицательные, все дальше уходя от истины. Иначе говоря, происходит все более избыточная коррекция веса.</a:t>
+            </a:r>
+          </a:p>
+          <a:p>
+            <a:pPr algn="just"/>
+            <a:r>
+              <a:rPr lang="ru-RU" sz="2800" b="0" dirty="0">
+                <a:solidFill>
+                  <a:schemeClr val="bg1"/>
+                </a:solidFill>
+                <a:effectLst/>
+                <a:latin typeface="Consolas" panose="020B0609020204030204" pitchFamily="49" charset="0"/>
+              </a:rPr>
+              <a:t>Что же случилось на самом деле? Взрывное расхождение оценки ошибки вызвано увеличением входного значения. Посмотрим, как происходит изменение веса в этом случае:</a:t>
+            </a:r>
+          </a:p>
+          <a:p>
+            <a:pPr algn="ctr"/>
+            <a:r>
+              <a:rPr lang="en-US" sz="2800" b="0" dirty="0">
+                <a:solidFill>
+                  <a:schemeClr val="bg1"/>
+                </a:solidFill>
+                <a:effectLst/>
+                <a:latin typeface="Consolas" panose="020B0609020204030204" pitchFamily="49" charset="0"/>
+              </a:rPr>
+              <a:t>weight = weight - (input * (pred - </a:t>
+            </a:r>
+            <a:r>
+              <a:rPr lang="en-US" sz="2800" b="0" dirty="0" err="1">
+                <a:solidFill>
+                  <a:schemeClr val="bg1"/>
+                </a:solidFill>
+                <a:effectLst/>
+                <a:latin typeface="Consolas" panose="020B0609020204030204" pitchFamily="49" charset="0"/>
+              </a:rPr>
+              <a:t>goal_pred</a:t>
+            </a:r>
+            <a:r>
+              <a:rPr lang="en-US" sz="2800" b="0" dirty="0">
+                <a:solidFill>
+                  <a:schemeClr val="bg1"/>
+                </a:solidFill>
+                <a:effectLst/>
+                <a:latin typeface="Consolas" panose="020B0609020204030204" pitchFamily="49" charset="0"/>
+              </a:rPr>
+              <a:t>))</a:t>
+            </a:r>
+          </a:p>
+        </p:txBody>
+      </p:sp>
+    </p:spTree>
+    <p:extLst>
+      <p:ext uri="{BB962C8B-B14F-4D97-AF65-F5344CB8AC3E}">
+        <p14:creationId xmlns:p14="http://schemas.microsoft.com/office/powerpoint/2010/main" val="1169068155"/>
+      </p:ext>
+    </p:extLst>
+  </p:cSld>
+  <p:clrMapOvr>
+    <a:masterClrMapping/>
+  </p:clrMapOvr>
+</p:sld>
+</file>
+
 <file path=ppt/slides/slide4.xml><?xml version="1.0" encoding="utf-8"?>
 <p:sld xmlns:a="http://schemas.openxmlformats.org/drawingml/2006/main" xmlns:r="http://schemas.openxmlformats.org/officeDocument/2006/relationships" xmlns:p="http://schemas.openxmlformats.org/presentationml/2006/main">
   <p:cSld>
@@ -29371,6 +29720,2501 @@
     <p:extLst>
       <p:ext uri="{BB962C8B-B14F-4D97-AF65-F5344CB8AC3E}">
         <p14:creationId xmlns:p14="http://schemas.microsoft.com/office/powerpoint/2010/main" val="2993972922"/>
+      </p:ext>
+    </p:extLst>
+  </p:cSld>
+  <p:clrMapOvr>
+    <a:masterClrMapping/>
+  </p:clrMapOvr>
+</p:sld>
+</file>
+
+<file path=ppt/slides/slide40.xml><?xml version="1.0" encoding="utf-8"?>
+<p:sld xmlns:a="http://schemas.openxmlformats.org/drawingml/2006/main" xmlns:r="http://schemas.openxmlformats.org/officeDocument/2006/relationships" xmlns:p="http://schemas.openxmlformats.org/presentationml/2006/main">
+  <p:cSld>
+    <p:spTree>
+      <p:nvGrpSpPr>
+        <p:cNvPr id="1" name=""/>
+        <p:cNvGrpSpPr/>
+        <p:nvPr/>
+      </p:nvGrpSpPr>
+      <p:grpSpPr>
+        <a:xfrm>
+          <a:off x="0" y="0"/>
+          <a:ext cx="0" cy="0"/>
+          <a:chOff x="0" y="0"/>
+          <a:chExt cx="0" cy="0"/>
+        </a:xfrm>
+      </p:grpSpPr>
+      <p:pic>
+        <p:nvPicPr>
+          <p:cNvPr id="4" name="Picture 3" descr="logo.png"/>
+          <p:cNvPicPr>
+            <a:picLocks noChangeAspect="1"/>
+          </p:cNvPicPr>
+          <p:nvPr/>
+        </p:nvPicPr>
+        <p:blipFill>
+          <a:blip r:embed="rId2"/>
+          <a:stretch>
+            <a:fillRect/>
+          </a:stretch>
+        </p:blipFill>
+        <p:spPr>
+          <a:xfrm>
+            <a:off x="12344400" y="274320"/>
+            <a:ext cx="1097280" cy="1080473"/>
+          </a:xfrm>
+          <a:prstGeom prst="rect">
+            <a:avLst/>
+          </a:prstGeom>
+        </p:spPr>
+      </p:pic>
+      <p:sp>
+        <p:nvSpPr>
+          <p:cNvPr id="5" name="Rectangle 4"/>
+          <p:cNvSpPr/>
+          <p:nvPr/>
+        </p:nvSpPr>
+        <p:spPr>
+          <a:xfrm>
+            <a:off x="0" y="7772400"/>
+            <a:ext cx="14630400" cy="457200"/>
+          </a:xfrm>
+          <a:prstGeom prst="rect">
+            <a:avLst/>
+          </a:prstGeom>
+          <a:solidFill>
+            <a:srgbClr val="640064"/>
+          </a:solidFill>
+          <a:ln>
+            <a:noFill/>
+          </a:ln>
+        </p:spPr>
+        <p:style>
+          <a:lnRef idx="1">
+            <a:schemeClr val="accent1"/>
+          </a:lnRef>
+          <a:fillRef idx="3">
+            <a:schemeClr val="accent1"/>
+          </a:fillRef>
+          <a:effectRef idx="2">
+            <a:schemeClr val="accent1"/>
+          </a:effectRef>
+          <a:fontRef idx="minor">
+            <a:schemeClr val="lt1"/>
+          </a:fontRef>
+        </p:style>
+        <p:txBody>
+          <a:bodyPr rtlCol="0" anchor="ctr"/>
+          <a:lstStyle/>
+          <a:p>
+            <a:pPr algn="ctr"/>
+            <a:endParaRPr>
+              <a:solidFill>
+                <a:schemeClr val="tx1"/>
+              </a:solidFill>
+            </a:endParaRPr>
+          </a:p>
+        </p:txBody>
+      </p:sp>
+      <p:sp>
+        <p:nvSpPr>
+          <p:cNvPr id="7" name="TextBox 6">
+            <a:extLst>
+              <a:ext uri="{FF2B5EF4-FFF2-40B4-BE49-F238E27FC236}">
+                <a16:creationId xmlns:a16="http://schemas.microsoft.com/office/drawing/2014/main" id="{EA77F26D-0F9B-DFF5-2FB4-9E508F48AFC7}"/>
+              </a:ext>
+            </a:extLst>
+          </p:cNvPr>
+          <p:cNvSpPr txBox="1"/>
+          <p:nvPr/>
+        </p:nvSpPr>
+        <p:spPr>
+          <a:xfrm>
+            <a:off x="705491" y="330403"/>
+            <a:ext cx="11408419" cy="769441"/>
+          </a:xfrm>
+          <a:prstGeom prst="rect">
+            <a:avLst/>
+          </a:prstGeom>
+          <a:noFill/>
+        </p:spPr>
+        <p:txBody>
+          <a:bodyPr wrap="square">
+            <a:spAutoFit/>
+          </a:bodyPr>
+          <a:lstStyle/>
+          <a:p>
+            <a:r>
+              <a:rPr lang="ru-RU" sz="4400" dirty="0"/>
+              <a:t>Избыточная коррекция</a:t>
+            </a:r>
+            <a:endParaRPr lang="ru-RU" sz="4400" b="1" dirty="0"/>
+          </a:p>
+        </p:txBody>
+      </p:sp>
+      <p:sp>
+        <p:nvSpPr>
+          <p:cNvPr id="6" name="TextBox 5">
+            <a:extLst>
+              <a:ext uri="{FF2B5EF4-FFF2-40B4-BE49-F238E27FC236}">
+                <a16:creationId xmlns:a16="http://schemas.microsoft.com/office/drawing/2014/main" id="{905FF7EB-3CCB-A00B-4578-2EABF116CB64}"/>
+              </a:ext>
+            </a:extLst>
+          </p:cNvPr>
+          <p:cNvSpPr txBox="1"/>
+          <p:nvPr/>
+        </p:nvSpPr>
+        <p:spPr>
+          <a:xfrm>
+            <a:off x="625737" y="1256632"/>
+            <a:ext cx="12853238" cy="3539430"/>
+          </a:xfrm>
+          <a:prstGeom prst="rect">
+            <a:avLst/>
+          </a:prstGeom>
+          <a:noFill/>
+        </p:spPr>
+        <p:txBody>
+          <a:bodyPr wrap="square">
+            <a:spAutoFit/>
+          </a:bodyPr>
+          <a:lstStyle/>
+          <a:p>
+            <a:pPr algn="ctr"/>
+            <a:r>
+              <a:rPr lang="en-US" sz="2800" dirty="0"/>
+              <a:t>weight = weight - (input * (pred - </a:t>
+            </a:r>
+            <a:r>
+              <a:rPr lang="en-US" sz="2800" dirty="0" err="1"/>
+              <a:t>goal_pred</a:t>
+            </a:r>
+            <a:r>
+              <a:rPr lang="en-US" sz="2800" dirty="0"/>
+              <a:t>)</a:t>
+            </a:r>
+            <a:endParaRPr lang="ru-RU" sz="2800" b="1" dirty="0"/>
+          </a:p>
+          <a:p>
+            <a:pPr algn="just"/>
+            <a:endParaRPr lang="ru-RU" sz="2800" b="0" dirty="0">
+              <a:effectLst/>
+              <a:latin typeface="Consolas" panose="020B0609020204030204" pitchFamily="49" charset="0"/>
+            </a:endParaRPr>
+          </a:p>
+          <a:p>
+            <a:pPr algn="just"/>
+            <a:r>
+              <a:rPr lang="ru-RU" sz="2800" b="0" dirty="0">
+                <a:effectLst/>
+                <a:latin typeface="Consolas" panose="020B0609020204030204" pitchFamily="49" charset="0"/>
+              </a:rPr>
+              <a:t>Если входное значение достаточно велико, это может вызвать значительное увеличение веса даже при маленьком значении ошибки. Что происходит, когда вес изменяется на значительную величину при маленьком значении ошибки? А происходит избыточная коррекция веса в сети. Если новая ошибка станет больше, коррекция окажется еще более избыточной. </a:t>
+            </a:r>
+            <a:endParaRPr lang="en-US" sz="2800" b="0" dirty="0">
+              <a:effectLst/>
+              <a:latin typeface="Consolas" panose="020B0609020204030204" pitchFamily="49" charset="0"/>
+            </a:endParaRPr>
+          </a:p>
+        </p:txBody>
+      </p:sp>
+      <p:pic>
+        <p:nvPicPr>
+          <p:cNvPr id="10" name="Рисунок 9">
+            <a:extLst>
+              <a:ext uri="{FF2B5EF4-FFF2-40B4-BE49-F238E27FC236}">
+                <a16:creationId xmlns:a16="http://schemas.microsoft.com/office/drawing/2014/main" id="{E727717A-92A1-FA81-7C74-B72B3DA509A8}"/>
+              </a:ext>
+            </a:extLst>
+          </p:cNvPr>
+          <p:cNvPicPr>
+            <a:picLocks noChangeAspect="1"/>
+          </p:cNvPicPr>
+          <p:nvPr/>
+        </p:nvPicPr>
+        <p:blipFill>
+          <a:blip r:embed="rId3"/>
+          <a:stretch>
+            <a:fillRect/>
+          </a:stretch>
+        </p:blipFill>
+        <p:spPr>
+          <a:xfrm>
+            <a:off x="9215110" y="4496430"/>
+            <a:ext cx="5342082" cy="3213763"/>
+          </a:xfrm>
+          <a:prstGeom prst="rect">
+            <a:avLst/>
+          </a:prstGeom>
+        </p:spPr>
+      </p:pic>
+    </p:spTree>
+    <p:extLst>
+      <p:ext uri="{BB962C8B-B14F-4D97-AF65-F5344CB8AC3E}">
+        <p14:creationId xmlns:p14="http://schemas.microsoft.com/office/powerpoint/2010/main" val="1979593701"/>
+      </p:ext>
+    </p:extLst>
+  </p:cSld>
+  <p:clrMapOvr>
+    <a:masterClrMapping/>
+  </p:clrMapOvr>
+</p:sld>
+</file>
+
+<file path=ppt/slides/slide41.xml><?xml version="1.0" encoding="utf-8"?>
+<p:sld xmlns:a="http://schemas.openxmlformats.org/drawingml/2006/main" xmlns:r="http://schemas.openxmlformats.org/officeDocument/2006/relationships" xmlns:p="http://schemas.openxmlformats.org/presentationml/2006/main">
+  <p:cSld>
+    <p:bg>
+      <p:bgPr>
+        <a:solidFill>
+          <a:srgbClr val="972996"/>
+        </a:solidFill>
+        <a:effectLst/>
+      </p:bgPr>
+    </p:bg>
+    <p:spTree>
+      <p:nvGrpSpPr>
+        <p:cNvPr id="1" name=""/>
+        <p:cNvGrpSpPr/>
+        <p:nvPr/>
+      </p:nvGrpSpPr>
+      <p:grpSpPr>
+        <a:xfrm>
+          <a:off x="0" y="0"/>
+          <a:ext cx="0" cy="0"/>
+          <a:chOff x="0" y="0"/>
+          <a:chExt cx="0" cy="0"/>
+        </a:xfrm>
+      </p:grpSpPr>
+      <p:pic>
+        <p:nvPicPr>
+          <p:cNvPr id="4" name="Picture 3" descr="logo.png"/>
+          <p:cNvPicPr>
+            <a:picLocks noChangeAspect="1"/>
+          </p:cNvPicPr>
+          <p:nvPr/>
+        </p:nvPicPr>
+        <p:blipFill>
+          <a:blip r:embed="rId2"/>
+          <a:stretch>
+            <a:fillRect/>
+          </a:stretch>
+        </p:blipFill>
+        <p:spPr>
+          <a:xfrm>
+            <a:off x="12344400" y="274320"/>
+            <a:ext cx="1097280" cy="1080473"/>
+          </a:xfrm>
+          <a:prstGeom prst="rect">
+            <a:avLst/>
+          </a:prstGeom>
+        </p:spPr>
+      </p:pic>
+      <p:sp>
+        <p:nvSpPr>
+          <p:cNvPr id="5" name="Rectangle 4"/>
+          <p:cNvSpPr/>
+          <p:nvPr/>
+        </p:nvSpPr>
+        <p:spPr>
+          <a:xfrm>
+            <a:off x="0" y="7772400"/>
+            <a:ext cx="14630400" cy="457200"/>
+          </a:xfrm>
+          <a:prstGeom prst="rect">
+            <a:avLst/>
+          </a:prstGeom>
+          <a:solidFill>
+            <a:srgbClr val="E6E6E6"/>
+          </a:solidFill>
+          <a:ln>
+            <a:noFill/>
+          </a:ln>
+        </p:spPr>
+        <p:style>
+          <a:lnRef idx="1">
+            <a:schemeClr val="accent1"/>
+          </a:lnRef>
+          <a:fillRef idx="3">
+            <a:schemeClr val="accent1"/>
+          </a:fillRef>
+          <a:effectRef idx="2">
+            <a:schemeClr val="accent1"/>
+          </a:effectRef>
+          <a:fontRef idx="minor">
+            <a:schemeClr val="lt1"/>
+          </a:fontRef>
+        </p:style>
+        <p:txBody>
+          <a:bodyPr rtlCol="0" anchor="ctr"/>
+          <a:lstStyle/>
+          <a:p>
+            <a:pPr algn="ctr"/>
+            <a:endParaRPr/>
+          </a:p>
+        </p:txBody>
+      </p:sp>
+      <p:sp>
+        <p:nvSpPr>
+          <p:cNvPr id="3" name="TextBox 2">
+            <a:extLst>
+              <a:ext uri="{FF2B5EF4-FFF2-40B4-BE49-F238E27FC236}">
+                <a16:creationId xmlns:a16="http://schemas.microsoft.com/office/drawing/2014/main" id="{C315D28A-F529-C361-6B0C-54FC6D10368B}"/>
+              </a:ext>
+            </a:extLst>
+          </p:cNvPr>
+          <p:cNvSpPr txBox="1"/>
+          <p:nvPr/>
+        </p:nvSpPr>
+        <p:spPr>
+          <a:xfrm>
+            <a:off x="625737" y="289929"/>
+            <a:ext cx="5083443" cy="769441"/>
+          </a:xfrm>
+          <a:prstGeom prst="rect">
+            <a:avLst/>
+          </a:prstGeom>
+          <a:noFill/>
+        </p:spPr>
+        <p:txBody>
+          <a:bodyPr wrap="none">
+            <a:spAutoFit/>
+          </a:bodyPr>
+          <a:lstStyle/>
+          <a:p>
+            <a:r>
+              <a:rPr lang="ru-RU" sz="4400" dirty="0">
+                <a:solidFill>
+                  <a:schemeClr val="bg1"/>
+                </a:solidFill>
+              </a:rPr>
+              <a:t>Альфа-коэффициент</a:t>
+            </a:r>
+            <a:endParaRPr lang="ru-RU" sz="4400" b="1" dirty="0">
+              <a:solidFill>
+                <a:schemeClr val="bg1"/>
+              </a:solidFill>
+            </a:endParaRPr>
+          </a:p>
+        </p:txBody>
+      </p:sp>
+      <p:sp>
+        <p:nvSpPr>
+          <p:cNvPr id="6" name="TextBox 5">
+            <a:extLst>
+              <a:ext uri="{FF2B5EF4-FFF2-40B4-BE49-F238E27FC236}">
+                <a16:creationId xmlns:a16="http://schemas.microsoft.com/office/drawing/2014/main" id="{37DEF13E-1348-A107-CAB6-C1C6A4588BF2}"/>
+              </a:ext>
+            </a:extLst>
+          </p:cNvPr>
+          <p:cNvSpPr txBox="1"/>
+          <p:nvPr/>
+        </p:nvSpPr>
+        <p:spPr>
+          <a:xfrm>
+            <a:off x="625737" y="1256632"/>
+            <a:ext cx="12853238" cy="3108543"/>
+          </a:xfrm>
+          <a:prstGeom prst="rect">
+            <a:avLst/>
+          </a:prstGeom>
+          <a:noFill/>
+        </p:spPr>
+        <p:txBody>
+          <a:bodyPr wrap="square">
+            <a:spAutoFit/>
+          </a:bodyPr>
+          <a:lstStyle/>
+          <a:p>
+            <a:pPr algn="just"/>
+            <a:r>
+              <a:rPr lang="ru-RU" sz="2800" b="0" dirty="0">
+                <a:solidFill>
+                  <a:schemeClr val="bg1"/>
+                </a:solidFill>
+                <a:effectLst/>
+                <a:latin typeface="Consolas" panose="020B0609020204030204" pitchFamily="49" charset="0"/>
+              </a:rPr>
+              <a:t>Это самый простой способ предотвратить избыточную коррекцию весов.</a:t>
+            </a:r>
+          </a:p>
+          <a:p>
+            <a:pPr algn="just"/>
+            <a:r>
+              <a:rPr lang="ru-RU" sz="2800" b="0" dirty="0">
+                <a:solidFill>
+                  <a:schemeClr val="bg1"/>
+                </a:solidFill>
+                <a:effectLst/>
+                <a:latin typeface="Consolas" panose="020B0609020204030204" pitchFamily="49" charset="0"/>
+              </a:rPr>
+              <a:t>В чем выражается проблема, которую мы пытаемся решить? При большом входном значении может происходить избыточная коррекция весов. Как это проявляется? Величина производной в новой точке будет превосходить величину прежней производной (хотя и с другим знаком).</a:t>
+            </a:r>
+            <a:endParaRPr lang="en-US" sz="2800" b="0" dirty="0">
+              <a:solidFill>
+                <a:schemeClr val="bg1"/>
+              </a:solidFill>
+              <a:effectLst/>
+              <a:latin typeface="Consolas" panose="020B0609020204030204" pitchFamily="49" charset="0"/>
+            </a:endParaRPr>
+          </a:p>
+        </p:txBody>
+      </p:sp>
+      <p:pic>
+        <p:nvPicPr>
+          <p:cNvPr id="7" name="Рисунок 6">
+            <a:extLst>
+              <a:ext uri="{FF2B5EF4-FFF2-40B4-BE49-F238E27FC236}">
+                <a16:creationId xmlns:a16="http://schemas.microsoft.com/office/drawing/2014/main" id="{89524495-68B2-FBFA-1287-176D1A66D710}"/>
+              </a:ext>
+            </a:extLst>
+          </p:cNvPr>
+          <p:cNvPicPr>
+            <a:picLocks noChangeAspect="1"/>
+          </p:cNvPicPr>
+          <p:nvPr/>
+        </p:nvPicPr>
+        <p:blipFill>
+          <a:blip r:embed="rId3"/>
+          <a:stretch>
+            <a:fillRect/>
+          </a:stretch>
+        </p:blipFill>
+        <p:spPr>
+          <a:xfrm>
+            <a:off x="4381315" y="4365175"/>
+            <a:ext cx="5342082" cy="3213763"/>
+          </a:xfrm>
+          <a:prstGeom prst="rect">
+            <a:avLst/>
+          </a:prstGeom>
+        </p:spPr>
+      </p:pic>
+      <p:sp>
+        <p:nvSpPr>
+          <p:cNvPr id="8" name="TextBox 7">
+            <a:extLst>
+              <a:ext uri="{FF2B5EF4-FFF2-40B4-BE49-F238E27FC236}">
+                <a16:creationId xmlns:a16="http://schemas.microsoft.com/office/drawing/2014/main" id="{13147323-93E9-E585-4ED2-366C579BF367}"/>
+              </a:ext>
+            </a:extLst>
+          </p:cNvPr>
+          <p:cNvSpPr txBox="1"/>
+          <p:nvPr/>
+        </p:nvSpPr>
+        <p:spPr>
+          <a:xfrm>
+            <a:off x="477158" y="5127310"/>
+            <a:ext cx="3392040" cy="1754326"/>
+          </a:xfrm>
+          <a:prstGeom prst="rect">
+            <a:avLst/>
+          </a:prstGeom>
+          <a:noFill/>
+        </p:spPr>
+        <p:txBody>
+          <a:bodyPr wrap="square">
+            <a:spAutoFit/>
+          </a:bodyPr>
+          <a:lstStyle/>
+          <a:p>
+            <a:pPr algn="just"/>
+            <a:r>
+              <a:rPr lang="ru-RU" b="0" dirty="0">
+                <a:solidFill>
+                  <a:schemeClr val="bg1"/>
+                </a:solidFill>
+                <a:effectLst/>
+                <a:latin typeface="Consolas" panose="020B0609020204030204" pitchFamily="49" charset="0"/>
+              </a:rPr>
+              <a:t>Выполнив шаг 2, мы оказываемся от цели дальше, чем были, а это означает, что абсолютная величина производной увеличилась.</a:t>
+            </a:r>
+            <a:endParaRPr lang="en-US" b="0" dirty="0">
+              <a:solidFill>
+                <a:schemeClr val="bg1"/>
+              </a:solidFill>
+              <a:effectLst/>
+              <a:latin typeface="Consolas" panose="020B0609020204030204" pitchFamily="49" charset="0"/>
+            </a:endParaRPr>
+          </a:p>
+        </p:txBody>
+      </p:sp>
+      <p:sp>
+        <p:nvSpPr>
+          <p:cNvPr id="9" name="TextBox 8">
+            <a:extLst>
+              <a:ext uri="{FF2B5EF4-FFF2-40B4-BE49-F238E27FC236}">
+                <a16:creationId xmlns:a16="http://schemas.microsoft.com/office/drawing/2014/main" id="{FA4A8FC3-84AB-A81D-419A-B77053228A93}"/>
+              </a:ext>
+            </a:extLst>
+          </p:cNvPr>
+          <p:cNvSpPr txBox="1"/>
+          <p:nvPr/>
+        </p:nvSpPr>
+        <p:spPr>
+          <a:xfrm>
+            <a:off x="10086935" y="5127310"/>
+            <a:ext cx="3392040" cy="2031325"/>
+          </a:xfrm>
+          <a:prstGeom prst="rect">
+            <a:avLst/>
+          </a:prstGeom>
+          <a:noFill/>
+        </p:spPr>
+        <p:txBody>
+          <a:bodyPr wrap="square">
+            <a:spAutoFit/>
+          </a:bodyPr>
+          <a:lstStyle/>
+          <a:p>
+            <a:pPr algn="just"/>
+            <a:r>
+              <a:rPr lang="ru-RU" dirty="0">
+                <a:solidFill>
+                  <a:schemeClr val="bg1"/>
+                </a:solidFill>
+                <a:latin typeface="Consolas" panose="020B0609020204030204" pitchFamily="49" charset="0"/>
+              </a:rPr>
+              <a:t>В</a:t>
+            </a:r>
+            <a:r>
+              <a:rPr lang="ru-RU" b="0" dirty="0">
+                <a:solidFill>
+                  <a:schemeClr val="bg1"/>
+                </a:solidFill>
+                <a:effectLst/>
+                <a:latin typeface="Consolas" panose="020B0609020204030204" pitchFamily="49" charset="0"/>
+              </a:rPr>
+              <a:t>ыполнив шаг 3, мы оказываемся еще дальше от</a:t>
+            </a:r>
+          </a:p>
+          <a:p>
+            <a:pPr algn="just"/>
+            <a:r>
+              <a:rPr lang="ru-RU" b="0" dirty="0">
+                <a:solidFill>
+                  <a:schemeClr val="bg1"/>
+                </a:solidFill>
+                <a:effectLst/>
+                <a:latin typeface="Consolas" panose="020B0609020204030204" pitchFamily="49" charset="0"/>
+              </a:rPr>
+              <a:t>цели, чем даже на шаге 2, и нейронная сеть продолжает отклоняться все больше и больше, демонстрируя расхождение.</a:t>
+            </a:r>
+            <a:endParaRPr lang="en-US" b="0" dirty="0">
+              <a:solidFill>
+                <a:schemeClr val="bg1"/>
+              </a:solidFill>
+              <a:effectLst/>
+              <a:latin typeface="Consolas" panose="020B0609020204030204" pitchFamily="49" charset="0"/>
+            </a:endParaRPr>
+          </a:p>
+        </p:txBody>
+      </p:sp>
+    </p:spTree>
+    <p:extLst>
+      <p:ext uri="{BB962C8B-B14F-4D97-AF65-F5344CB8AC3E}">
+        <p14:creationId xmlns:p14="http://schemas.microsoft.com/office/powerpoint/2010/main" val="2903023405"/>
+      </p:ext>
+    </p:extLst>
+  </p:cSld>
+  <p:clrMapOvr>
+    <a:masterClrMapping/>
+  </p:clrMapOvr>
+</p:sld>
+</file>
+
+<file path=ppt/slides/slide42.xml><?xml version="1.0" encoding="utf-8"?>
+<p:sld xmlns:a="http://schemas.openxmlformats.org/drawingml/2006/main" xmlns:r="http://schemas.openxmlformats.org/officeDocument/2006/relationships" xmlns:p="http://schemas.openxmlformats.org/presentationml/2006/main">
+  <p:cSld>
+    <p:spTree>
+      <p:nvGrpSpPr>
+        <p:cNvPr id="1" name=""/>
+        <p:cNvGrpSpPr/>
+        <p:nvPr/>
+      </p:nvGrpSpPr>
+      <p:grpSpPr>
+        <a:xfrm>
+          <a:off x="0" y="0"/>
+          <a:ext cx="0" cy="0"/>
+          <a:chOff x="0" y="0"/>
+          <a:chExt cx="0" cy="0"/>
+        </a:xfrm>
+      </p:grpSpPr>
+      <p:pic>
+        <p:nvPicPr>
+          <p:cNvPr id="4" name="Picture 3" descr="logo.png"/>
+          <p:cNvPicPr>
+            <a:picLocks noChangeAspect="1"/>
+          </p:cNvPicPr>
+          <p:nvPr/>
+        </p:nvPicPr>
+        <p:blipFill>
+          <a:blip r:embed="rId2"/>
+          <a:stretch>
+            <a:fillRect/>
+          </a:stretch>
+        </p:blipFill>
+        <p:spPr>
+          <a:xfrm>
+            <a:off x="12344400" y="274320"/>
+            <a:ext cx="1097280" cy="1080473"/>
+          </a:xfrm>
+          <a:prstGeom prst="rect">
+            <a:avLst/>
+          </a:prstGeom>
+        </p:spPr>
+      </p:pic>
+      <p:sp>
+        <p:nvSpPr>
+          <p:cNvPr id="5" name="Rectangle 4"/>
+          <p:cNvSpPr/>
+          <p:nvPr/>
+        </p:nvSpPr>
+        <p:spPr>
+          <a:xfrm>
+            <a:off x="0" y="7772400"/>
+            <a:ext cx="14630400" cy="457200"/>
+          </a:xfrm>
+          <a:prstGeom prst="rect">
+            <a:avLst/>
+          </a:prstGeom>
+          <a:solidFill>
+            <a:srgbClr val="640064"/>
+          </a:solidFill>
+          <a:ln>
+            <a:noFill/>
+          </a:ln>
+        </p:spPr>
+        <p:style>
+          <a:lnRef idx="1">
+            <a:schemeClr val="accent1"/>
+          </a:lnRef>
+          <a:fillRef idx="3">
+            <a:schemeClr val="accent1"/>
+          </a:fillRef>
+          <a:effectRef idx="2">
+            <a:schemeClr val="accent1"/>
+          </a:effectRef>
+          <a:fontRef idx="minor">
+            <a:schemeClr val="lt1"/>
+          </a:fontRef>
+        </p:style>
+        <p:txBody>
+          <a:bodyPr rtlCol="0" anchor="ctr"/>
+          <a:lstStyle/>
+          <a:p>
+            <a:pPr algn="ctr"/>
+            <a:endParaRPr>
+              <a:solidFill>
+                <a:schemeClr val="tx1"/>
+              </a:solidFill>
+            </a:endParaRPr>
+          </a:p>
+        </p:txBody>
+      </p:sp>
+      <p:sp>
+        <p:nvSpPr>
+          <p:cNvPr id="7" name="TextBox 6">
+            <a:extLst>
+              <a:ext uri="{FF2B5EF4-FFF2-40B4-BE49-F238E27FC236}">
+                <a16:creationId xmlns:a16="http://schemas.microsoft.com/office/drawing/2014/main" id="{EA77F26D-0F9B-DFF5-2FB4-9E508F48AFC7}"/>
+              </a:ext>
+            </a:extLst>
+          </p:cNvPr>
+          <p:cNvSpPr txBox="1"/>
+          <p:nvPr/>
+        </p:nvSpPr>
+        <p:spPr>
+          <a:xfrm>
+            <a:off x="705491" y="330403"/>
+            <a:ext cx="11408419" cy="769441"/>
+          </a:xfrm>
+          <a:prstGeom prst="rect">
+            <a:avLst/>
+          </a:prstGeom>
+          <a:noFill/>
+        </p:spPr>
+        <p:txBody>
+          <a:bodyPr wrap="square">
+            <a:spAutoFit/>
+          </a:bodyPr>
+          <a:lstStyle/>
+          <a:p>
+            <a:r>
+              <a:rPr lang="ru-RU" sz="4400" dirty="0"/>
+              <a:t>Альфа-коэффициент</a:t>
+            </a:r>
+            <a:r>
+              <a:rPr lang="en-US" sz="4400" dirty="0"/>
+              <a:t> (</a:t>
+            </a:r>
+            <a:r>
+              <a:rPr lang="ru-RU" sz="4400" dirty="0"/>
+              <a:t>или скорость обучения)</a:t>
+            </a:r>
+            <a:endParaRPr lang="ru-RU" sz="4400" b="1" dirty="0"/>
+          </a:p>
+        </p:txBody>
+      </p:sp>
+      <p:sp>
+        <p:nvSpPr>
+          <p:cNvPr id="6" name="TextBox 5">
+            <a:extLst>
+              <a:ext uri="{FF2B5EF4-FFF2-40B4-BE49-F238E27FC236}">
+                <a16:creationId xmlns:a16="http://schemas.microsoft.com/office/drawing/2014/main" id="{905FF7EB-3CCB-A00B-4578-2EABF116CB64}"/>
+              </a:ext>
+            </a:extLst>
+          </p:cNvPr>
+          <p:cNvSpPr txBox="1"/>
+          <p:nvPr/>
+        </p:nvSpPr>
+        <p:spPr>
+          <a:xfrm>
+            <a:off x="625737" y="1354793"/>
+            <a:ext cx="12853238" cy="5693866"/>
+          </a:xfrm>
+          <a:prstGeom prst="rect">
+            <a:avLst/>
+          </a:prstGeom>
+          <a:noFill/>
+        </p:spPr>
+        <p:txBody>
+          <a:bodyPr wrap="square">
+            <a:spAutoFit/>
+          </a:bodyPr>
+          <a:lstStyle/>
+          <a:p>
+            <a:pPr algn="ctr"/>
+            <a:r>
+              <a:rPr lang="ru-RU" sz="2800" dirty="0"/>
+              <a:t>Решение проблемы заключается в том, чтобы умножить величину изменения веса на некоторый коэффициент, чтобы сделать ее меньше. В большинстве случаев достаточно умножить величину изменения веса на одно вещественное число в диапазоне от 0 до 1. Часто это число называют альфа-коэффициентом.</a:t>
+            </a:r>
+          </a:p>
+          <a:p>
+            <a:pPr algn="ctr"/>
+            <a:endParaRPr lang="ru-RU" sz="2800" b="0" dirty="0">
+              <a:effectLst/>
+              <a:latin typeface="Consolas" panose="020B0609020204030204" pitchFamily="49" charset="0"/>
+            </a:endParaRPr>
+          </a:p>
+          <a:p>
+            <a:pPr algn="ctr"/>
+            <a:endParaRPr lang="ru-RU" sz="2800" dirty="0">
+              <a:latin typeface="Consolas" panose="020B0609020204030204" pitchFamily="49" charset="0"/>
+            </a:endParaRPr>
+          </a:p>
+          <a:p>
+            <a:pPr algn="ctr"/>
+            <a:r>
+              <a:rPr lang="ru-RU" sz="2800" b="0" dirty="0">
+                <a:effectLst/>
+                <a:latin typeface="Consolas" panose="020B0609020204030204" pitchFamily="49" charset="0"/>
+              </a:rPr>
+              <a:t>Выбор соответствующего альфа-коэффициента, даже для современных нейронных сетей, часто производится наугад. Вы смотрите, как изменяется ошибка с каждой итерацией, и если начинает наблюдаться расхождение, значит, альфа-коэффициент слишком велик и его следует уменьшить. Если обучение происходит слишком медленно, значит, альфа-коэффициент слишком мал и его следует увеличить.</a:t>
+            </a:r>
+            <a:endParaRPr lang="en-US" sz="2800" b="0" dirty="0">
+              <a:effectLst/>
+              <a:latin typeface="Consolas" panose="020B0609020204030204" pitchFamily="49" charset="0"/>
+            </a:endParaRPr>
+          </a:p>
+        </p:txBody>
+      </p:sp>
+    </p:spTree>
+    <p:extLst>
+      <p:ext uri="{BB962C8B-B14F-4D97-AF65-F5344CB8AC3E}">
+        <p14:creationId xmlns:p14="http://schemas.microsoft.com/office/powerpoint/2010/main" val="3598292336"/>
+      </p:ext>
+    </p:extLst>
+  </p:cSld>
+  <p:clrMapOvr>
+    <a:masterClrMapping/>
+  </p:clrMapOvr>
+</p:sld>
+</file>
+
+<file path=ppt/slides/slide43.xml><?xml version="1.0" encoding="utf-8"?>
+<p:sld xmlns:a="http://schemas.openxmlformats.org/drawingml/2006/main" xmlns:r="http://schemas.openxmlformats.org/officeDocument/2006/relationships" xmlns:p="http://schemas.openxmlformats.org/presentationml/2006/main">
+  <p:cSld>
+    <p:bg>
+      <p:bgPr>
+        <a:solidFill>
+          <a:srgbClr val="972996"/>
+        </a:solidFill>
+        <a:effectLst/>
+      </p:bgPr>
+    </p:bg>
+    <p:spTree>
+      <p:nvGrpSpPr>
+        <p:cNvPr id="1" name=""/>
+        <p:cNvGrpSpPr/>
+        <p:nvPr/>
+      </p:nvGrpSpPr>
+      <p:grpSpPr>
+        <a:xfrm>
+          <a:off x="0" y="0"/>
+          <a:ext cx="0" cy="0"/>
+          <a:chOff x="0" y="0"/>
+          <a:chExt cx="0" cy="0"/>
+        </a:xfrm>
+      </p:grpSpPr>
+      <p:pic>
+        <p:nvPicPr>
+          <p:cNvPr id="4" name="Picture 3" descr="logo.png"/>
+          <p:cNvPicPr>
+            <a:picLocks noChangeAspect="1"/>
+          </p:cNvPicPr>
+          <p:nvPr/>
+        </p:nvPicPr>
+        <p:blipFill>
+          <a:blip r:embed="rId2"/>
+          <a:stretch>
+            <a:fillRect/>
+          </a:stretch>
+        </p:blipFill>
+        <p:spPr>
+          <a:xfrm>
+            <a:off x="12344400" y="274320"/>
+            <a:ext cx="1097280" cy="1080473"/>
+          </a:xfrm>
+          <a:prstGeom prst="rect">
+            <a:avLst/>
+          </a:prstGeom>
+        </p:spPr>
+      </p:pic>
+      <p:sp>
+        <p:nvSpPr>
+          <p:cNvPr id="5" name="Rectangle 4"/>
+          <p:cNvSpPr/>
+          <p:nvPr/>
+        </p:nvSpPr>
+        <p:spPr>
+          <a:xfrm>
+            <a:off x="0" y="7772400"/>
+            <a:ext cx="14630400" cy="457200"/>
+          </a:xfrm>
+          <a:prstGeom prst="rect">
+            <a:avLst/>
+          </a:prstGeom>
+          <a:solidFill>
+            <a:srgbClr val="E6E6E6"/>
+          </a:solidFill>
+          <a:ln>
+            <a:noFill/>
+          </a:ln>
+        </p:spPr>
+        <p:style>
+          <a:lnRef idx="1">
+            <a:schemeClr val="accent1"/>
+          </a:lnRef>
+          <a:fillRef idx="3">
+            <a:schemeClr val="accent1"/>
+          </a:fillRef>
+          <a:effectRef idx="2">
+            <a:schemeClr val="accent1"/>
+          </a:effectRef>
+          <a:fontRef idx="minor">
+            <a:schemeClr val="lt1"/>
+          </a:fontRef>
+        </p:style>
+        <p:txBody>
+          <a:bodyPr rtlCol="0" anchor="ctr"/>
+          <a:lstStyle/>
+          <a:p>
+            <a:pPr algn="ctr"/>
+            <a:endParaRPr/>
+          </a:p>
+        </p:txBody>
+      </p:sp>
+      <p:sp>
+        <p:nvSpPr>
+          <p:cNvPr id="3" name="TextBox 2">
+            <a:extLst>
+              <a:ext uri="{FF2B5EF4-FFF2-40B4-BE49-F238E27FC236}">
+                <a16:creationId xmlns:a16="http://schemas.microsoft.com/office/drawing/2014/main" id="{C315D28A-F529-C361-6B0C-54FC6D10368B}"/>
+              </a:ext>
+            </a:extLst>
+          </p:cNvPr>
+          <p:cNvSpPr txBox="1"/>
+          <p:nvPr/>
+        </p:nvSpPr>
+        <p:spPr>
+          <a:xfrm>
+            <a:off x="625737" y="289929"/>
+            <a:ext cx="2453557" cy="769441"/>
+          </a:xfrm>
+          <a:prstGeom prst="rect">
+            <a:avLst/>
+          </a:prstGeom>
+          <a:noFill/>
+        </p:spPr>
+        <p:txBody>
+          <a:bodyPr wrap="none">
+            <a:spAutoFit/>
+          </a:bodyPr>
+          <a:lstStyle/>
+          <a:p>
+            <a:r>
+              <a:rPr lang="ru-RU" sz="4400" dirty="0">
+                <a:solidFill>
+                  <a:schemeClr val="bg1"/>
+                </a:solidFill>
+              </a:rPr>
+              <a:t>Куда его?</a:t>
+            </a:r>
+            <a:endParaRPr lang="ru-RU" sz="4400" b="1" dirty="0">
+              <a:solidFill>
+                <a:schemeClr val="bg1"/>
+              </a:solidFill>
+            </a:endParaRPr>
+          </a:p>
+        </p:txBody>
+      </p:sp>
+      <p:sp>
+        <p:nvSpPr>
+          <p:cNvPr id="6" name="TextBox 5">
+            <a:extLst>
+              <a:ext uri="{FF2B5EF4-FFF2-40B4-BE49-F238E27FC236}">
+                <a16:creationId xmlns:a16="http://schemas.microsoft.com/office/drawing/2014/main" id="{37DEF13E-1348-A107-CAB6-C1C6A4588BF2}"/>
+              </a:ext>
+            </a:extLst>
+          </p:cNvPr>
+          <p:cNvSpPr txBox="1"/>
+          <p:nvPr/>
+        </p:nvSpPr>
+        <p:spPr>
+          <a:xfrm>
+            <a:off x="541114" y="1214289"/>
+            <a:ext cx="7544903" cy="2862322"/>
+          </a:xfrm>
+          <a:prstGeom prst="rect">
+            <a:avLst/>
+          </a:prstGeom>
+          <a:noFill/>
+        </p:spPr>
+        <p:txBody>
+          <a:bodyPr wrap="square">
+            <a:spAutoFit/>
+          </a:bodyPr>
+          <a:lstStyle/>
+          <a:p>
+            <a:r>
+              <a:rPr lang="en-US" b="0" dirty="0">
+                <a:solidFill>
+                  <a:srgbClr val="C586C0"/>
+                </a:solidFill>
+                <a:effectLst/>
+                <a:latin typeface="Consolas" panose="020B0609020204030204" pitchFamily="49" charset="0"/>
+              </a:rPr>
+              <a:t>for</a:t>
+            </a:r>
+            <a:r>
+              <a:rPr lang="en-US" b="0" dirty="0">
+                <a:solidFill>
+                  <a:srgbClr val="BBBEBF"/>
+                </a:solidFill>
+                <a:effectLst/>
+                <a:latin typeface="Consolas" panose="020B0609020204030204" pitchFamily="49" charset="0"/>
+              </a:rPr>
+              <a:t> </a:t>
+            </a:r>
+            <a:r>
+              <a:rPr lang="en-US" b="0" dirty="0">
+                <a:solidFill>
+                  <a:srgbClr val="C9D1D9"/>
+                </a:solidFill>
+                <a:effectLst/>
+                <a:latin typeface="Consolas" panose="020B0609020204030204" pitchFamily="49" charset="0"/>
+              </a:rPr>
+              <a:t>epoch</a:t>
+            </a:r>
+            <a:r>
+              <a:rPr lang="en-US" b="0" dirty="0">
+                <a:solidFill>
+                  <a:srgbClr val="BBBEBF"/>
+                </a:solidFill>
+                <a:effectLst/>
+                <a:latin typeface="Consolas" panose="020B0609020204030204" pitchFamily="49" charset="0"/>
+              </a:rPr>
+              <a:t> </a:t>
+            </a:r>
+            <a:r>
+              <a:rPr lang="en-US" b="0" dirty="0">
+                <a:solidFill>
+                  <a:srgbClr val="C586C0"/>
+                </a:solidFill>
+                <a:effectLst/>
+                <a:latin typeface="Consolas" panose="020B0609020204030204" pitchFamily="49" charset="0"/>
+              </a:rPr>
+              <a:t>in</a:t>
+            </a:r>
+            <a:r>
+              <a:rPr lang="en-US" b="0" dirty="0">
+                <a:solidFill>
+                  <a:srgbClr val="BBBEBF"/>
+                </a:solidFill>
+                <a:effectLst/>
+                <a:latin typeface="Consolas" panose="020B0609020204030204" pitchFamily="49" charset="0"/>
+              </a:rPr>
+              <a:t> </a:t>
+            </a:r>
+            <a:r>
+              <a:rPr lang="en-US" b="0" dirty="0">
+                <a:solidFill>
+                  <a:srgbClr val="4EC9B0"/>
+                </a:solidFill>
+                <a:effectLst/>
+                <a:latin typeface="Consolas" panose="020B0609020204030204" pitchFamily="49" charset="0"/>
+              </a:rPr>
+              <a:t>range</a:t>
+            </a:r>
+            <a:r>
+              <a:rPr lang="en-US" b="0" dirty="0">
+                <a:solidFill>
+                  <a:srgbClr val="BBBEBF"/>
+                </a:solidFill>
+                <a:effectLst/>
+                <a:latin typeface="Consolas" panose="020B0609020204030204" pitchFamily="49" charset="0"/>
+              </a:rPr>
+              <a:t>(</a:t>
+            </a:r>
+            <a:r>
+              <a:rPr lang="en-US" b="0" dirty="0">
+                <a:solidFill>
+                  <a:srgbClr val="C9D1D9"/>
+                </a:solidFill>
+                <a:effectLst/>
+                <a:latin typeface="Consolas" panose="020B0609020204030204" pitchFamily="49" charset="0"/>
+              </a:rPr>
+              <a:t>epochs</a:t>
+            </a:r>
+            <a:r>
+              <a:rPr lang="en-US" b="0" dirty="0">
+                <a:solidFill>
+                  <a:srgbClr val="BBBEBF"/>
+                </a:solidFill>
+                <a:effectLst/>
+                <a:latin typeface="Consolas" panose="020B0609020204030204" pitchFamily="49" charset="0"/>
+              </a:rPr>
+              <a:t>):</a:t>
+            </a:r>
+            <a:br>
+              <a:rPr lang="en-US" b="0" dirty="0">
+                <a:solidFill>
+                  <a:srgbClr val="BBBEBF"/>
+                </a:solidFill>
+                <a:effectLst/>
+                <a:latin typeface="Consolas" panose="020B0609020204030204" pitchFamily="49" charset="0"/>
+              </a:rPr>
+            </a:br>
+            <a:r>
+              <a:rPr lang="en-US" b="0" dirty="0">
+                <a:solidFill>
+                  <a:srgbClr val="BBBEBF"/>
+                </a:solidFill>
+                <a:effectLst/>
+                <a:latin typeface="Consolas" panose="020B0609020204030204" pitchFamily="49" charset="0"/>
+              </a:rPr>
+              <a:t>    </a:t>
+            </a:r>
+            <a:r>
+              <a:rPr lang="en-US" b="0" dirty="0" err="1">
+                <a:solidFill>
+                  <a:srgbClr val="C9D1D9"/>
+                </a:solidFill>
+                <a:effectLst/>
+                <a:latin typeface="Consolas" panose="020B0609020204030204" pitchFamily="49" charset="0"/>
+              </a:rPr>
+              <a:t>total_error</a:t>
+            </a:r>
+            <a:r>
+              <a:rPr lang="en-US" b="0" dirty="0">
+                <a:solidFill>
+                  <a:srgbClr val="BBBEBF"/>
+                </a:solidFill>
+                <a:effectLst/>
+                <a:latin typeface="Consolas" panose="020B0609020204030204" pitchFamily="49" charset="0"/>
+              </a:rPr>
+              <a:t> </a:t>
+            </a:r>
+            <a:r>
+              <a:rPr lang="en-US" b="0" dirty="0">
+                <a:solidFill>
+                  <a:srgbClr val="D4D4D4"/>
+                </a:solidFill>
+                <a:effectLst/>
+                <a:latin typeface="Consolas" panose="020B0609020204030204" pitchFamily="49" charset="0"/>
+              </a:rPr>
+              <a:t>=</a:t>
+            </a:r>
+            <a:r>
+              <a:rPr lang="en-US" b="0" dirty="0">
+                <a:solidFill>
+                  <a:srgbClr val="BBBEBF"/>
+                </a:solidFill>
+                <a:effectLst/>
+                <a:latin typeface="Consolas" panose="020B0609020204030204" pitchFamily="49" charset="0"/>
+              </a:rPr>
+              <a:t> </a:t>
+            </a:r>
+            <a:r>
+              <a:rPr lang="en-US" b="0" dirty="0">
+                <a:solidFill>
+                  <a:srgbClr val="B5CEA8"/>
+                </a:solidFill>
+                <a:effectLst/>
+                <a:latin typeface="Consolas" panose="020B0609020204030204" pitchFamily="49" charset="0"/>
+              </a:rPr>
+              <a:t>0</a:t>
+            </a:r>
+            <a:br>
+              <a:rPr lang="en-US" b="0" dirty="0">
+                <a:solidFill>
+                  <a:srgbClr val="BBBEBF"/>
+                </a:solidFill>
+                <a:effectLst/>
+                <a:latin typeface="Consolas" panose="020B0609020204030204" pitchFamily="49" charset="0"/>
+              </a:rPr>
+            </a:br>
+            <a:r>
+              <a:rPr lang="en-US" b="0" dirty="0">
+                <a:solidFill>
+                  <a:srgbClr val="BBBEBF"/>
+                </a:solidFill>
+                <a:effectLst/>
+                <a:latin typeface="Consolas" panose="020B0609020204030204" pitchFamily="49" charset="0"/>
+              </a:rPr>
+              <a:t>    </a:t>
+            </a:r>
+            <a:r>
+              <a:rPr lang="en-US" b="0" dirty="0">
+                <a:solidFill>
+                  <a:srgbClr val="C586C0"/>
+                </a:solidFill>
+                <a:effectLst/>
+                <a:latin typeface="Consolas" panose="020B0609020204030204" pitchFamily="49" charset="0"/>
+              </a:rPr>
+              <a:t>for</a:t>
+            </a:r>
+            <a:r>
+              <a:rPr lang="en-US" b="0" dirty="0">
+                <a:solidFill>
+                  <a:srgbClr val="BBBEBF"/>
+                </a:solidFill>
+                <a:effectLst/>
+                <a:latin typeface="Consolas" panose="020B0609020204030204" pitchFamily="49" charset="0"/>
+              </a:rPr>
+              <a:t> </a:t>
+            </a:r>
+            <a:r>
+              <a:rPr lang="en-US" b="0" dirty="0" err="1">
+                <a:solidFill>
+                  <a:srgbClr val="C9D1D9"/>
+                </a:solidFill>
+                <a:effectLst/>
+                <a:latin typeface="Consolas" panose="020B0609020204030204" pitchFamily="49" charset="0"/>
+              </a:rPr>
+              <a:t>i</a:t>
+            </a:r>
+            <a:r>
+              <a:rPr lang="en-US" b="0" dirty="0">
+                <a:solidFill>
+                  <a:srgbClr val="BBBEBF"/>
+                </a:solidFill>
+                <a:effectLst/>
+                <a:latin typeface="Consolas" panose="020B0609020204030204" pitchFamily="49" charset="0"/>
+              </a:rPr>
+              <a:t> </a:t>
+            </a:r>
+            <a:r>
+              <a:rPr lang="en-US" b="0" dirty="0">
+                <a:solidFill>
+                  <a:srgbClr val="C586C0"/>
+                </a:solidFill>
+                <a:effectLst/>
+                <a:latin typeface="Consolas" panose="020B0609020204030204" pitchFamily="49" charset="0"/>
+              </a:rPr>
+              <a:t>in</a:t>
+            </a:r>
+            <a:r>
+              <a:rPr lang="en-US" b="0" dirty="0">
+                <a:solidFill>
+                  <a:srgbClr val="BBBEBF"/>
+                </a:solidFill>
+                <a:effectLst/>
+                <a:latin typeface="Consolas" panose="020B0609020204030204" pitchFamily="49" charset="0"/>
+              </a:rPr>
+              <a:t> </a:t>
+            </a:r>
+            <a:r>
+              <a:rPr lang="en-US" b="0" dirty="0">
+                <a:solidFill>
+                  <a:srgbClr val="4EC9B0"/>
+                </a:solidFill>
+                <a:effectLst/>
+                <a:latin typeface="Consolas" panose="020B0609020204030204" pitchFamily="49" charset="0"/>
+              </a:rPr>
+              <a:t>range</a:t>
+            </a:r>
+            <a:r>
+              <a:rPr lang="en-US" b="0" dirty="0">
+                <a:solidFill>
+                  <a:srgbClr val="BBBEBF"/>
+                </a:solidFill>
+                <a:effectLst/>
+                <a:latin typeface="Consolas" panose="020B0609020204030204" pitchFamily="49" charset="0"/>
+              </a:rPr>
+              <a:t>(</a:t>
+            </a:r>
+            <a:r>
+              <a:rPr lang="en-US" b="0" dirty="0" err="1">
+                <a:solidFill>
+                  <a:srgbClr val="D2A8FF"/>
+                </a:solidFill>
+                <a:effectLst/>
+                <a:latin typeface="Consolas" panose="020B0609020204030204" pitchFamily="49" charset="0"/>
+              </a:rPr>
+              <a:t>len</a:t>
+            </a:r>
+            <a:r>
+              <a:rPr lang="en-US" b="0" dirty="0">
+                <a:solidFill>
+                  <a:srgbClr val="BBBEBF"/>
+                </a:solidFill>
+                <a:effectLst/>
+                <a:latin typeface="Consolas" panose="020B0609020204030204" pitchFamily="49" charset="0"/>
+              </a:rPr>
+              <a:t>(</a:t>
+            </a:r>
+            <a:r>
+              <a:rPr lang="en-US" b="0" dirty="0">
+                <a:solidFill>
+                  <a:srgbClr val="C9D1D9"/>
+                </a:solidFill>
+                <a:effectLst/>
+                <a:latin typeface="Consolas" panose="020B0609020204030204" pitchFamily="49" charset="0"/>
+              </a:rPr>
+              <a:t>prices</a:t>
+            </a:r>
+            <a:r>
+              <a:rPr lang="en-US" b="0" dirty="0">
+                <a:solidFill>
+                  <a:srgbClr val="BBBEBF"/>
+                </a:solidFill>
+                <a:effectLst/>
+                <a:latin typeface="Consolas" panose="020B0609020204030204" pitchFamily="49" charset="0"/>
+              </a:rPr>
+              <a:t>)):</a:t>
+            </a:r>
+            <a:br>
+              <a:rPr lang="en-US" b="0" dirty="0">
+                <a:solidFill>
+                  <a:srgbClr val="BBBEBF"/>
+                </a:solidFill>
+                <a:effectLst/>
+                <a:latin typeface="Consolas" panose="020B0609020204030204" pitchFamily="49" charset="0"/>
+              </a:rPr>
+            </a:br>
+            <a:r>
+              <a:rPr lang="en-US" b="0" dirty="0">
+                <a:solidFill>
+                  <a:srgbClr val="BBBEBF"/>
+                </a:solidFill>
+                <a:effectLst/>
+                <a:latin typeface="Consolas" panose="020B0609020204030204" pitchFamily="49" charset="0"/>
+              </a:rPr>
+              <a:t>        </a:t>
+            </a:r>
+            <a:r>
+              <a:rPr lang="en-US" b="0" dirty="0">
+                <a:solidFill>
+                  <a:srgbClr val="C9D1D9"/>
+                </a:solidFill>
+                <a:effectLst/>
+                <a:latin typeface="Consolas" panose="020B0609020204030204" pitchFamily="49" charset="0"/>
+              </a:rPr>
+              <a:t>price</a:t>
+            </a:r>
+            <a:r>
+              <a:rPr lang="en-US" b="0" dirty="0">
+                <a:solidFill>
+                  <a:srgbClr val="BBBEBF"/>
+                </a:solidFill>
+                <a:effectLst/>
+                <a:latin typeface="Consolas" panose="020B0609020204030204" pitchFamily="49" charset="0"/>
+              </a:rPr>
+              <a:t> </a:t>
+            </a:r>
+            <a:r>
+              <a:rPr lang="en-US" b="0" dirty="0">
+                <a:solidFill>
+                  <a:srgbClr val="D4D4D4"/>
+                </a:solidFill>
+                <a:effectLst/>
+                <a:latin typeface="Consolas" panose="020B0609020204030204" pitchFamily="49" charset="0"/>
+              </a:rPr>
+              <a:t>=</a:t>
+            </a:r>
+            <a:r>
+              <a:rPr lang="en-US" b="0" dirty="0">
+                <a:solidFill>
+                  <a:srgbClr val="BBBEBF"/>
+                </a:solidFill>
+                <a:effectLst/>
+                <a:latin typeface="Consolas" panose="020B0609020204030204" pitchFamily="49" charset="0"/>
+              </a:rPr>
+              <a:t> </a:t>
+            </a:r>
+            <a:r>
+              <a:rPr lang="en-US" b="0" dirty="0">
+                <a:solidFill>
+                  <a:srgbClr val="C9D1D9"/>
+                </a:solidFill>
+                <a:effectLst/>
+                <a:latin typeface="Consolas" panose="020B0609020204030204" pitchFamily="49" charset="0"/>
+              </a:rPr>
+              <a:t>prices</a:t>
+            </a:r>
+            <a:r>
+              <a:rPr lang="en-US" b="0" dirty="0">
+                <a:solidFill>
+                  <a:srgbClr val="BBBEBF"/>
+                </a:solidFill>
+                <a:effectLst/>
+                <a:latin typeface="Consolas" panose="020B0609020204030204" pitchFamily="49" charset="0"/>
+              </a:rPr>
+              <a:t>[</a:t>
+            </a:r>
+            <a:r>
+              <a:rPr lang="en-US" b="0" dirty="0" err="1">
+                <a:solidFill>
+                  <a:srgbClr val="C9D1D9"/>
+                </a:solidFill>
+                <a:effectLst/>
+                <a:latin typeface="Consolas" panose="020B0609020204030204" pitchFamily="49" charset="0"/>
+              </a:rPr>
+              <a:t>i</a:t>
+            </a:r>
+            <a:r>
+              <a:rPr lang="en-US" b="0" dirty="0">
+                <a:solidFill>
+                  <a:srgbClr val="BBBEBF"/>
+                </a:solidFill>
+                <a:effectLst/>
+                <a:latin typeface="Consolas" panose="020B0609020204030204" pitchFamily="49" charset="0"/>
+              </a:rPr>
+              <a:t>]</a:t>
+            </a:r>
+          </a:p>
+          <a:p>
+            <a:r>
+              <a:rPr lang="en-US" b="0" dirty="0">
+                <a:solidFill>
+                  <a:srgbClr val="BBBEBF"/>
+                </a:solidFill>
+                <a:effectLst/>
+                <a:latin typeface="Consolas" panose="020B0609020204030204" pitchFamily="49" charset="0"/>
+              </a:rPr>
+              <a:t>        </a:t>
+            </a:r>
+            <a:r>
+              <a:rPr lang="en-US" b="0" dirty="0">
+                <a:solidFill>
+                  <a:srgbClr val="C9D1D9"/>
+                </a:solidFill>
+                <a:effectLst/>
+                <a:latin typeface="Consolas" panose="020B0609020204030204" pitchFamily="49" charset="0"/>
+              </a:rPr>
+              <a:t>target</a:t>
+            </a:r>
+            <a:r>
+              <a:rPr lang="en-US" b="0" dirty="0">
+                <a:solidFill>
+                  <a:srgbClr val="BBBEBF"/>
+                </a:solidFill>
+                <a:effectLst/>
+                <a:latin typeface="Consolas" panose="020B0609020204030204" pitchFamily="49" charset="0"/>
+              </a:rPr>
+              <a:t> </a:t>
+            </a:r>
+            <a:r>
+              <a:rPr lang="en-US" b="0" dirty="0">
+                <a:solidFill>
+                  <a:srgbClr val="D4D4D4"/>
+                </a:solidFill>
+                <a:effectLst/>
+                <a:latin typeface="Consolas" panose="020B0609020204030204" pitchFamily="49" charset="0"/>
+              </a:rPr>
+              <a:t>=</a:t>
+            </a:r>
+            <a:r>
+              <a:rPr lang="en-US" b="0" dirty="0">
+                <a:solidFill>
+                  <a:srgbClr val="BBBEBF"/>
+                </a:solidFill>
+                <a:effectLst/>
+                <a:latin typeface="Consolas" panose="020B0609020204030204" pitchFamily="49" charset="0"/>
+              </a:rPr>
+              <a:t> </a:t>
+            </a:r>
+            <a:r>
+              <a:rPr lang="en-US" b="0" dirty="0">
+                <a:solidFill>
+                  <a:srgbClr val="C9D1D9"/>
+                </a:solidFill>
+                <a:effectLst/>
+                <a:latin typeface="Consolas" panose="020B0609020204030204" pitchFamily="49" charset="0"/>
+              </a:rPr>
+              <a:t>sales</a:t>
+            </a:r>
+            <a:r>
+              <a:rPr lang="en-US" b="0" dirty="0">
+                <a:solidFill>
+                  <a:srgbClr val="BBBEBF"/>
+                </a:solidFill>
+                <a:effectLst/>
+                <a:latin typeface="Consolas" panose="020B0609020204030204" pitchFamily="49" charset="0"/>
+              </a:rPr>
+              <a:t>[</a:t>
+            </a:r>
+            <a:r>
+              <a:rPr lang="en-US" b="0" dirty="0" err="1">
+                <a:solidFill>
+                  <a:srgbClr val="C9D1D9"/>
+                </a:solidFill>
+                <a:effectLst/>
+                <a:latin typeface="Consolas" panose="020B0609020204030204" pitchFamily="49" charset="0"/>
+              </a:rPr>
+              <a:t>i</a:t>
+            </a:r>
+            <a:r>
+              <a:rPr lang="en-US" b="0" dirty="0">
+                <a:solidFill>
+                  <a:srgbClr val="BBBEBF"/>
+                </a:solidFill>
+                <a:effectLst/>
+                <a:latin typeface="Consolas" panose="020B0609020204030204" pitchFamily="49" charset="0"/>
+              </a:rPr>
+              <a:t>]</a:t>
+            </a:r>
+            <a:br>
+              <a:rPr lang="en-US" b="0" dirty="0">
+                <a:solidFill>
+                  <a:srgbClr val="BBBEBF"/>
+                </a:solidFill>
+                <a:effectLst/>
+                <a:latin typeface="Consolas" panose="020B0609020204030204" pitchFamily="49" charset="0"/>
+              </a:rPr>
+            </a:br>
+            <a:r>
+              <a:rPr lang="en-US" b="0" dirty="0">
+                <a:solidFill>
+                  <a:srgbClr val="BBBEBF"/>
+                </a:solidFill>
+                <a:effectLst/>
+                <a:latin typeface="Consolas" panose="020B0609020204030204" pitchFamily="49" charset="0"/>
+              </a:rPr>
+              <a:t>        </a:t>
+            </a:r>
+            <a:r>
+              <a:rPr lang="en-US" b="0" dirty="0">
+                <a:solidFill>
+                  <a:srgbClr val="C9D1D9"/>
+                </a:solidFill>
+                <a:effectLst/>
+                <a:latin typeface="Consolas" panose="020B0609020204030204" pitchFamily="49" charset="0"/>
+              </a:rPr>
+              <a:t>pred</a:t>
+            </a:r>
+            <a:r>
+              <a:rPr lang="en-US" b="0" dirty="0">
+                <a:solidFill>
+                  <a:srgbClr val="BBBEBF"/>
+                </a:solidFill>
+                <a:effectLst/>
+                <a:latin typeface="Consolas" panose="020B0609020204030204" pitchFamily="49" charset="0"/>
+              </a:rPr>
+              <a:t> </a:t>
+            </a:r>
+            <a:r>
+              <a:rPr lang="en-US" b="0" dirty="0">
+                <a:solidFill>
+                  <a:srgbClr val="D4D4D4"/>
+                </a:solidFill>
+                <a:effectLst/>
+                <a:latin typeface="Consolas" panose="020B0609020204030204" pitchFamily="49" charset="0"/>
+              </a:rPr>
+              <a:t>=</a:t>
+            </a:r>
+            <a:r>
+              <a:rPr lang="en-US" b="0" dirty="0">
+                <a:solidFill>
+                  <a:srgbClr val="BBBEBF"/>
+                </a:solidFill>
+                <a:effectLst/>
+                <a:latin typeface="Consolas" panose="020B0609020204030204" pitchFamily="49" charset="0"/>
+              </a:rPr>
+              <a:t> </a:t>
+            </a:r>
+            <a:r>
+              <a:rPr lang="en-US" b="0" dirty="0" err="1">
+                <a:solidFill>
+                  <a:srgbClr val="D2A8FF"/>
+                </a:solidFill>
+                <a:effectLst/>
+                <a:latin typeface="Consolas" panose="020B0609020204030204" pitchFamily="49" charset="0"/>
+              </a:rPr>
+              <a:t>neural_network</a:t>
+            </a:r>
+            <a:r>
+              <a:rPr lang="en-US" b="0" dirty="0">
+                <a:solidFill>
+                  <a:srgbClr val="BBBEBF"/>
+                </a:solidFill>
+                <a:effectLst/>
+                <a:latin typeface="Consolas" panose="020B0609020204030204" pitchFamily="49" charset="0"/>
+              </a:rPr>
+              <a:t>(</a:t>
+            </a:r>
+            <a:r>
+              <a:rPr lang="en-US" b="0" dirty="0">
+                <a:solidFill>
+                  <a:srgbClr val="C9D1D9"/>
+                </a:solidFill>
+                <a:effectLst/>
+                <a:latin typeface="Consolas" panose="020B0609020204030204" pitchFamily="49" charset="0"/>
+              </a:rPr>
+              <a:t>price</a:t>
+            </a:r>
+            <a:r>
+              <a:rPr lang="en-US" b="0" dirty="0">
+                <a:solidFill>
+                  <a:srgbClr val="BBBEBF"/>
+                </a:solidFill>
+                <a:effectLst/>
+                <a:latin typeface="Consolas" panose="020B0609020204030204" pitchFamily="49" charset="0"/>
+              </a:rPr>
+              <a:t>, </a:t>
+            </a:r>
+            <a:r>
+              <a:rPr lang="en-US" b="0" dirty="0">
+                <a:solidFill>
+                  <a:srgbClr val="C9D1D9"/>
+                </a:solidFill>
+                <a:effectLst/>
+                <a:latin typeface="Consolas" panose="020B0609020204030204" pitchFamily="49" charset="0"/>
+              </a:rPr>
+              <a:t>weight</a:t>
+            </a:r>
+            <a:r>
+              <a:rPr lang="en-US" b="0" dirty="0">
+                <a:solidFill>
+                  <a:srgbClr val="BBBEBF"/>
+                </a:solidFill>
+                <a:effectLst/>
+                <a:latin typeface="Consolas" panose="020B0609020204030204" pitchFamily="49" charset="0"/>
+              </a:rPr>
+              <a:t>)</a:t>
+            </a:r>
+            <a:br>
+              <a:rPr lang="en-US" b="0" dirty="0">
+                <a:solidFill>
+                  <a:srgbClr val="BBBEBF"/>
+                </a:solidFill>
+                <a:effectLst/>
+                <a:latin typeface="Consolas" panose="020B0609020204030204" pitchFamily="49" charset="0"/>
+              </a:rPr>
+            </a:br>
+            <a:r>
+              <a:rPr lang="en-US" b="0" dirty="0">
+                <a:solidFill>
+                  <a:srgbClr val="BBBEBF"/>
+                </a:solidFill>
+                <a:effectLst/>
+                <a:latin typeface="Consolas" panose="020B0609020204030204" pitchFamily="49" charset="0"/>
+              </a:rPr>
+              <a:t>        </a:t>
+            </a:r>
+            <a:r>
+              <a:rPr lang="en-US" b="0" dirty="0">
+                <a:solidFill>
+                  <a:srgbClr val="C9D1D9"/>
+                </a:solidFill>
+                <a:effectLst/>
+                <a:latin typeface="Consolas" panose="020B0609020204030204" pitchFamily="49" charset="0"/>
+              </a:rPr>
+              <a:t>error</a:t>
+            </a:r>
+            <a:r>
+              <a:rPr lang="en-US" b="0" dirty="0">
+                <a:solidFill>
+                  <a:srgbClr val="BBBEBF"/>
+                </a:solidFill>
+                <a:effectLst/>
+                <a:latin typeface="Consolas" panose="020B0609020204030204" pitchFamily="49" charset="0"/>
+              </a:rPr>
+              <a:t> </a:t>
+            </a:r>
+            <a:r>
+              <a:rPr lang="en-US" b="0" dirty="0">
+                <a:solidFill>
+                  <a:srgbClr val="D4D4D4"/>
+                </a:solidFill>
+                <a:effectLst/>
+                <a:latin typeface="Consolas" panose="020B0609020204030204" pitchFamily="49" charset="0"/>
+              </a:rPr>
+              <a:t>=</a:t>
+            </a:r>
+            <a:r>
+              <a:rPr lang="en-US" b="0" dirty="0">
+                <a:solidFill>
+                  <a:srgbClr val="BBBEBF"/>
+                </a:solidFill>
+                <a:effectLst/>
+                <a:latin typeface="Consolas" panose="020B0609020204030204" pitchFamily="49" charset="0"/>
+              </a:rPr>
+              <a:t> (</a:t>
+            </a:r>
+            <a:r>
+              <a:rPr lang="en-US" b="0" dirty="0">
+                <a:solidFill>
+                  <a:srgbClr val="C9D1D9"/>
+                </a:solidFill>
+                <a:effectLst/>
+                <a:latin typeface="Consolas" panose="020B0609020204030204" pitchFamily="49" charset="0"/>
+              </a:rPr>
+              <a:t>pred</a:t>
+            </a:r>
+            <a:r>
+              <a:rPr lang="en-US" b="0" dirty="0">
+                <a:solidFill>
+                  <a:srgbClr val="BBBEBF"/>
+                </a:solidFill>
+                <a:effectLst/>
+                <a:latin typeface="Consolas" panose="020B0609020204030204" pitchFamily="49" charset="0"/>
+              </a:rPr>
+              <a:t> </a:t>
+            </a:r>
+            <a:r>
+              <a:rPr lang="en-US" b="0" dirty="0">
+                <a:solidFill>
+                  <a:srgbClr val="D4D4D4"/>
+                </a:solidFill>
+                <a:effectLst/>
+                <a:latin typeface="Consolas" panose="020B0609020204030204" pitchFamily="49" charset="0"/>
+              </a:rPr>
+              <a:t>-</a:t>
+            </a:r>
+            <a:r>
+              <a:rPr lang="en-US" b="0" dirty="0">
+                <a:solidFill>
+                  <a:srgbClr val="BBBEBF"/>
+                </a:solidFill>
+                <a:effectLst/>
+                <a:latin typeface="Consolas" panose="020B0609020204030204" pitchFamily="49" charset="0"/>
+              </a:rPr>
+              <a:t> </a:t>
+            </a:r>
+            <a:r>
+              <a:rPr lang="en-US" b="0" dirty="0">
+                <a:solidFill>
+                  <a:srgbClr val="C9D1D9"/>
+                </a:solidFill>
+                <a:effectLst/>
+                <a:latin typeface="Consolas" panose="020B0609020204030204" pitchFamily="49" charset="0"/>
+              </a:rPr>
+              <a:t>target</a:t>
+            </a:r>
+            <a:r>
+              <a:rPr lang="en-US" b="0" dirty="0">
+                <a:solidFill>
+                  <a:srgbClr val="BBBEBF"/>
+                </a:solidFill>
+                <a:effectLst/>
+                <a:latin typeface="Consolas" panose="020B0609020204030204" pitchFamily="49" charset="0"/>
+              </a:rPr>
+              <a:t>) </a:t>
+            </a:r>
+            <a:r>
+              <a:rPr lang="en-US" b="0" dirty="0">
+                <a:solidFill>
+                  <a:srgbClr val="D4D4D4"/>
+                </a:solidFill>
+                <a:effectLst/>
+                <a:latin typeface="Consolas" panose="020B0609020204030204" pitchFamily="49" charset="0"/>
+              </a:rPr>
+              <a:t>**</a:t>
+            </a:r>
+            <a:r>
+              <a:rPr lang="en-US" b="0" dirty="0">
+                <a:solidFill>
+                  <a:srgbClr val="BBBEBF"/>
+                </a:solidFill>
+                <a:effectLst/>
+                <a:latin typeface="Consolas" panose="020B0609020204030204" pitchFamily="49" charset="0"/>
+              </a:rPr>
+              <a:t> </a:t>
+            </a:r>
+            <a:r>
+              <a:rPr lang="en-US" b="0" dirty="0">
+                <a:solidFill>
+                  <a:srgbClr val="B5CEA8"/>
+                </a:solidFill>
+                <a:effectLst/>
+                <a:latin typeface="Consolas" panose="020B0609020204030204" pitchFamily="49" charset="0"/>
+              </a:rPr>
+              <a:t>2</a:t>
+            </a:r>
+            <a:endParaRPr lang="en-US" b="0" dirty="0">
+              <a:solidFill>
+                <a:srgbClr val="BBBEBF"/>
+              </a:solidFill>
+              <a:effectLst/>
+              <a:latin typeface="Consolas" panose="020B0609020204030204" pitchFamily="49" charset="0"/>
+            </a:endParaRPr>
+          </a:p>
+          <a:p>
+            <a:r>
+              <a:rPr lang="en-US" b="0" dirty="0">
+                <a:solidFill>
+                  <a:srgbClr val="BBBEBF"/>
+                </a:solidFill>
+                <a:effectLst/>
+                <a:latin typeface="Consolas" panose="020B0609020204030204" pitchFamily="49" charset="0"/>
+              </a:rPr>
+              <a:t>        </a:t>
+            </a:r>
+            <a:r>
+              <a:rPr lang="en-US" b="0" dirty="0" err="1">
+                <a:solidFill>
+                  <a:srgbClr val="C9D1D9"/>
+                </a:solidFill>
+                <a:effectLst/>
+                <a:latin typeface="Consolas" panose="020B0609020204030204" pitchFamily="49" charset="0"/>
+              </a:rPr>
+              <a:t>total_error</a:t>
+            </a:r>
+            <a:r>
+              <a:rPr lang="en-US" b="0" dirty="0">
+                <a:solidFill>
+                  <a:srgbClr val="BBBEBF"/>
+                </a:solidFill>
+                <a:effectLst/>
+                <a:latin typeface="Consolas" panose="020B0609020204030204" pitchFamily="49" charset="0"/>
+              </a:rPr>
+              <a:t> </a:t>
+            </a:r>
+            <a:r>
+              <a:rPr lang="en-US" b="0" dirty="0">
+                <a:solidFill>
+                  <a:srgbClr val="D4D4D4"/>
+                </a:solidFill>
+                <a:effectLst/>
+                <a:latin typeface="Consolas" panose="020B0609020204030204" pitchFamily="49" charset="0"/>
+              </a:rPr>
+              <a:t>+=</a:t>
+            </a:r>
+            <a:r>
+              <a:rPr lang="en-US" b="0" dirty="0">
+                <a:solidFill>
+                  <a:srgbClr val="BBBEBF"/>
+                </a:solidFill>
+                <a:effectLst/>
+                <a:latin typeface="Consolas" panose="020B0609020204030204" pitchFamily="49" charset="0"/>
+              </a:rPr>
+              <a:t> </a:t>
+            </a:r>
+            <a:r>
+              <a:rPr lang="en-US" b="0" dirty="0">
+                <a:solidFill>
+                  <a:srgbClr val="C9D1D9"/>
+                </a:solidFill>
+                <a:effectLst/>
+                <a:latin typeface="Consolas" panose="020B0609020204030204" pitchFamily="49" charset="0"/>
+              </a:rPr>
+              <a:t>error</a:t>
+            </a:r>
+            <a:br>
+              <a:rPr lang="en-US" b="0" dirty="0">
+                <a:solidFill>
+                  <a:srgbClr val="BBBEBF"/>
+                </a:solidFill>
+                <a:effectLst/>
+                <a:latin typeface="Consolas" panose="020B0609020204030204" pitchFamily="49" charset="0"/>
+              </a:rPr>
+            </a:br>
+            <a:r>
+              <a:rPr lang="en-US" b="0" dirty="0">
+                <a:solidFill>
+                  <a:srgbClr val="BBBEBF"/>
+                </a:solidFill>
+                <a:effectLst/>
+                <a:latin typeface="Consolas" panose="020B0609020204030204" pitchFamily="49" charset="0"/>
+              </a:rPr>
+              <a:t>        </a:t>
+            </a:r>
+            <a:r>
+              <a:rPr lang="en-US" b="0" dirty="0" err="1">
+                <a:solidFill>
+                  <a:srgbClr val="C9D1D9"/>
+                </a:solidFill>
+                <a:effectLst/>
+                <a:latin typeface="Consolas" panose="020B0609020204030204" pitchFamily="49" charset="0"/>
+              </a:rPr>
+              <a:t>direction_and_amount</a:t>
+            </a:r>
+            <a:r>
+              <a:rPr lang="en-US" b="0" dirty="0">
+                <a:solidFill>
+                  <a:srgbClr val="BBBEBF"/>
+                </a:solidFill>
+                <a:effectLst/>
+                <a:latin typeface="Consolas" panose="020B0609020204030204" pitchFamily="49" charset="0"/>
+              </a:rPr>
+              <a:t> </a:t>
+            </a:r>
+            <a:r>
+              <a:rPr lang="en-US" b="0" dirty="0">
+                <a:solidFill>
+                  <a:srgbClr val="D4D4D4"/>
+                </a:solidFill>
+                <a:effectLst/>
+                <a:latin typeface="Consolas" panose="020B0609020204030204" pitchFamily="49" charset="0"/>
+              </a:rPr>
+              <a:t>=</a:t>
+            </a:r>
+            <a:r>
+              <a:rPr lang="en-US" b="0" dirty="0">
+                <a:solidFill>
+                  <a:srgbClr val="BBBEBF"/>
+                </a:solidFill>
+                <a:effectLst/>
+                <a:latin typeface="Consolas" panose="020B0609020204030204" pitchFamily="49" charset="0"/>
+              </a:rPr>
+              <a:t> (</a:t>
+            </a:r>
+            <a:r>
+              <a:rPr lang="en-US" b="0" dirty="0">
+                <a:solidFill>
+                  <a:srgbClr val="C9D1D9"/>
+                </a:solidFill>
+                <a:effectLst/>
+                <a:latin typeface="Consolas" panose="020B0609020204030204" pitchFamily="49" charset="0"/>
+              </a:rPr>
+              <a:t>pred</a:t>
+            </a:r>
+            <a:r>
+              <a:rPr lang="en-US" b="0" dirty="0">
+                <a:solidFill>
+                  <a:srgbClr val="BBBEBF"/>
+                </a:solidFill>
+                <a:effectLst/>
+                <a:latin typeface="Consolas" panose="020B0609020204030204" pitchFamily="49" charset="0"/>
+              </a:rPr>
+              <a:t> </a:t>
+            </a:r>
+            <a:r>
+              <a:rPr lang="en-US" b="0" dirty="0">
+                <a:solidFill>
+                  <a:srgbClr val="D4D4D4"/>
+                </a:solidFill>
+                <a:effectLst/>
+                <a:latin typeface="Consolas" panose="020B0609020204030204" pitchFamily="49" charset="0"/>
+              </a:rPr>
+              <a:t>-</a:t>
+            </a:r>
+            <a:r>
+              <a:rPr lang="en-US" b="0" dirty="0">
+                <a:solidFill>
+                  <a:srgbClr val="BBBEBF"/>
+                </a:solidFill>
+                <a:effectLst/>
+                <a:latin typeface="Consolas" panose="020B0609020204030204" pitchFamily="49" charset="0"/>
+              </a:rPr>
+              <a:t> </a:t>
+            </a:r>
+            <a:r>
+              <a:rPr lang="en-US" b="0" dirty="0">
+                <a:solidFill>
+                  <a:srgbClr val="C9D1D9"/>
+                </a:solidFill>
+                <a:effectLst/>
+                <a:latin typeface="Consolas" panose="020B0609020204030204" pitchFamily="49" charset="0"/>
+              </a:rPr>
+              <a:t>target</a:t>
+            </a:r>
+            <a:r>
+              <a:rPr lang="en-US" b="0" dirty="0">
+                <a:solidFill>
+                  <a:srgbClr val="BBBEBF"/>
+                </a:solidFill>
+                <a:effectLst/>
+                <a:latin typeface="Consolas" panose="020B0609020204030204" pitchFamily="49" charset="0"/>
+              </a:rPr>
+              <a:t>) </a:t>
+            </a:r>
+            <a:r>
+              <a:rPr lang="en-US" b="0" dirty="0">
+                <a:solidFill>
+                  <a:srgbClr val="D4D4D4"/>
+                </a:solidFill>
+                <a:effectLst/>
+                <a:latin typeface="Consolas" panose="020B0609020204030204" pitchFamily="49" charset="0"/>
+              </a:rPr>
+              <a:t>*</a:t>
+            </a:r>
+            <a:r>
+              <a:rPr lang="en-US" b="0" dirty="0">
+                <a:solidFill>
+                  <a:srgbClr val="BBBEBF"/>
+                </a:solidFill>
+                <a:effectLst/>
+                <a:latin typeface="Consolas" panose="020B0609020204030204" pitchFamily="49" charset="0"/>
+              </a:rPr>
+              <a:t> </a:t>
+            </a:r>
+            <a:r>
+              <a:rPr lang="en-US" b="0" dirty="0">
+                <a:solidFill>
+                  <a:srgbClr val="C9D1D9"/>
+                </a:solidFill>
+                <a:effectLst/>
+                <a:latin typeface="Consolas" panose="020B0609020204030204" pitchFamily="49" charset="0"/>
+              </a:rPr>
+              <a:t>price</a:t>
+            </a:r>
+            <a:br>
+              <a:rPr lang="en-US" b="0" dirty="0">
+                <a:solidFill>
+                  <a:srgbClr val="BBBEBF"/>
+                </a:solidFill>
+                <a:effectLst/>
+                <a:latin typeface="Consolas" panose="020B0609020204030204" pitchFamily="49" charset="0"/>
+              </a:rPr>
+            </a:br>
+            <a:r>
+              <a:rPr lang="en-US" b="0" dirty="0">
+                <a:solidFill>
+                  <a:srgbClr val="BBBEBF"/>
+                </a:solidFill>
+                <a:effectLst/>
+                <a:latin typeface="Consolas" panose="020B0609020204030204" pitchFamily="49" charset="0"/>
+              </a:rPr>
+              <a:t>        </a:t>
+            </a:r>
+            <a:r>
+              <a:rPr lang="en-US" b="0" dirty="0">
+                <a:solidFill>
+                  <a:srgbClr val="C9D1D9"/>
+                </a:solidFill>
+                <a:effectLst/>
+                <a:latin typeface="Consolas" panose="020B0609020204030204" pitchFamily="49" charset="0"/>
+              </a:rPr>
+              <a:t>weight</a:t>
+            </a:r>
+            <a:r>
+              <a:rPr lang="en-US" b="0" dirty="0">
+                <a:solidFill>
+                  <a:srgbClr val="BBBEBF"/>
+                </a:solidFill>
+                <a:effectLst/>
+                <a:latin typeface="Consolas" panose="020B0609020204030204" pitchFamily="49" charset="0"/>
+              </a:rPr>
+              <a:t> </a:t>
+            </a:r>
+            <a:r>
+              <a:rPr lang="en-US" b="0" dirty="0">
+                <a:solidFill>
+                  <a:srgbClr val="D4D4D4"/>
+                </a:solidFill>
+                <a:effectLst/>
+                <a:latin typeface="Consolas" panose="020B0609020204030204" pitchFamily="49" charset="0"/>
+              </a:rPr>
+              <a:t>=</a:t>
+            </a:r>
+            <a:r>
+              <a:rPr lang="en-US" b="0" dirty="0">
+                <a:solidFill>
+                  <a:srgbClr val="BBBEBF"/>
+                </a:solidFill>
+                <a:effectLst/>
+                <a:latin typeface="Consolas" panose="020B0609020204030204" pitchFamily="49" charset="0"/>
+              </a:rPr>
+              <a:t> </a:t>
+            </a:r>
+            <a:r>
+              <a:rPr lang="en-US" b="0" dirty="0">
+                <a:solidFill>
+                  <a:srgbClr val="C9D1D9"/>
+                </a:solidFill>
+                <a:effectLst/>
+                <a:latin typeface="Consolas" panose="020B0609020204030204" pitchFamily="49" charset="0"/>
+              </a:rPr>
+              <a:t>weight</a:t>
+            </a:r>
+            <a:r>
+              <a:rPr lang="en-US" b="0" dirty="0">
+                <a:solidFill>
+                  <a:srgbClr val="BBBEBF"/>
+                </a:solidFill>
+                <a:effectLst/>
+                <a:latin typeface="Consolas" panose="020B0609020204030204" pitchFamily="49" charset="0"/>
+              </a:rPr>
+              <a:t> </a:t>
+            </a:r>
+            <a:r>
+              <a:rPr lang="en-US" b="0" dirty="0">
+                <a:solidFill>
+                  <a:srgbClr val="D4D4D4"/>
+                </a:solidFill>
+                <a:effectLst/>
+                <a:latin typeface="Consolas" panose="020B0609020204030204" pitchFamily="49" charset="0"/>
+              </a:rPr>
+              <a:t>-</a:t>
+            </a:r>
+            <a:r>
+              <a:rPr lang="en-US" b="0" dirty="0">
+                <a:solidFill>
+                  <a:srgbClr val="BBBEBF"/>
+                </a:solidFill>
+                <a:effectLst/>
+                <a:latin typeface="Consolas" panose="020B0609020204030204" pitchFamily="49" charset="0"/>
+              </a:rPr>
+              <a:t> alpha </a:t>
+            </a:r>
+            <a:r>
+              <a:rPr lang="en-US" b="0" dirty="0">
+                <a:solidFill>
+                  <a:srgbClr val="D4D4D4"/>
+                </a:solidFill>
+                <a:effectLst/>
+                <a:latin typeface="Consolas" panose="020B0609020204030204" pitchFamily="49" charset="0"/>
+              </a:rPr>
+              <a:t>*</a:t>
+            </a:r>
+            <a:r>
+              <a:rPr lang="en-US" b="0" dirty="0">
+                <a:solidFill>
+                  <a:srgbClr val="BBBEBF"/>
+                </a:solidFill>
+                <a:effectLst/>
+                <a:latin typeface="Consolas" panose="020B0609020204030204" pitchFamily="49" charset="0"/>
+              </a:rPr>
+              <a:t> </a:t>
+            </a:r>
+            <a:r>
+              <a:rPr lang="en-US" b="0" dirty="0" err="1">
+                <a:solidFill>
+                  <a:srgbClr val="C9D1D9"/>
+                </a:solidFill>
+                <a:effectLst/>
+                <a:latin typeface="Consolas" panose="020B0609020204030204" pitchFamily="49" charset="0"/>
+              </a:rPr>
+              <a:t>direction_and_amount</a:t>
+            </a:r>
+            <a:endParaRPr lang="en-US" b="0" dirty="0">
+              <a:solidFill>
+                <a:srgbClr val="BBBEBF"/>
+              </a:solidFill>
+              <a:effectLst/>
+              <a:latin typeface="Consolas" panose="020B0609020204030204" pitchFamily="49" charset="0"/>
+            </a:endParaRPr>
+          </a:p>
+        </p:txBody>
+      </p:sp>
+      <p:sp>
+        <p:nvSpPr>
+          <p:cNvPr id="10" name="TextBox 9">
+            <a:extLst>
+              <a:ext uri="{FF2B5EF4-FFF2-40B4-BE49-F238E27FC236}">
+                <a16:creationId xmlns:a16="http://schemas.microsoft.com/office/drawing/2014/main" id="{41369A3A-A82E-55AF-D5B5-0E7E954B3D1B}"/>
+              </a:ext>
+            </a:extLst>
+          </p:cNvPr>
+          <p:cNvSpPr txBox="1"/>
+          <p:nvPr/>
+        </p:nvSpPr>
+        <p:spPr>
+          <a:xfrm>
+            <a:off x="541114" y="4540201"/>
+            <a:ext cx="6038062" cy="1200329"/>
+          </a:xfrm>
+          <a:prstGeom prst="rect">
+            <a:avLst/>
+          </a:prstGeom>
+          <a:noFill/>
+        </p:spPr>
+        <p:txBody>
+          <a:bodyPr wrap="square">
+            <a:spAutoFit/>
+          </a:bodyPr>
+          <a:lstStyle/>
+          <a:p>
+            <a:r>
+              <a:rPr lang="ru-RU" dirty="0">
+                <a:solidFill>
+                  <a:schemeClr val="bg1"/>
+                </a:solidFill>
+              </a:rPr>
+              <a:t>Теперь шаг маленький:</a:t>
+            </a:r>
+          </a:p>
+          <a:p>
+            <a:r>
+              <a:rPr lang="en-US" dirty="0">
+                <a:solidFill>
+                  <a:schemeClr val="bg1"/>
+                </a:solidFill>
+              </a:rPr>
+              <a:t>weight = weight - alpha * gradient</a:t>
+            </a:r>
+            <a:endParaRPr lang="ru-RU" dirty="0">
+              <a:solidFill>
+                <a:schemeClr val="bg1"/>
+              </a:solidFill>
+            </a:endParaRPr>
+          </a:p>
+          <a:p>
+            <a:r>
+              <a:rPr lang="ru-RU" dirty="0">
+                <a:solidFill>
+                  <a:schemeClr val="bg1"/>
+                </a:solidFill>
+              </a:rPr>
+              <a:t>Если </a:t>
+            </a:r>
+            <a:r>
+              <a:rPr lang="en-US" dirty="0">
+                <a:solidFill>
+                  <a:schemeClr val="bg1"/>
+                </a:solidFill>
+              </a:rPr>
+              <a:t>gradient = -1012</a:t>
+            </a:r>
+            <a:r>
+              <a:rPr lang="ru-RU" dirty="0">
+                <a:solidFill>
+                  <a:schemeClr val="bg1"/>
+                </a:solidFill>
+              </a:rPr>
+              <a:t> и </a:t>
+            </a:r>
+            <a:r>
+              <a:rPr lang="en-US" dirty="0">
+                <a:solidFill>
+                  <a:schemeClr val="bg1"/>
+                </a:solidFill>
+              </a:rPr>
+              <a:t>alpha = 0.0001</a:t>
+            </a:r>
+            <a:r>
+              <a:rPr lang="ru-RU" dirty="0">
+                <a:solidFill>
+                  <a:schemeClr val="bg1"/>
+                </a:solidFill>
+              </a:rPr>
+              <a:t>. То </a:t>
+            </a:r>
+            <a:r>
+              <a:rPr lang="en-US" dirty="0">
+                <a:solidFill>
+                  <a:schemeClr val="bg1"/>
+                </a:solidFill>
+              </a:rPr>
+              <a:t>weight = -0.1012</a:t>
+            </a:r>
+            <a:endParaRPr lang="ru-RU" dirty="0">
+              <a:solidFill>
+                <a:schemeClr val="bg1"/>
+              </a:solidFill>
+            </a:endParaRPr>
+          </a:p>
+          <a:p>
+            <a:r>
+              <a:rPr lang="ru-RU" dirty="0">
+                <a:solidFill>
+                  <a:schemeClr val="bg1"/>
+                </a:solidFill>
+              </a:rPr>
+              <a:t>Вес меняется плавно, а не прыгает на тысячи.</a:t>
+            </a:r>
+          </a:p>
+        </p:txBody>
+      </p:sp>
+      <p:sp>
+        <p:nvSpPr>
+          <p:cNvPr id="12" name="TextBox 11">
+            <a:extLst>
+              <a:ext uri="{FF2B5EF4-FFF2-40B4-BE49-F238E27FC236}">
+                <a16:creationId xmlns:a16="http://schemas.microsoft.com/office/drawing/2014/main" id="{30D15312-47C6-35F3-DB42-A2C378226C51}"/>
+              </a:ext>
+            </a:extLst>
+          </p:cNvPr>
+          <p:cNvSpPr txBox="1"/>
+          <p:nvPr/>
+        </p:nvSpPr>
+        <p:spPr>
+          <a:xfrm rot="1578714">
+            <a:off x="10509554" y="1271366"/>
+            <a:ext cx="3838969" cy="646331"/>
+          </a:xfrm>
+          <a:prstGeom prst="rect">
+            <a:avLst/>
+          </a:prstGeom>
+          <a:noFill/>
+        </p:spPr>
+        <p:txBody>
+          <a:bodyPr wrap="square">
+            <a:spAutoFit/>
+          </a:bodyPr>
+          <a:lstStyle/>
+          <a:p>
+            <a:pPr algn="ctr"/>
+            <a:r>
+              <a:rPr lang="ru-RU" dirty="0">
+                <a:solidFill>
+                  <a:schemeClr val="bg1"/>
+                </a:solidFill>
+              </a:rPr>
+              <a:t>Градиент показывает направление.</a:t>
+            </a:r>
+            <a:br>
+              <a:rPr lang="ru-RU" dirty="0">
+                <a:solidFill>
+                  <a:schemeClr val="bg1"/>
+                </a:solidFill>
+              </a:rPr>
+            </a:br>
+            <a:r>
+              <a:rPr lang="ru-RU" dirty="0" err="1">
+                <a:solidFill>
+                  <a:schemeClr val="bg1"/>
+                </a:solidFill>
+              </a:rPr>
+              <a:t>alpha</a:t>
+            </a:r>
+            <a:r>
+              <a:rPr lang="ru-RU" dirty="0">
+                <a:solidFill>
+                  <a:schemeClr val="bg1"/>
+                </a:solidFill>
+              </a:rPr>
+              <a:t> показывает размер шага.</a:t>
+            </a:r>
+          </a:p>
+        </p:txBody>
+      </p:sp>
+    </p:spTree>
+    <p:extLst>
+      <p:ext uri="{BB962C8B-B14F-4D97-AF65-F5344CB8AC3E}">
+        <p14:creationId xmlns:p14="http://schemas.microsoft.com/office/powerpoint/2010/main" val="691518423"/>
+      </p:ext>
+    </p:extLst>
+  </p:cSld>
+  <p:clrMapOvr>
+    <a:masterClrMapping/>
+  </p:clrMapOvr>
+</p:sld>
+</file>
+
+<file path=ppt/slides/slide44.xml><?xml version="1.0" encoding="utf-8"?>
+<p:sld xmlns:a="http://schemas.openxmlformats.org/drawingml/2006/main" xmlns:r="http://schemas.openxmlformats.org/officeDocument/2006/relationships" xmlns:p="http://schemas.openxmlformats.org/presentationml/2006/main">
+  <p:cSld>
+    <p:bg>
+      <p:bgPr>
+        <a:solidFill>
+          <a:srgbClr val="000000"/>
+        </a:solidFill>
+        <a:effectLst/>
+      </p:bgPr>
+    </p:bg>
+    <p:spTree>
+      <p:nvGrpSpPr>
+        <p:cNvPr id="1" name=""/>
+        <p:cNvGrpSpPr/>
+        <p:nvPr/>
+      </p:nvGrpSpPr>
+      <p:grpSpPr>
+        <a:xfrm>
+          <a:off x="0" y="0"/>
+          <a:ext cx="0" cy="0"/>
+          <a:chOff x="0" y="0"/>
+          <a:chExt cx="0" cy="0"/>
+        </a:xfrm>
+      </p:grpSpPr>
+      <p:sp>
+        <p:nvSpPr>
+          <p:cNvPr id="4" name="Rectangle 3"/>
+          <p:cNvSpPr/>
+          <p:nvPr/>
+        </p:nvSpPr>
+        <p:spPr>
+          <a:xfrm>
+            <a:off x="0" y="7772400"/>
+            <a:ext cx="14630400" cy="457200"/>
+          </a:xfrm>
+          <a:prstGeom prst="rect">
+            <a:avLst/>
+          </a:prstGeom>
+          <a:solidFill>
+            <a:srgbClr val="640064"/>
+          </a:solidFill>
+          <a:ln>
+            <a:noFill/>
+          </a:ln>
+        </p:spPr>
+        <p:style>
+          <a:lnRef idx="1">
+            <a:schemeClr val="accent1"/>
+          </a:lnRef>
+          <a:fillRef idx="3">
+            <a:schemeClr val="accent1"/>
+          </a:fillRef>
+          <a:effectRef idx="2">
+            <a:schemeClr val="accent1"/>
+          </a:effectRef>
+          <a:fontRef idx="minor">
+            <a:schemeClr val="lt1"/>
+          </a:fontRef>
+        </p:style>
+        <p:txBody>
+          <a:bodyPr rtlCol="0" anchor="ctr"/>
+          <a:lstStyle/>
+          <a:p>
+            <a:pPr algn="ctr"/>
+            <a:endParaRPr>
+              <a:solidFill>
+                <a:schemeClr val="bg1"/>
+              </a:solidFill>
+            </a:endParaRPr>
+          </a:p>
+        </p:txBody>
+      </p:sp>
+      <p:sp>
+        <p:nvSpPr>
+          <p:cNvPr id="3" name="TextBox 2">
+            <a:extLst>
+              <a:ext uri="{FF2B5EF4-FFF2-40B4-BE49-F238E27FC236}">
+                <a16:creationId xmlns:a16="http://schemas.microsoft.com/office/drawing/2014/main" id="{60C94DDE-3021-A7B8-613F-8CDEE0F3BF48}"/>
+              </a:ext>
+            </a:extLst>
+          </p:cNvPr>
+          <p:cNvSpPr txBox="1"/>
+          <p:nvPr/>
+        </p:nvSpPr>
+        <p:spPr>
+          <a:xfrm>
+            <a:off x="442912" y="281672"/>
+            <a:ext cx="13139737" cy="769441"/>
+          </a:xfrm>
+          <a:prstGeom prst="rect">
+            <a:avLst/>
+          </a:prstGeom>
+          <a:noFill/>
+        </p:spPr>
+        <p:txBody>
+          <a:bodyPr wrap="square">
+            <a:spAutoFit/>
+          </a:bodyPr>
+          <a:lstStyle/>
+          <a:p>
+            <a:r>
+              <a:rPr lang="ru-RU" sz="4400" b="1" dirty="0">
+                <a:solidFill>
+                  <a:schemeClr val="bg1"/>
+                </a:solidFill>
+              </a:rPr>
+              <a:t>Пробуем</a:t>
+            </a:r>
+          </a:p>
+        </p:txBody>
+      </p:sp>
+      <p:sp>
+        <p:nvSpPr>
+          <p:cNvPr id="2" name="TextBox 1">
+            <a:extLst>
+              <a:ext uri="{FF2B5EF4-FFF2-40B4-BE49-F238E27FC236}">
+                <a16:creationId xmlns:a16="http://schemas.microsoft.com/office/drawing/2014/main" id="{03EB8301-CC7D-A7A3-15C3-810BE0BC42DA}"/>
+              </a:ext>
+            </a:extLst>
+          </p:cNvPr>
+          <p:cNvSpPr txBox="1"/>
+          <p:nvPr/>
+        </p:nvSpPr>
+        <p:spPr>
+          <a:xfrm>
+            <a:off x="541114" y="1887685"/>
+            <a:ext cx="7469332" cy="954107"/>
+          </a:xfrm>
+          <a:prstGeom prst="rect">
+            <a:avLst/>
+          </a:prstGeom>
+          <a:noFill/>
+        </p:spPr>
+        <p:txBody>
+          <a:bodyPr wrap="square">
+            <a:spAutoFit/>
+          </a:bodyPr>
+          <a:lstStyle/>
+          <a:p>
+            <a:r>
+              <a:rPr lang="ru-RU" sz="2800" dirty="0">
+                <a:solidFill>
+                  <a:schemeClr val="bg1"/>
+                </a:solidFill>
+              </a:rPr>
+              <a:t>Добавим в код </a:t>
+            </a:r>
+            <a:r>
+              <a:rPr lang="en-US" sz="2800" dirty="0">
+                <a:solidFill>
+                  <a:schemeClr val="bg1"/>
+                </a:solidFill>
+              </a:rPr>
+              <a:t>alpha </a:t>
+            </a:r>
+            <a:r>
+              <a:rPr lang="ru-RU" sz="2800" dirty="0">
+                <a:solidFill>
+                  <a:schemeClr val="bg1"/>
+                </a:solidFill>
+              </a:rPr>
+              <a:t>и </a:t>
+            </a:r>
+            <a:r>
+              <a:rPr lang="en-US" sz="2800" dirty="0">
+                <a:solidFill>
+                  <a:schemeClr val="bg1"/>
+                </a:solidFill>
+              </a:rPr>
+              <a:t>bias</a:t>
+            </a:r>
+            <a:r>
+              <a:rPr lang="ru-RU" sz="2800" dirty="0">
+                <a:solidFill>
+                  <a:schemeClr val="bg1"/>
+                </a:solidFill>
+              </a:rPr>
+              <a:t> (если его нет)</a:t>
+            </a:r>
+          </a:p>
+          <a:p>
+            <a:r>
+              <a:rPr lang="ru-RU" sz="2800" dirty="0">
+                <a:solidFill>
+                  <a:schemeClr val="bg1"/>
+                </a:solidFill>
+              </a:rPr>
+              <a:t>Сделаем на несколько нейронов</a:t>
+            </a:r>
+          </a:p>
+        </p:txBody>
+      </p:sp>
+    </p:spTree>
+    <p:extLst>
+      <p:ext uri="{BB962C8B-B14F-4D97-AF65-F5344CB8AC3E}">
+        <p14:creationId xmlns:p14="http://schemas.microsoft.com/office/powerpoint/2010/main" val="3956513240"/>
       </p:ext>
     </p:extLst>
   </p:cSld>

--- a/1. ML first 28.pptx
+++ b/1. ML first 28.pptx
@@ -49,6 +49,14 @@
     <p:sldId id="342" r:id="rId43"/>
     <p:sldId id="343" r:id="rId44"/>
     <p:sldId id="344" r:id="rId45"/>
+    <p:sldId id="345" r:id="rId46"/>
+    <p:sldId id="346" r:id="rId47"/>
+    <p:sldId id="347" r:id="rId48"/>
+    <p:sldId id="348" r:id="rId49"/>
+    <p:sldId id="349" r:id="rId50"/>
+    <p:sldId id="350" r:id="rId51"/>
+    <p:sldId id="351" r:id="rId52"/>
+    <p:sldId id="352" r:id="rId53"/>
   </p:sldIdLst>
   <p:sldSz cx="14630400" cy="8229600"/>
   <p:notesSz cx="6858000" cy="9144000"/>
@@ -345,7 +353,7 @@
           <a:p>
             <a:fld id="{5BCAD085-E8A6-8845-BD4E-CB4CCA059FC4}" type="datetimeFigureOut">
               <a:rPr lang="en-US" smtClean="0"/>
-              <a:t>3/28/2026</a:t>
+              <a:t>4/4/2026</a:t>
             </a:fld>
             <a:endParaRPr lang="en-US"/>
           </a:p>
@@ -513,7 +521,7 @@
           <a:p>
             <a:fld id="{5BCAD085-E8A6-8845-BD4E-CB4CCA059FC4}" type="datetimeFigureOut">
               <a:rPr lang="en-US" smtClean="0"/>
-              <a:t>3/28/2026</a:t>
+              <a:t>4/4/2026</a:t>
             </a:fld>
             <a:endParaRPr lang="en-US"/>
           </a:p>
@@ -691,7 +699,7 @@
           <a:p>
             <a:fld id="{5BCAD085-E8A6-8845-BD4E-CB4CCA059FC4}" type="datetimeFigureOut">
               <a:rPr lang="en-US" smtClean="0"/>
-              <a:t>3/28/2026</a:t>
+              <a:t>4/4/2026</a:t>
             </a:fld>
             <a:endParaRPr lang="en-US"/>
           </a:p>
@@ -859,7 +867,7 @@
           <a:p>
             <a:fld id="{5BCAD085-E8A6-8845-BD4E-CB4CCA059FC4}" type="datetimeFigureOut">
               <a:rPr lang="en-US" smtClean="0"/>
-              <a:t>3/28/2026</a:t>
+              <a:t>4/4/2026</a:t>
             </a:fld>
             <a:endParaRPr lang="en-US"/>
           </a:p>
@@ -1104,7 +1112,7 @@
           <a:p>
             <a:fld id="{5BCAD085-E8A6-8845-BD4E-CB4CCA059FC4}" type="datetimeFigureOut">
               <a:rPr lang="en-US" smtClean="0"/>
-              <a:t>3/28/2026</a:t>
+              <a:t>4/4/2026</a:t>
             </a:fld>
             <a:endParaRPr lang="en-US"/>
           </a:p>
@@ -1389,7 +1397,7 @@
           <a:p>
             <a:fld id="{5BCAD085-E8A6-8845-BD4E-CB4CCA059FC4}" type="datetimeFigureOut">
               <a:rPr lang="en-US" smtClean="0"/>
-              <a:t>3/28/2026</a:t>
+              <a:t>4/4/2026</a:t>
             </a:fld>
             <a:endParaRPr lang="en-US"/>
           </a:p>
@@ -1808,7 +1816,7 @@
           <a:p>
             <a:fld id="{5BCAD085-E8A6-8845-BD4E-CB4CCA059FC4}" type="datetimeFigureOut">
               <a:rPr lang="en-US" smtClean="0"/>
-              <a:t>3/28/2026</a:t>
+              <a:t>4/4/2026</a:t>
             </a:fld>
             <a:endParaRPr lang="en-US"/>
           </a:p>
@@ -1925,7 +1933,7 @@
           <a:p>
             <a:fld id="{5BCAD085-E8A6-8845-BD4E-CB4CCA059FC4}" type="datetimeFigureOut">
               <a:rPr lang="en-US" smtClean="0"/>
-              <a:t>3/28/2026</a:t>
+              <a:t>4/4/2026</a:t>
             </a:fld>
             <a:endParaRPr lang="en-US"/>
           </a:p>
@@ -2020,7 +2028,7 @@
           <a:p>
             <a:fld id="{5BCAD085-E8A6-8845-BD4E-CB4CCA059FC4}" type="datetimeFigureOut">
               <a:rPr lang="en-US" smtClean="0"/>
-              <a:t>3/28/2026</a:t>
+              <a:t>4/4/2026</a:t>
             </a:fld>
             <a:endParaRPr lang="en-US"/>
           </a:p>
@@ -2295,7 +2303,7 @@
           <a:p>
             <a:fld id="{5BCAD085-E8A6-8845-BD4E-CB4CCA059FC4}" type="datetimeFigureOut">
               <a:rPr lang="en-US" smtClean="0"/>
-              <a:t>3/28/2026</a:t>
+              <a:t>4/4/2026</a:t>
             </a:fld>
             <a:endParaRPr lang="en-US"/>
           </a:p>
@@ -2547,7 +2555,7 @@
           <a:p>
             <a:fld id="{5BCAD085-E8A6-8845-BD4E-CB4CCA059FC4}" type="datetimeFigureOut">
               <a:rPr lang="en-US" smtClean="0"/>
-              <a:t>3/28/2026</a:t>
+              <a:t>4/4/2026</a:t>
             </a:fld>
             <a:endParaRPr lang="en-US"/>
           </a:p>
@@ -2758,7 +2766,7 @@
           <a:p>
             <a:fld id="{5BCAD085-E8A6-8845-BD4E-CB4CCA059FC4}" type="datetimeFigureOut">
               <a:rPr lang="en-US" smtClean="0"/>
-              <a:t>3/28/2026</a:t>
+              <a:t>4/4/2026</a:t>
             </a:fld>
             <a:endParaRPr lang="en-US"/>
           </a:p>
@@ -32224,6 +32232,1274 @@
 </p:sld>
 </file>
 
+<file path=ppt/slides/slide45.xml><?xml version="1.0" encoding="utf-8"?>
+<p:sld xmlns:a="http://schemas.openxmlformats.org/drawingml/2006/main" xmlns:r="http://schemas.openxmlformats.org/officeDocument/2006/relationships" xmlns:p="http://schemas.openxmlformats.org/presentationml/2006/main">
+  <p:cSld>
+    <p:bg>
+      <p:bgPr>
+        <a:solidFill>
+          <a:srgbClr val="972996"/>
+        </a:solidFill>
+        <a:effectLst/>
+      </p:bgPr>
+    </p:bg>
+    <p:spTree>
+      <p:nvGrpSpPr>
+        <p:cNvPr id="1" name=""/>
+        <p:cNvGrpSpPr/>
+        <p:nvPr/>
+      </p:nvGrpSpPr>
+      <p:grpSpPr>
+        <a:xfrm>
+          <a:off x="0" y="0"/>
+          <a:ext cx="0" cy="0"/>
+          <a:chOff x="0" y="0"/>
+          <a:chExt cx="0" cy="0"/>
+        </a:xfrm>
+      </p:grpSpPr>
+      <p:pic>
+        <p:nvPicPr>
+          <p:cNvPr id="4" name="Picture 3" descr="logo.png"/>
+          <p:cNvPicPr>
+            <a:picLocks noChangeAspect="1"/>
+          </p:cNvPicPr>
+          <p:nvPr/>
+        </p:nvPicPr>
+        <p:blipFill>
+          <a:blip r:embed="rId2"/>
+          <a:stretch>
+            <a:fillRect/>
+          </a:stretch>
+        </p:blipFill>
+        <p:spPr>
+          <a:xfrm>
+            <a:off x="12344400" y="274320"/>
+            <a:ext cx="1097280" cy="1080473"/>
+          </a:xfrm>
+          <a:prstGeom prst="rect">
+            <a:avLst/>
+          </a:prstGeom>
+        </p:spPr>
+      </p:pic>
+      <p:sp>
+        <p:nvSpPr>
+          <p:cNvPr id="5" name="Rectangle 4"/>
+          <p:cNvSpPr/>
+          <p:nvPr/>
+        </p:nvSpPr>
+        <p:spPr>
+          <a:xfrm>
+            <a:off x="0" y="7772400"/>
+            <a:ext cx="14630400" cy="457200"/>
+          </a:xfrm>
+          <a:prstGeom prst="rect">
+            <a:avLst/>
+          </a:prstGeom>
+          <a:solidFill>
+            <a:srgbClr val="E6E6E6"/>
+          </a:solidFill>
+          <a:ln>
+            <a:noFill/>
+          </a:ln>
+        </p:spPr>
+        <p:style>
+          <a:lnRef idx="1">
+            <a:schemeClr val="accent1"/>
+          </a:lnRef>
+          <a:fillRef idx="3">
+            <a:schemeClr val="accent1"/>
+          </a:fillRef>
+          <a:effectRef idx="2">
+            <a:schemeClr val="accent1"/>
+          </a:effectRef>
+          <a:fontRef idx="minor">
+            <a:schemeClr val="lt1"/>
+          </a:fontRef>
+        </p:style>
+        <p:txBody>
+          <a:bodyPr rtlCol="0" anchor="ctr"/>
+          <a:lstStyle/>
+          <a:p>
+            <a:pPr algn="ctr"/>
+            <a:endParaRPr/>
+          </a:p>
+        </p:txBody>
+      </p:sp>
+      <p:sp>
+        <p:nvSpPr>
+          <p:cNvPr id="3" name="TextBox 2">
+            <a:extLst>
+              <a:ext uri="{FF2B5EF4-FFF2-40B4-BE49-F238E27FC236}">
+                <a16:creationId xmlns:a16="http://schemas.microsoft.com/office/drawing/2014/main" id="{C315D28A-F529-C361-6B0C-54FC6D10368B}"/>
+              </a:ext>
+            </a:extLst>
+          </p:cNvPr>
+          <p:cNvSpPr txBox="1"/>
+          <p:nvPr/>
+        </p:nvSpPr>
+        <p:spPr>
+          <a:xfrm>
+            <a:off x="625737" y="289929"/>
+            <a:ext cx="5043753" cy="769441"/>
+          </a:xfrm>
+          <a:prstGeom prst="rect">
+            <a:avLst/>
+          </a:prstGeom>
+          <a:noFill/>
+        </p:spPr>
+        <p:txBody>
+          <a:bodyPr wrap="none">
+            <a:spAutoFit/>
+          </a:bodyPr>
+          <a:lstStyle/>
+          <a:p>
+            <a:r>
+              <a:rPr lang="ru-RU" sz="4400" b="1" dirty="0">
+                <a:solidFill>
+                  <a:schemeClr val="bg1"/>
+                </a:solidFill>
+              </a:rPr>
+              <a:t>Задача о светофоре</a:t>
+            </a:r>
+          </a:p>
+        </p:txBody>
+      </p:sp>
+      <p:sp>
+        <p:nvSpPr>
+          <p:cNvPr id="10" name="TextBox 9">
+            <a:extLst>
+              <a:ext uri="{FF2B5EF4-FFF2-40B4-BE49-F238E27FC236}">
+                <a16:creationId xmlns:a16="http://schemas.microsoft.com/office/drawing/2014/main" id="{41369A3A-A82E-55AF-D5B5-0E7E954B3D1B}"/>
+              </a:ext>
+            </a:extLst>
+          </p:cNvPr>
+          <p:cNvSpPr txBox="1"/>
+          <p:nvPr/>
+        </p:nvSpPr>
+        <p:spPr>
+          <a:xfrm>
+            <a:off x="345088" y="1059370"/>
+            <a:ext cx="10220089" cy="923330"/>
+          </a:xfrm>
+          <a:prstGeom prst="rect">
+            <a:avLst/>
+          </a:prstGeom>
+          <a:noFill/>
+        </p:spPr>
+        <p:txBody>
+          <a:bodyPr wrap="square">
+            <a:spAutoFit/>
+          </a:bodyPr>
+          <a:lstStyle/>
+          <a:p>
+            <a:r>
+              <a:rPr lang="ru-RU" dirty="0">
+                <a:solidFill>
+                  <a:schemeClr val="bg1"/>
+                </a:solidFill>
+              </a:rPr>
+              <a:t>Представьте, что вы идете по улице в незнакомой стране. Подойдя к перекрестку, поднимаете глаза и видите светофор незнакомого устройства. Как узнать, по какому сигналу можно безопасно пересечь проезжую часть?</a:t>
+            </a:r>
+          </a:p>
+        </p:txBody>
+      </p:sp>
+      <p:sp>
+        <p:nvSpPr>
+          <p:cNvPr id="12" name="TextBox 11">
+            <a:extLst>
+              <a:ext uri="{FF2B5EF4-FFF2-40B4-BE49-F238E27FC236}">
+                <a16:creationId xmlns:a16="http://schemas.microsoft.com/office/drawing/2014/main" id="{30D15312-47C6-35F3-DB42-A2C378226C51}"/>
+              </a:ext>
+            </a:extLst>
+          </p:cNvPr>
+          <p:cNvSpPr txBox="1"/>
+          <p:nvPr/>
+        </p:nvSpPr>
+        <p:spPr>
+          <a:xfrm rot="1578714">
+            <a:off x="10509554" y="1132867"/>
+            <a:ext cx="3838969" cy="923330"/>
+          </a:xfrm>
+          <a:prstGeom prst="rect">
+            <a:avLst/>
+          </a:prstGeom>
+          <a:noFill/>
+        </p:spPr>
+        <p:txBody>
+          <a:bodyPr wrap="square">
+            <a:spAutoFit/>
+          </a:bodyPr>
+          <a:lstStyle/>
+          <a:p>
+            <a:pPr algn="ctr"/>
+            <a:r>
+              <a:rPr lang="ru-RU" i="1" dirty="0">
+                <a:solidFill>
+                  <a:schemeClr val="bg1"/>
+                </a:solidFill>
+              </a:rPr>
+              <a:t>Программируя на </a:t>
+            </a:r>
+            <a:r>
+              <a:rPr lang="ru-RU" i="1" dirty="0" err="1">
+                <a:solidFill>
+                  <a:schemeClr val="bg1"/>
+                </a:solidFill>
+              </a:rPr>
+              <a:t>Ардуино</a:t>
+            </a:r>
+            <a:r>
+              <a:rPr lang="ru-RU" i="1" dirty="0">
+                <a:solidFill>
+                  <a:schemeClr val="bg1"/>
+                </a:solidFill>
+              </a:rPr>
+              <a:t> я понял, что большинство детей не знает как работает светофор</a:t>
+            </a:r>
+          </a:p>
+        </p:txBody>
+      </p:sp>
+      <p:pic>
+        <p:nvPicPr>
+          <p:cNvPr id="9" name="Рисунок 8">
+            <a:extLst>
+              <a:ext uri="{FF2B5EF4-FFF2-40B4-BE49-F238E27FC236}">
+                <a16:creationId xmlns:a16="http://schemas.microsoft.com/office/drawing/2014/main" id="{9C797F51-BC55-E90A-7A6F-8B14E2DD029E}"/>
+              </a:ext>
+            </a:extLst>
+          </p:cNvPr>
+          <p:cNvPicPr>
+            <a:picLocks noChangeAspect="1"/>
+          </p:cNvPicPr>
+          <p:nvPr/>
+        </p:nvPicPr>
+        <p:blipFill>
+          <a:blip r:embed="rId3"/>
+          <a:stretch>
+            <a:fillRect/>
+          </a:stretch>
+        </p:blipFill>
+        <p:spPr>
+          <a:xfrm>
+            <a:off x="3641699" y="2712198"/>
+            <a:ext cx="6591300" cy="1943100"/>
+          </a:xfrm>
+          <a:prstGeom prst="rect">
+            <a:avLst/>
+          </a:prstGeom>
+        </p:spPr>
+      </p:pic>
+      <p:sp>
+        <p:nvSpPr>
+          <p:cNvPr id="13" name="TextBox 12">
+            <a:extLst>
+              <a:ext uri="{FF2B5EF4-FFF2-40B4-BE49-F238E27FC236}">
+                <a16:creationId xmlns:a16="http://schemas.microsoft.com/office/drawing/2014/main" id="{FD01884E-EB19-1A5D-AFC5-20308679A8FD}"/>
+              </a:ext>
+            </a:extLst>
+          </p:cNvPr>
+          <p:cNvSpPr txBox="1"/>
+          <p:nvPr/>
+        </p:nvSpPr>
+        <p:spPr>
+          <a:xfrm>
+            <a:off x="2100853" y="4951784"/>
+            <a:ext cx="9672991" cy="1477328"/>
+          </a:xfrm>
+          <a:prstGeom prst="rect">
+            <a:avLst/>
+          </a:prstGeom>
+          <a:noFill/>
+        </p:spPr>
+        <p:txBody>
+          <a:bodyPr wrap="square">
+            <a:spAutoFit/>
+          </a:bodyPr>
+          <a:lstStyle/>
+          <a:p>
+            <a:pPr algn="ctr"/>
+            <a:r>
+              <a:rPr lang="ru-RU" dirty="0">
+                <a:solidFill>
+                  <a:schemeClr val="bg1"/>
+                </a:solidFill>
+              </a:rPr>
+              <a:t>Чтобы разобраться, когда безопасно пересечь улицу, нужно понимать значение огней светофора. Но в данном случае это неизвестно. Какая комбинация огней разрешает переход? Какая требует остановиться? Чтобы решить эту задачу, можно постоять перед перекрестком несколько минут и понаблюдать за комбинациями огней и за тем, как ведут себя окружающие — идут или стоят. </a:t>
+            </a:r>
+          </a:p>
+        </p:txBody>
+      </p:sp>
+    </p:spTree>
+    <p:extLst>
+      <p:ext uri="{BB962C8B-B14F-4D97-AF65-F5344CB8AC3E}">
+        <p14:creationId xmlns:p14="http://schemas.microsoft.com/office/powerpoint/2010/main" val="750774861"/>
+      </p:ext>
+    </p:extLst>
+  </p:cSld>
+  <p:clrMapOvr>
+    <a:masterClrMapping/>
+  </p:clrMapOvr>
+</p:sld>
+</file>
+
+<file path=ppt/slides/slide46.xml><?xml version="1.0" encoding="utf-8"?>
+<p:sld xmlns:a="http://schemas.openxmlformats.org/drawingml/2006/main" xmlns:r="http://schemas.openxmlformats.org/officeDocument/2006/relationships" xmlns:p="http://schemas.openxmlformats.org/presentationml/2006/main">
+  <p:cSld>
+    <p:spTree>
+      <p:nvGrpSpPr>
+        <p:cNvPr id="1" name=""/>
+        <p:cNvGrpSpPr/>
+        <p:nvPr/>
+      </p:nvGrpSpPr>
+      <p:grpSpPr>
+        <a:xfrm>
+          <a:off x="0" y="0"/>
+          <a:ext cx="0" cy="0"/>
+          <a:chOff x="0" y="0"/>
+          <a:chExt cx="0" cy="0"/>
+        </a:xfrm>
+      </p:grpSpPr>
+      <p:pic>
+        <p:nvPicPr>
+          <p:cNvPr id="4" name="Picture 3" descr="logo.png"/>
+          <p:cNvPicPr>
+            <a:picLocks noChangeAspect="1"/>
+          </p:cNvPicPr>
+          <p:nvPr/>
+        </p:nvPicPr>
+        <p:blipFill>
+          <a:blip r:embed="rId2"/>
+          <a:stretch>
+            <a:fillRect/>
+          </a:stretch>
+        </p:blipFill>
+        <p:spPr>
+          <a:xfrm>
+            <a:off x="12344400" y="274320"/>
+            <a:ext cx="1097280" cy="1080473"/>
+          </a:xfrm>
+          <a:prstGeom prst="rect">
+            <a:avLst/>
+          </a:prstGeom>
+        </p:spPr>
+      </p:pic>
+      <p:sp>
+        <p:nvSpPr>
+          <p:cNvPr id="5" name="Rectangle 4"/>
+          <p:cNvSpPr/>
+          <p:nvPr/>
+        </p:nvSpPr>
+        <p:spPr>
+          <a:xfrm>
+            <a:off x="0" y="7772400"/>
+            <a:ext cx="14630400" cy="457200"/>
+          </a:xfrm>
+          <a:prstGeom prst="rect">
+            <a:avLst/>
+          </a:prstGeom>
+          <a:solidFill>
+            <a:srgbClr val="640064"/>
+          </a:solidFill>
+          <a:ln>
+            <a:noFill/>
+          </a:ln>
+        </p:spPr>
+        <p:style>
+          <a:lnRef idx="1">
+            <a:schemeClr val="accent1"/>
+          </a:lnRef>
+          <a:fillRef idx="3">
+            <a:schemeClr val="accent1"/>
+          </a:fillRef>
+          <a:effectRef idx="2">
+            <a:schemeClr val="accent1"/>
+          </a:effectRef>
+          <a:fontRef idx="minor">
+            <a:schemeClr val="lt1"/>
+          </a:fontRef>
+        </p:style>
+        <p:txBody>
+          <a:bodyPr rtlCol="0" anchor="ctr"/>
+          <a:lstStyle/>
+          <a:p>
+            <a:pPr algn="ctr"/>
+            <a:endParaRPr>
+              <a:solidFill>
+                <a:schemeClr val="tx1"/>
+              </a:solidFill>
+            </a:endParaRPr>
+          </a:p>
+        </p:txBody>
+      </p:sp>
+      <p:sp>
+        <p:nvSpPr>
+          <p:cNvPr id="7" name="TextBox 6">
+            <a:extLst>
+              <a:ext uri="{FF2B5EF4-FFF2-40B4-BE49-F238E27FC236}">
+                <a16:creationId xmlns:a16="http://schemas.microsoft.com/office/drawing/2014/main" id="{EA77F26D-0F9B-DFF5-2FB4-9E508F48AFC7}"/>
+              </a:ext>
+            </a:extLst>
+          </p:cNvPr>
+          <p:cNvSpPr txBox="1"/>
+          <p:nvPr/>
+        </p:nvSpPr>
+        <p:spPr>
+          <a:xfrm>
+            <a:off x="705491" y="330403"/>
+            <a:ext cx="11408419" cy="769441"/>
+          </a:xfrm>
+          <a:prstGeom prst="rect">
+            <a:avLst/>
+          </a:prstGeom>
+          <a:noFill/>
+        </p:spPr>
+        <p:txBody>
+          <a:bodyPr wrap="square">
+            <a:spAutoFit/>
+          </a:bodyPr>
+          <a:lstStyle/>
+          <a:p>
+            <a:r>
+              <a:rPr lang="ru-RU" sz="4400" dirty="0"/>
+              <a:t>Первая комбинация</a:t>
+            </a:r>
+            <a:endParaRPr lang="ru-RU" sz="4400" b="1" dirty="0"/>
+          </a:p>
+        </p:txBody>
+      </p:sp>
+      <p:sp>
+        <p:nvSpPr>
+          <p:cNvPr id="6" name="TextBox 5">
+            <a:extLst>
+              <a:ext uri="{FF2B5EF4-FFF2-40B4-BE49-F238E27FC236}">
+                <a16:creationId xmlns:a16="http://schemas.microsoft.com/office/drawing/2014/main" id="{905FF7EB-3CCB-A00B-4578-2EABF116CB64}"/>
+              </a:ext>
+            </a:extLst>
+          </p:cNvPr>
+          <p:cNvSpPr txBox="1"/>
+          <p:nvPr/>
+        </p:nvSpPr>
+        <p:spPr>
+          <a:xfrm>
+            <a:off x="315899" y="2465066"/>
+            <a:ext cx="12853238" cy="1815882"/>
+          </a:xfrm>
+          <a:prstGeom prst="rect">
+            <a:avLst/>
+          </a:prstGeom>
+          <a:noFill/>
+        </p:spPr>
+        <p:txBody>
+          <a:bodyPr wrap="square">
+            <a:spAutoFit/>
+          </a:bodyPr>
+          <a:lstStyle/>
+          <a:p>
+            <a:pPr algn="ctr"/>
+            <a:r>
+              <a:rPr lang="ru-RU" sz="2800" dirty="0"/>
+              <a:t>При этой комбинации никто не переходит улицу. В этот момент у вас рождается</a:t>
+            </a:r>
+          </a:p>
+          <a:p>
+            <a:pPr algn="ctr"/>
+            <a:r>
+              <a:rPr lang="ru-RU" sz="2800" dirty="0"/>
+              <a:t>мысль: «Схема работы светофора не так проста. Включение левой или правой</a:t>
+            </a:r>
+          </a:p>
+          <a:p>
+            <a:pPr algn="ctr"/>
+            <a:r>
+              <a:rPr lang="ru-RU" sz="2800" dirty="0"/>
+              <a:t>секции может означать требование остановиться, а включение средней — раз</a:t>
+            </a:r>
+          </a:p>
+          <a:p>
+            <a:pPr algn="ctr"/>
+            <a:r>
+              <a:rPr lang="ru-RU" sz="2800" dirty="0"/>
+              <a:t>решать движение». Но пока вы не можете знать этого наверняка</a:t>
+            </a:r>
+            <a:endParaRPr lang="en-US" sz="2800" b="0" dirty="0">
+              <a:effectLst/>
+              <a:latin typeface="Consolas" panose="020B0609020204030204" pitchFamily="49" charset="0"/>
+            </a:endParaRPr>
+          </a:p>
+        </p:txBody>
+      </p:sp>
+      <p:sp>
+        <p:nvSpPr>
+          <p:cNvPr id="2" name="TextBox 1">
+            <a:extLst>
+              <a:ext uri="{FF2B5EF4-FFF2-40B4-BE49-F238E27FC236}">
+                <a16:creationId xmlns:a16="http://schemas.microsoft.com/office/drawing/2014/main" id="{93AB76DD-B37D-CEFF-E5AC-80A65C31D8E5}"/>
+              </a:ext>
+            </a:extLst>
+          </p:cNvPr>
+          <p:cNvSpPr txBox="1"/>
+          <p:nvPr/>
+        </p:nvSpPr>
+        <p:spPr>
+          <a:xfrm>
+            <a:off x="11947221" y="3876590"/>
+            <a:ext cx="3063507" cy="738664"/>
+          </a:xfrm>
+          <a:prstGeom prst="rect">
+            <a:avLst/>
+          </a:prstGeom>
+          <a:noFill/>
+        </p:spPr>
+        <p:txBody>
+          <a:bodyPr wrap="square">
+            <a:spAutoFit/>
+          </a:bodyPr>
+          <a:lstStyle/>
+          <a:p>
+            <a:pPr algn="ctr"/>
+            <a:r>
+              <a:rPr lang="ru-RU" sz="1400" dirty="0"/>
+              <a:t>Я опаздываю на работу. </a:t>
+            </a:r>
+          </a:p>
+          <a:p>
+            <a:pPr algn="ctr"/>
+            <a:r>
+              <a:rPr lang="ru-RU" sz="1400" dirty="0"/>
+              <a:t>Тем временем каждый встретившийся мне светофор</a:t>
+            </a:r>
+            <a:endParaRPr lang="en-US" sz="1400" b="0" dirty="0">
+              <a:effectLst/>
+              <a:latin typeface="Consolas" panose="020B0609020204030204" pitchFamily="49" charset="0"/>
+            </a:endParaRPr>
+          </a:p>
+        </p:txBody>
+      </p:sp>
+      <p:pic>
+        <p:nvPicPr>
+          <p:cNvPr id="8" name="Рисунок 7" descr="Изображение выглядит как свет, светофор, транспорт, Сигнальное устройство&#10;&#10;Автоматически созданное описание">
+            <a:extLst>
+              <a:ext uri="{FF2B5EF4-FFF2-40B4-BE49-F238E27FC236}">
+                <a16:creationId xmlns:a16="http://schemas.microsoft.com/office/drawing/2014/main" id="{8E74D08C-4586-12B3-3449-6A8A8AB6BD98}"/>
+              </a:ext>
+            </a:extLst>
+          </p:cNvPr>
+          <p:cNvPicPr>
+            <a:picLocks noChangeAspect="1"/>
+          </p:cNvPicPr>
+          <p:nvPr/>
+        </p:nvPicPr>
+        <p:blipFill>
+          <a:blip r:embed="rId3"/>
+          <a:stretch>
+            <a:fillRect/>
+          </a:stretch>
+        </p:blipFill>
+        <p:spPr>
+          <a:xfrm>
+            <a:off x="12897995" y="4710037"/>
+            <a:ext cx="1161959" cy="2945813"/>
+          </a:xfrm>
+          <a:prstGeom prst="rect">
+            <a:avLst/>
+          </a:prstGeom>
+        </p:spPr>
+      </p:pic>
+      <p:pic>
+        <p:nvPicPr>
+          <p:cNvPr id="10" name="Рисунок 9">
+            <a:extLst>
+              <a:ext uri="{FF2B5EF4-FFF2-40B4-BE49-F238E27FC236}">
+                <a16:creationId xmlns:a16="http://schemas.microsoft.com/office/drawing/2014/main" id="{B3B8DD2C-5681-0A7E-2188-CEAA43AF6517}"/>
+              </a:ext>
+            </a:extLst>
+          </p:cNvPr>
+          <p:cNvPicPr>
+            <a:picLocks noChangeAspect="1"/>
+          </p:cNvPicPr>
+          <p:nvPr/>
+        </p:nvPicPr>
+        <p:blipFill>
+          <a:blip r:embed="rId4"/>
+          <a:stretch>
+            <a:fillRect/>
+          </a:stretch>
+        </p:blipFill>
+        <p:spPr>
+          <a:xfrm>
+            <a:off x="4891087" y="1178685"/>
+            <a:ext cx="4848225" cy="1390650"/>
+          </a:xfrm>
+          <a:prstGeom prst="rect">
+            <a:avLst/>
+          </a:prstGeom>
+        </p:spPr>
+      </p:pic>
+    </p:spTree>
+    <p:extLst>
+      <p:ext uri="{BB962C8B-B14F-4D97-AF65-F5344CB8AC3E}">
+        <p14:creationId xmlns:p14="http://schemas.microsoft.com/office/powerpoint/2010/main" val="951635144"/>
+      </p:ext>
+    </p:extLst>
+  </p:cSld>
+  <p:clrMapOvr>
+    <a:masterClrMapping/>
+  </p:clrMapOvr>
+</p:sld>
+</file>
+
+<file path=ppt/slides/slide47.xml><?xml version="1.0" encoding="utf-8"?>
+<p:sld xmlns:a="http://schemas.openxmlformats.org/drawingml/2006/main" xmlns:r="http://schemas.openxmlformats.org/officeDocument/2006/relationships" xmlns:p="http://schemas.openxmlformats.org/presentationml/2006/main">
+  <p:cSld>
+    <p:bg>
+      <p:bgPr>
+        <a:solidFill>
+          <a:srgbClr val="972996"/>
+        </a:solidFill>
+        <a:effectLst/>
+      </p:bgPr>
+    </p:bg>
+    <p:spTree>
+      <p:nvGrpSpPr>
+        <p:cNvPr id="1" name=""/>
+        <p:cNvGrpSpPr/>
+        <p:nvPr/>
+      </p:nvGrpSpPr>
+      <p:grpSpPr>
+        <a:xfrm>
+          <a:off x="0" y="0"/>
+          <a:ext cx="0" cy="0"/>
+          <a:chOff x="0" y="0"/>
+          <a:chExt cx="0" cy="0"/>
+        </a:xfrm>
+      </p:grpSpPr>
+      <p:pic>
+        <p:nvPicPr>
+          <p:cNvPr id="4" name="Picture 3" descr="logo.png"/>
+          <p:cNvPicPr>
+            <a:picLocks noChangeAspect="1"/>
+          </p:cNvPicPr>
+          <p:nvPr/>
+        </p:nvPicPr>
+        <p:blipFill>
+          <a:blip r:embed="rId2"/>
+          <a:stretch>
+            <a:fillRect/>
+          </a:stretch>
+        </p:blipFill>
+        <p:spPr>
+          <a:xfrm>
+            <a:off x="12344400" y="274320"/>
+            <a:ext cx="1097280" cy="1080473"/>
+          </a:xfrm>
+          <a:prstGeom prst="rect">
+            <a:avLst/>
+          </a:prstGeom>
+        </p:spPr>
+      </p:pic>
+      <p:sp>
+        <p:nvSpPr>
+          <p:cNvPr id="5" name="Rectangle 4"/>
+          <p:cNvSpPr/>
+          <p:nvPr/>
+        </p:nvSpPr>
+        <p:spPr>
+          <a:xfrm>
+            <a:off x="0" y="7772400"/>
+            <a:ext cx="14630400" cy="457200"/>
+          </a:xfrm>
+          <a:prstGeom prst="rect">
+            <a:avLst/>
+          </a:prstGeom>
+          <a:solidFill>
+            <a:srgbClr val="E6E6E6"/>
+          </a:solidFill>
+          <a:ln>
+            <a:noFill/>
+          </a:ln>
+        </p:spPr>
+        <p:style>
+          <a:lnRef idx="1">
+            <a:schemeClr val="accent1"/>
+          </a:lnRef>
+          <a:fillRef idx="3">
+            <a:schemeClr val="accent1"/>
+          </a:fillRef>
+          <a:effectRef idx="2">
+            <a:schemeClr val="accent1"/>
+          </a:effectRef>
+          <a:fontRef idx="minor">
+            <a:schemeClr val="lt1"/>
+          </a:fontRef>
+        </p:style>
+        <p:txBody>
+          <a:bodyPr rtlCol="0" anchor="ctr"/>
+          <a:lstStyle/>
+          <a:p>
+            <a:pPr algn="ctr"/>
+            <a:endParaRPr/>
+          </a:p>
+        </p:txBody>
+      </p:sp>
+      <p:sp>
+        <p:nvSpPr>
+          <p:cNvPr id="3" name="TextBox 2">
+            <a:extLst>
+              <a:ext uri="{FF2B5EF4-FFF2-40B4-BE49-F238E27FC236}">
+                <a16:creationId xmlns:a16="http://schemas.microsoft.com/office/drawing/2014/main" id="{C315D28A-F529-C361-6B0C-54FC6D10368B}"/>
+              </a:ext>
+            </a:extLst>
+          </p:cNvPr>
+          <p:cNvSpPr txBox="1"/>
+          <p:nvPr/>
+        </p:nvSpPr>
+        <p:spPr>
+          <a:xfrm>
+            <a:off x="625737" y="289929"/>
+            <a:ext cx="5093895" cy="769441"/>
+          </a:xfrm>
+          <a:prstGeom prst="rect">
+            <a:avLst/>
+          </a:prstGeom>
+          <a:noFill/>
+        </p:spPr>
+        <p:txBody>
+          <a:bodyPr wrap="none">
+            <a:spAutoFit/>
+          </a:bodyPr>
+          <a:lstStyle/>
+          <a:p>
+            <a:r>
+              <a:rPr lang="ru-RU" sz="4400" b="1" dirty="0">
+                <a:solidFill>
+                  <a:schemeClr val="bg1"/>
+                </a:solidFill>
+              </a:rPr>
+              <a:t>Вторая комбинация</a:t>
+            </a:r>
+          </a:p>
+        </p:txBody>
+      </p:sp>
+      <p:sp>
+        <p:nvSpPr>
+          <p:cNvPr id="13" name="TextBox 12">
+            <a:extLst>
+              <a:ext uri="{FF2B5EF4-FFF2-40B4-BE49-F238E27FC236}">
+                <a16:creationId xmlns:a16="http://schemas.microsoft.com/office/drawing/2014/main" id="{FD01884E-EB19-1A5D-AFC5-20308679A8FD}"/>
+              </a:ext>
+            </a:extLst>
+          </p:cNvPr>
+          <p:cNvSpPr txBox="1"/>
+          <p:nvPr/>
+        </p:nvSpPr>
+        <p:spPr>
+          <a:xfrm>
+            <a:off x="2418249" y="3492555"/>
+            <a:ext cx="9672991" cy="923330"/>
+          </a:xfrm>
+          <a:prstGeom prst="rect">
+            <a:avLst/>
+          </a:prstGeom>
+          <a:noFill/>
+        </p:spPr>
+        <p:txBody>
+          <a:bodyPr wrap="square">
+            <a:spAutoFit/>
+          </a:bodyPr>
+          <a:lstStyle/>
+          <a:p>
+            <a:pPr algn="ctr"/>
+            <a:r>
+              <a:rPr lang="ru-RU" dirty="0">
+                <a:solidFill>
+                  <a:schemeClr val="bg1"/>
+                </a:solidFill>
+              </a:rPr>
+              <a:t>После включения этой комбинации огней люди пошли. Единственное, в чем вы теперь уверены, что правая секция, похоже, ничего не запрещает и ничего не разрешает. Возможно, она вообще не имеет никакого значения.</a:t>
+            </a:r>
+          </a:p>
+        </p:txBody>
+      </p:sp>
+      <p:pic>
+        <p:nvPicPr>
+          <p:cNvPr id="6" name="Рисунок 5">
+            <a:extLst>
+              <a:ext uri="{FF2B5EF4-FFF2-40B4-BE49-F238E27FC236}">
+                <a16:creationId xmlns:a16="http://schemas.microsoft.com/office/drawing/2014/main" id="{D6B4F4DF-715A-C9DA-1537-0F72B3C72CAB}"/>
+              </a:ext>
+            </a:extLst>
+          </p:cNvPr>
+          <p:cNvPicPr>
+            <a:picLocks noChangeAspect="1"/>
+          </p:cNvPicPr>
+          <p:nvPr/>
+        </p:nvPicPr>
+        <p:blipFill>
+          <a:blip r:embed="rId3"/>
+          <a:stretch>
+            <a:fillRect/>
+          </a:stretch>
+        </p:blipFill>
+        <p:spPr>
+          <a:xfrm>
+            <a:off x="4792531" y="1556131"/>
+            <a:ext cx="4924425" cy="1524000"/>
+          </a:xfrm>
+          <a:prstGeom prst="rect">
+            <a:avLst/>
+          </a:prstGeom>
+        </p:spPr>
+      </p:pic>
+    </p:spTree>
+    <p:extLst>
+      <p:ext uri="{BB962C8B-B14F-4D97-AF65-F5344CB8AC3E}">
+        <p14:creationId xmlns:p14="http://schemas.microsoft.com/office/powerpoint/2010/main" val="627844701"/>
+      </p:ext>
+    </p:extLst>
+  </p:cSld>
+  <p:clrMapOvr>
+    <a:masterClrMapping/>
+  </p:clrMapOvr>
+</p:sld>
+</file>
+
+<file path=ppt/slides/slide48.xml><?xml version="1.0" encoding="utf-8"?>
+<p:sld xmlns:a="http://schemas.openxmlformats.org/drawingml/2006/main" xmlns:r="http://schemas.openxmlformats.org/officeDocument/2006/relationships" xmlns:p="http://schemas.openxmlformats.org/presentationml/2006/main">
+  <p:cSld>
+    <p:spTree>
+      <p:nvGrpSpPr>
+        <p:cNvPr id="1" name=""/>
+        <p:cNvGrpSpPr/>
+        <p:nvPr/>
+      </p:nvGrpSpPr>
+      <p:grpSpPr>
+        <a:xfrm>
+          <a:off x="0" y="0"/>
+          <a:ext cx="0" cy="0"/>
+          <a:chOff x="0" y="0"/>
+          <a:chExt cx="0" cy="0"/>
+        </a:xfrm>
+      </p:grpSpPr>
+      <p:pic>
+        <p:nvPicPr>
+          <p:cNvPr id="4" name="Picture 3" descr="logo.png"/>
+          <p:cNvPicPr>
+            <a:picLocks noChangeAspect="1"/>
+          </p:cNvPicPr>
+          <p:nvPr/>
+        </p:nvPicPr>
+        <p:blipFill>
+          <a:blip r:embed="rId2"/>
+          <a:stretch>
+            <a:fillRect/>
+          </a:stretch>
+        </p:blipFill>
+        <p:spPr>
+          <a:xfrm>
+            <a:off x="12344400" y="274320"/>
+            <a:ext cx="1097280" cy="1080473"/>
+          </a:xfrm>
+          <a:prstGeom prst="rect">
+            <a:avLst/>
+          </a:prstGeom>
+        </p:spPr>
+      </p:pic>
+      <p:sp>
+        <p:nvSpPr>
+          <p:cNvPr id="5" name="Rectangle 4"/>
+          <p:cNvSpPr/>
+          <p:nvPr/>
+        </p:nvSpPr>
+        <p:spPr>
+          <a:xfrm>
+            <a:off x="0" y="7772400"/>
+            <a:ext cx="14630400" cy="457200"/>
+          </a:xfrm>
+          <a:prstGeom prst="rect">
+            <a:avLst/>
+          </a:prstGeom>
+          <a:solidFill>
+            <a:srgbClr val="640064"/>
+          </a:solidFill>
+          <a:ln>
+            <a:noFill/>
+          </a:ln>
+        </p:spPr>
+        <p:style>
+          <a:lnRef idx="1">
+            <a:schemeClr val="accent1"/>
+          </a:lnRef>
+          <a:fillRef idx="3">
+            <a:schemeClr val="accent1"/>
+          </a:fillRef>
+          <a:effectRef idx="2">
+            <a:schemeClr val="accent1"/>
+          </a:effectRef>
+          <a:fontRef idx="minor">
+            <a:schemeClr val="lt1"/>
+          </a:fontRef>
+        </p:style>
+        <p:txBody>
+          <a:bodyPr rtlCol="0" anchor="ctr"/>
+          <a:lstStyle/>
+          <a:p>
+            <a:pPr algn="ctr"/>
+            <a:endParaRPr>
+              <a:solidFill>
+                <a:schemeClr val="tx1"/>
+              </a:solidFill>
+            </a:endParaRPr>
+          </a:p>
+        </p:txBody>
+      </p:sp>
+      <p:sp>
+        <p:nvSpPr>
+          <p:cNvPr id="7" name="TextBox 6">
+            <a:extLst>
+              <a:ext uri="{FF2B5EF4-FFF2-40B4-BE49-F238E27FC236}">
+                <a16:creationId xmlns:a16="http://schemas.microsoft.com/office/drawing/2014/main" id="{EA77F26D-0F9B-DFF5-2FB4-9E508F48AFC7}"/>
+              </a:ext>
+            </a:extLst>
+          </p:cNvPr>
+          <p:cNvSpPr txBox="1"/>
+          <p:nvPr/>
+        </p:nvSpPr>
+        <p:spPr>
+          <a:xfrm>
+            <a:off x="705491" y="330403"/>
+            <a:ext cx="11408419" cy="769441"/>
+          </a:xfrm>
+          <a:prstGeom prst="rect">
+            <a:avLst/>
+          </a:prstGeom>
+          <a:noFill/>
+        </p:spPr>
+        <p:txBody>
+          <a:bodyPr wrap="square">
+            <a:spAutoFit/>
+          </a:bodyPr>
+          <a:lstStyle/>
+          <a:p>
+            <a:r>
+              <a:rPr lang="ru-RU" sz="4400" dirty="0"/>
+              <a:t>Третья комбинация</a:t>
+            </a:r>
+            <a:endParaRPr lang="ru-RU" sz="4400" b="1" dirty="0"/>
+          </a:p>
+        </p:txBody>
+      </p:sp>
+      <p:sp>
+        <p:nvSpPr>
+          <p:cNvPr id="6" name="TextBox 5">
+            <a:extLst>
+              <a:ext uri="{FF2B5EF4-FFF2-40B4-BE49-F238E27FC236}">
+                <a16:creationId xmlns:a16="http://schemas.microsoft.com/office/drawing/2014/main" id="{905FF7EB-3CCB-A00B-4578-2EABF116CB64}"/>
+              </a:ext>
+            </a:extLst>
+          </p:cNvPr>
+          <p:cNvSpPr txBox="1"/>
+          <p:nvPr/>
+        </p:nvSpPr>
+        <p:spPr>
+          <a:xfrm>
+            <a:off x="888581" y="2613578"/>
+            <a:ext cx="12853238" cy="1384995"/>
+          </a:xfrm>
+          <a:prstGeom prst="rect">
+            <a:avLst/>
+          </a:prstGeom>
+          <a:noFill/>
+        </p:spPr>
+        <p:txBody>
+          <a:bodyPr wrap="square">
+            <a:spAutoFit/>
+          </a:bodyPr>
+          <a:lstStyle/>
+          <a:p>
+            <a:pPr algn="ctr"/>
+            <a:r>
+              <a:rPr lang="ru-RU" sz="2800" dirty="0"/>
+              <a:t>Еще одна комбинация. На этот раз изменилась только средняя секция, и вы</a:t>
+            </a:r>
+          </a:p>
+          <a:p>
+            <a:pPr algn="ctr"/>
+            <a:r>
+              <a:rPr lang="ru-RU" sz="2800" dirty="0"/>
+              <a:t>отметили противоположное поведение. У вас появляется рабочая гипотеза,</a:t>
+            </a:r>
+          </a:p>
+          <a:p>
+            <a:pPr algn="ctr"/>
+            <a:r>
+              <a:rPr lang="ru-RU" sz="2800" dirty="0"/>
+              <a:t>что средняя секция указывает, когда безопасно перейти перекресток. </a:t>
+            </a:r>
+            <a:endParaRPr lang="en-US" sz="2800" b="0" dirty="0">
+              <a:effectLst/>
+              <a:latin typeface="Consolas" panose="020B0609020204030204" pitchFamily="49" charset="0"/>
+            </a:endParaRPr>
+          </a:p>
+        </p:txBody>
+      </p:sp>
+      <p:pic>
+        <p:nvPicPr>
+          <p:cNvPr id="9" name="Рисунок 8">
+            <a:extLst>
+              <a:ext uri="{FF2B5EF4-FFF2-40B4-BE49-F238E27FC236}">
+                <a16:creationId xmlns:a16="http://schemas.microsoft.com/office/drawing/2014/main" id="{B3F1545D-8D9B-B8CC-7756-487356D331F2}"/>
+              </a:ext>
+            </a:extLst>
+          </p:cNvPr>
+          <p:cNvPicPr>
+            <a:picLocks noChangeAspect="1"/>
+          </p:cNvPicPr>
+          <p:nvPr/>
+        </p:nvPicPr>
+        <p:blipFill>
+          <a:blip r:embed="rId3"/>
+          <a:stretch>
+            <a:fillRect/>
+          </a:stretch>
+        </p:blipFill>
+        <p:spPr>
+          <a:xfrm>
+            <a:off x="4987360" y="1035191"/>
+            <a:ext cx="4867275" cy="1371600"/>
+          </a:xfrm>
+          <a:prstGeom prst="rect">
+            <a:avLst/>
+          </a:prstGeom>
+        </p:spPr>
+      </p:pic>
+    </p:spTree>
+    <p:extLst>
+      <p:ext uri="{BB962C8B-B14F-4D97-AF65-F5344CB8AC3E}">
+        <p14:creationId xmlns:p14="http://schemas.microsoft.com/office/powerpoint/2010/main" val="261931625"/>
+      </p:ext>
+    </p:extLst>
+  </p:cSld>
+  <p:clrMapOvr>
+    <a:masterClrMapping/>
+  </p:clrMapOvr>
+</p:sld>
+</file>
+
+<file path=ppt/slides/slide49.xml><?xml version="1.0" encoding="utf-8"?>
+<p:sld xmlns:a="http://schemas.openxmlformats.org/drawingml/2006/main" xmlns:r="http://schemas.openxmlformats.org/officeDocument/2006/relationships" xmlns:p="http://schemas.openxmlformats.org/presentationml/2006/main">
+  <p:cSld>
+    <p:bg>
+      <p:bgPr>
+        <a:solidFill>
+          <a:srgbClr val="972996"/>
+        </a:solidFill>
+        <a:effectLst/>
+      </p:bgPr>
+    </p:bg>
+    <p:spTree>
+      <p:nvGrpSpPr>
+        <p:cNvPr id="1" name=""/>
+        <p:cNvGrpSpPr/>
+        <p:nvPr/>
+      </p:nvGrpSpPr>
+      <p:grpSpPr>
+        <a:xfrm>
+          <a:off x="0" y="0"/>
+          <a:ext cx="0" cy="0"/>
+          <a:chOff x="0" y="0"/>
+          <a:chExt cx="0" cy="0"/>
+        </a:xfrm>
+      </p:grpSpPr>
+      <p:pic>
+        <p:nvPicPr>
+          <p:cNvPr id="4" name="Picture 3" descr="logo.png"/>
+          <p:cNvPicPr>
+            <a:picLocks noChangeAspect="1"/>
+          </p:cNvPicPr>
+          <p:nvPr/>
+        </p:nvPicPr>
+        <p:blipFill>
+          <a:blip r:embed="rId2"/>
+          <a:stretch>
+            <a:fillRect/>
+          </a:stretch>
+        </p:blipFill>
+        <p:spPr>
+          <a:xfrm>
+            <a:off x="12344400" y="274320"/>
+            <a:ext cx="1097280" cy="1080473"/>
+          </a:xfrm>
+          <a:prstGeom prst="rect">
+            <a:avLst/>
+          </a:prstGeom>
+        </p:spPr>
+      </p:pic>
+      <p:sp>
+        <p:nvSpPr>
+          <p:cNvPr id="5" name="Rectangle 4"/>
+          <p:cNvSpPr/>
+          <p:nvPr/>
+        </p:nvSpPr>
+        <p:spPr>
+          <a:xfrm>
+            <a:off x="0" y="7772400"/>
+            <a:ext cx="14630400" cy="457200"/>
+          </a:xfrm>
+          <a:prstGeom prst="rect">
+            <a:avLst/>
+          </a:prstGeom>
+          <a:solidFill>
+            <a:srgbClr val="E6E6E6"/>
+          </a:solidFill>
+          <a:ln>
+            <a:noFill/>
+          </a:ln>
+        </p:spPr>
+        <p:style>
+          <a:lnRef idx="1">
+            <a:schemeClr val="accent1"/>
+          </a:lnRef>
+          <a:fillRef idx="3">
+            <a:schemeClr val="accent1"/>
+          </a:fillRef>
+          <a:effectRef idx="2">
+            <a:schemeClr val="accent1"/>
+          </a:effectRef>
+          <a:fontRef idx="minor">
+            <a:schemeClr val="lt1"/>
+          </a:fontRef>
+        </p:style>
+        <p:txBody>
+          <a:bodyPr rtlCol="0" anchor="ctr"/>
+          <a:lstStyle/>
+          <a:p>
+            <a:pPr algn="ctr"/>
+            <a:endParaRPr/>
+          </a:p>
+        </p:txBody>
+      </p:sp>
+      <p:sp>
+        <p:nvSpPr>
+          <p:cNvPr id="3" name="TextBox 2">
+            <a:extLst>
+              <a:ext uri="{FF2B5EF4-FFF2-40B4-BE49-F238E27FC236}">
+                <a16:creationId xmlns:a16="http://schemas.microsoft.com/office/drawing/2014/main" id="{C315D28A-F529-C361-6B0C-54FC6D10368B}"/>
+              </a:ext>
+            </a:extLst>
+          </p:cNvPr>
+          <p:cNvSpPr txBox="1"/>
+          <p:nvPr/>
+        </p:nvSpPr>
+        <p:spPr>
+          <a:xfrm>
+            <a:off x="625737" y="289929"/>
+            <a:ext cx="3975768" cy="769441"/>
+          </a:xfrm>
+          <a:prstGeom prst="rect">
+            <a:avLst/>
+          </a:prstGeom>
+          <a:noFill/>
+        </p:spPr>
+        <p:txBody>
+          <a:bodyPr wrap="none">
+            <a:spAutoFit/>
+          </a:bodyPr>
+          <a:lstStyle/>
+          <a:p>
+            <a:r>
+              <a:rPr lang="ru-RU" sz="4400" b="1" dirty="0">
+                <a:solidFill>
+                  <a:schemeClr val="bg1"/>
+                </a:solidFill>
+              </a:rPr>
+              <a:t>Общий шаблон</a:t>
+            </a:r>
+          </a:p>
+        </p:txBody>
+      </p:sp>
+      <p:pic>
+        <p:nvPicPr>
+          <p:cNvPr id="7" name="Рисунок 6">
+            <a:extLst>
+              <a:ext uri="{FF2B5EF4-FFF2-40B4-BE49-F238E27FC236}">
+                <a16:creationId xmlns:a16="http://schemas.microsoft.com/office/drawing/2014/main" id="{206152C1-F201-F538-8B20-D9BCBF261829}"/>
+              </a:ext>
+            </a:extLst>
+          </p:cNvPr>
+          <p:cNvPicPr>
+            <a:picLocks noChangeAspect="1"/>
+          </p:cNvPicPr>
+          <p:nvPr/>
+        </p:nvPicPr>
+        <p:blipFill>
+          <a:blip r:embed="rId3"/>
+          <a:stretch>
+            <a:fillRect/>
+          </a:stretch>
+        </p:blipFill>
+        <p:spPr>
+          <a:xfrm>
+            <a:off x="4136171" y="979186"/>
+            <a:ext cx="5572125" cy="6724650"/>
+          </a:xfrm>
+          <a:prstGeom prst="rect">
+            <a:avLst/>
+          </a:prstGeom>
+        </p:spPr>
+      </p:pic>
+      <p:sp>
+        <p:nvSpPr>
+          <p:cNvPr id="9" name="TextBox 8">
+            <a:extLst>
+              <a:ext uri="{FF2B5EF4-FFF2-40B4-BE49-F238E27FC236}">
+                <a16:creationId xmlns:a16="http://schemas.microsoft.com/office/drawing/2014/main" id="{75923EBE-36DF-8C68-8BE4-095ED6D75139}"/>
+              </a:ext>
+            </a:extLst>
+          </p:cNvPr>
+          <p:cNvSpPr txBox="1"/>
+          <p:nvPr/>
+        </p:nvSpPr>
+        <p:spPr>
+          <a:xfrm>
+            <a:off x="10028172" y="3627443"/>
+            <a:ext cx="4231934" cy="1200329"/>
+          </a:xfrm>
+          <a:prstGeom prst="rect">
+            <a:avLst/>
+          </a:prstGeom>
+          <a:noFill/>
+        </p:spPr>
+        <p:txBody>
+          <a:bodyPr wrap="square">
+            <a:spAutoFit/>
+          </a:bodyPr>
+          <a:lstStyle/>
+          <a:p>
+            <a:pPr algn="ctr"/>
+            <a:r>
+              <a:rPr lang="ru-RU" dirty="0">
+                <a:solidFill>
+                  <a:schemeClr val="bg1"/>
+                </a:solidFill>
+              </a:rPr>
+              <a:t>Между средней секцией и возможностью безопасно пересечь перекресток имеется идеальная корреляция.</a:t>
+            </a:r>
+          </a:p>
+        </p:txBody>
+      </p:sp>
+    </p:spTree>
+    <p:extLst>
+      <p:ext uri="{BB962C8B-B14F-4D97-AF65-F5344CB8AC3E}">
+        <p14:creationId xmlns:p14="http://schemas.microsoft.com/office/powerpoint/2010/main" val="2583299626"/>
+      </p:ext>
+    </p:extLst>
+  </p:cSld>
+  <p:clrMapOvr>
+    <a:masterClrMapping/>
+  </p:clrMapOvr>
+</p:sld>
+</file>
+
 <file path=ppt/slides/slide5.xml><?xml version="1.0" encoding="utf-8"?>
 <p:sld xmlns:a="http://schemas.openxmlformats.org/drawingml/2006/main" xmlns:r="http://schemas.openxmlformats.org/officeDocument/2006/relationships" xmlns:p="http://schemas.openxmlformats.org/presentationml/2006/main">
   <p:cSld>
@@ -32419,6 +33695,1732 @@
     <p:extLst>
       <p:ext uri="{BB962C8B-B14F-4D97-AF65-F5344CB8AC3E}">
         <p14:creationId xmlns:p14="http://schemas.microsoft.com/office/powerpoint/2010/main" val="750037596"/>
+      </p:ext>
+    </p:extLst>
+  </p:cSld>
+  <p:clrMapOvr>
+    <a:masterClrMapping/>
+  </p:clrMapOvr>
+</p:sld>
+</file>
+
+<file path=ppt/slides/slide50.xml><?xml version="1.0" encoding="utf-8"?>
+<p:sld xmlns:a="http://schemas.openxmlformats.org/drawingml/2006/main" xmlns:r="http://schemas.openxmlformats.org/officeDocument/2006/relationships" xmlns:p="http://schemas.openxmlformats.org/presentationml/2006/main">
+  <p:cSld>
+    <p:spTree>
+      <p:nvGrpSpPr>
+        <p:cNvPr id="1" name=""/>
+        <p:cNvGrpSpPr/>
+        <p:nvPr/>
+      </p:nvGrpSpPr>
+      <p:grpSpPr>
+        <a:xfrm>
+          <a:off x="0" y="0"/>
+          <a:ext cx="0" cy="0"/>
+          <a:chOff x="0" y="0"/>
+          <a:chExt cx="0" cy="0"/>
+        </a:xfrm>
+      </p:grpSpPr>
+      <p:pic>
+        <p:nvPicPr>
+          <p:cNvPr id="4" name="Picture 3" descr="logo.png"/>
+          <p:cNvPicPr>
+            <a:picLocks noChangeAspect="1"/>
+          </p:cNvPicPr>
+          <p:nvPr/>
+        </p:nvPicPr>
+        <p:blipFill>
+          <a:blip r:embed="rId2"/>
+          <a:stretch>
+            <a:fillRect/>
+          </a:stretch>
+        </p:blipFill>
+        <p:spPr>
+          <a:xfrm>
+            <a:off x="12344400" y="274320"/>
+            <a:ext cx="1097280" cy="1080473"/>
+          </a:xfrm>
+          <a:prstGeom prst="rect">
+            <a:avLst/>
+          </a:prstGeom>
+        </p:spPr>
+      </p:pic>
+      <p:sp>
+        <p:nvSpPr>
+          <p:cNvPr id="5" name="Rectangle 4"/>
+          <p:cNvSpPr/>
+          <p:nvPr/>
+        </p:nvSpPr>
+        <p:spPr>
+          <a:xfrm>
+            <a:off x="0" y="7772400"/>
+            <a:ext cx="14630400" cy="457200"/>
+          </a:xfrm>
+          <a:prstGeom prst="rect">
+            <a:avLst/>
+          </a:prstGeom>
+          <a:solidFill>
+            <a:srgbClr val="640064"/>
+          </a:solidFill>
+          <a:ln>
+            <a:noFill/>
+          </a:ln>
+        </p:spPr>
+        <p:style>
+          <a:lnRef idx="1">
+            <a:schemeClr val="accent1"/>
+          </a:lnRef>
+          <a:fillRef idx="3">
+            <a:schemeClr val="accent1"/>
+          </a:fillRef>
+          <a:effectRef idx="2">
+            <a:schemeClr val="accent1"/>
+          </a:effectRef>
+          <a:fontRef idx="minor">
+            <a:schemeClr val="lt1"/>
+          </a:fontRef>
+        </p:style>
+        <p:txBody>
+          <a:bodyPr rtlCol="0" anchor="ctr"/>
+          <a:lstStyle/>
+          <a:p>
+            <a:pPr algn="ctr"/>
+            <a:endParaRPr>
+              <a:solidFill>
+                <a:schemeClr val="tx1"/>
+              </a:solidFill>
+            </a:endParaRPr>
+          </a:p>
+        </p:txBody>
+      </p:sp>
+      <p:sp>
+        <p:nvSpPr>
+          <p:cNvPr id="7" name="TextBox 6">
+            <a:extLst>
+              <a:ext uri="{FF2B5EF4-FFF2-40B4-BE49-F238E27FC236}">
+                <a16:creationId xmlns:a16="http://schemas.microsoft.com/office/drawing/2014/main" id="{EA77F26D-0F9B-DFF5-2FB4-9E508F48AFC7}"/>
+              </a:ext>
+            </a:extLst>
+          </p:cNvPr>
+          <p:cNvSpPr txBox="1"/>
+          <p:nvPr/>
+        </p:nvSpPr>
+        <p:spPr>
+          <a:xfrm>
+            <a:off x="705491" y="330403"/>
+            <a:ext cx="11408419" cy="769441"/>
+          </a:xfrm>
+          <a:prstGeom prst="rect">
+            <a:avLst/>
+          </a:prstGeom>
+          <a:noFill/>
+        </p:spPr>
+        <p:txBody>
+          <a:bodyPr wrap="square">
+            <a:spAutoFit/>
+          </a:bodyPr>
+          <a:lstStyle/>
+          <a:p>
+            <a:r>
+              <a:rPr lang="ru-RU" sz="4400" dirty="0"/>
+              <a:t>Подготовка данных</a:t>
+            </a:r>
+            <a:endParaRPr lang="ru-RU" sz="4400" b="1" dirty="0"/>
+          </a:p>
+        </p:txBody>
+      </p:sp>
+      <p:sp>
+        <p:nvSpPr>
+          <p:cNvPr id="6" name="TextBox 5">
+            <a:extLst>
+              <a:ext uri="{FF2B5EF4-FFF2-40B4-BE49-F238E27FC236}">
+                <a16:creationId xmlns:a16="http://schemas.microsoft.com/office/drawing/2014/main" id="{905FF7EB-3CCB-A00B-4578-2EABF116CB64}"/>
+              </a:ext>
+            </a:extLst>
+          </p:cNvPr>
+          <p:cNvSpPr txBox="1"/>
+          <p:nvPr/>
+        </p:nvSpPr>
+        <p:spPr>
+          <a:xfrm>
+            <a:off x="705491" y="1487582"/>
+            <a:ext cx="12307706" cy="3970318"/>
+          </a:xfrm>
+          <a:prstGeom prst="rect">
+            <a:avLst/>
+          </a:prstGeom>
+          <a:noFill/>
+        </p:spPr>
+        <p:txBody>
+          <a:bodyPr wrap="square">
+            <a:spAutoFit/>
+          </a:bodyPr>
+          <a:lstStyle/>
+          <a:p>
+            <a:pPr algn="ctr"/>
+            <a:r>
+              <a:rPr lang="ru-RU" sz="2800" dirty="0"/>
+              <a:t>Нейронные сети не умеют распознавать сигналы светофора.</a:t>
+            </a:r>
+          </a:p>
+          <a:p>
+            <a:pPr algn="ctr"/>
+            <a:r>
+              <a:rPr lang="ru-RU" sz="2800" dirty="0">
+                <a:latin typeface="Consolas" panose="020B0609020204030204" pitchFamily="49" charset="0"/>
+              </a:rPr>
+              <a:t>О</a:t>
+            </a:r>
+            <a:r>
+              <a:rPr lang="ru-RU" sz="2800" b="0" dirty="0">
+                <a:effectLst/>
+                <a:latin typeface="Consolas" panose="020B0609020204030204" pitchFamily="49" charset="0"/>
+              </a:rPr>
+              <a:t>ни могут принимать набор данных, представляющий</a:t>
+            </a:r>
+            <a:r>
+              <a:rPr lang="ru-RU" sz="2800" dirty="0">
+                <a:latin typeface="Consolas" panose="020B0609020204030204" pitchFamily="49" charset="0"/>
+              </a:rPr>
+              <a:t> </a:t>
+            </a:r>
+            <a:r>
+              <a:rPr lang="ru-RU" sz="2800" b="0" dirty="0">
+                <a:effectLst/>
+                <a:latin typeface="Consolas" panose="020B0609020204030204" pitchFamily="49" charset="0"/>
+              </a:rPr>
+              <a:t>то, что вы знаете, и превращать его в набор данных, представляющий то, что вы хотели бы знать (обучение с учителем).</a:t>
+            </a:r>
+          </a:p>
+          <a:p>
+            <a:pPr algn="ctr"/>
+            <a:endParaRPr lang="ru-RU" sz="2800" dirty="0">
+              <a:latin typeface="Consolas" panose="020B0609020204030204" pitchFamily="49" charset="0"/>
+            </a:endParaRPr>
+          </a:p>
+          <a:p>
+            <a:pPr algn="ctr"/>
+            <a:r>
+              <a:rPr lang="ru-RU" sz="2800" dirty="0">
+                <a:latin typeface="Consolas" panose="020B0609020204030204" pitchFamily="49" charset="0"/>
+              </a:rPr>
+              <a:t>Что мы знаем? Сигналы светофора</a:t>
+            </a:r>
+          </a:p>
+          <a:p>
+            <a:pPr algn="ctr"/>
+            <a:r>
+              <a:rPr lang="ru-RU" sz="2800" b="0" dirty="0">
+                <a:effectLst/>
+                <a:latin typeface="Consolas" panose="020B0609020204030204" pitchFamily="49" charset="0"/>
+              </a:rPr>
+              <a:t>Что мы хотим знать? Идти нам или стоять.</a:t>
+            </a:r>
+          </a:p>
+          <a:p>
+            <a:pPr algn="ctr"/>
+            <a:endParaRPr lang="ru-RU" sz="2800" dirty="0">
+              <a:latin typeface="Consolas" panose="020B0609020204030204" pitchFamily="49" charset="0"/>
+            </a:endParaRPr>
+          </a:p>
+          <a:p>
+            <a:pPr algn="ctr"/>
+            <a:r>
+              <a:rPr lang="ru-RU" sz="2800" b="0" dirty="0">
+                <a:effectLst/>
+                <a:latin typeface="Consolas" panose="020B0609020204030204" pitchFamily="49" charset="0"/>
+              </a:rPr>
+              <a:t>Как будет выглядеть числовой шаблон?</a:t>
+            </a:r>
+            <a:endParaRPr lang="en-US" sz="2800" b="0" dirty="0">
+              <a:effectLst/>
+              <a:latin typeface="Consolas" panose="020B0609020204030204" pitchFamily="49" charset="0"/>
+            </a:endParaRPr>
+          </a:p>
+        </p:txBody>
+      </p:sp>
+    </p:spTree>
+    <p:extLst>
+      <p:ext uri="{BB962C8B-B14F-4D97-AF65-F5344CB8AC3E}">
+        <p14:creationId xmlns:p14="http://schemas.microsoft.com/office/powerpoint/2010/main" val="2302947032"/>
+      </p:ext>
+    </p:extLst>
+  </p:cSld>
+  <p:clrMapOvr>
+    <a:masterClrMapping/>
+  </p:clrMapOvr>
+</p:sld>
+</file>
+
+<file path=ppt/slides/slide51.xml><?xml version="1.0" encoding="utf-8"?>
+<p:sld xmlns:a="http://schemas.openxmlformats.org/drawingml/2006/main" xmlns:r="http://schemas.openxmlformats.org/officeDocument/2006/relationships" xmlns:p="http://schemas.openxmlformats.org/presentationml/2006/main">
+  <p:cSld>
+    <p:bg>
+      <p:bgPr>
+        <a:solidFill>
+          <a:srgbClr val="972996"/>
+        </a:solidFill>
+        <a:effectLst/>
+      </p:bgPr>
+    </p:bg>
+    <p:spTree>
+      <p:nvGrpSpPr>
+        <p:cNvPr id="1" name=""/>
+        <p:cNvGrpSpPr/>
+        <p:nvPr/>
+      </p:nvGrpSpPr>
+      <p:grpSpPr>
+        <a:xfrm>
+          <a:off x="0" y="0"/>
+          <a:ext cx="0" cy="0"/>
+          <a:chOff x="0" y="0"/>
+          <a:chExt cx="0" cy="0"/>
+        </a:xfrm>
+      </p:grpSpPr>
+      <p:pic>
+        <p:nvPicPr>
+          <p:cNvPr id="4" name="Picture 3" descr="logo.png"/>
+          <p:cNvPicPr>
+            <a:picLocks noChangeAspect="1"/>
+          </p:cNvPicPr>
+          <p:nvPr/>
+        </p:nvPicPr>
+        <p:blipFill>
+          <a:blip r:embed="rId2"/>
+          <a:stretch>
+            <a:fillRect/>
+          </a:stretch>
+        </p:blipFill>
+        <p:spPr>
+          <a:xfrm>
+            <a:off x="12344400" y="274320"/>
+            <a:ext cx="1097280" cy="1080473"/>
+          </a:xfrm>
+          <a:prstGeom prst="rect">
+            <a:avLst/>
+          </a:prstGeom>
+        </p:spPr>
+      </p:pic>
+      <p:sp>
+        <p:nvSpPr>
+          <p:cNvPr id="5" name="Rectangle 4"/>
+          <p:cNvSpPr/>
+          <p:nvPr/>
+        </p:nvSpPr>
+        <p:spPr>
+          <a:xfrm>
+            <a:off x="0" y="7772400"/>
+            <a:ext cx="14630400" cy="457200"/>
+          </a:xfrm>
+          <a:prstGeom prst="rect">
+            <a:avLst/>
+          </a:prstGeom>
+          <a:solidFill>
+            <a:srgbClr val="E6E6E6"/>
+          </a:solidFill>
+          <a:ln>
+            <a:noFill/>
+          </a:ln>
+        </p:spPr>
+        <p:style>
+          <a:lnRef idx="1">
+            <a:schemeClr val="accent1"/>
+          </a:lnRef>
+          <a:fillRef idx="3">
+            <a:schemeClr val="accent1"/>
+          </a:fillRef>
+          <a:effectRef idx="2">
+            <a:schemeClr val="accent1"/>
+          </a:effectRef>
+          <a:fontRef idx="minor">
+            <a:schemeClr val="lt1"/>
+          </a:fontRef>
+        </p:style>
+        <p:txBody>
+          <a:bodyPr rtlCol="0" anchor="ctr"/>
+          <a:lstStyle/>
+          <a:p>
+            <a:pPr algn="ctr"/>
+            <a:endParaRPr/>
+          </a:p>
+        </p:txBody>
+      </p:sp>
+      <p:sp>
+        <p:nvSpPr>
+          <p:cNvPr id="3" name="TextBox 2">
+            <a:extLst>
+              <a:ext uri="{FF2B5EF4-FFF2-40B4-BE49-F238E27FC236}">
+                <a16:creationId xmlns:a16="http://schemas.microsoft.com/office/drawing/2014/main" id="{C315D28A-F529-C361-6B0C-54FC6D10368B}"/>
+              </a:ext>
+            </a:extLst>
+          </p:cNvPr>
+          <p:cNvSpPr txBox="1"/>
+          <p:nvPr/>
+        </p:nvSpPr>
+        <p:spPr>
+          <a:xfrm>
+            <a:off x="625737" y="289929"/>
+            <a:ext cx="2511906" cy="769441"/>
+          </a:xfrm>
+          <a:prstGeom prst="rect">
+            <a:avLst/>
+          </a:prstGeom>
+          <a:noFill/>
+        </p:spPr>
+        <p:txBody>
+          <a:bodyPr wrap="none">
+            <a:spAutoFit/>
+          </a:bodyPr>
+          <a:lstStyle/>
+          <a:p>
+            <a:r>
+              <a:rPr lang="ru-RU" sz="4400" b="1" dirty="0">
+                <a:solidFill>
+                  <a:schemeClr val="bg1"/>
+                </a:solidFill>
+              </a:rPr>
+              <a:t>Матрицы</a:t>
+            </a:r>
+          </a:p>
+        </p:txBody>
+      </p:sp>
+      <p:sp>
+        <p:nvSpPr>
+          <p:cNvPr id="9" name="TextBox 8">
+            <a:extLst>
+              <a:ext uri="{FF2B5EF4-FFF2-40B4-BE49-F238E27FC236}">
+                <a16:creationId xmlns:a16="http://schemas.microsoft.com/office/drawing/2014/main" id="{75923EBE-36DF-8C68-8BE4-095ED6D75139}"/>
+              </a:ext>
+            </a:extLst>
+          </p:cNvPr>
+          <p:cNvSpPr txBox="1"/>
+          <p:nvPr/>
+        </p:nvSpPr>
+        <p:spPr>
+          <a:xfrm>
+            <a:off x="2259550" y="1526590"/>
+            <a:ext cx="6574612" cy="2862322"/>
+          </a:xfrm>
+          <a:prstGeom prst="rect">
+            <a:avLst/>
+          </a:prstGeom>
+          <a:noFill/>
+        </p:spPr>
+        <p:txBody>
+          <a:bodyPr wrap="square">
+            <a:spAutoFit/>
+          </a:bodyPr>
+          <a:lstStyle/>
+          <a:p>
+            <a:r>
+              <a:rPr lang="en-US" b="0" dirty="0">
+                <a:solidFill>
+                  <a:srgbClr val="C9D1D9"/>
+                </a:solidFill>
+                <a:effectLst/>
+                <a:latin typeface="Consolas" panose="020B0609020204030204" pitchFamily="49" charset="0"/>
+              </a:rPr>
+              <a:t>streetlights</a:t>
+            </a:r>
+            <a:r>
+              <a:rPr lang="en-US" b="0" dirty="0">
+                <a:solidFill>
+                  <a:srgbClr val="BBBEBF"/>
+                </a:solidFill>
+                <a:effectLst/>
+                <a:latin typeface="Consolas" panose="020B0609020204030204" pitchFamily="49" charset="0"/>
+              </a:rPr>
+              <a:t> </a:t>
+            </a:r>
+            <a:r>
+              <a:rPr lang="en-US" b="0" dirty="0">
+                <a:solidFill>
+                  <a:srgbClr val="D4D4D4"/>
+                </a:solidFill>
+                <a:effectLst/>
+                <a:latin typeface="Consolas" panose="020B0609020204030204" pitchFamily="49" charset="0"/>
+              </a:rPr>
+              <a:t>=</a:t>
+            </a:r>
+            <a:r>
+              <a:rPr lang="en-US" b="0" dirty="0">
+                <a:solidFill>
+                  <a:srgbClr val="BBBEBF"/>
+                </a:solidFill>
+                <a:effectLst/>
+                <a:latin typeface="Consolas" panose="020B0609020204030204" pitchFamily="49" charset="0"/>
+              </a:rPr>
+              <a:t> </a:t>
+            </a:r>
+            <a:r>
+              <a:rPr lang="en-US" b="0" dirty="0" err="1">
+                <a:solidFill>
+                  <a:srgbClr val="4EC9B0"/>
+                </a:solidFill>
+                <a:effectLst/>
+                <a:latin typeface="Consolas" panose="020B0609020204030204" pitchFamily="49" charset="0"/>
+              </a:rPr>
+              <a:t>np</a:t>
+            </a:r>
+            <a:r>
+              <a:rPr lang="en-US" b="0" dirty="0" err="1">
+                <a:solidFill>
+                  <a:srgbClr val="BBBEBF"/>
+                </a:solidFill>
+                <a:effectLst/>
+                <a:latin typeface="Consolas" panose="020B0609020204030204" pitchFamily="49" charset="0"/>
+              </a:rPr>
+              <a:t>.</a:t>
+            </a:r>
+            <a:r>
+              <a:rPr lang="en-US" b="0" dirty="0" err="1">
+                <a:solidFill>
+                  <a:srgbClr val="D2A8FF"/>
+                </a:solidFill>
+                <a:effectLst/>
+                <a:latin typeface="Consolas" panose="020B0609020204030204" pitchFamily="49" charset="0"/>
+              </a:rPr>
+              <a:t>array</a:t>
+            </a:r>
+            <a:r>
+              <a:rPr lang="en-US" b="0" dirty="0">
+                <a:solidFill>
+                  <a:srgbClr val="BBBEBF"/>
+                </a:solidFill>
+                <a:effectLst/>
+                <a:latin typeface="Consolas" panose="020B0609020204030204" pitchFamily="49" charset="0"/>
+              </a:rPr>
+              <a:t>([</a:t>
+            </a:r>
+          </a:p>
+          <a:p>
+            <a:r>
+              <a:rPr lang="en-US" b="0" dirty="0">
+                <a:solidFill>
+                  <a:srgbClr val="BBBEBF"/>
+                </a:solidFill>
+                <a:effectLst/>
+                <a:latin typeface="Consolas" panose="020B0609020204030204" pitchFamily="49" charset="0"/>
+              </a:rPr>
+              <a:t>    [</a:t>
+            </a:r>
+            <a:r>
+              <a:rPr lang="en-US" b="0" dirty="0">
+                <a:solidFill>
+                  <a:srgbClr val="B5CEA8"/>
+                </a:solidFill>
+                <a:effectLst/>
+                <a:latin typeface="Consolas" panose="020B0609020204030204" pitchFamily="49" charset="0"/>
+              </a:rPr>
+              <a:t>1</a:t>
+            </a:r>
+            <a:r>
+              <a:rPr lang="en-US" b="0" dirty="0">
+                <a:solidFill>
+                  <a:srgbClr val="BBBEBF"/>
+                </a:solidFill>
+                <a:effectLst/>
+                <a:latin typeface="Consolas" panose="020B0609020204030204" pitchFamily="49" charset="0"/>
+              </a:rPr>
+              <a:t>,</a:t>
+            </a:r>
+            <a:r>
+              <a:rPr lang="en-US" b="0" dirty="0">
+                <a:solidFill>
+                  <a:srgbClr val="B5CEA8"/>
+                </a:solidFill>
+                <a:effectLst/>
+                <a:latin typeface="Consolas" panose="020B0609020204030204" pitchFamily="49" charset="0"/>
+              </a:rPr>
+              <a:t>0</a:t>
+            </a:r>
+            <a:r>
+              <a:rPr lang="en-US" b="0" dirty="0">
+                <a:solidFill>
+                  <a:srgbClr val="BBBEBF"/>
+                </a:solidFill>
+                <a:effectLst/>
+                <a:latin typeface="Consolas" panose="020B0609020204030204" pitchFamily="49" charset="0"/>
+              </a:rPr>
+              <a:t>,</a:t>
+            </a:r>
+            <a:r>
+              <a:rPr lang="en-US" b="0" dirty="0">
+                <a:solidFill>
+                  <a:srgbClr val="B5CEA8"/>
+                </a:solidFill>
+                <a:effectLst/>
+                <a:latin typeface="Consolas" panose="020B0609020204030204" pitchFamily="49" charset="0"/>
+              </a:rPr>
+              <a:t>1</a:t>
+            </a:r>
+            <a:r>
+              <a:rPr lang="en-US" b="0" dirty="0">
+                <a:solidFill>
+                  <a:srgbClr val="BBBEBF"/>
+                </a:solidFill>
+                <a:effectLst/>
+                <a:latin typeface="Consolas" panose="020B0609020204030204" pitchFamily="49" charset="0"/>
+              </a:rPr>
+              <a:t>],</a:t>
+            </a:r>
+          </a:p>
+          <a:p>
+            <a:r>
+              <a:rPr lang="en-US" b="0" dirty="0">
+                <a:solidFill>
+                  <a:srgbClr val="BBBEBF"/>
+                </a:solidFill>
+                <a:effectLst/>
+                <a:latin typeface="Consolas" panose="020B0609020204030204" pitchFamily="49" charset="0"/>
+              </a:rPr>
+              <a:t>    [</a:t>
+            </a:r>
+            <a:r>
+              <a:rPr lang="en-US" b="0" dirty="0">
+                <a:solidFill>
+                  <a:srgbClr val="B5CEA8"/>
+                </a:solidFill>
+                <a:effectLst/>
+                <a:latin typeface="Consolas" panose="020B0609020204030204" pitchFamily="49" charset="0"/>
+              </a:rPr>
+              <a:t>0</a:t>
+            </a:r>
+            <a:r>
+              <a:rPr lang="en-US" b="0" dirty="0">
+                <a:solidFill>
+                  <a:srgbClr val="BBBEBF"/>
+                </a:solidFill>
+                <a:effectLst/>
+                <a:latin typeface="Consolas" panose="020B0609020204030204" pitchFamily="49" charset="0"/>
+              </a:rPr>
+              <a:t>,</a:t>
+            </a:r>
+            <a:r>
+              <a:rPr lang="en-US" b="0" dirty="0">
+                <a:solidFill>
+                  <a:srgbClr val="B5CEA8"/>
+                </a:solidFill>
+                <a:effectLst/>
+                <a:latin typeface="Consolas" panose="020B0609020204030204" pitchFamily="49" charset="0"/>
+              </a:rPr>
+              <a:t>1</a:t>
+            </a:r>
+            <a:r>
+              <a:rPr lang="en-US" b="0" dirty="0">
+                <a:solidFill>
+                  <a:srgbClr val="BBBEBF"/>
+                </a:solidFill>
+                <a:effectLst/>
+                <a:latin typeface="Consolas" panose="020B0609020204030204" pitchFamily="49" charset="0"/>
+              </a:rPr>
+              <a:t>,</a:t>
+            </a:r>
+            <a:r>
+              <a:rPr lang="en-US" b="0" dirty="0">
+                <a:solidFill>
+                  <a:srgbClr val="B5CEA8"/>
+                </a:solidFill>
+                <a:effectLst/>
+                <a:latin typeface="Consolas" panose="020B0609020204030204" pitchFamily="49" charset="0"/>
+              </a:rPr>
+              <a:t>1</a:t>
+            </a:r>
+            <a:r>
+              <a:rPr lang="en-US" b="0" dirty="0">
+                <a:solidFill>
+                  <a:srgbClr val="BBBEBF"/>
+                </a:solidFill>
+                <a:effectLst/>
+                <a:latin typeface="Consolas" panose="020B0609020204030204" pitchFamily="49" charset="0"/>
+              </a:rPr>
+              <a:t>],</a:t>
+            </a:r>
+          </a:p>
+          <a:p>
+            <a:r>
+              <a:rPr lang="en-US" b="0" dirty="0">
+                <a:solidFill>
+                  <a:srgbClr val="BBBEBF"/>
+                </a:solidFill>
+                <a:effectLst/>
+                <a:latin typeface="Consolas" panose="020B0609020204030204" pitchFamily="49" charset="0"/>
+              </a:rPr>
+              <a:t>    [</a:t>
+            </a:r>
+            <a:r>
+              <a:rPr lang="en-US" b="0" dirty="0">
+                <a:solidFill>
+                  <a:srgbClr val="B5CEA8"/>
+                </a:solidFill>
+                <a:effectLst/>
+                <a:latin typeface="Consolas" panose="020B0609020204030204" pitchFamily="49" charset="0"/>
+              </a:rPr>
+              <a:t>0</a:t>
+            </a:r>
+            <a:r>
+              <a:rPr lang="en-US" b="0" dirty="0">
+                <a:solidFill>
+                  <a:srgbClr val="BBBEBF"/>
+                </a:solidFill>
+                <a:effectLst/>
+                <a:latin typeface="Consolas" panose="020B0609020204030204" pitchFamily="49" charset="0"/>
+              </a:rPr>
+              <a:t>,</a:t>
+            </a:r>
+            <a:r>
+              <a:rPr lang="en-US" b="0" dirty="0">
+                <a:solidFill>
+                  <a:srgbClr val="B5CEA8"/>
+                </a:solidFill>
+                <a:effectLst/>
+                <a:latin typeface="Consolas" panose="020B0609020204030204" pitchFamily="49" charset="0"/>
+              </a:rPr>
+              <a:t>0</a:t>
+            </a:r>
+            <a:r>
+              <a:rPr lang="en-US" b="0" dirty="0">
+                <a:solidFill>
+                  <a:srgbClr val="BBBEBF"/>
+                </a:solidFill>
+                <a:effectLst/>
+                <a:latin typeface="Consolas" panose="020B0609020204030204" pitchFamily="49" charset="0"/>
+              </a:rPr>
+              <a:t>,</a:t>
+            </a:r>
+            <a:r>
+              <a:rPr lang="en-US" b="0" dirty="0">
+                <a:solidFill>
+                  <a:srgbClr val="B5CEA8"/>
+                </a:solidFill>
+                <a:effectLst/>
+                <a:latin typeface="Consolas" panose="020B0609020204030204" pitchFamily="49" charset="0"/>
+              </a:rPr>
+              <a:t>1</a:t>
+            </a:r>
+            <a:r>
+              <a:rPr lang="en-US" b="0" dirty="0">
+                <a:solidFill>
+                  <a:srgbClr val="BBBEBF"/>
+                </a:solidFill>
+                <a:effectLst/>
+                <a:latin typeface="Consolas" panose="020B0609020204030204" pitchFamily="49" charset="0"/>
+              </a:rPr>
+              <a:t>],</a:t>
+            </a:r>
+          </a:p>
+          <a:p>
+            <a:r>
+              <a:rPr lang="en-US" b="0" dirty="0">
+                <a:solidFill>
+                  <a:srgbClr val="BBBEBF"/>
+                </a:solidFill>
+                <a:effectLst/>
+                <a:latin typeface="Consolas" panose="020B0609020204030204" pitchFamily="49" charset="0"/>
+              </a:rPr>
+              <a:t>    [</a:t>
+            </a:r>
+            <a:r>
+              <a:rPr lang="en-US" b="0" dirty="0">
+                <a:solidFill>
+                  <a:srgbClr val="B5CEA8"/>
+                </a:solidFill>
+                <a:effectLst/>
+                <a:latin typeface="Consolas" panose="020B0609020204030204" pitchFamily="49" charset="0"/>
+              </a:rPr>
+              <a:t>1</a:t>
+            </a:r>
+            <a:r>
+              <a:rPr lang="en-US" b="0" dirty="0">
+                <a:solidFill>
+                  <a:srgbClr val="BBBEBF"/>
+                </a:solidFill>
+                <a:effectLst/>
+                <a:latin typeface="Consolas" panose="020B0609020204030204" pitchFamily="49" charset="0"/>
+              </a:rPr>
+              <a:t>,</a:t>
+            </a:r>
+            <a:r>
+              <a:rPr lang="en-US" b="0" dirty="0">
+                <a:solidFill>
+                  <a:srgbClr val="B5CEA8"/>
+                </a:solidFill>
+                <a:effectLst/>
+                <a:latin typeface="Consolas" panose="020B0609020204030204" pitchFamily="49" charset="0"/>
+              </a:rPr>
+              <a:t>1</a:t>
+            </a:r>
+            <a:r>
+              <a:rPr lang="en-US" b="0" dirty="0">
+                <a:solidFill>
+                  <a:srgbClr val="BBBEBF"/>
+                </a:solidFill>
+                <a:effectLst/>
+                <a:latin typeface="Consolas" panose="020B0609020204030204" pitchFamily="49" charset="0"/>
+              </a:rPr>
+              <a:t>,</a:t>
+            </a:r>
+            <a:r>
+              <a:rPr lang="en-US" b="0" dirty="0">
+                <a:solidFill>
+                  <a:srgbClr val="B5CEA8"/>
+                </a:solidFill>
+                <a:effectLst/>
+                <a:latin typeface="Consolas" panose="020B0609020204030204" pitchFamily="49" charset="0"/>
+              </a:rPr>
+              <a:t>1</a:t>
+            </a:r>
+            <a:r>
+              <a:rPr lang="en-US" b="0" dirty="0">
+                <a:solidFill>
+                  <a:srgbClr val="BBBEBF"/>
+                </a:solidFill>
+                <a:effectLst/>
+                <a:latin typeface="Consolas" panose="020B0609020204030204" pitchFamily="49" charset="0"/>
+              </a:rPr>
+              <a:t>],</a:t>
+            </a:r>
+          </a:p>
+          <a:p>
+            <a:r>
+              <a:rPr lang="en-US" b="0" dirty="0">
+                <a:solidFill>
+                  <a:srgbClr val="BBBEBF"/>
+                </a:solidFill>
+                <a:effectLst/>
+                <a:latin typeface="Consolas" panose="020B0609020204030204" pitchFamily="49" charset="0"/>
+              </a:rPr>
+              <a:t>    [</a:t>
+            </a:r>
+            <a:r>
+              <a:rPr lang="en-US" b="0" dirty="0">
+                <a:solidFill>
+                  <a:srgbClr val="B5CEA8"/>
+                </a:solidFill>
+                <a:effectLst/>
+                <a:latin typeface="Consolas" panose="020B0609020204030204" pitchFamily="49" charset="0"/>
+              </a:rPr>
+              <a:t>0</a:t>
+            </a:r>
+            <a:r>
+              <a:rPr lang="en-US" b="0" dirty="0">
+                <a:solidFill>
+                  <a:srgbClr val="BBBEBF"/>
+                </a:solidFill>
+                <a:effectLst/>
+                <a:latin typeface="Consolas" panose="020B0609020204030204" pitchFamily="49" charset="0"/>
+              </a:rPr>
+              <a:t>,</a:t>
+            </a:r>
+            <a:r>
+              <a:rPr lang="en-US" b="0" dirty="0">
+                <a:solidFill>
+                  <a:srgbClr val="B5CEA8"/>
+                </a:solidFill>
+                <a:effectLst/>
+                <a:latin typeface="Consolas" panose="020B0609020204030204" pitchFamily="49" charset="0"/>
+              </a:rPr>
+              <a:t>1</a:t>
+            </a:r>
+            <a:r>
+              <a:rPr lang="en-US" b="0" dirty="0">
+                <a:solidFill>
+                  <a:srgbClr val="BBBEBF"/>
+                </a:solidFill>
+                <a:effectLst/>
+                <a:latin typeface="Consolas" panose="020B0609020204030204" pitchFamily="49" charset="0"/>
+              </a:rPr>
+              <a:t>,</a:t>
+            </a:r>
+            <a:r>
+              <a:rPr lang="en-US" b="0" dirty="0">
+                <a:solidFill>
+                  <a:srgbClr val="B5CEA8"/>
+                </a:solidFill>
+                <a:effectLst/>
+                <a:latin typeface="Consolas" panose="020B0609020204030204" pitchFamily="49" charset="0"/>
+              </a:rPr>
+              <a:t>1</a:t>
+            </a:r>
+            <a:r>
+              <a:rPr lang="en-US" b="0" dirty="0">
+                <a:solidFill>
+                  <a:srgbClr val="BBBEBF"/>
+                </a:solidFill>
+                <a:effectLst/>
+                <a:latin typeface="Consolas" panose="020B0609020204030204" pitchFamily="49" charset="0"/>
+              </a:rPr>
+              <a:t>],</a:t>
+            </a:r>
+          </a:p>
+          <a:p>
+            <a:r>
+              <a:rPr lang="en-US" b="0" dirty="0">
+                <a:solidFill>
+                  <a:srgbClr val="BBBEBF"/>
+                </a:solidFill>
+                <a:effectLst/>
+                <a:latin typeface="Consolas" panose="020B0609020204030204" pitchFamily="49" charset="0"/>
+              </a:rPr>
+              <a:t>    [</a:t>
+            </a:r>
+            <a:r>
+              <a:rPr lang="en-US" b="0" dirty="0">
+                <a:solidFill>
+                  <a:srgbClr val="B5CEA8"/>
+                </a:solidFill>
+                <a:effectLst/>
+                <a:latin typeface="Consolas" panose="020B0609020204030204" pitchFamily="49" charset="0"/>
+              </a:rPr>
+              <a:t>1</a:t>
+            </a:r>
+            <a:r>
+              <a:rPr lang="en-US" b="0" dirty="0">
+                <a:solidFill>
+                  <a:srgbClr val="BBBEBF"/>
+                </a:solidFill>
+                <a:effectLst/>
+                <a:latin typeface="Consolas" panose="020B0609020204030204" pitchFamily="49" charset="0"/>
+              </a:rPr>
+              <a:t>,</a:t>
+            </a:r>
+            <a:r>
+              <a:rPr lang="en-US" b="0" dirty="0">
+                <a:solidFill>
+                  <a:srgbClr val="B5CEA8"/>
+                </a:solidFill>
+                <a:effectLst/>
+                <a:latin typeface="Consolas" panose="020B0609020204030204" pitchFamily="49" charset="0"/>
+              </a:rPr>
+              <a:t>0</a:t>
+            </a:r>
+            <a:r>
+              <a:rPr lang="en-US" b="0" dirty="0">
+                <a:solidFill>
+                  <a:srgbClr val="BBBEBF"/>
+                </a:solidFill>
+                <a:effectLst/>
+                <a:latin typeface="Consolas" panose="020B0609020204030204" pitchFamily="49" charset="0"/>
+              </a:rPr>
+              <a:t>,</a:t>
+            </a:r>
+            <a:r>
+              <a:rPr lang="en-US" b="0" dirty="0">
+                <a:solidFill>
+                  <a:srgbClr val="B5CEA8"/>
+                </a:solidFill>
+                <a:effectLst/>
+                <a:latin typeface="Consolas" panose="020B0609020204030204" pitchFamily="49" charset="0"/>
+              </a:rPr>
+              <a:t>1</a:t>
+            </a:r>
+            <a:r>
+              <a:rPr lang="en-US" b="0" dirty="0">
+                <a:solidFill>
+                  <a:srgbClr val="BBBEBF"/>
+                </a:solidFill>
+                <a:effectLst/>
+                <a:latin typeface="Consolas" panose="020B0609020204030204" pitchFamily="49" charset="0"/>
+              </a:rPr>
+              <a:t>],</a:t>
+            </a:r>
+          </a:p>
+          <a:p>
+            <a:r>
+              <a:rPr lang="en-US" b="0" dirty="0">
+                <a:solidFill>
+                  <a:srgbClr val="BBBEBF"/>
+                </a:solidFill>
+                <a:effectLst/>
+                <a:latin typeface="Consolas" panose="020B0609020204030204" pitchFamily="49" charset="0"/>
+              </a:rPr>
+              <a:t>])</a:t>
+            </a:r>
+          </a:p>
+          <a:p>
+            <a:br>
+              <a:rPr lang="en-US" b="0" dirty="0">
+                <a:solidFill>
+                  <a:srgbClr val="BBBEBF"/>
+                </a:solidFill>
+                <a:effectLst/>
+                <a:latin typeface="Consolas" panose="020B0609020204030204" pitchFamily="49" charset="0"/>
+              </a:rPr>
+            </a:br>
+            <a:r>
+              <a:rPr lang="en-US" b="0" dirty="0" err="1">
+                <a:solidFill>
+                  <a:srgbClr val="C9D1D9"/>
+                </a:solidFill>
+                <a:effectLst/>
+                <a:latin typeface="Consolas" panose="020B0609020204030204" pitchFamily="49" charset="0"/>
+              </a:rPr>
+              <a:t>walk_vs_stop</a:t>
+            </a:r>
+            <a:r>
+              <a:rPr lang="en-US" b="0" dirty="0">
+                <a:solidFill>
+                  <a:srgbClr val="BBBEBF"/>
+                </a:solidFill>
+                <a:effectLst/>
+                <a:latin typeface="Consolas" panose="020B0609020204030204" pitchFamily="49" charset="0"/>
+              </a:rPr>
+              <a:t> </a:t>
+            </a:r>
+            <a:r>
+              <a:rPr lang="en-US" b="0" dirty="0">
+                <a:solidFill>
+                  <a:srgbClr val="D4D4D4"/>
+                </a:solidFill>
+                <a:effectLst/>
+                <a:latin typeface="Consolas" panose="020B0609020204030204" pitchFamily="49" charset="0"/>
+              </a:rPr>
+              <a:t>=</a:t>
+            </a:r>
+            <a:r>
+              <a:rPr lang="en-US" b="0" dirty="0">
+                <a:solidFill>
+                  <a:srgbClr val="BBBEBF"/>
+                </a:solidFill>
+                <a:effectLst/>
+                <a:latin typeface="Consolas" panose="020B0609020204030204" pitchFamily="49" charset="0"/>
+              </a:rPr>
+              <a:t> </a:t>
+            </a:r>
+            <a:r>
+              <a:rPr lang="en-US" b="0" dirty="0" err="1">
+                <a:solidFill>
+                  <a:srgbClr val="4EC9B0"/>
+                </a:solidFill>
+                <a:effectLst/>
+                <a:latin typeface="Consolas" panose="020B0609020204030204" pitchFamily="49" charset="0"/>
+              </a:rPr>
+              <a:t>np</a:t>
+            </a:r>
+            <a:r>
+              <a:rPr lang="en-US" b="0" dirty="0" err="1">
+                <a:solidFill>
+                  <a:srgbClr val="BBBEBF"/>
+                </a:solidFill>
+                <a:effectLst/>
+                <a:latin typeface="Consolas" panose="020B0609020204030204" pitchFamily="49" charset="0"/>
+              </a:rPr>
+              <a:t>.</a:t>
+            </a:r>
+            <a:r>
+              <a:rPr lang="en-US" b="0" dirty="0" err="1">
+                <a:solidFill>
+                  <a:srgbClr val="D2A8FF"/>
+                </a:solidFill>
+                <a:effectLst/>
+                <a:latin typeface="Consolas" panose="020B0609020204030204" pitchFamily="49" charset="0"/>
+              </a:rPr>
+              <a:t>array</a:t>
+            </a:r>
+            <a:r>
+              <a:rPr lang="en-US" b="0" dirty="0">
+                <a:solidFill>
+                  <a:srgbClr val="BBBEBF"/>
+                </a:solidFill>
+                <a:effectLst/>
+                <a:latin typeface="Consolas" panose="020B0609020204030204" pitchFamily="49" charset="0"/>
+              </a:rPr>
+              <a:t>([</a:t>
+            </a:r>
+            <a:r>
+              <a:rPr lang="en-US" b="0" dirty="0">
+                <a:solidFill>
+                  <a:srgbClr val="B5CEA8"/>
+                </a:solidFill>
+                <a:effectLst/>
+                <a:latin typeface="Consolas" panose="020B0609020204030204" pitchFamily="49" charset="0"/>
+              </a:rPr>
+              <a:t>0</a:t>
+            </a:r>
+            <a:r>
+              <a:rPr lang="en-US" b="0" dirty="0">
+                <a:solidFill>
+                  <a:srgbClr val="BBBEBF"/>
+                </a:solidFill>
+                <a:effectLst/>
+                <a:latin typeface="Consolas" panose="020B0609020204030204" pitchFamily="49" charset="0"/>
+              </a:rPr>
+              <a:t>,</a:t>
+            </a:r>
+            <a:r>
+              <a:rPr lang="en-US" b="0" dirty="0">
+                <a:solidFill>
+                  <a:srgbClr val="B5CEA8"/>
+                </a:solidFill>
+                <a:effectLst/>
+                <a:latin typeface="Consolas" panose="020B0609020204030204" pitchFamily="49" charset="0"/>
+              </a:rPr>
+              <a:t>1</a:t>
+            </a:r>
+            <a:r>
+              <a:rPr lang="en-US" b="0" dirty="0">
+                <a:solidFill>
+                  <a:srgbClr val="BBBEBF"/>
+                </a:solidFill>
+                <a:effectLst/>
+                <a:latin typeface="Consolas" panose="020B0609020204030204" pitchFamily="49" charset="0"/>
+              </a:rPr>
+              <a:t>,</a:t>
+            </a:r>
+            <a:r>
+              <a:rPr lang="en-US" b="0" dirty="0">
+                <a:solidFill>
+                  <a:srgbClr val="B5CEA8"/>
+                </a:solidFill>
+                <a:effectLst/>
+                <a:latin typeface="Consolas" panose="020B0609020204030204" pitchFamily="49" charset="0"/>
+              </a:rPr>
+              <a:t>0</a:t>
+            </a:r>
+            <a:r>
+              <a:rPr lang="en-US" b="0" dirty="0">
+                <a:solidFill>
+                  <a:srgbClr val="BBBEBF"/>
+                </a:solidFill>
+                <a:effectLst/>
+                <a:latin typeface="Consolas" panose="020B0609020204030204" pitchFamily="49" charset="0"/>
+              </a:rPr>
+              <a:t>,</a:t>
+            </a:r>
+            <a:r>
+              <a:rPr lang="en-US" b="0" dirty="0">
+                <a:solidFill>
+                  <a:srgbClr val="B5CEA8"/>
+                </a:solidFill>
+                <a:effectLst/>
+                <a:latin typeface="Consolas" panose="020B0609020204030204" pitchFamily="49" charset="0"/>
+              </a:rPr>
+              <a:t>1</a:t>
+            </a:r>
+            <a:r>
+              <a:rPr lang="en-US" b="0" dirty="0">
+                <a:solidFill>
+                  <a:srgbClr val="BBBEBF"/>
+                </a:solidFill>
+                <a:effectLst/>
+                <a:latin typeface="Consolas" panose="020B0609020204030204" pitchFamily="49" charset="0"/>
+              </a:rPr>
+              <a:t>,</a:t>
+            </a:r>
+            <a:r>
+              <a:rPr lang="en-US" b="0" dirty="0">
+                <a:solidFill>
+                  <a:srgbClr val="B5CEA8"/>
+                </a:solidFill>
+                <a:effectLst/>
+                <a:latin typeface="Consolas" panose="020B0609020204030204" pitchFamily="49" charset="0"/>
+              </a:rPr>
+              <a:t>1</a:t>
+            </a:r>
+            <a:r>
+              <a:rPr lang="en-US" b="0" dirty="0">
+                <a:solidFill>
+                  <a:srgbClr val="BBBEBF"/>
+                </a:solidFill>
+                <a:effectLst/>
+                <a:latin typeface="Consolas" panose="020B0609020204030204" pitchFamily="49" charset="0"/>
+              </a:rPr>
+              <a:t>,</a:t>
+            </a:r>
+            <a:r>
+              <a:rPr lang="en-US" b="0" dirty="0">
+                <a:solidFill>
+                  <a:srgbClr val="B5CEA8"/>
+                </a:solidFill>
+                <a:effectLst/>
+                <a:latin typeface="Consolas" panose="020B0609020204030204" pitchFamily="49" charset="0"/>
+              </a:rPr>
+              <a:t>0</a:t>
+            </a:r>
+            <a:r>
+              <a:rPr lang="en-US" b="0" dirty="0">
+                <a:solidFill>
+                  <a:srgbClr val="BBBEBF"/>
+                </a:solidFill>
+                <a:effectLst/>
+                <a:latin typeface="Consolas" panose="020B0609020204030204" pitchFamily="49" charset="0"/>
+              </a:rPr>
+              <a:t>])</a:t>
+            </a:r>
+          </a:p>
+        </p:txBody>
+      </p:sp>
+      <p:sp>
+        <p:nvSpPr>
+          <p:cNvPr id="6" name="TextBox 5">
+            <a:extLst>
+              <a:ext uri="{FF2B5EF4-FFF2-40B4-BE49-F238E27FC236}">
+                <a16:creationId xmlns:a16="http://schemas.microsoft.com/office/drawing/2014/main" id="{9EE6C657-79F9-2D8C-1671-8A06372BA150}"/>
+              </a:ext>
+            </a:extLst>
+          </p:cNvPr>
+          <p:cNvSpPr txBox="1"/>
+          <p:nvPr/>
+        </p:nvSpPr>
+        <p:spPr>
+          <a:xfrm>
+            <a:off x="1624760" y="4702256"/>
+            <a:ext cx="7360542" cy="646331"/>
+          </a:xfrm>
+          <a:prstGeom prst="rect">
+            <a:avLst/>
+          </a:prstGeom>
+          <a:noFill/>
+        </p:spPr>
+        <p:txBody>
+          <a:bodyPr wrap="square">
+            <a:spAutoFit/>
+          </a:bodyPr>
+          <a:lstStyle/>
+          <a:p>
+            <a:pPr algn="ctr"/>
+            <a:r>
+              <a:rPr lang="ru-RU" dirty="0">
+                <a:solidFill>
+                  <a:schemeClr val="bg1"/>
+                </a:solidFill>
+              </a:rPr>
+              <a:t>Чего мы хотим от нейронной сети? Чтобы она взяла матрицу </a:t>
+            </a:r>
+            <a:r>
+              <a:rPr lang="ru-RU" dirty="0" err="1">
+                <a:solidFill>
+                  <a:schemeClr val="bg1"/>
+                </a:solidFill>
+              </a:rPr>
+              <a:t>streetlights</a:t>
+            </a:r>
+            <a:endParaRPr lang="ru-RU" dirty="0">
+              <a:solidFill>
+                <a:schemeClr val="bg1"/>
+              </a:solidFill>
+            </a:endParaRPr>
+          </a:p>
+          <a:p>
+            <a:pPr algn="ctr"/>
+            <a:r>
+              <a:rPr lang="ru-RU" dirty="0">
+                <a:solidFill>
+                  <a:schemeClr val="bg1"/>
+                </a:solidFill>
+              </a:rPr>
+              <a:t>и научилась преобразовывать ее в матрицу </a:t>
+            </a:r>
+            <a:r>
+              <a:rPr lang="ru-RU" dirty="0" err="1">
+                <a:solidFill>
+                  <a:schemeClr val="bg1"/>
+                </a:solidFill>
+              </a:rPr>
+              <a:t>walk_vs_stop</a:t>
+            </a:r>
+            <a:r>
+              <a:rPr lang="ru-RU" dirty="0">
+                <a:solidFill>
+                  <a:schemeClr val="bg1"/>
+                </a:solidFill>
+              </a:rPr>
+              <a:t>.</a:t>
+            </a:r>
+          </a:p>
+        </p:txBody>
+      </p:sp>
+    </p:spTree>
+    <p:extLst>
+      <p:ext uri="{BB962C8B-B14F-4D97-AF65-F5344CB8AC3E}">
+        <p14:creationId xmlns:p14="http://schemas.microsoft.com/office/powerpoint/2010/main" val="562749988"/>
+      </p:ext>
+    </p:extLst>
+  </p:cSld>
+  <p:clrMapOvr>
+    <a:masterClrMapping/>
+  </p:clrMapOvr>
+</p:sld>
+</file>
+
+<file path=ppt/slides/slide52.xml><?xml version="1.0" encoding="utf-8"?>
+<p:sld xmlns:a="http://schemas.openxmlformats.org/drawingml/2006/main" xmlns:r="http://schemas.openxmlformats.org/officeDocument/2006/relationships" xmlns:p="http://schemas.openxmlformats.org/presentationml/2006/main">
+  <p:cSld>
+    <p:bg>
+      <p:bgPr>
+        <a:solidFill>
+          <a:srgbClr val="000000"/>
+        </a:solidFill>
+        <a:effectLst/>
+      </p:bgPr>
+    </p:bg>
+    <p:spTree>
+      <p:nvGrpSpPr>
+        <p:cNvPr id="1" name=""/>
+        <p:cNvGrpSpPr/>
+        <p:nvPr/>
+      </p:nvGrpSpPr>
+      <p:grpSpPr>
+        <a:xfrm>
+          <a:off x="0" y="0"/>
+          <a:ext cx="0" cy="0"/>
+          <a:chOff x="0" y="0"/>
+          <a:chExt cx="0" cy="0"/>
+        </a:xfrm>
+      </p:grpSpPr>
+      <p:sp>
+        <p:nvSpPr>
+          <p:cNvPr id="4" name="Rectangle 3"/>
+          <p:cNvSpPr/>
+          <p:nvPr/>
+        </p:nvSpPr>
+        <p:spPr>
+          <a:xfrm>
+            <a:off x="0" y="7772400"/>
+            <a:ext cx="14630400" cy="457200"/>
+          </a:xfrm>
+          <a:prstGeom prst="rect">
+            <a:avLst/>
+          </a:prstGeom>
+          <a:solidFill>
+            <a:srgbClr val="640064"/>
+          </a:solidFill>
+          <a:ln>
+            <a:noFill/>
+          </a:ln>
+        </p:spPr>
+        <p:style>
+          <a:lnRef idx="1">
+            <a:schemeClr val="accent1"/>
+          </a:lnRef>
+          <a:fillRef idx="3">
+            <a:schemeClr val="accent1"/>
+          </a:fillRef>
+          <a:effectRef idx="2">
+            <a:schemeClr val="accent1"/>
+          </a:effectRef>
+          <a:fontRef idx="minor">
+            <a:schemeClr val="lt1"/>
+          </a:fontRef>
+        </p:style>
+        <p:txBody>
+          <a:bodyPr rtlCol="0" anchor="ctr"/>
+          <a:lstStyle/>
+          <a:p>
+            <a:pPr algn="ctr"/>
+            <a:endParaRPr>
+              <a:solidFill>
+                <a:schemeClr val="bg1"/>
+              </a:solidFill>
+            </a:endParaRPr>
+          </a:p>
+        </p:txBody>
+      </p:sp>
+      <p:sp>
+        <p:nvSpPr>
+          <p:cNvPr id="3" name="TextBox 2">
+            <a:extLst>
+              <a:ext uri="{FF2B5EF4-FFF2-40B4-BE49-F238E27FC236}">
+                <a16:creationId xmlns:a16="http://schemas.microsoft.com/office/drawing/2014/main" id="{60C94DDE-3021-A7B8-613F-8CDEE0F3BF48}"/>
+              </a:ext>
+            </a:extLst>
+          </p:cNvPr>
+          <p:cNvSpPr txBox="1"/>
+          <p:nvPr/>
+        </p:nvSpPr>
+        <p:spPr>
+          <a:xfrm>
+            <a:off x="442912" y="281672"/>
+            <a:ext cx="13139737" cy="769441"/>
+          </a:xfrm>
+          <a:prstGeom prst="rect">
+            <a:avLst/>
+          </a:prstGeom>
+          <a:noFill/>
+        </p:spPr>
+        <p:txBody>
+          <a:bodyPr wrap="square">
+            <a:spAutoFit/>
+          </a:bodyPr>
+          <a:lstStyle/>
+          <a:p>
+            <a:r>
+              <a:rPr lang="ru-RU" sz="4400" b="1" dirty="0">
+                <a:solidFill>
+                  <a:schemeClr val="bg1"/>
+                </a:solidFill>
+              </a:rPr>
+              <a:t>Пробуем</a:t>
+            </a:r>
+          </a:p>
+        </p:txBody>
+      </p:sp>
+      <p:sp>
+        <p:nvSpPr>
+          <p:cNvPr id="2" name="TextBox 1">
+            <a:extLst>
+              <a:ext uri="{FF2B5EF4-FFF2-40B4-BE49-F238E27FC236}">
+                <a16:creationId xmlns:a16="http://schemas.microsoft.com/office/drawing/2014/main" id="{03EB8301-CC7D-A7A3-15C3-810BE0BC42DA}"/>
+              </a:ext>
+            </a:extLst>
+          </p:cNvPr>
+          <p:cNvSpPr txBox="1"/>
+          <p:nvPr/>
+        </p:nvSpPr>
+        <p:spPr>
+          <a:xfrm>
+            <a:off x="442912" y="1051113"/>
+            <a:ext cx="11519858" cy="954107"/>
+          </a:xfrm>
+          <a:prstGeom prst="rect">
+            <a:avLst/>
+          </a:prstGeom>
+          <a:noFill/>
+        </p:spPr>
+        <p:txBody>
+          <a:bodyPr wrap="square">
+            <a:spAutoFit/>
+          </a:bodyPr>
+          <a:lstStyle/>
+          <a:p>
+            <a:r>
+              <a:rPr lang="ru-RU" sz="2800" dirty="0">
+                <a:solidFill>
+                  <a:schemeClr val="bg1"/>
+                </a:solidFill>
+              </a:rPr>
+              <a:t>Мини-нейросеть для распознавания цифр 0-9.</a:t>
+            </a:r>
+          </a:p>
+          <a:p>
+            <a:r>
+              <a:rPr lang="ru-RU" sz="2800" dirty="0">
+                <a:solidFill>
+                  <a:schemeClr val="bg1"/>
+                </a:solidFill>
+              </a:rPr>
+              <a:t>Каждая цифра — это </a:t>
+            </a:r>
+            <a:r>
+              <a:rPr lang="ru-RU" sz="2800" b="1" dirty="0">
+                <a:solidFill>
+                  <a:schemeClr val="bg1"/>
+                </a:solidFill>
+              </a:rPr>
+              <a:t>матрица 3×5</a:t>
+            </a:r>
+            <a:r>
+              <a:rPr lang="ru-RU" sz="2800" dirty="0">
+                <a:solidFill>
+                  <a:schemeClr val="bg1"/>
+                </a:solidFill>
+              </a:rPr>
+              <a:t>, превращённая в вектор из 15 чисел.</a:t>
+            </a:r>
+          </a:p>
+        </p:txBody>
+      </p:sp>
+      <p:sp>
+        <p:nvSpPr>
+          <p:cNvPr id="6" name="TextBox 5">
+            <a:extLst>
+              <a:ext uri="{FF2B5EF4-FFF2-40B4-BE49-F238E27FC236}">
+                <a16:creationId xmlns:a16="http://schemas.microsoft.com/office/drawing/2014/main" id="{73BFD941-660F-A48E-BEE1-C383EFB976F2}"/>
+              </a:ext>
+            </a:extLst>
+          </p:cNvPr>
+          <p:cNvSpPr txBox="1"/>
+          <p:nvPr/>
+        </p:nvSpPr>
+        <p:spPr>
+          <a:xfrm>
+            <a:off x="528992" y="2457375"/>
+            <a:ext cx="959742" cy="1477328"/>
+          </a:xfrm>
+          <a:prstGeom prst="rect">
+            <a:avLst/>
+          </a:prstGeom>
+          <a:noFill/>
+        </p:spPr>
+        <p:txBody>
+          <a:bodyPr wrap="square">
+            <a:spAutoFit/>
+          </a:bodyPr>
+          <a:lstStyle/>
+          <a:p>
+            <a:r>
+              <a:rPr lang="ru-RU" dirty="0">
+                <a:solidFill>
+                  <a:schemeClr val="bg1"/>
+                </a:solidFill>
+              </a:rPr>
+              <a:t>[1,1,1,</a:t>
+            </a:r>
+            <a:br>
+              <a:rPr lang="ru-RU" dirty="0">
+                <a:solidFill>
+                  <a:schemeClr val="bg1"/>
+                </a:solidFill>
+              </a:rPr>
+            </a:br>
+            <a:r>
+              <a:rPr lang="ru-RU" dirty="0">
+                <a:solidFill>
+                  <a:schemeClr val="bg1"/>
+                </a:solidFill>
+              </a:rPr>
+              <a:t> 1,0,1,</a:t>
+            </a:r>
+            <a:br>
+              <a:rPr lang="ru-RU" dirty="0">
+                <a:solidFill>
+                  <a:schemeClr val="bg1"/>
+                </a:solidFill>
+              </a:rPr>
+            </a:br>
+            <a:r>
+              <a:rPr lang="ru-RU" dirty="0">
+                <a:solidFill>
+                  <a:schemeClr val="bg1"/>
+                </a:solidFill>
+              </a:rPr>
+              <a:t> 1,0,1,</a:t>
+            </a:r>
+            <a:br>
+              <a:rPr lang="ru-RU" dirty="0">
+                <a:solidFill>
+                  <a:schemeClr val="bg1"/>
+                </a:solidFill>
+              </a:rPr>
+            </a:br>
+            <a:r>
+              <a:rPr lang="ru-RU" dirty="0">
+                <a:solidFill>
+                  <a:schemeClr val="bg1"/>
+                </a:solidFill>
+              </a:rPr>
+              <a:t> 1,0,1,</a:t>
+            </a:r>
+            <a:br>
+              <a:rPr lang="ru-RU" dirty="0">
+                <a:solidFill>
+                  <a:schemeClr val="bg1"/>
+                </a:solidFill>
+              </a:rPr>
+            </a:br>
+            <a:r>
+              <a:rPr lang="ru-RU" dirty="0">
+                <a:solidFill>
+                  <a:schemeClr val="bg1"/>
+                </a:solidFill>
+              </a:rPr>
+              <a:t> 1,1,1]</a:t>
+            </a:r>
+          </a:p>
+        </p:txBody>
+      </p:sp>
+      <p:sp>
+        <p:nvSpPr>
+          <p:cNvPr id="8" name="TextBox 7">
+            <a:extLst>
+              <a:ext uri="{FF2B5EF4-FFF2-40B4-BE49-F238E27FC236}">
+                <a16:creationId xmlns:a16="http://schemas.microsoft.com/office/drawing/2014/main" id="{B7F85513-CCA1-7873-F3F9-1BE036F47926}"/>
+              </a:ext>
+            </a:extLst>
+          </p:cNvPr>
+          <p:cNvSpPr txBox="1"/>
+          <p:nvPr/>
+        </p:nvSpPr>
+        <p:spPr>
+          <a:xfrm>
+            <a:off x="1715444" y="2457375"/>
+            <a:ext cx="831273" cy="1477328"/>
+          </a:xfrm>
+          <a:prstGeom prst="rect">
+            <a:avLst/>
+          </a:prstGeom>
+          <a:noFill/>
+        </p:spPr>
+        <p:txBody>
+          <a:bodyPr wrap="square">
+            <a:spAutoFit/>
+          </a:bodyPr>
+          <a:lstStyle/>
+          <a:p>
+            <a:r>
+              <a:rPr lang="ru-RU" dirty="0">
+                <a:solidFill>
+                  <a:schemeClr val="bg1"/>
+                </a:solidFill>
+              </a:rPr>
+              <a:t>[0,1,0,</a:t>
+            </a:r>
+            <a:br>
+              <a:rPr lang="ru-RU" dirty="0">
+                <a:solidFill>
+                  <a:schemeClr val="bg1"/>
+                </a:solidFill>
+              </a:rPr>
+            </a:br>
+            <a:r>
+              <a:rPr lang="ru-RU" dirty="0">
+                <a:solidFill>
+                  <a:schemeClr val="bg1"/>
+                </a:solidFill>
+              </a:rPr>
+              <a:t> 1,1,0,</a:t>
+            </a:r>
+            <a:br>
+              <a:rPr lang="ru-RU" dirty="0">
+                <a:solidFill>
+                  <a:schemeClr val="bg1"/>
+                </a:solidFill>
+              </a:rPr>
+            </a:br>
+            <a:r>
+              <a:rPr lang="ru-RU" dirty="0">
+                <a:solidFill>
+                  <a:schemeClr val="bg1"/>
+                </a:solidFill>
+              </a:rPr>
+              <a:t> 0,1,0,</a:t>
+            </a:r>
+            <a:br>
+              <a:rPr lang="ru-RU" dirty="0">
+                <a:solidFill>
+                  <a:schemeClr val="bg1"/>
+                </a:solidFill>
+              </a:rPr>
+            </a:br>
+            <a:r>
+              <a:rPr lang="ru-RU" dirty="0">
+                <a:solidFill>
+                  <a:schemeClr val="bg1"/>
+                </a:solidFill>
+              </a:rPr>
+              <a:t> 0,1,0,</a:t>
+            </a:r>
+            <a:br>
+              <a:rPr lang="ru-RU" dirty="0">
+                <a:solidFill>
+                  <a:schemeClr val="bg1"/>
+                </a:solidFill>
+              </a:rPr>
+            </a:br>
+            <a:r>
+              <a:rPr lang="ru-RU" dirty="0">
+                <a:solidFill>
+                  <a:schemeClr val="bg1"/>
+                </a:solidFill>
+              </a:rPr>
+              <a:t> 1,1,1]</a:t>
+            </a:r>
+          </a:p>
+        </p:txBody>
+      </p:sp>
+      <p:sp>
+        <p:nvSpPr>
+          <p:cNvPr id="10" name="TextBox 9">
+            <a:extLst>
+              <a:ext uri="{FF2B5EF4-FFF2-40B4-BE49-F238E27FC236}">
+                <a16:creationId xmlns:a16="http://schemas.microsoft.com/office/drawing/2014/main" id="{DFCAF404-3C90-9D37-C1CE-A33EA80841CE}"/>
+              </a:ext>
+            </a:extLst>
+          </p:cNvPr>
+          <p:cNvSpPr txBox="1"/>
+          <p:nvPr/>
+        </p:nvSpPr>
+        <p:spPr>
+          <a:xfrm>
+            <a:off x="2773427" y="2457375"/>
+            <a:ext cx="959742" cy="1477328"/>
+          </a:xfrm>
+          <a:prstGeom prst="rect">
+            <a:avLst/>
+          </a:prstGeom>
+          <a:noFill/>
+        </p:spPr>
+        <p:txBody>
+          <a:bodyPr wrap="square">
+            <a:spAutoFit/>
+          </a:bodyPr>
+          <a:lstStyle/>
+          <a:p>
+            <a:r>
+              <a:rPr lang="ru-RU" dirty="0">
+                <a:solidFill>
+                  <a:schemeClr val="bg1"/>
+                </a:solidFill>
+              </a:rPr>
+              <a:t>[1,1,1,</a:t>
+            </a:r>
+            <a:br>
+              <a:rPr lang="ru-RU" dirty="0">
+                <a:solidFill>
+                  <a:schemeClr val="bg1"/>
+                </a:solidFill>
+              </a:rPr>
+            </a:br>
+            <a:r>
+              <a:rPr lang="ru-RU" dirty="0">
+                <a:solidFill>
+                  <a:schemeClr val="bg1"/>
+                </a:solidFill>
+              </a:rPr>
+              <a:t> 1,0,0,</a:t>
+            </a:r>
+            <a:br>
+              <a:rPr lang="ru-RU" dirty="0">
+                <a:solidFill>
+                  <a:schemeClr val="bg1"/>
+                </a:solidFill>
+              </a:rPr>
+            </a:br>
+            <a:r>
+              <a:rPr lang="ru-RU" dirty="0">
+                <a:solidFill>
+                  <a:schemeClr val="bg1"/>
+                </a:solidFill>
+              </a:rPr>
+              <a:t> 1,1,1,</a:t>
+            </a:r>
+            <a:br>
+              <a:rPr lang="ru-RU" dirty="0">
+                <a:solidFill>
+                  <a:schemeClr val="bg1"/>
+                </a:solidFill>
+              </a:rPr>
+            </a:br>
+            <a:r>
+              <a:rPr lang="ru-RU" dirty="0">
+                <a:solidFill>
+                  <a:schemeClr val="bg1"/>
+                </a:solidFill>
+              </a:rPr>
+              <a:t> 1,0,1,</a:t>
+            </a:r>
+            <a:br>
+              <a:rPr lang="ru-RU" dirty="0">
+                <a:solidFill>
+                  <a:schemeClr val="bg1"/>
+                </a:solidFill>
+              </a:rPr>
+            </a:br>
+            <a:r>
+              <a:rPr lang="ru-RU" dirty="0">
+                <a:solidFill>
+                  <a:schemeClr val="bg1"/>
+                </a:solidFill>
+              </a:rPr>
+              <a:t> 1,1,1]</a:t>
+            </a:r>
+          </a:p>
+        </p:txBody>
+      </p:sp>
+    </p:spTree>
+    <p:extLst>
+      <p:ext uri="{BB962C8B-B14F-4D97-AF65-F5344CB8AC3E}">
+        <p14:creationId xmlns:p14="http://schemas.microsoft.com/office/powerpoint/2010/main" val="2368577020"/>
       </p:ext>
     </p:extLst>
   </p:cSld>

--- a/1. ML first 28.pptx
+++ b/1. ML first 28.pptx
@@ -57,6 +57,14 @@
     <p:sldId id="350" r:id="rId51"/>
     <p:sldId id="351" r:id="rId52"/>
     <p:sldId id="352" r:id="rId53"/>
+    <p:sldId id="353" r:id="rId54"/>
+    <p:sldId id="354" r:id="rId55"/>
+    <p:sldId id="355" r:id="rId56"/>
+    <p:sldId id="358" r:id="rId57"/>
+    <p:sldId id="357" r:id="rId58"/>
+    <p:sldId id="356" r:id="rId59"/>
+    <p:sldId id="359" r:id="rId60"/>
+    <p:sldId id="360" r:id="rId61"/>
   </p:sldIdLst>
   <p:sldSz cx="14630400" cy="8229600"/>
   <p:notesSz cx="6858000" cy="9144000"/>
@@ -158,12 +166,12 @@
   <p:extLst>
     <p:ext uri="{EFAFB233-063F-42B5-8137-9DF3F51BA10A}">
       <p15:sldGuideLst xmlns:p15="http://schemas.microsoft.com/office/powerpoint/2012/main">
-        <p15:guide id="1" orient="horz" pos="2160">
+        <p15:guide id="1" orient="horz" userDrawn="1">
           <p15:clr>
             <a:srgbClr val="A4A3A4"/>
           </p15:clr>
         </p15:guide>
-        <p15:guide id="2" pos="2880">
+        <p15:guide id="2" userDrawn="1">
           <p15:clr>
             <a:srgbClr val="A4A3A4"/>
           </p15:clr>
@@ -353,7 +361,7 @@
           <a:p>
             <a:fld id="{5BCAD085-E8A6-8845-BD4E-CB4CCA059FC4}" type="datetimeFigureOut">
               <a:rPr lang="en-US" smtClean="0"/>
-              <a:t>4/4/2026</a:t>
+              <a:t>5/2/2026</a:t>
             </a:fld>
             <a:endParaRPr lang="en-US"/>
           </a:p>
@@ -521,7 +529,7 @@
           <a:p>
             <a:fld id="{5BCAD085-E8A6-8845-BD4E-CB4CCA059FC4}" type="datetimeFigureOut">
               <a:rPr lang="en-US" smtClean="0"/>
-              <a:t>4/4/2026</a:t>
+              <a:t>5/2/2026</a:t>
             </a:fld>
             <a:endParaRPr lang="en-US"/>
           </a:p>
@@ -699,7 +707,7 @@
           <a:p>
             <a:fld id="{5BCAD085-E8A6-8845-BD4E-CB4CCA059FC4}" type="datetimeFigureOut">
               <a:rPr lang="en-US" smtClean="0"/>
-              <a:t>4/4/2026</a:t>
+              <a:t>5/2/2026</a:t>
             </a:fld>
             <a:endParaRPr lang="en-US"/>
           </a:p>
@@ -867,7 +875,7 @@
           <a:p>
             <a:fld id="{5BCAD085-E8A6-8845-BD4E-CB4CCA059FC4}" type="datetimeFigureOut">
               <a:rPr lang="en-US" smtClean="0"/>
-              <a:t>4/4/2026</a:t>
+              <a:t>5/2/2026</a:t>
             </a:fld>
             <a:endParaRPr lang="en-US"/>
           </a:p>
@@ -1112,7 +1120,7 @@
           <a:p>
             <a:fld id="{5BCAD085-E8A6-8845-BD4E-CB4CCA059FC4}" type="datetimeFigureOut">
               <a:rPr lang="en-US" smtClean="0"/>
-              <a:t>4/4/2026</a:t>
+              <a:t>5/2/2026</a:t>
             </a:fld>
             <a:endParaRPr lang="en-US"/>
           </a:p>
@@ -1397,7 +1405,7 @@
           <a:p>
             <a:fld id="{5BCAD085-E8A6-8845-BD4E-CB4CCA059FC4}" type="datetimeFigureOut">
               <a:rPr lang="en-US" smtClean="0"/>
-              <a:t>4/4/2026</a:t>
+              <a:t>5/2/2026</a:t>
             </a:fld>
             <a:endParaRPr lang="en-US"/>
           </a:p>
@@ -1816,7 +1824,7 @@
           <a:p>
             <a:fld id="{5BCAD085-E8A6-8845-BD4E-CB4CCA059FC4}" type="datetimeFigureOut">
               <a:rPr lang="en-US" smtClean="0"/>
-              <a:t>4/4/2026</a:t>
+              <a:t>5/2/2026</a:t>
             </a:fld>
             <a:endParaRPr lang="en-US"/>
           </a:p>
@@ -1933,7 +1941,7 @@
           <a:p>
             <a:fld id="{5BCAD085-E8A6-8845-BD4E-CB4CCA059FC4}" type="datetimeFigureOut">
               <a:rPr lang="en-US" smtClean="0"/>
-              <a:t>4/4/2026</a:t>
+              <a:t>5/2/2026</a:t>
             </a:fld>
             <a:endParaRPr lang="en-US"/>
           </a:p>
@@ -2028,7 +2036,7 @@
           <a:p>
             <a:fld id="{5BCAD085-E8A6-8845-BD4E-CB4CCA059FC4}" type="datetimeFigureOut">
               <a:rPr lang="en-US" smtClean="0"/>
-              <a:t>4/4/2026</a:t>
+              <a:t>5/2/2026</a:t>
             </a:fld>
             <a:endParaRPr lang="en-US"/>
           </a:p>
@@ -2303,7 +2311,7 @@
           <a:p>
             <a:fld id="{5BCAD085-E8A6-8845-BD4E-CB4CCA059FC4}" type="datetimeFigureOut">
               <a:rPr lang="en-US" smtClean="0"/>
-              <a:t>4/4/2026</a:t>
+              <a:t>5/2/2026</a:t>
             </a:fld>
             <a:endParaRPr lang="en-US"/>
           </a:p>
@@ -2555,7 +2563,7 @@
           <a:p>
             <a:fld id="{5BCAD085-E8A6-8845-BD4E-CB4CCA059FC4}" type="datetimeFigureOut">
               <a:rPr lang="en-US" smtClean="0"/>
-              <a:t>4/4/2026</a:t>
+              <a:t>5/2/2026</a:t>
             </a:fld>
             <a:endParaRPr lang="en-US"/>
           </a:p>
@@ -2766,7 +2774,7 @@
           <a:p>
             <a:fld id="{5BCAD085-E8A6-8845-BD4E-CB4CCA059FC4}" type="datetimeFigureOut">
               <a:rPr lang="en-US" smtClean="0"/>
-              <a:t>4/4/2026</a:t>
+              <a:t>5/2/2026</a:t>
             </a:fld>
             <a:endParaRPr lang="en-US"/>
           </a:p>
@@ -35430,6 +35438,4522 @@
 </p:sld>
 </file>
 
+<file path=ppt/slides/slide53.xml><?xml version="1.0" encoding="utf-8"?>
+<p:sld xmlns:a="http://schemas.openxmlformats.org/drawingml/2006/main" xmlns:r="http://schemas.openxmlformats.org/officeDocument/2006/relationships" xmlns:p="http://schemas.openxmlformats.org/presentationml/2006/main">
+  <p:cSld>
+    <p:spTree>
+      <p:nvGrpSpPr>
+        <p:cNvPr id="1" name=""/>
+        <p:cNvGrpSpPr/>
+        <p:nvPr/>
+      </p:nvGrpSpPr>
+      <p:grpSpPr>
+        <a:xfrm>
+          <a:off x="0" y="0"/>
+          <a:ext cx="0" cy="0"/>
+          <a:chOff x="0" y="0"/>
+          <a:chExt cx="0" cy="0"/>
+        </a:xfrm>
+      </p:grpSpPr>
+      <p:pic>
+        <p:nvPicPr>
+          <p:cNvPr id="4" name="Picture 3" descr="logo.png"/>
+          <p:cNvPicPr>
+            <a:picLocks noChangeAspect="1"/>
+          </p:cNvPicPr>
+          <p:nvPr/>
+        </p:nvPicPr>
+        <p:blipFill>
+          <a:blip r:embed="rId2"/>
+          <a:stretch>
+            <a:fillRect/>
+          </a:stretch>
+        </p:blipFill>
+        <p:spPr>
+          <a:xfrm>
+            <a:off x="12344400" y="274320"/>
+            <a:ext cx="1097280" cy="1080473"/>
+          </a:xfrm>
+          <a:prstGeom prst="rect">
+            <a:avLst/>
+          </a:prstGeom>
+        </p:spPr>
+      </p:pic>
+      <p:sp>
+        <p:nvSpPr>
+          <p:cNvPr id="5" name="Rectangle 4"/>
+          <p:cNvSpPr/>
+          <p:nvPr/>
+        </p:nvSpPr>
+        <p:spPr>
+          <a:xfrm>
+            <a:off x="0" y="7772400"/>
+            <a:ext cx="14630400" cy="457200"/>
+          </a:xfrm>
+          <a:prstGeom prst="rect">
+            <a:avLst/>
+          </a:prstGeom>
+          <a:solidFill>
+            <a:srgbClr val="640064"/>
+          </a:solidFill>
+          <a:ln>
+            <a:noFill/>
+          </a:ln>
+        </p:spPr>
+        <p:style>
+          <a:lnRef idx="1">
+            <a:schemeClr val="accent1"/>
+          </a:lnRef>
+          <a:fillRef idx="3">
+            <a:schemeClr val="accent1"/>
+          </a:fillRef>
+          <a:effectRef idx="2">
+            <a:schemeClr val="accent1"/>
+          </a:effectRef>
+          <a:fontRef idx="minor">
+            <a:schemeClr val="lt1"/>
+          </a:fontRef>
+        </p:style>
+        <p:txBody>
+          <a:bodyPr rtlCol="0" anchor="ctr"/>
+          <a:lstStyle/>
+          <a:p>
+            <a:pPr algn="ctr"/>
+            <a:endParaRPr>
+              <a:solidFill>
+                <a:schemeClr val="tx1"/>
+              </a:solidFill>
+            </a:endParaRPr>
+          </a:p>
+        </p:txBody>
+      </p:sp>
+      <p:sp>
+        <p:nvSpPr>
+          <p:cNvPr id="7" name="TextBox 6">
+            <a:extLst>
+              <a:ext uri="{FF2B5EF4-FFF2-40B4-BE49-F238E27FC236}">
+                <a16:creationId xmlns:a16="http://schemas.microsoft.com/office/drawing/2014/main" id="{EA77F26D-0F9B-DFF5-2FB4-9E508F48AFC7}"/>
+              </a:ext>
+            </a:extLst>
+          </p:cNvPr>
+          <p:cNvSpPr txBox="1"/>
+          <p:nvPr/>
+        </p:nvSpPr>
+        <p:spPr>
+          <a:xfrm>
+            <a:off x="705491" y="330403"/>
+            <a:ext cx="11408419" cy="769441"/>
+          </a:xfrm>
+          <a:prstGeom prst="rect">
+            <a:avLst/>
+          </a:prstGeom>
+          <a:noFill/>
+        </p:spPr>
+        <p:txBody>
+          <a:bodyPr wrap="square">
+            <a:spAutoFit/>
+          </a:bodyPr>
+          <a:lstStyle/>
+          <a:p>
+            <a:r>
+              <a:rPr lang="ru-RU" sz="4400" dirty="0"/>
+              <a:t>Стохастический градиентный спуск</a:t>
+            </a:r>
+            <a:endParaRPr lang="ru-RU" sz="4400" b="1" dirty="0"/>
+          </a:p>
+        </p:txBody>
+      </p:sp>
+      <p:graphicFrame>
+        <p:nvGraphicFramePr>
+          <p:cNvPr id="2" name="Таблица 1">
+            <a:extLst>
+              <a:ext uri="{FF2B5EF4-FFF2-40B4-BE49-F238E27FC236}">
+                <a16:creationId xmlns:a16="http://schemas.microsoft.com/office/drawing/2014/main" id="{1D24E36D-4C55-717C-087C-00BED5476219}"/>
+              </a:ext>
+            </a:extLst>
+          </p:cNvPr>
+          <p:cNvGraphicFramePr>
+            <a:graphicFrameLocks noGrp="1"/>
+          </p:cNvGraphicFramePr>
+          <p:nvPr>
+            <p:extLst>
+              <p:ext uri="{D42A27DB-BD31-4B8C-83A1-F6EECF244321}">
+                <p14:modId xmlns:p14="http://schemas.microsoft.com/office/powerpoint/2010/main" val="84589410"/>
+              </p:ext>
+            </p:extLst>
+          </p:nvPr>
+        </p:nvGraphicFramePr>
+        <p:xfrm>
+          <a:off x="2438400" y="1732658"/>
+          <a:ext cx="9753600" cy="5029200"/>
+        </p:xfrm>
+        <a:graphic>
+          <a:graphicData uri="http://schemas.openxmlformats.org/drawingml/2006/table">
+            <a:tbl>
+              <a:tblPr firstRow="1" bandRow="1">
+                <a:tableStyleId>{5C22544A-7EE6-4342-B048-85BDC9FD1C3A}</a:tableStyleId>
+              </a:tblPr>
+              <a:tblGrid>
+                <a:gridCol w="4876800">
+                  <a:extLst>
+                    <a:ext uri="{9D8B030D-6E8A-4147-A177-3AD203B41FA5}">
+                      <a16:colId xmlns:a16="http://schemas.microsoft.com/office/drawing/2014/main" val="3815395467"/>
+                    </a:ext>
+                  </a:extLst>
+                </a:gridCol>
+                <a:gridCol w="4876800">
+                  <a:extLst>
+                    <a:ext uri="{9D8B030D-6E8A-4147-A177-3AD203B41FA5}">
+                      <a16:colId xmlns:a16="http://schemas.microsoft.com/office/drawing/2014/main" val="2348908131"/>
+                    </a:ext>
+                  </a:extLst>
+                </a:gridCol>
+              </a:tblGrid>
+              <a:tr h="370840">
+                <a:tc>
+                  <a:txBody>
+                    <a:bodyPr/>
+                    <a:lstStyle/>
+                    <a:p>
+                      <a:pPr algn="ctr"/>
+                      <a:endParaRPr lang="ru-RU" sz="1800" dirty="0">
+                        <a:latin typeface="Consolas" panose="020B0609020204030204" pitchFamily="49" charset="0"/>
+                      </a:endParaRPr>
+                    </a:p>
+                    <a:p>
+                      <a:pPr algn="ctr"/>
+                      <a:r>
+                        <a:rPr lang="ru-RU" dirty="0"/>
+                        <a:t>Градиентный спуск</a:t>
+                      </a:r>
+                    </a:p>
+                    <a:p>
+                      <a:pPr algn="ctr"/>
+                      <a:endParaRPr lang="ru-RU" dirty="0"/>
+                    </a:p>
+                    <a:p>
+                      <a:pPr algn="ctr"/>
+                      <a:endParaRPr lang="ru-RU" dirty="0"/>
+                    </a:p>
+                    <a:p>
+                      <a:pPr algn="just"/>
+                      <a:r>
+                        <a:rPr lang="ru-RU" dirty="0"/>
+                        <a:t>Представь, что ты стоишь в горах в густом тумане и хочешь спуститься в долину. Ты не видишь куда идти — но можешь потрогать землю под ногами и почувствовать, в какую сторону она наклонена. Делаешь шаг вниз по склону. Снова щупаешь. Снова шаг. Постепенно спускаешься.</a:t>
+                      </a:r>
+                    </a:p>
+                    <a:p>
+                      <a:pPr algn="just"/>
+                      <a:r>
+                        <a:rPr lang="ru-RU" dirty="0"/>
+                        <a:t>Это и есть градиентный спуск: </a:t>
+                      </a:r>
+                      <a:r>
+                        <a:rPr lang="ru-RU" b="1" dirty="0"/>
+                        <a:t>не знаем где минимум, но знаем в какую сторону идти.</a:t>
+                      </a:r>
+                      <a:endParaRPr lang="ru-RU" dirty="0"/>
+                    </a:p>
+                    <a:p>
+                      <a:pPr algn="just"/>
+                      <a:r>
+                        <a:rPr lang="ru-RU" dirty="0"/>
+                        <a:t>В нейросети "высота" — это ошибка. "Спуститься" — значит уменьшить ошибку. "Наклон склона" — это градиент.</a:t>
+                      </a:r>
+                    </a:p>
+                    <a:p>
+                      <a:pPr algn="ctr"/>
+                      <a:endParaRPr lang="en-US" sz="1800" b="0" dirty="0">
+                        <a:effectLst/>
+                        <a:latin typeface="Consolas" panose="020B0609020204030204" pitchFamily="49" charset="0"/>
+                      </a:endParaRPr>
+                    </a:p>
+                    <a:p>
+                      <a:endParaRPr lang="ru-RU" dirty="0"/>
+                    </a:p>
+                  </a:txBody>
+                  <a:tcPr/>
+                </a:tc>
+                <a:tc>
+                  <a:txBody>
+                    <a:bodyPr/>
+                    <a:lstStyle/>
+                    <a:p>
+                      <a:endParaRPr lang="ru-RU" i="1" dirty="0"/>
+                    </a:p>
+                    <a:p>
+                      <a:pPr algn="ctr"/>
+                      <a:r>
+                        <a:rPr lang="ru-RU" i="1" dirty="0"/>
+                        <a:t>Стохастический (случайный)</a:t>
+                      </a:r>
+                    </a:p>
+                    <a:p>
+                      <a:pPr algn="ctr"/>
+                      <a:r>
+                        <a:rPr lang="ru-RU" i="1" dirty="0"/>
+                        <a:t>градиентный спуск</a:t>
+                      </a:r>
+                    </a:p>
+                    <a:p>
+                      <a:pPr algn="ctr"/>
+                      <a:endParaRPr lang="ru-RU" i="1" dirty="0"/>
+                    </a:p>
+                    <a:p>
+                      <a:pPr algn="just"/>
+                      <a:r>
+                        <a:rPr lang="ru-RU" dirty="0"/>
+                        <a:t>Обычный градиентный спуск считает ошибку на </a:t>
+                      </a:r>
+                      <a:r>
+                        <a:rPr lang="ru-RU" b="1" dirty="0"/>
+                        <a:t>всех</a:t>
+                      </a:r>
+                      <a:r>
+                        <a:rPr lang="ru-RU" dirty="0"/>
+                        <a:t> примерах сразу, потом делает один шаг. Представь: ты хочешь узнать, в какую сторону наклонена земля — и для этого опрашиваешь всех 1000 жителей деревни. Точно, но медленно.</a:t>
+                      </a:r>
+                    </a:p>
+                    <a:p>
+                      <a:pPr algn="just"/>
+                      <a:r>
+                        <a:rPr lang="ru-RU" b="1" dirty="0"/>
+                        <a:t>Стохастический</a:t>
+                      </a:r>
+                      <a:r>
+                        <a:rPr lang="ru-RU" dirty="0"/>
+                        <a:t> градиентный спуск делает шаг после </a:t>
+                      </a:r>
+                      <a:r>
+                        <a:rPr lang="ru-RU" b="1" dirty="0"/>
+                        <a:t>каждого</a:t>
+                      </a:r>
+                      <a:r>
+                        <a:rPr lang="ru-RU" dirty="0"/>
+                        <a:t> примера. Опросил одного человека — уже пошёл. Быстро, но направление немного случайное, с шумом.</a:t>
+                      </a:r>
+                    </a:p>
+                    <a:p>
+                      <a:pPr algn="ctr"/>
+                      <a:endParaRPr lang="ru-RU" dirty="0"/>
+                    </a:p>
+                  </a:txBody>
+                  <a:tcPr/>
+                </a:tc>
+                <a:extLst>
+                  <a:ext uri="{0D108BD9-81ED-4DB2-BD59-A6C34878D82A}">
+                    <a16:rowId xmlns:a16="http://schemas.microsoft.com/office/drawing/2014/main" val="1613177430"/>
+                  </a:ext>
+                </a:extLst>
+              </a:tr>
+            </a:tbl>
+          </a:graphicData>
+        </a:graphic>
+      </p:graphicFrame>
+    </p:spTree>
+    <p:extLst>
+      <p:ext uri="{BB962C8B-B14F-4D97-AF65-F5344CB8AC3E}">
+        <p14:creationId xmlns:p14="http://schemas.microsoft.com/office/powerpoint/2010/main" val="348007424"/>
+      </p:ext>
+    </p:extLst>
+  </p:cSld>
+  <p:clrMapOvr>
+    <a:masterClrMapping/>
+  </p:clrMapOvr>
+</p:sld>
+</file>
+
+<file path=ppt/slides/slide54.xml><?xml version="1.0" encoding="utf-8"?>
+<p:sld xmlns:a="http://schemas.openxmlformats.org/drawingml/2006/main" xmlns:r="http://schemas.openxmlformats.org/officeDocument/2006/relationships" xmlns:p="http://schemas.openxmlformats.org/presentationml/2006/main">
+  <p:cSld>
+    <p:bg>
+      <p:bgPr>
+        <a:solidFill>
+          <a:srgbClr val="972996"/>
+        </a:solidFill>
+        <a:effectLst/>
+      </p:bgPr>
+    </p:bg>
+    <p:spTree>
+      <p:nvGrpSpPr>
+        <p:cNvPr id="1" name=""/>
+        <p:cNvGrpSpPr/>
+        <p:nvPr/>
+      </p:nvGrpSpPr>
+      <p:grpSpPr>
+        <a:xfrm>
+          <a:off x="0" y="0"/>
+          <a:ext cx="0" cy="0"/>
+          <a:chOff x="0" y="0"/>
+          <a:chExt cx="0" cy="0"/>
+        </a:xfrm>
+      </p:grpSpPr>
+      <p:pic>
+        <p:nvPicPr>
+          <p:cNvPr id="4" name="Picture 3" descr="logo.png"/>
+          <p:cNvPicPr>
+            <a:picLocks noChangeAspect="1"/>
+          </p:cNvPicPr>
+          <p:nvPr/>
+        </p:nvPicPr>
+        <p:blipFill>
+          <a:blip r:embed="rId2"/>
+          <a:stretch>
+            <a:fillRect/>
+          </a:stretch>
+        </p:blipFill>
+        <p:spPr>
+          <a:xfrm>
+            <a:off x="12344400" y="274320"/>
+            <a:ext cx="1097280" cy="1080473"/>
+          </a:xfrm>
+          <a:prstGeom prst="rect">
+            <a:avLst/>
+          </a:prstGeom>
+        </p:spPr>
+      </p:pic>
+      <p:sp>
+        <p:nvSpPr>
+          <p:cNvPr id="5" name="Rectangle 4"/>
+          <p:cNvSpPr/>
+          <p:nvPr/>
+        </p:nvSpPr>
+        <p:spPr>
+          <a:xfrm>
+            <a:off x="0" y="7772400"/>
+            <a:ext cx="14630400" cy="457200"/>
+          </a:xfrm>
+          <a:prstGeom prst="rect">
+            <a:avLst/>
+          </a:prstGeom>
+          <a:solidFill>
+            <a:srgbClr val="E6E6E6"/>
+          </a:solidFill>
+          <a:ln>
+            <a:noFill/>
+          </a:ln>
+        </p:spPr>
+        <p:style>
+          <a:lnRef idx="1">
+            <a:schemeClr val="accent1"/>
+          </a:lnRef>
+          <a:fillRef idx="3">
+            <a:schemeClr val="accent1"/>
+          </a:fillRef>
+          <a:effectRef idx="2">
+            <a:schemeClr val="accent1"/>
+          </a:effectRef>
+          <a:fontRef idx="minor">
+            <a:schemeClr val="lt1"/>
+          </a:fontRef>
+        </p:style>
+        <p:txBody>
+          <a:bodyPr rtlCol="0" anchor="ctr"/>
+          <a:lstStyle/>
+          <a:p>
+            <a:pPr algn="ctr"/>
+            <a:endParaRPr/>
+          </a:p>
+        </p:txBody>
+      </p:sp>
+      <p:sp>
+        <p:nvSpPr>
+          <p:cNvPr id="3" name="TextBox 2">
+            <a:extLst>
+              <a:ext uri="{FF2B5EF4-FFF2-40B4-BE49-F238E27FC236}">
+                <a16:creationId xmlns:a16="http://schemas.microsoft.com/office/drawing/2014/main" id="{C315D28A-F529-C361-6B0C-54FC6D10368B}"/>
+              </a:ext>
+            </a:extLst>
+          </p:cNvPr>
+          <p:cNvSpPr txBox="1"/>
+          <p:nvPr/>
+        </p:nvSpPr>
+        <p:spPr>
+          <a:xfrm>
+            <a:off x="625737" y="289929"/>
+            <a:ext cx="8623515" cy="769441"/>
+          </a:xfrm>
+          <a:prstGeom prst="rect">
+            <a:avLst/>
+          </a:prstGeom>
+          <a:noFill/>
+        </p:spPr>
+        <p:txBody>
+          <a:bodyPr wrap="none">
+            <a:spAutoFit/>
+          </a:bodyPr>
+          <a:lstStyle/>
+          <a:p>
+            <a:r>
+              <a:rPr lang="ru-RU" sz="4400" dirty="0">
+                <a:solidFill>
+                  <a:schemeClr val="bg1"/>
+                </a:solidFill>
+              </a:rPr>
+              <a:t>Стохастический градиентный спуск</a:t>
+            </a:r>
+            <a:endParaRPr lang="ru-RU" sz="4400" b="1" dirty="0">
+              <a:solidFill>
+                <a:schemeClr val="bg1"/>
+              </a:solidFill>
+            </a:endParaRPr>
+          </a:p>
+        </p:txBody>
+      </p:sp>
+      <p:graphicFrame>
+        <p:nvGraphicFramePr>
+          <p:cNvPr id="7" name="Таблица 6">
+            <a:extLst>
+              <a:ext uri="{FF2B5EF4-FFF2-40B4-BE49-F238E27FC236}">
+                <a16:creationId xmlns:a16="http://schemas.microsoft.com/office/drawing/2014/main" id="{D053DBFC-4116-1C08-3F30-EFBF3A5138A8}"/>
+              </a:ext>
+            </a:extLst>
+          </p:cNvPr>
+          <p:cNvGraphicFramePr>
+            <a:graphicFrameLocks noGrp="1"/>
+          </p:cNvGraphicFramePr>
+          <p:nvPr>
+            <p:extLst>
+              <p:ext uri="{D42A27DB-BD31-4B8C-83A1-F6EECF244321}">
+                <p14:modId xmlns:p14="http://schemas.microsoft.com/office/powerpoint/2010/main" val="245248715"/>
+              </p:ext>
+            </p:extLst>
+          </p:nvPr>
+        </p:nvGraphicFramePr>
+        <p:xfrm>
+          <a:off x="2302374" y="1526729"/>
+          <a:ext cx="9753600" cy="5029200"/>
+        </p:xfrm>
+        <a:graphic>
+          <a:graphicData uri="http://schemas.openxmlformats.org/drawingml/2006/table">
+            <a:tbl>
+              <a:tblPr firstRow="1" bandRow="1">
+                <a:tableStyleId>{5C22544A-7EE6-4342-B048-85BDC9FD1C3A}</a:tableStyleId>
+              </a:tblPr>
+              <a:tblGrid>
+                <a:gridCol w="4876800">
+                  <a:extLst>
+                    <a:ext uri="{9D8B030D-6E8A-4147-A177-3AD203B41FA5}">
+                      <a16:colId xmlns:a16="http://schemas.microsoft.com/office/drawing/2014/main" val="3815395467"/>
+                    </a:ext>
+                  </a:extLst>
+                </a:gridCol>
+                <a:gridCol w="4876800">
+                  <a:extLst>
+                    <a:ext uri="{9D8B030D-6E8A-4147-A177-3AD203B41FA5}">
+                      <a16:colId xmlns:a16="http://schemas.microsoft.com/office/drawing/2014/main" val="2348908131"/>
+                    </a:ext>
+                  </a:extLst>
+                </a:gridCol>
+              </a:tblGrid>
+              <a:tr h="357825">
+                <a:tc>
+                  <a:txBody>
+                    <a:bodyPr/>
+                    <a:lstStyle/>
+                    <a:p>
+                      <a:pPr algn="ctr"/>
+                      <a:endParaRPr lang="ru-RU" sz="1800" dirty="0">
+                        <a:latin typeface="Consolas" panose="020B0609020204030204" pitchFamily="49" charset="0"/>
+                      </a:endParaRPr>
+                    </a:p>
+                    <a:p>
+                      <a:endParaRPr lang="en-US" sz="1800" b="0" kern="1200" dirty="0">
+                        <a:solidFill>
+                          <a:schemeClr val="lt1"/>
+                        </a:solidFill>
+                        <a:effectLst/>
+                        <a:latin typeface="+mn-lt"/>
+                        <a:ea typeface="+mn-ea"/>
+                        <a:cs typeface="+mn-cs"/>
+                      </a:endParaRPr>
+                    </a:p>
+                    <a:p>
+                      <a:endParaRPr lang="en-US" sz="1800" b="0" kern="1200" dirty="0">
+                        <a:solidFill>
+                          <a:schemeClr val="lt1"/>
+                        </a:solidFill>
+                        <a:effectLst/>
+                        <a:latin typeface="+mn-lt"/>
+                        <a:ea typeface="+mn-ea"/>
+                        <a:cs typeface="+mn-cs"/>
+                      </a:endParaRPr>
+                    </a:p>
+                    <a:p>
+                      <a:endParaRPr lang="en-US" sz="1800" b="0" kern="1200" dirty="0">
+                        <a:solidFill>
+                          <a:schemeClr val="lt1"/>
+                        </a:solidFill>
+                        <a:effectLst/>
+                        <a:latin typeface="+mn-lt"/>
+                        <a:ea typeface="+mn-ea"/>
+                        <a:cs typeface="+mn-cs"/>
+                      </a:endParaRPr>
+                    </a:p>
+                    <a:p>
+                      <a:r>
+                        <a:rPr lang="en-US" sz="1800" b="0" kern="1200" dirty="0">
+                          <a:solidFill>
+                            <a:schemeClr val="lt1"/>
+                          </a:solidFill>
+                          <a:effectLst/>
+                          <a:latin typeface="+mn-lt"/>
+                          <a:ea typeface="+mn-ea"/>
+                          <a:cs typeface="+mn-cs"/>
+                        </a:rPr>
+                        <a:t>def f(x):</a:t>
+                      </a:r>
+                    </a:p>
+                    <a:p>
+                      <a:r>
+                        <a:rPr lang="en-US" sz="1800" b="0" kern="1200" dirty="0">
+                          <a:solidFill>
+                            <a:schemeClr val="lt1"/>
+                          </a:solidFill>
+                          <a:effectLst/>
+                          <a:latin typeface="+mn-lt"/>
+                          <a:ea typeface="+mn-ea"/>
+                          <a:cs typeface="+mn-cs"/>
+                        </a:rPr>
+                        <a:t>    return (x - 3) ** 2</a:t>
+                      </a:r>
+                    </a:p>
+                    <a:p>
+                      <a:br>
+                        <a:rPr lang="en-US" sz="1800" b="0" kern="1200" dirty="0">
+                          <a:solidFill>
+                            <a:schemeClr val="lt1"/>
+                          </a:solidFill>
+                          <a:effectLst/>
+                          <a:latin typeface="+mn-lt"/>
+                          <a:ea typeface="+mn-ea"/>
+                          <a:cs typeface="+mn-cs"/>
+                        </a:rPr>
+                      </a:br>
+                      <a:r>
+                        <a:rPr lang="en-US" sz="1800" b="0" kern="1200" dirty="0">
+                          <a:solidFill>
+                            <a:schemeClr val="lt1"/>
+                          </a:solidFill>
+                          <a:effectLst/>
+                          <a:latin typeface="+mn-lt"/>
+                          <a:ea typeface="+mn-ea"/>
+                          <a:cs typeface="+mn-cs"/>
+                        </a:rPr>
+                        <a:t>def grad(x):</a:t>
+                      </a:r>
+                    </a:p>
+                    <a:p>
+                      <a:r>
+                        <a:rPr lang="en-US" sz="1800" b="0" kern="1200" dirty="0">
+                          <a:solidFill>
+                            <a:schemeClr val="lt1"/>
+                          </a:solidFill>
+                          <a:effectLst/>
+                          <a:latin typeface="+mn-lt"/>
+                          <a:ea typeface="+mn-ea"/>
+                          <a:cs typeface="+mn-cs"/>
+                        </a:rPr>
+                        <a:t>    return 2 * (x - 3)   # </a:t>
+                      </a:r>
+                      <a:r>
+                        <a:rPr lang="ru-RU" sz="1800" b="0" kern="1200" dirty="0">
+                          <a:solidFill>
+                            <a:schemeClr val="lt1"/>
+                          </a:solidFill>
+                          <a:effectLst/>
+                          <a:latin typeface="+mn-lt"/>
+                          <a:ea typeface="+mn-ea"/>
+                          <a:cs typeface="+mn-cs"/>
+                        </a:rPr>
+                        <a:t>производная </a:t>
+                      </a:r>
+                      <a:r>
+                        <a:rPr lang="en-US" sz="1800" b="0" kern="1200" dirty="0">
+                          <a:solidFill>
+                            <a:schemeClr val="lt1"/>
+                          </a:solidFill>
+                          <a:effectLst/>
+                          <a:latin typeface="+mn-lt"/>
+                          <a:ea typeface="+mn-ea"/>
+                          <a:cs typeface="+mn-cs"/>
+                        </a:rPr>
+                        <a:t>f(x)</a:t>
+                      </a:r>
+                    </a:p>
+                    <a:p>
+                      <a:br>
+                        <a:rPr lang="en-US" sz="1800" b="0" kern="1200" dirty="0">
+                          <a:solidFill>
+                            <a:schemeClr val="lt1"/>
+                          </a:solidFill>
+                          <a:effectLst/>
+                          <a:latin typeface="+mn-lt"/>
+                          <a:ea typeface="+mn-ea"/>
+                          <a:cs typeface="+mn-cs"/>
+                        </a:rPr>
+                      </a:br>
+                      <a:r>
+                        <a:rPr lang="en-US" sz="1800" b="0" kern="1200" dirty="0">
+                          <a:solidFill>
+                            <a:schemeClr val="lt1"/>
+                          </a:solidFill>
+                          <a:effectLst/>
+                          <a:latin typeface="+mn-lt"/>
+                          <a:ea typeface="+mn-ea"/>
+                          <a:cs typeface="+mn-cs"/>
+                        </a:rPr>
+                        <a:t>x = 0.0   # </a:t>
+                      </a:r>
+                      <a:r>
+                        <a:rPr lang="ru-RU" sz="1800" b="0" kern="1200" dirty="0">
+                          <a:solidFill>
+                            <a:schemeClr val="lt1"/>
+                          </a:solidFill>
+                          <a:effectLst/>
+                          <a:latin typeface="+mn-lt"/>
+                          <a:ea typeface="+mn-ea"/>
+                          <a:cs typeface="+mn-cs"/>
+                        </a:rPr>
+                        <a:t>начальная точка</a:t>
+                      </a:r>
+                    </a:p>
+                    <a:p>
+                      <a:r>
+                        <a:rPr lang="en-US" sz="1800" b="0" kern="1200" dirty="0" err="1">
+                          <a:solidFill>
+                            <a:schemeClr val="lt1"/>
+                          </a:solidFill>
+                          <a:effectLst/>
+                          <a:latin typeface="+mn-lt"/>
+                          <a:ea typeface="+mn-ea"/>
+                          <a:cs typeface="+mn-cs"/>
+                        </a:rPr>
+                        <a:t>lr</a:t>
+                      </a:r>
+                      <a:r>
+                        <a:rPr lang="en-US" sz="1800" b="0" kern="1200" dirty="0">
+                          <a:solidFill>
+                            <a:schemeClr val="lt1"/>
+                          </a:solidFill>
+                          <a:effectLst/>
+                          <a:latin typeface="+mn-lt"/>
+                          <a:ea typeface="+mn-ea"/>
+                          <a:cs typeface="+mn-cs"/>
+                        </a:rPr>
+                        <a:t> = 0.1  # </a:t>
+                      </a:r>
+                      <a:r>
+                        <a:rPr lang="ru-RU" sz="1800" b="0" kern="1200" dirty="0">
+                          <a:solidFill>
+                            <a:schemeClr val="lt1"/>
+                          </a:solidFill>
+                          <a:effectLst/>
+                          <a:latin typeface="+mn-lt"/>
+                          <a:ea typeface="+mn-ea"/>
+                          <a:cs typeface="+mn-cs"/>
+                        </a:rPr>
+                        <a:t>скорость обучения</a:t>
+                      </a:r>
+                    </a:p>
+                    <a:p>
+                      <a:br>
+                        <a:rPr lang="ru-RU" sz="1800" b="0" kern="1200" dirty="0">
+                          <a:solidFill>
+                            <a:schemeClr val="lt1"/>
+                          </a:solidFill>
+                          <a:effectLst/>
+                          <a:latin typeface="+mn-lt"/>
+                          <a:ea typeface="+mn-ea"/>
+                          <a:cs typeface="+mn-cs"/>
+                        </a:rPr>
+                      </a:br>
+                      <a:r>
+                        <a:rPr lang="en-US" sz="1800" b="0" kern="1200" dirty="0">
+                          <a:solidFill>
+                            <a:schemeClr val="lt1"/>
+                          </a:solidFill>
+                          <a:effectLst/>
+                          <a:latin typeface="+mn-lt"/>
+                          <a:ea typeface="+mn-ea"/>
+                          <a:cs typeface="+mn-cs"/>
+                        </a:rPr>
+                        <a:t>for </a:t>
+                      </a:r>
+                      <a:r>
+                        <a:rPr lang="en-US" sz="1800" b="0" kern="1200" dirty="0" err="1">
+                          <a:solidFill>
+                            <a:schemeClr val="lt1"/>
+                          </a:solidFill>
+                          <a:effectLst/>
+                          <a:latin typeface="+mn-lt"/>
+                          <a:ea typeface="+mn-ea"/>
+                          <a:cs typeface="+mn-cs"/>
+                        </a:rPr>
+                        <a:t>i</a:t>
+                      </a:r>
+                      <a:r>
+                        <a:rPr lang="en-US" sz="1800" b="0" kern="1200" dirty="0">
+                          <a:solidFill>
+                            <a:schemeClr val="lt1"/>
+                          </a:solidFill>
+                          <a:effectLst/>
+                          <a:latin typeface="+mn-lt"/>
+                          <a:ea typeface="+mn-ea"/>
+                          <a:cs typeface="+mn-cs"/>
+                        </a:rPr>
+                        <a:t> in range(20):</a:t>
+                      </a:r>
+                    </a:p>
+                    <a:p>
+                      <a:r>
+                        <a:rPr lang="en-US" sz="1800" b="0" kern="1200" dirty="0">
+                          <a:solidFill>
+                            <a:schemeClr val="lt1"/>
+                          </a:solidFill>
+                          <a:effectLst/>
+                          <a:latin typeface="+mn-lt"/>
+                          <a:ea typeface="+mn-ea"/>
+                          <a:cs typeface="+mn-cs"/>
+                        </a:rPr>
+                        <a:t>    g = grad(x)          # </a:t>
+                      </a:r>
+                      <a:r>
+                        <a:rPr lang="ru-RU" sz="1800" b="0" kern="1200" dirty="0">
+                          <a:solidFill>
+                            <a:schemeClr val="lt1"/>
+                          </a:solidFill>
+                          <a:effectLst/>
+                          <a:latin typeface="+mn-lt"/>
+                          <a:ea typeface="+mn-ea"/>
+                          <a:cs typeface="+mn-cs"/>
+                        </a:rPr>
+                        <a:t>градиент — точный</a:t>
+                      </a:r>
+                    </a:p>
+                    <a:p>
+                      <a:r>
+                        <a:rPr lang="ru-RU" sz="1800" b="0" kern="1200" dirty="0">
+                          <a:solidFill>
+                            <a:schemeClr val="lt1"/>
+                          </a:solidFill>
+                          <a:effectLst/>
+                          <a:latin typeface="+mn-lt"/>
+                          <a:ea typeface="+mn-ea"/>
+                          <a:cs typeface="+mn-cs"/>
+                        </a:rPr>
+                        <a:t>    </a:t>
+                      </a:r>
+                      <a:r>
+                        <a:rPr lang="en-US" sz="1800" b="0" kern="1200" dirty="0">
+                          <a:solidFill>
+                            <a:schemeClr val="lt1"/>
+                          </a:solidFill>
+                          <a:effectLst/>
+                          <a:latin typeface="+mn-lt"/>
+                          <a:ea typeface="+mn-ea"/>
+                          <a:cs typeface="+mn-cs"/>
+                        </a:rPr>
+                        <a:t>x = x - </a:t>
+                      </a:r>
+                      <a:r>
+                        <a:rPr lang="en-US" sz="1800" b="0" kern="1200" dirty="0" err="1">
+                          <a:solidFill>
+                            <a:schemeClr val="lt1"/>
+                          </a:solidFill>
+                          <a:effectLst/>
+                          <a:latin typeface="+mn-lt"/>
+                          <a:ea typeface="+mn-ea"/>
+                          <a:cs typeface="+mn-cs"/>
+                        </a:rPr>
+                        <a:t>lr</a:t>
+                      </a:r>
+                      <a:r>
+                        <a:rPr lang="en-US" sz="1800" b="0" kern="1200" dirty="0">
+                          <a:solidFill>
+                            <a:schemeClr val="lt1"/>
+                          </a:solidFill>
+                          <a:effectLst/>
+                          <a:latin typeface="+mn-lt"/>
+                          <a:ea typeface="+mn-ea"/>
+                          <a:cs typeface="+mn-cs"/>
+                        </a:rPr>
+                        <a:t> * g       # </a:t>
+                      </a:r>
+                      <a:r>
+                        <a:rPr lang="ru-RU" sz="1800" b="0" kern="1200" dirty="0">
+                          <a:solidFill>
+                            <a:schemeClr val="lt1"/>
+                          </a:solidFill>
+                          <a:effectLst/>
+                          <a:latin typeface="+mn-lt"/>
+                          <a:ea typeface="+mn-ea"/>
+                          <a:cs typeface="+mn-cs"/>
+                        </a:rPr>
+                        <a:t>шаг вниз по склону</a:t>
+                      </a:r>
+                    </a:p>
+                    <a:p>
+                      <a:r>
+                        <a:rPr lang="ru-RU" sz="1800" b="0" kern="1200" dirty="0">
+                          <a:solidFill>
+                            <a:schemeClr val="lt1"/>
+                          </a:solidFill>
+                          <a:effectLst/>
+                          <a:latin typeface="+mn-lt"/>
+                          <a:ea typeface="+mn-ea"/>
+                          <a:cs typeface="+mn-cs"/>
+                        </a:rPr>
+                        <a:t>    </a:t>
+                      </a:r>
+                      <a:r>
+                        <a:rPr lang="en-US" sz="1800" b="0" kern="1200" dirty="0">
+                          <a:solidFill>
+                            <a:schemeClr val="lt1"/>
+                          </a:solidFill>
+                          <a:effectLst/>
+                          <a:latin typeface="+mn-lt"/>
+                          <a:ea typeface="+mn-ea"/>
+                          <a:cs typeface="+mn-cs"/>
+                        </a:rPr>
+                        <a:t>print(f"</a:t>
+                      </a:r>
+                      <a:r>
+                        <a:rPr lang="ru-RU" sz="1800" b="0" kern="1200" dirty="0">
+                          <a:solidFill>
+                            <a:schemeClr val="lt1"/>
+                          </a:solidFill>
+                          <a:effectLst/>
+                          <a:latin typeface="+mn-lt"/>
+                          <a:ea typeface="+mn-ea"/>
+                          <a:cs typeface="+mn-cs"/>
+                        </a:rPr>
+                        <a:t>шаг {</a:t>
+                      </a:r>
+                      <a:r>
+                        <a:rPr lang="en-US" sz="1800" b="0" kern="1200" dirty="0">
+                          <a:solidFill>
+                            <a:schemeClr val="lt1"/>
+                          </a:solidFill>
+                          <a:effectLst/>
+                          <a:latin typeface="+mn-lt"/>
+                          <a:ea typeface="+mn-ea"/>
+                          <a:cs typeface="+mn-cs"/>
+                        </a:rPr>
+                        <a:t>i+1:2d}: x = {x:.4f}, f(x) = {f(x):.4f}")</a:t>
+                      </a:r>
+                      <a:endParaRPr lang="en-US" sz="1800" b="0" dirty="0">
+                        <a:effectLst/>
+                        <a:latin typeface="Consolas" panose="020B0609020204030204" pitchFamily="49" charset="0"/>
+                      </a:endParaRPr>
+                    </a:p>
+                    <a:p>
+                      <a:endParaRPr lang="ru-RU" dirty="0"/>
+                    </a:p>
+                  </a:txBody>
+                  <a:tcPr/>
+                </a:tc>
+                <a:tc>
+                  <a:txBody>
+                    <a:bodyPr/>
+                    <a:lstStyle/>
+                    <a:p>
+                      <a:endParaRPr lang="ru-RU" i="1" dirty="0"/>
+                    </a:p>
+                    <a:p>
+                      <a:r>
+                        <a:rPr lang="en-US" sz="1800" b="0" kern="1200" dirty="0">
+                          <a:solidFill>
+                            <a:schemeClr val="lt1"/>
+                          </a:solidFill>
+                          <a:effectLst/>
+                          <a:latin typeface="+mn-lt"/>
+                          <a:ea typeface="+mn-ea"/>
+                          <a:cs typeface="+mn-cs"/>
+                        </a:rPr>
+                        <a:t>import random</a:t>
+                      </a:r>
+                    </a:p>
+                    <a:p>
+                      <a:br>
+                        <a:rPr lang="en-US" sz="1800" b="0" kern="1200" dirty="0">
+                          <a:solidFill>
+                            <a:schemeClr val="lt1"/>
+                          </a:solidFill>
+                          <a:effectLst/>
+                          <a:latin typeface="+mn-lt"/>
+                          <a:ea typeface="+mn-ea"/>
+                          <a:cs typeface="+mn-cs"/>
+                        </a:rPr>
+                      </a:br>
+                      <a:r>
+                        <a:rPr lang="en-US" sz="1800" b="0" kern="1200" dirty="0">
+                          <a:solidFill>
+                            <a:schemeClr val="lt1"/>
+                          </a:solidFill>
+                          <a:effectLst/>
+                          <a:latin typeface="+mn-lt"/>
+                          <a:ea typeface="+mn-ea"/>
+                          <a:cs typeface="+mn-cs"/>
+                        </a:rPr>
+                        <a:t>def f(x):</a:t>
+                      </a:r>
+                    </a:p>
+                    <a:p>
+                      <a:r>
+                        <a:rPr lang="en-US" sz="1800" b="0" kern="1200" dirty="0">
+                          <a:solidFill>
+                            <a:schemeClr val="lt1"/>
+                          </a:solidFill>
+                          <a:effectLst/>
+                          <a:latin typeface="+mn-lt"/>
+                          <a:ea typeface="+mn-ea"/>
+                          <a:cs typeface="+mn-cs"/>
+                        </a:rPr>
+                        <a:t>    return (x - 3) ** 2</a:t>
+                      </a:r>
+                    </a:p>
+                    <a:p>
+                      <a:br>
+                        <a:rPr lang="en-US" sz="1800" b="0" kern="1200" dirty="0">
+                          <a:solidFill>
+                            <a:schemeClr val="lt1"/>
+                          </a:solidFill>
+                          <a:effectLst/>
+                          <a:latin typeface="+mn-lt"/>
+                          <a:ea typeface="+mn-ea"/>
+                          <a:cs typeface="+mn-cs"/>
+                        </a:rPr>
+                      </a:br>
+                      <a:r>
+                        <a:rPr lang="en-US" sz="1800" b="0" kern="1200" dirty="0">
+                          <a:solidFill>
+                            <a:schemeClr val="lt1"/>
+                          </a:solidFill>
+                          <a:effectLst/>
+                          <a:latin typeface="+mn-lt"/>
+                          <a:ea typeface="+mn-ea"/>
+                          <a:cs typeface="+mn-cs"/>
+                        </a:rPr>
+                        <a:t>def </a:t>
+                      </a:r>
+                      <a:r>
+                        <a:rPr lang="en-US" sz="1800" b="0" kern="1200" dirty="0" err="1">
+                          <a:solidFill>
+                            <a:schemeClr val="lt1"/>
+                          </a:solidFill>
+                          <a:effectLst/>
+                          <a:latin typeface="+mn-lt"/>
+                          <a:ea typeface="+mn-ea"/>
+                          <a:cs typeface="+mn-cs"/>
+                        </a:rPr>
+                        <a:t>noisy_grad</a:t>
+                      </a:r>
+                      <a:r>
+                        <a:rPr lang="en-US" sz="1800" b="0" kern="1200" dirty="0">
+                          <a:solidFill>
+                            <a:schemeClr val="lt1"/>
+                          </a:solidFill>
+                          <a:effectLst/>
+                          <a:latin typeface="+mn-lt"/>
+                          <a:ea typeface="+mn-ea"/>
+                          <a:cs typeface="+mn-cs"/>
+                        </a:rPr>
+                        <a:t>(x):</a:t>
+                      </a:r>
+                    </a:p>
+                    <a:p>
+                      <a:r>
+                        <a:rPr lang="en-US" sz="1800" b="0" kern="1200" dirty="0">
+                          <a:solidFill>
+                            <a:schemeClr val="lt1"/>
+                          </a:solidFill>
+                          <a:effectLst/>
+                          <a:latin typeface="+mn-lt"/>
+                          <a:ea typeface="+mn-ea"/>
+                          <a:cs typeface="+mn-cs"/>
+                        </a:rPr>
+                        <a:t>    noise = </a:t>
+                      </a:r>
+                      <a:r>
+                        <a:rPr lang="en-US" sz="1800" b="0" kern="1200" dirty="0" err="1">
+                          <a:solidFill>
+                            <a:schemeClr val="lt1"/>
+                          </a:solidFill>
+                          <a:effectLst/>
+                          <a:latin typeface="+mn-lt"/>
+                          <a:ea typeface="+mn-ea"/>
+                          <a:cs typeface="+mn-cs"/>
+                        </a:rPr>
+                        <a:t>random.uniform</a:t>
+                      </a:r>
+                      <a:r>
+                        <a:rPr lang="en-US" sz="1800" b="0" kern="1200" dirty="0">
+                          <a:solidFill>
+                            <a:schemeClr val="lt1"/>
+                          </a:solidFill>
+                          <a:effectLst/>
+                          <a:latin typeface="+mn-lt"/>
+                          <a:ea typeface="+mn-ea"/>
+                          <a:cs typeface="+mn-cs"/>
+                        </a:rPr>
+                        <a:t>(-1.5, 1.5) </a:t>
+                      </a:r>
+                      <a:r>
+                        <a:rPr lang="ru-RU" sz="1800" b="0" kern="1200" dirty="0">
+                          <a:solidFill>
+                            <a:schemeClr val="lt1"/>
+                          </a:solidFill>
+                          <a:effectLst/>
+                          <a:latin typeface="+mn-lt"/>
+                          <a:ea typeface="+mn-ea"/>
+                          <a:cs typeface="+mn-cs"/>
+                        </a:rPr>
+                        <a:t>    </a:t>
+                      </a:r>
+                      <a:endParaRPr lang="en-US" sz="1800" b="0" kern="1200" dirty="0">
+                        <a:solidFill>
+                          <a:schemeClr val="lt1"/>
+                        </a:solidFill>
+                        <a:effectLst/>
+                        <a:latin typeface="+mn-lt"/>
+                        <a:ea typeface="+mn-ea"/>
+                        <a:cs typeface="+mn-cs"/>
+                      </a:endParaRPr>
+                    </a:p>
+                    <a:p>
+                      <a:r>
+                        <a:rPr lang="en-US" sz="1800" b="0" kern="1200" dirty="0">
+                          <a:solidFill>
+                            <a:schemeClr val="lt1"/>
+                          </a:solidFill>
+                          <a:effectLst/>
+                          <a:latin typeface="+mn-lt"/>
+                          <a:ea typeface="+mn-ea"/>
+                          <a:cs typeface="+mn-cs"/>
+                        </a:rPr>
+                        <a:t>    return 2 * (x - 3) + noise</a:t>
+                      </a:r>
+                    </a:p>
+                    <a:p>
+                      <a:br>
+                        <a:rPr lang="en-US" sz="1800" b="0" kern="1200" dirty="0">
+                          <a:solidFill>
+                            <a:schemeClr val="lt1"/>
+                          </a:solidFill>
+                          <a:effectLst/>
+                          <a:latin typeface="+mn-lt"/>
+                          <a:ea typeface="+mn-ea"/>
+                          <a:cs typeface="+mn-cs"/>
+                        </a:rPr>
+                      </a:br>
+                      <a:r>
+                        <a:rPr lang="en-US" sz="1800" b="0" kern="1200" dirty="0">
+                          <a:solidFill>
+                            <a:schemeClr val="lt1"/>
+                          </a:solidFill>
+                          <a:effectLst/>
+                          <a:latin typeface="+mn-lt"/>
+                          <a:ea typeface="+mn-ea"/>
+                          <a:cs typeface="+mn-cs"/>
+                        </a:rPr>
+                        <a:t>x = 0.0</a:t>
+                      </a:r>
+                    </a:p>
+                    <a:p>
+                      <a:r>
+                        <a:rPr lang="en-US" sz="1800" b="0" kern="1200" dirty="0" err="1">
+                          <a:solidFill>
+                            <a:schemeClr val="lt1"/>
+                          </a:solidFill>
+                          <a:effectLst/>
+                          <a:latin typeface="+mn-lt"/>
+                          <a:ea typeface="+mn-ea"/>
+                          <a:cs typeface="+mn-cs"/>
+                        </a:rPr>
+                        <a:t>lr</a:t>
+                      </a:r>
+                      <a:r>
+                        <a:rPr lang="en-US" sz="1800" b="0" kern="1200" dirty="0">
+                          <a:solidFill>
+                            <a:schemeClr val="lt1"/>
+                          </a:solidFill>
+                          <a:effectLst/>
+                          <a:latin typeface="+mn-lt"/>
+                          <a:ea typeface="+mn-ea"/>
+                          <a:cs typeface="+mn-cs"/>
+                        </a:rPr>
+                        <a:t> = 0.1</a:t>
+                      </a:r>
+                    </a:p>
+                    <a:p>
+                      <a:br>
+                        <a:rPr lang="en-US" sz="1800" b="0" kern="1200" dirty="0">
+                          <a:solidFill>
+                            <a:schemeClr val="lt1"/>
+                          </a:solidFill>
+                          <a:effectLst/>
+                          <a:latin typeface="+mn-lt"/>
+                          <a:ea typeface="+mn-ea"/>
+                          <a:cs typeface="+mn-cs"/>
+                        </a:rPr>
+                      </a:br>
+                      <a:r>
+                        <a:rPr lang="en-US" sz="1800" b="0" kern="1200" dirty="0">
+                          <a:solidFill>
+                            <a:schemeClr val="lt1"/>
+                          </a:solidFill>
+                          <a:effectLst/>
+                          <a:latin typeface="+mn-lt"/>
+                          <a:ea typeface="+mn-ea"/>
+                          <a:cs typeface="+mn-cs"/>
+                        </a:rPr>
+                        <a:t>for </a:t>
+                      </a:r>
+                      <a:r>
+                        <a:rPr lang="en-US" sz="1800" b="0" kern="1200" dirty="0" err="1">
+                          <a:solidFill>
+                            <a:schemeClr val="lt1"/>
+                          </a:solidFill>
+                          <a:effectLst/>
+                          <a:latin typeface="+mn-lt"/>
+                          <a:ea typeface="+mn-ea"/>
+                          <a:cs typeface="+mn-cs"/>
+                        </a:rPr>
+                        <a:t>i</a:t>
+                      </a:r>
+                      <a:r>
+                        <a:rPr lang="en-US" sz="1800" b="0" kern="1200" dirty="0">
+                          <a:solidFill>
+                            <a:schemeClr val="lt1"/>
+                          </a:solidFill>
+                          <a:effectLst/>
+                          <a:latin typeface="+mn-lt"/>
+                          <a:ea typeface="+mn-ea"/>
+                          <a:cs typeface="+mn-cs"/>
+                        </a:rPr>
+                        <a:t> in range(20):</a:t>
+                      </a:r>
+                    </a:p>
+                    <a:p>
+                      <a:r>
+                        <a:rPr lang="en-US" sz="1800" b="0" kern="1200" dirty="0">
+                          <a:solidFill>
+                            <a:schemeClr val="lt1"/>
+                          </a:solidFill>
+                          <a:effectLst/>
+                          <a:latin typeface="+mn-lt"/>
+                          <a:ea typeface="+mn-ea"/>
+                          <a:cs typeface="+mn-cs"/>
+                        </a:rPr>
+                        <a:t>    g = </a:t>
+                      </a:r>
+                      <a:r>
+                        <a:rPr lang="en-US" sz="1800" b="0" kern="1200" dirty="0" err="1">
+                          <a:solidFill>
+                            <a:schemeClr val="lt1"/>
+                          </a:solidFill>
+                          <a:effectLst/>
+                          <a:latin typeface="+mn-lt"/>
+                          <a:ea typeface="+mn-ea"/>
+                          <a:cs typeface="+mn-cs"/>
+                        </a:rPr>
+                        <a:t>noisy_grad</a:t>
+                      </a:r>
+                      <a:r>
+                        <a:rPr lang="en-US" sz="1800" b="0" kern="1200" dirty="0">
+                          <a:solidFill>
+                            <a:schemeClr val="lt1"/>
+                          </a:solidFill>
+                          <a:effectLst/>
+                          <a:latin typeface="+mn-lt"/>
+                          <a:ea typeface="+mn-ea"/>
+                          <a:cs typeface="+mn-cs"/>
+                        </a:rPr>
+                        <a:t>(x)    # </a:t>
+                      </a:r>
+                      <a:r>
+                        <a:rPr lang="ru-RU" sz="1800" b="0" kern="1200" dirty="0">
+                          <a:solidFill>
+                            <a:schemeClr val="lt1"/>
+                          </a:solidFill>
+                          <a:effectLst/>
+                          <a:latin typeface="+mn-lt"/>
+                          <a:ea typeface="+mn-ea"/>
+                          <a:cs typeface="+mn-cs"/>
+                        </a:rPr>
+                        <a:t>градиент — шумный</a:t>
+                      </a:r>
+                      <a:endParaRPr lang="en-US" sz="1800" b="0" kern="1200" dirty="0">
+                        <a:solidFill>
+                          <a:schemeClr val="lt1"/>
+                        </a:solidFill>
+                        <a:effectLst/>
+                        <a:latin typeface="+mn-lt"/>
+                        <a:ea typeface="+mn-ea"/>
+                        <a:cs typeface="+mn-cs"/>
+                      </a:endParaRPr>
+                    </a:p>
+                    <a:p>
+                      <a:r>
+                        <a:rPr lang="ru-RU" sz="1800" b="0" kern="1200" dirty="0">
+                          <a:solidFill>
+                            <a:schemeClr val="lt1"/>
+                          </a:solidFill>
+                          <a:effectLst/>
+                          <a:latin typeface="+mn-lt"/>
+                          <a:ea typeface="+mn-ea"/>
+                          <a:cs typeface="+mn-cs"/>
+                        </a:rPr>
+                        <a:t>    </a:t>
+                      </a:r>
+                      <a:r>
+                        <a:rPr lang="en-US" sz="1800" b="0" kern="1200" dirty="0">
+                          <a:solidFill>
+                            <a:schemeClr val="lt1"/>
+                          </a:solidFill>
+                          <a:effectLst/>
+                          <a:latin typeface="+mn-lt"/>
+                          <a:ea typeface="+mn-ea"/>
+                          <a:cs typeface="+mn-cs"/>
+                        </a:rPr>
+                        <a:t>x = x - </a:t>
+                      </a:r>
+                      <a:r>
+                        <a:rPr lang="en-US" sz="1800" b="0" kern="1200" dirty="0" err="1">
+                          <a:solidFill>
+                            <a:schemeClr val="lt1"/>
+                          </a:solidFill>
+                          <a:effectLst/>
+                          <a:latin typeface="+mn-lt"/>
+                          <a:ea typeface="+mn-ea"/>
+                          <a:cs typeface="+mn-cs"/>
+                        </a:rPr>
+                        <a:t>lr</a:t>
+                      </a:r>
+                      <a:r>
+                        <a:rPr lang="en-US" sz="1800" b="0" kern="1200" dirty="0">
+                          <a:solidFill>
+                            <a:schemeClr val="lt1"/>
+                          </a:solidFill>
+                          <a:effectLst/>
+                          <a:latin typeface="+mn-lt"/>
+                          <a:ea typeface="+mn-ea"/>
+                          <a:cs typeface="+mn-cs"/>
+                        </a:rPr>
+                        <a:t> * g</a:t>
+                      </a:r>
+                    </a:p>
+                    <a:p>
+                      <a:r>
+                        <a:rPr lang="en-US" sz="1800" b="0" kern="1200" dirty="0">
+                          <a:solidFill>
+                            <a:schemeClr val="lt1"/>
+                          </a:solidFill>
+                          <a:effectLst/>
+                          <a:latin typeface="+mn-lt"/>
+                          <a:ea typeface="+mn-ea"/>
+                          <a:cs typeface="+mn-cs"/>
+                        </a:rPr>
+                        <a:t>    print(f"</a:t>
+                      </a:r>
+                      <a:r>
+                        <a:rPr lang="ru-RU" sz="1800" b="0" kern="1200" dirty="0">
+                          <a:solidFill>
+                            <a:schemeClr val="lt1"/>
+                          </a:solidFill>
+                          <a:effectLst/>
+                          <a:latin typeface="+mn-lt"/>
+                          <a:ea typeface="+mn-ea"/>
+                          <a:cs typeface="+mn-cs"/>
+                        </a:rPr>
+                        <a:t>шаг {</a:t>
+                      </a:r>
+                      <a:r>
+                        <a:rPr lang="en-US" sz="1800" b="0" kern="1200" dirty="0">
+                          <a:solidFill>
+                            <a:schemeClr val="lt1"/>
+                          </a:solidFill>
+                          <a:effectLst/>
+                          <a:latin typeface="+mn-lt"/>
+                          <a:ea typeface="+mn-ea"/>
+                          <a:cs typeface="+mn-cs"/>
+                        </a:rPr>
+                        <a:t>i+1:2d}: x = {x:.4f}, f(x) = {f(x):.4f}")</a:t>
+                      </a:r>
+                    </a:p>
+                    <a:p>
+                      <a:pPr algn="ctr"/>
+                      <a:endParaRPr lang="ru-RU" dirty="0"/>
+                    </a:p>
+                  </a:txBody>
+                  <a:tcPr/>
+                </a:tc>
+                <a:extLst>
+                  <a:ext uri="{0D108BD9-81ED-4DB2-BD59-A6C34878D82A}">
+                    <a16:rowId xmlns:a16="http://schemas.microsoft.com/office/drawing/2014/main" val="1613177430"/>
+                  </a:ext>
+                </a:extLst>
+              </a:tr>
+            </a:tbl>
+          </a:graphicData>
+        </a:graphic>
+      </p:graphicFrame>
+    </p:spTree>
+    <p:extLst>
+      <p:ext uri="{BB962C8B-B14F-4D97-AF65-F5344CB8AC3E}">
+        <p14:creationId xmlns:p14="http://schemas.microsoft.com/office/powerpoint/2010/main" val="1127441208"/>
+      </p:ext>
+    </p:extLst>
+  </p:cSld>
+  <p:clrMapOvr>
+    <a:masterClrMapping/>
+  </p:clrMapOvr>
+</p:sld>
+</file>
+
+<file path=ppt/slides/slide55.xml><?xml version="1.0" encoding="utf-8"?>
+<p:sld xmlns:a="http://schemas.openxmlformats.org/drawingml/2006/main" xmlns:r="http://schemas.openxmlformats.org/officeDocument/2006/relationships" xmlns:p="http://schemas.openxmlformats.org/presentationml/2006/main">
+  <p:cSld>
+    <p:spTree>
+      <p:nvGrpSpPr>
+        <p:cNvPr id="1" name=""/>
+        <p:cNvGrpSpPr/>
+        <p:nvPr/>
+      </p:nvGrpSpPr>
+      <p:grpSpPr>
+        <a:xfrm>
+          <a:off x="0" y="0"/>
+          <a:ext cx="0" cy="0"/>
+          <a:chOff x="0" y="0"/>
+          <a:chExt cx="0" cy="0"/>
+        </a:xfrm>
+      </p:grpSpPr>
+      <p:pic>
+        <p:nvPicPr>
+          <p:cNvPr id="4" name="Picture 3" descr="logo.png"/>
+          <p:cNvPicPr>
+            <a:picLocks noChangeAspect="1"/>
+          </p:cNvPicPr>
+          <p:nvPr/>
+        </p:nvPicPr>
+        <p:blipFill>
+          <a:blip r:embed="rId2"/>
+          <a:stretch>
+            <a:fillRect/>
+          </a:stretch>
+        </p:blipFill>
+        <p:spPr>
+          <a:xfrm>
+            <a:off x="12344400" y="274320"/>
+            <a:ext cx="1097280" cy="1080473"/>
+          </a:xfrm>
+          <a:prstGeom prst="rect">
+            <a:avLst/>
+          </a:prstGeom>
+        </p:spPr>
+      </p:pic>
+      <p:sp>
+        <p:nvSpPr>
+          <p:cNvPr id="5" name="Rectangle 4"/>
+          <p:cNvSpPr/>
+          <p:nvPr/>
+        </p:nvSpPr>
+        <p:spPr>
+          <a:xfrm>
+            <a:off x="0" y="7772400"/>
+            <a:ext cx="14630400" cy="457200"/>
+          </a:xfrm>
+          <a:prstGeom prst="rect">
+            <a:avLst/>
+          </a:prstGeom>
+          <a:solidFill>
+            <a:srgbClr val="640064"/>
+          </a:solidFill>
+          <a:ln>
+            <a:noFill/>
+          </a:ln>
+        </p:spPr>
+        <p:style>
+          <a:lnRef idx="1">
+            <a:schemeClr val="accent1"/>
+          </a:lnRef>
+          <a:fillRef idx="3">
+            <a:schemeClr val="accent1"/>
+          </a:fillRef>
+          <a:effectRef idx="2">
+            <a:schemeClr val="accent1"/>
+          </a:effectRef>
+          <a:fontRef idx="minor">
+            <a:schemeClr val="lt1"/>
+          </a:fontRef>
+        </p:style>
+        <p:txBody>
+          <a:bodyPr rtlCol="0" anchor="ctr"/>
+          <a:lstStyle/>
+          <a:p>
+            <a:pPr algn="ctr"/>
+            <a:endParaRPr>
+              <a:solidFill>
+                <a:schemeClr val="tx1"/>
+              </a:solidFill>
+            </a:endParaRPr>
+          </a:p>
+        </p:txBody>
+      </p:sp>
+      <p:sp>
+        <p:nvSpPr>
+          <p:cNvPr id="7" name="TextBox 6">
+            <a:extLst>
+              <a:ext uri="{FF2B5EF4-FFF2-40B4-BE49-F238E27FC236}">
+                <a16:creationId xmlns:a16="http://schemas.microsoft.com/office/drawing/2014/main" id="{EA77F26D-0F9B-DFF5-2FB4-9E508F48AFC7}"/>
+              </a:ext>
+            </a:extLst>
+          </p:cNvPr>
+          <p:cNvSpPr txBox="1"/>
+          <p:nvPr/>
+        </p:nvSpPr>
+        <p:spPr>
+          <a:xfrm>
+            <a:off x="705491" y="330403"/>
+            <a:ext cx="11408419" cy="769441"/>
+          </a:xfrm>
+          <a:prstGeom prst="rect">
+            <a:avLst/>
+          </a:prstGeom>
+          <a:noFill/>
+        </p:spPr>
+        <p:txBody>
+          <a:bodyPr wrap="square">
+            <a:spAutoFit/>
+          </a:bodyPr>
+          <a:lstStyle/>
+          <a:p>
+            <a:r>
+              <a:rPr lang="ru-RU" sz="4400" dirty="0"/>
+              <a:t>Обратное распространение ошибки</a:t>
+            </a:r>
+            <a:endParaRPr lang="ru-RU" sz="4400" b="1" dirty="0"/>
+          </a:p>
+        </p:txBody>
+      </p:sp>
+      <p:pic>
+        <p:nvPicPr>
+          <p:cNvPr id="6" name="Рисунок 5">
+            <a:extLst>
+              <a:ext uri="{FF2B5EF4-FFF2-40B4-BE49-F238E27FC236}">
+                <a16:creationId xmlns:a16="http://schemas.microsoft.com/office/drawing/2014/main" id="{57E847A7-8F15-A1BB-94F5-93F2F375B556}"/>
+              </a:ext>
+            </a:extLst>
+          </p:cNvPr>
+          <p:cNvPicPr>
+            <a:picLocks noChangeAspect="1"/>
+          </p:cNvPicPr>
+          <p:nvPr/>
+        </p:nvPicPr>
+        <p:blipFill>
+          <a:blip r:embed="rId3">
+            <a:extLst>
+              <a:ext uri="{96DAC541-7B7A-43D3-8B79-37D633B846F1}">
+                <asvg:svgBlip xmlns:asvg="http://schemas.microsoft.com/office/drawing/2016/SVG/main" r:embed="rId4"/>
+              </a:ext>
+            </a:extLst>
+          </a:blip>
+          <a:stretch>
+            <a:fillRect/>
+          </a:stretch>
+        </p:blipFill>
+        <p:spPr>
+          <a:xfrm>
+            <a:off x="3789533" y="1111475"/>
+            <a:ext cx="7531742" cy="5981089"/>
+          </a:xfrm>
+          <a:prstGeom prst="rect">
+            <a:avLst/>
+          </a:prstGeom>
+        </p:spPr>
+      </p:pic>
+    </p:spTree>
+    <p:extLst>
+      <p:ext uri="{BB962C8B-B14F-4D97-AF65-F5344CB8AC3E}">
+        <p14:creationId xmlns:p14="http://schemas.microsoft.com/office/powerpoint/2010/main" val="583012450"/>
+      </p:ext>
+    </p:extLst>
+  </p:cSld>
+  <p:clrMapOvr>
+    <a:masterClrMapping/>
+  </p:clrMapOvr>
+</p:sld>
+</file>
+
+<file path=ppt/slides/slide56.xml><?xml version="1.0" encoding="utf-8"?>
+<p:sld xmlns:a="http://schemas.openxmlformats.org/drawingml/2006/main" xmlns:r="http://schemas.openxmlformats.org/officeDocument/2006/relationships" xmlns:p="http://schemas.openxmlformats.org/presentationml/2006/main">
+  <p:cSld>
+    <p:bg>
+      <p:bgPr>
+        <a:solidFill>
+          <a:srgbClr val="972996"/>
+        </a:solidFill>
+        <a:effectLst/>
+      </p:bgPr>
+    </p:bg>
+    <p:spTree>
+      <p:nvGrpSpPr>
+        <p:cNvPr id="1" name=""/>
+        <p:cNvGrpSpPr/>
+        <p:nvPr/>
+      </p:nvGrpSpPr>
+      <p:grpSpPr>
+        <a:xfrm>
+          <a:off x="0" y="0"/>
+          <a:ext cx="0" cy="0"/>
+          <a:chOff x="0" y="0"/>
+          <a:chExt cx="0" cy="0"/>
+        </a:xfrm>
+      </p:grpSpPr>
+      <p:pic>
+        <p:nvPicPr>
+          <p:cNvPr id="4" name="Picture 3" descr="logo.png"/>
+          <p:cNvPicPr>
+            <a:picLocks noChangeAspect="1"/>
+          </p:cNvPicPr>
+          <p:nvPr/>
+        </p:nvPicPr>
+        <p:blipFill>
+          <a:blip r:embed="rId2"/>
+          <a:stretch>
+            <a:fillRect/>
+          </a:stretch>
+        </p:blipFill>
+        <p:spPr>
+          <a:xfrm>
+            <a:off x="12344400" y="274320"/>
+            <a:ext cx="1097280" cy="1080473"/>
+          </a:xfrm>
+          <a:prstGeom prst="rect">
+            <a:avLst/>
+          </a:prstGeom>
+        </p:spPr>
+      </p:pic>
+      <p:sp>
+        <p:nvSpPr>
+          <p:cNvPr id="5" name="Rectangle 4"/>
+          <p:cNvSpPr/>
+          <p:nvPr/>
+        </p:nvSpPr>
+        <p:spPr>
+          <a:xfrm>
+            <a:off x="0" y="7772400"/>
+            <a:ext cx="14630400" cy="457200"/>
+          </a:xfrm>
+          <a:prstGeom prst="rect">
+            <a:avLst/>
+          </a:prstGeom>
+          <a:solidFill>
+            <a:srgbClr val="E6E6E6"/>
+          </a:solidFill>
+          <a:ln>
+            <a:noFill/>
+          </a:ln>
+        </p:spPr>
+        <p:style>
+          <a:lnRef idx="1">
+            <a:schemeClr val="accent1"/>
+          </a:lnRef>
+          <a:fillRef idx="3">
+            <a:schemeClr val="accent1"/>
+          </a:fillRef>
+          <a:effectRef idx="2">
+            <a:schemeClr val="accent1"/>
+          </a:effectRef>
+          <a:fontRef idx="minor">
+            <a:schemeClr val="lt1"/>
+          </a:fontRef>
+        </p:style>
+        <p:txBody>
+          <a:bodyPr rtlCol="0" anchor="ctr"/>
+          <a:lstStyle/>
+          <a:p>
+            <a:pPr algn="ctr"/>
+            <a:endParaRPr/>
+          </a:p>
+        </p:txBody>
+      </p:sp>
+      <p:sp>
+        <p:nvSpPr>
+          <p:cNvPr id="3" name="TextBox 2">
+            <a:extLst>
+              <a:ext uri="{FF2B5EF4-FFF2-40B4-BE49-F238E27FC236}">
+                <a16:creationId xmlns:a16="http://schemas.microsoft.com/office/drawing/2014/main" id="{C315D28A-F529-C361-6B0C-54FC6D10368B}"/>
+              </a:ext>
+            </a:extLst>
+          </p:cNvPr>
+          <p:cNvSpPr txBox="1"/>
+          <p:nvPr/>
+        </p:nvSpPr>
+        <p:spPr>
+          <a:xfrm>
+            <a:off x="625737" y="289929"/>
+            <a:ext cx="8847230" cy="769441"/>
+          </a:xfrm>
+          <a:prstGeom prst="rect">
+            <a:avLst/>
+          </a:prstGeom>
+          <a:noFill/>
+        </p:spPr>
+        <p:txBody>
+          <a:bodyPr wrap="none">
+            <a:spAutoFit/>
+          </a:bodyPr>
+          <a:lstStyle/>
+          <a:p>
+            <a:r>
+              <a:rPr lang="ru-RU" sz="4400" dirty="0">
+                <a:solidFill>
+                  <a:schemeClr val="bg1"/>
+                </a:solidFill>
+              </a:rPr>
+              <a:t>Обратное распространение ошибки</a:t>
+            </a:r>
+            <a:endParaRPr lang="ru-RU" sz="4400" b="1" dirty="0">
+              <a:solidFill>
+                <a:schemeClr val="bg1"/>
+              </a:solidFill>
+            </a:endParaRPr>
+          </a:p>
+        </p:txBody>
+      </p:sp>
+      <p:sp>
+        <p:nvSpPr>
+          <p:cNvPr id="6" name="Rectangle 2">
+            <a:extLst>
+              <a:ext uri="{FF2B5EF4-FFF2-40B4-BE49-F238E27FC236}">
+                <a16:creationId xmlns:a16="http://schemas.microsoft.com/office/drawing/2014/main" id="{CE49345A-741A-0A63-1066-8BBF41B5D065}"/>
+              </a:ext>
+            </a:extLst>
+          </p:cNvPr>
+          <p:cNvSpPr>
+            <a:spLocks noChangeArrowheads="1"/>
+          </p:cNvSpPr>
+          <p:nvPr/>
+        </p:nvSpPr>
+        <p:spPr bwMode="auto">
+          <a:xfrm>
+            <a:off x="428483" y="1354793"/>
+            <a:ext cx="13020754" cy="5262979"/>
+          </a:xfrm>
+          <a:prstGeom prst="rect">
+            <a:avLst/>
+          </a:prstGeom>
+          <a:noFill/>
+          <a:ln>
+            <a:noFill/>
+          </a:ln>
+          <a:effectLst/>
+          <a:extLst>
+            <a:ext uri="{909E8E84-426E-40DD-AFC4-6F175D3DCCD1}">
+              <a14:hiddenFill xmlns:a14="http://schemas.microsoft.com/office/drawing/2010/main">
+                <a:solidFill>
+                  <a:schemeClr val="accent1"/>
+                </a:solidFill>
+              </a14:hiddenFill>
+            </a:ext>
+            <a:ext uri="{91240B29-F687-4F45-9708-019B960494DF}">
+              <a14:hiddenLine xmlns:a14="http://schemas.microsoft.com/office/drawing/2010/main" w="9525">
+                <a:solidFill>
+                  <a:schemeClr val="tx1"/>
+                </a:solidFill>
+                <a:miter lim="800000"/>
+                <a:headEnd/>
+                <a:tailEnd/>
+              </a14:hiddenLine>
+            </a:ext>
+            <a:ext uri="{AF507438-7753-43E0-B8FC-AC1667EBCBE1}">
+              <a14:hiddenEffects xmlns:a14="http://schemas.microsoft.com/office/drawing/2010/main">
+                <a:effectLst>
+                  <a:outerShdw dist="35921" dir="2700000" algn="ctr" rotWithShape="0">
+                    <a:schemeClr val="bg2"/>
+                  </a:outerShdw>
+                </a:effectLst>
+              </a14:hiddenEffects>
+            </a:ext>
+          </a:extLst>
+        </p:spPr>
+        <p:txBody>
+          <a:bodyPr vert="horz" wrap="square" lIns="91440" tIns="45720" rIns="91440" bIns="45720" numCol="1" anchor="ctr" anchorCtr="0" compatLnSpc="1">
+            <a:prstTxWarp prst="textNoShape">
+              <a:avLst/>
+            </a:prstTxWarp>
+            <a:spAutoFit/>
+          </a:bodyPr>
+          <a:lstStyle/>
+          <a:p>
+            <a:pPr marL="0" marR="0" lvl="0" indent="0" algn="l" defTabSz="914400" rtl="0" eaLnBrk="0" fontAlgn="base" latinLnBrk="0" hangingPunct="0">
+              <a:lnSpc>
+                <a:spcPct val="100000"/>
+              </a:lnSpc>
+              <a:spcBef>
+                <a:spcPct val="0"/>
+              </a:spcBef>
+              <a:spcAft>
+                <a:spcPct val="0"/>
+              </a:spcAft>
+              <a:buClrTx/>
+              <a:buSzTx/>
+              <a:buFontTx/>
+              <a:buNone/>
+              <a:tabLst/>
+            </a:pPr>
+            <a:r>
+              <a:rPr kumimoji="0" lang="ru-RU" altLang="ru-RU" sz="2800" b="0" i="0" u="none" strike="noStrike" cap="none" normalizeH="0" baseline="0" dirty="0">
+                <a:ln>
+                  <a:noFill/>
+                </a:ln>
+                <a:solidFill>
+                  <a:schemeClr val="bg1"/>
+                </a:solidFill>
+                <a:effectLst/>
+                <a:latin typeface="+mj-lt"/>
+              </a:rPr>
+              <a:t>Вот как это работает по шагам:</a:t>
+            </a:r>
+          </a:p>
+          <a:p>
+            <a:pPr marL="0" marR="0" lvl="0" indent="0" algn="l" defTabSz="914400" rtl="0" eaLnBrk="0" fontAlgn="base" latinLnBrk="0" hangingPunct="0">
+              <a:lnSpc>
+                <a:spcPct val="100000"/>
+              </a:lnSpc>
+              <a:spcBef>
+                <a:spcPct val="0"/>
+              </a:spcBef>
+              <a:spcAft>
+                <a:spcPct val="0"/>
+              </a:spcAft>
+              <a:buClrTx/>
+              <a:buSzTx/>
+              <a:buFontTx/>
+              <a:buNone/>
+              <a:tabLst/>
+            </a:pPr>
+            <a:r>
+              <a:rPr kumimoji="0" lang="ru-RU" altLang="ru-RU" sz="2800" b="1" i="0" u="none" strike="noStrike" cap="none" normalizeH="0" baseline="0" dirty="0">
+                <a:ln>
+                  <a:noFill/>
+                </a:ln>
+                <a:solidFill>
+                  <a:schemeClr val="bg1"/>
+                </a:solidFill>
+                <a:effectLst/>
+                <a:latin typeface="+mj-lt"/>
+              </a:rPr>
+              <a:t>① Прямой проход</a:t>
+            </a:r>
+            <a:r>
+              <a:rPr kumimoji="0" lang="ru-RU" altLang="ru-RU" sz="2800" b="0" i="0" u="none" strike="noStrike" cap="none" normalizeH="0" baseline="0" dirty="0">
+                <a:ln>
+                  <a:noFill/>
+                </a:ln>
+                <a:solidFill>
+                  <a:schemeClr val="bg1"/>
+                </a:solidFill>
+                <a:effectLst/>
+                <a:latin typeface="+mj-lt"/>
+              </a:rPr>
+              <a:t> — нейросеть берёт цифру (15 пикселей) и вычисляет ответ. Например, выдаёт [0.1, 0.8, 0.05, ...] — думает, что это цифра 1.</a:t>
+            </a:r>
+          </a:p>
+          <a:p>
+            <a:pPr marL="0" marR="0" lvl="0" indent="0" algn="l" defTabSz="914400" rtl="0" eaLnBrk="0" fontAlgn="base" latinLnBrk="0" hangingPunct="0">
+              <a:lnSpc>
+                <a:spcPct val="100000"/>
+              </a:lnSpc>
+              <a:spcBef>
+                <a:spcPct val="0"/>
+              </a:spcBef>
+              <a:spcAft>
+                <a:spcPct val="0"/>
+              </a:spcAft>
+              <a:buClrTx/>
+              <a:buSzTx/>
+              <a:buFontTx/>
+              <a:buNone/>
+              <a:tabLst/>
+            </a:pPr>
+            <a:r>
+              <a:rPr kumimoji="0" lang="ru-RU" altLang="ru-RU" sz="2800" b="1" i="0" u="none" strike="noStrike" cap="none" normalizeH="0" baseline="0" dirty="0">
+                <a:ln>
+                  <a:noFill/>
+                </a:ln>
+                <a:solidFill>
+                  <a:schemeClr val="bg1"/>
+                </a:solidFill>
+                <a:effectLst/>
+                <a:latin typeface="+mj-lt"/>
+              </a:rPr>
+              <a:t>② Ошибка</a:t>
+            </a:r>
+            <a:r>
+              <a:rPr kumimoji="0" lang="ru-RU" altLang="ru-RU" sz="2800" b="0" i="0" u="none" strike="noStrike" cap="none" normalizeH="0" baseline="0" dirty="0">
+                <a:ln>
+                  <a:noFill/>
+                </a:ln>
+                <a:solidFill>
+                  <a:schemeClr val="bg1"/>
+                </a:solidFill>
+                <a:effectLst/>
+                <a:latin typeface="+mj-lt"/>
+              </a:rPr>
+              <a:t> — сравниваем с правильным ответом. Если на самом деле это была 3, то правильный ответ [0, 0, 0, 1, ...]. </a:t>
+            </a:r>
+            <a:endParaRPr kumimoji="0" lang="en-US" altLang="ru-RU" sz="2800" b="0" i="0" u="none" strike="noStrike" cap="none" normalizeH="0" baseline="0" dirty="0">
+              <a:ln>
+                <a:noFill/>
+              </a:ln>
+              <a:solidFill>
+                <a:schemeClr val="bg1"/>
+              </a:solidFill>
+              <a:effectLst/>
+              <a:latin typeface="+mj-lt"/>
+            </a:endParaRPr>
+          </a:p>
+          <a:p>
+            <a:pPr marL="0" marR="0" lvl="0" indent="0" algn="l" defTabSz="914400" rtl="0" eaLnBrk="0" fontAlgn="base" latinLnBrk="0" hangingPunct="0">
+              <a:lnSpc>
+                <a:spcPct val="100000"/>
+              </a:lnSpc>
+              <a:spcBef>
+                <a:spcPct val="0"/>
+              </a:spcBef>
+              <a:spcAft>
+                <a:spcPct val="0"/>
+              </a:spcAft>
+              <a:buClrTx/>
+              <a:buSzTx/>
+              <a:buFontTx/>
+              <a:buNone/>
+              <a:tabLst/>
+            </a:pPr>
+            <a:r>
+              <a:rPr kumimoji="0" lang="ru-RU" altLang="ru-RU" sz="2800" b="0" i="0" u="none" strike="noStrike" cap="none" normalizeH="0" baseline="0" dirty="0">
+                <a:ln>
+                  <a:noFill/>
+                </a:ln>
+                <a:solidFill>
+                  <a:schemeClr val="bg1"/>
+                </a:solidFill>
+                <a:effectLst/>
+                <a:latin typeface="+mj-lt"/>
+              </a:rPr>
+              <a:t>Считаем разницу по каждому выходу: 0.8 − 0 = 0.8 — это ошибка.</a:t>
+            </a:r>
+          </a:p>
+          <a:p>
+            <a:pPr marL="0" marR="0" lvl="0" indent="0" algn="l" defTabSz="914400" rtl="0" eaLnBrk="0" fontAlgn="base" latinLnBrk="0" hangingPunct="0">
+              <a:lnSpc>
+                <a:spcPct val="100000"/>
+              </a:lnSpc>
+              <a:spcBef>
+                <a:spcPct val="0"/>
+              </a:spcBef>
+              <a:spcAft>
+                <a:spcPct val="0"/>
+              </a:spcAft>
+              <a:buClrTx/>
+              <a:buSzTx/>
+              <a:buFontTx/>
+              <a:buNone/>
+              <a:tabLst/>
+            </a:pPr>
+            <a:r>
+              <a:rPr kumimoji="0" lang="ru-RU" altLang="ru-RU" sz="2800" b="1" i="0" u="none" strike="noStrike" cap="none" normalizeH="0" baseline="0" dirty="0">
+                <a:ln>
+                  <a:noFill/>
+                </a:ln>
+                <a:solidFill>
+                  <a:schemeClr val="bg1"/>
+                </a:solidFill>
+                <a:effectLst/>
+                <a:latin typeface="+mj-lt"/>
+              </a:rPr>
+              <a:t>③ Обратный проход</a:t>
+            </a:r>
+            <a:r>
+              <a:rPr kumimoji="0" lang="ru-RU" altLang="ru-RU" sz="2800" b="0" i="0" u="none" strike="noStrike" cap="none" normalizeH="0" baseline="0" dirty="0">
+                <a:ln>
+                  <a:noFill/>
+                </a:ln>
+                <a:solidFill>
+                  <a:schemeClr val="bg1"/>
+                </a:solidFill>
+                <a:effectLst/>
+                <a:latin typeface="+mj-lt"/>
+              </a:rPr>
+              <a:t> — ошибка "идёт назад" через всю сеть, от выхода к входу. На каждом слое вычисляется: </a:t>
+            </a:r>
+            <a:r>
+              <a:rPr kumimoji="0" lang="ru-RU" altLang="ru-RU" sz="2800" b="0" i="1" u="none" strike="noStrike" cap="none" normalizeH="0" baseline="0" dirty="0">
+                <a:ln>
+                  <a:noFill/>
+                </a:ln>
+                <a:solidFill>
+                  <a:schemeClr val="bg1"/>
+                </a:solidFill>
+                <a:effectLst/>
+                <a:latin typeface="+mj-lt"/>
+              </a:rPr>
+              <a:t>а насколько этот вес виноват в ошибке?</a:t>
+            </a:r>
+            <a:r>
+              <a:rPr kumimoji="0" lang="ru-RU" altLang="ru-RU" sz="2800" b="0" i="0" u="none" strike="noStrike" cap="none" normalizeH="0" baseline="0" dirty="0">
+                <a:ln>
+                  <a:noFill/>
+                </a:ln>
+                <a:solidFill>
+                  <a:schemeClr val="bg1"/>
+                </a:solidFill>
+                <a:effectLst/>
+                <a:latin typeface="+mj-lt"/>
+              </a:rPr>
+              <a:t> И вес чуть-чуть корректируется.</a:t>
+            </a:r>
+          </a:p>
+          <a:p>
+            <a:pPr marL="0" marR="0" lvl="0" indent="0" algn="l" defTabSz="914400" rtl="0" eaLnBrk="0" fontAlgn="base" latinLnBrk="0" hangingPunct="0">
+              <a:lnSpc>
+                <a:spcPct val="100000"/>
+              </a:lnSpc>
+              <a:spcBef>
+                <a:spcPct val="0"/>
+              </a:spcBef>
+              <a:spcAft>
+                <a:spcPct val="0"/>
+              </a:spcAft>
+              <a:buClrTx/>
+              <a:buSzTx/>
+              <a:buFontTx/>
+              <a:buNone/>
+              <a:tabLst/>
+            </a:pPr>
+            <a:r>
+              <a:rPr kumimoji="0" lang="ru-RU" altLang="ru-RU" sz="2800" b="1" i="0" u="none" strike="noStrike" cap="none" normalizeH="0" baseline="0" dirty="0">
+                <a:ln>
+                  <a:noFill/>
+                </a:ln>
+                <a:solidFill>
+                  <a:schemeClr val="bg1"/>
+                </a:solidFill>
+                <a:effectLst/>
+                <a:latin typeface="+mj-lt"/>
+              </a:rPr>
+              <a:t>④ Формула правки</a:t>
+            </a:r>
+            <a:r>
+              <a:rPr kumimoji="0" lang="ru-RU" altLang="ru-RU" sz="2800" b="0" i="0" u="none" strike="noStrike" cap="none" normalizeH="0" baseline="0" dirty="0">
+                <a:ln>
+                  <a:noFill/>
+                </a:ln>
+                <a:solidFill>
+                  <a:schemeClr val="bg1"/>
+                </a:solidFill>
+                <a:effectLst/>
+                <a:latin typeface="+mj-lt"/>
+              </a:rPr>
+              <a:t> — в коде это буквально три строчки:</a:t>
+            </a:r>
+          </a:p>
+          <a:p>
+            <a:pPr marL="0" marR="0" lvl="0" indent="0" algn="l" defTabSz="914400" rtl="0" eaLnBrk="0" fontAlgn="base" latinLnBrk="0" hangingPunct="0">
+              <a:lnSpc>
+                <a:spcPct val="100000"/>
+              </a:lnSpc>
+              <a:spcBef>
+                <a:spcPct val="0"/>
+              </a:spcBef>
+              <a:spcAft>
+                <a:spcPct val="0"/>
+              </a:spcAft>
+              <a:buClrTx/>
+              <a:buSzTx/>
+              <a:buFontTx/>
+              <a:buNone/>
+              <a:tabLst/>
+            </a:pPr>
+            <a:endParaRPr kumimoji="0" lang="ru-RU" altLang="ru-RU" sz="2800" b="0" i="0" u="none" strike="noStrike" cap="none" normalizeH="0" baseline="0" dirty="0">
+              <a:ln>
+                <a:noFill/>
+              </a:ln>
+              <a:solidFill>
+                <a:schemeClr val="bg1"/>
+              </a:solidFill>
+              <a:effectLst/>
+              <a:latin typeface="+mj-lt"/>
+            </a:endParaRPr>
+          </a:p>
+          <a:p>
+            <a:pPr marL="0" marR="0" lvl="0" indent="0" algn="ctr" defTabSz="914400" rtl="0" eaLnBrk="0" fontAlgn="base" latinLnBrk="0" hangingPunct="0">
+              <a:lnSpc>
+                <a:spcPct val="100000"/>
+              </a:lnSpc>
+              <a:spcBef>
+                <a:spcPct val="0"/>
+              </a:spcBef>
+              <a:spcAft>
+                <a:spcPct val="0"/>
+              </a:spcAft>
+              <a:buClrTx/>
+              <a:buSzTx/>
+              <a:buFontTx/>
+              <a:buNone/>
+              <a:tabLst/>
+            </a:pPr>
+            <a:r>
+              <a:rPr kumimoji="0" lang="ru-RU" altLang="ru-RU" sz="2800" b="0" i="0" u="none" strike="noStrike" cap="none" normalizeH="0" baseline="0" dirty="0">
+                <a:ln>
+                  <a:noFill/>
+                </a:ln>
+                <a:solidFill>
+                  <a:schemeClr val="bg1"/>
+                </a:solidFill>
+                <a:effectLst/>
+                <a:latin typeface="+mj-lt"/>
+              </a:rPr>
+              <a:t>w2[i][j] -= </a:t>
+            </a:r>
+            <a:r>
+              <a:rPr kumimoji="0" lang="ru-RU" altLang="ru-RU" sz="2800" b="0" i="0" u="none" strike="noStrike" cap="none" normalizeH="0" baseline="0" dirty="0" err="1">
+                <a:ln>
+                  <a:noFill/>
+                </a:ln>
+                <a:solidFill>
+                  <a:schemeClr val="bg1"/>
+                </a:solidFill>
+                <a:effectLst/>
+                <a:latin typeface="+mj-lt"/>
+              </a:rPr>
+              <a:t>alpha</a:t>
+            </a:r>
+            <a:r>
+              <a:rPr kumimoji="0" lang="ru-RU" altLang="ru-RU" sz="2800" b="0" i="0" u="none" strike="noStrike" cap="none" normalizeH="0" baseline="0" dirty="0">
+                <a:ln>
+                  <a:noFill/>
+                </a:ln>
+                <a:solidFill>
+                  <a:schemeClr val="bg1"/>
+                </a:solidFill>
+                <a:effectLst/>
+                <a:latin typeface="+mj-lt"/>
+              </a:rPr>
+              <a:t> * </a:t>
+            </a:r>
+            <a:r>
+              <a:rPr kumimoji="0" lang="ru-RU" altLang="ru-RU" sz="2800" b="0" i="0" u="none" strike="noStrike" cap="none" normalizeH="0" baseline="0" dirty="0" err="1">
+                <a:ln>
+                  <a:noFill/>
+                </a:ln>
+                <a:solidFill>
+                  <a:schemeClr val="bg1"/>
+                </a:solidFill>
+                <a:effectLst/>
+                <a:latin typeface="+mj-lt"/>
+              </a:rPr>
+              <a:t>errors</a:t>
+            </a:r>
+            <a:r>
+              <a:rPr kumimoji="0" lang="ru-RU" altLang="ru-RU" sz="2800" b="0" i="0" u="none" strike="noStrike" cap="none" normalizeH="0" baseline="0" dirty="0">
+                <a:ln>
+                  <a:noFill/>
+                </a:ln>
+                <a:solidFill>
+                  <a:schemeClr val="bg1"/>
+                </a:solidFill>
+                <a:effectLst/>
+                <a:latin typeface="+mj-lt"/>
+              </a:rPr>
+              <a:t>[i] * </a:t>
+            </a:r>
+            <a:r>
+              <a:rPr kumimoji="0" lang="ru-RU" altLang="ru-RU" sz="2800" b="0" i="0" u="none" strike="noStrike" cap="none" normalizeH="0" baseline="0" dirty="0" err="1">
+                <a:ln>
+                  <a:noFill/>
+                </a:ln>
+                <a:solidFill>
+                  <a:schemeClr val="bg1"/>
+                </a:solidFill>
+                <a:effectLst/>
+                <a:latin typeface="+mj-lt"/>
+              </a:rPr>
+              <a:t>hidden</a:t>
+            </a:r>
+            <a:r>
+              <a:rPr kumimoji="0" lang="ru-RU" altLang="ru-RU" sz="2800" b="0" i="0" u="none" strike="noStrike" cap="none" normalizeH="0" baseline="0" dirty="0">
+                <a:ln>
+                  <a:noFill/>
+                </a:ln>
+                <a:solidFill>
+                  <a:schemeClr val="bg1"/>
+                </a:solidFill>
+                <a:effectLst/>
+                <a:latin typeface="+mj-lt"/>
+              </a:rPr>
+              <a:t>[j]</a:t>
+            </a:r>
+          </a:p>
+        </p:txBody>
+      </p:sp>
+    </p:spTree>
+    <p:extLst>
+      <p:ext uri="{BB962C8B-B14F-4D97-AF65-F5344CB8AC3E}">
+        <p14:creationId xmlns:p14="http://schemas.microsoft.com/office/powerpoint/2010/main" val="536770995"/>
+      </p:ext>
+    </p:extLst>
+  </p:cSld>
+  <p:clrMapOvr>
+    <a:masterClrMapping/>
+  </p:clrMapOvr>
+</p:sld>
+</file>
+
+<file path=ppt/slides/slide57.xml><?xml version="1.0" encoding="utf-8"?>
+<p:sld xmlns:a="http://schemas.openxmlformats.org/drawingml/2006/main" xmlns:r="http://schemas.openxmlformats.org/officeDocument/2006/relationships" xmlns:p="http://schemas.openxmlformats.org/presentationml/2006/main">
+  <p:cSld>
+    <p:spTree>
+      <p:nvGrpSpPr>
+        <p:cNvPr id="1" name=""/>
+        <p:cNvGrpSpPr/>
+        <p:nvPr/>
+      </p:nvGrpSpPr>
+      <p:grpSpPr>
+        <a:xfrm>
+          <a:off x="0" y="0"/>
+          <a:ext cx="0" cy="0"/>
+          <a:chOff x="0" y="0"/>
+          <a:chExt cx="0" cy="0"/>
+        </a:xfrm>
+      </p:grpSpPr>
+      <p:pic>
+        <p:nvPicPr>
+          <p:cNvPr id="4" name="Picture 3" descr="logo.png"/>
+          <p:cNvPicPr>
+            <a:picLocks noChangeAspect="1"/>
+          </p:cNvPicPr>
+          <p:nvPr/>
+        </p:nvPicPr>
+        <p:blipFill>
+          <a:blip r:embed="rId2"/>
+          <a:stretch>
+            <a:fillRect/>
+          </a:stretch>
+        </p:blipFill>
+        <p:spPr>
+          <a:xfrm>
+            <a:off x="12344400" y="274320"/>
+            <a:ext cx="1097280" cy="1080473"/>
+          </a:xfrm>
+          <a:prstGeom prst="rect">
+            <a:avLst/>
+          </a:prstGeom>
+        </p:spPr>
+      </p:pic>
+      <p:sp>
+        <p:nvSpPr>
+          <p:cNvPr id="5" name="Rectangle 4"/>
+          <p:cNvSpPr/>
+          <p:nvPr/>
+        </p:nvSpPr>
+        <p:spPr>
+          <a:xfrm>
+            <a:off x="0" y="7772400"/>
+            <a:ext cx="14630400" cy="457200"/>
+          </a:xfrm>
+          <a:prstGeom prst="rect">
+            <a:avLst/>
+          </a:prstGeom>
+          <a:solidFill>
+            <a:srgbClr val="640064"/>
+          </a:solidFill>
+          <a:ln>
+            <a:noFill/>
+          </a:ln>
+        </p:spPr>
+        <p:style>
+          <a:lnRef idx="1">
+            <a:schemeClr val="accent1"/>
+          </a:lnRef>
+          <a:fillRef idx="3">
+            <a:schemeClr val="accent1"/>
+          </a:fillRef>
+          <a:effectRef idx="2">
+            <a:schemeClr val="accent1"/>
+          </a:effectRef>
+          <a:fontRef idx="minor">
+            <a:schemeClr val="lt1"/>
+          </a:fontRef>
+        </p:style>
+        <p:txBody>
+          <a:bodyPr rtlCol="0" anchor="ctr"/>
+          <a:lstStyle/>
+          <a:p>
+            <a:pPr algn="ctr"/>
+            <a:endParaRPr>
+              <a:solidFill>
+                <a:schemeClr val="tx1"/>
+              </a:solidFill>
+            </a:endParaRPr>
+          </a:p>
+        </p:txBody>
+      </p:sp>
+      <p:sp>
+        <p:nvSpPr>
+          <p:cNvPr id="7" name="TextBox 6">
+            <a:extLst>
+              <a:ext uri="{FF2B5EF4-FFF2-40B4-BE49-F238E27FC236}">
+                <a16:creationId xmlns:a16="http://schemas.microsoft.com/office/drawing/2014/main" id="{EA77F26D-0F9B-DFF5-2FB4-9E508F48AFC7}"/>
+              </a:ext>
+            </a:extLst>
+          </p:cNvPr>
+          <p:cNvSpPr txBox="1"/>
+          <p:nvPr/>
+        </p:nvSpPr>
+        <p:spPr>
+          <a:xfrm>
+            <a:off x="705491" y="330403"/>
+            <a:ext cx="11408419" cy="769441"/>
+          </a:xfrm>
+          <a:prstGeom prst="rect">
+            <a:avLst/>
+          </a:prstGeom>
+          <a:noFill/>
+        </p:spPr>
+        <p:txBody>
+          <a:bodyPr wrap="square">
+            <a:spAutoFit/>
+          </a:bodyPr>
+          <a:lstStyle/>
+          <a:p>
+            <a:r>
+              <a:rPr lang="ru-RU" sz="4400" b="1" dirty="0"/>
+              <a:t>Скрытый слой</a:t>
+            </a:r>
+          </a:p>
+        </p:txBody>
+      </p:sp>
+      <p:sp>
+        <p:nvSpPr>
+          <p:cNvPr id="2" name="Rectangle 1">
+            <a:extLst>
+              <a:ext uri="{FF2B5EF4-FFF2-40B4-BE49-F238E27FC236}">
+                <a16:creationId xmlns:a16="http://schemas.microsoft.com/office/drawing/2014/main" id="{A7CB8B6A-C238-71DC-D309-73921177E9CA}"/>
+              </a:ext>
+            </a:extLst>
+          </p:cNvPr>
+          <p:cNvSpPr>
+            <a:spLocks noChangeArrowheads="1"/>
+          </p:cNvSpPr>
+          <p:nvPr/>
+        </p:nvSpPr>
+        <p:spPr bwMode="auto">
+          <a:xfrm>
+            <a:off x="470047" y="1193763"/>
+            <a:ext cx="12068569" cy="5355312"/>
+          </a:xfrm>
+          <a:prstGeom prst="rect">
+            <a:avLst/>
+          </a:prstGeom>
+          <a:noFill/>
+          <a:ln>
+            <a:noFill/>
+          </a:ln>
+          <a:effectLst/>
+          <a:extLst>
+            <a:ext uri="{909E8E84-426E-40DD-AFC4-6F175D3DCCD1}">
+              <a14:hiddenFill xmlns:a14="http://schemas.microsoft.com/office/drawing/2010/main">
+                <a:solidFill>
+                  <a:schemeClr val="accent1"/>
+                </a:solidFill>
+              </a14:hiddenFill>
+            </a:ext>
+            <a:ext uri="{91240B29-F687-4F45-9708-019B960494DF}">
+              <a14:hiddenLine xmlns:a14="http://schemas.microsoft.com/office/drawing/2010/main" w="9525">
+                <a:solidFill>
+                  <a:schemeClr val="tx1"/>
+                </a:solidFill>
+                <a:miter lim="800000"/>
+                <a:headEnd/>
+                <a:tailEnd/>
+              </a14:hiddenLine>
+            </a:ext>
+            <a:ext uri="{AF507438-7753-43E0-B8FC-AC1667EBCBE1}">
+              <a14:hiddenEffects xmlns:a14="http://schemas.microsoft.com/office/drawing/2010/main">
+                <a:effectLst>
+                  <a:outerShdw dist="35921" dir="2700000" algn="ctr" rotWithShape="0">
+                    <a:schemeClr val="bg2"/>
+                  </a:outerShdw>
+                </a:effectLst>
+              </a14:hiddenEffects>
+            </a:ext>
+          </a:extLst>
+        </p:spPr>
+        <p:txBody>
+          <a:bodyPr vert="horz" wrap="square" lIns="91440" tIns="45720" rIns="91440" bIns="45720" numCol="1" anchor="ctr" anchorCtr="0" compatLnSpc="1">
+            <a:prstTxWarp prst="textNoShape">
+              <a:avLst/>
+            </a:prstTxWarp>
+            <a:spAutoFit/>
+          </a:bodyPr>
+          <a:lstStyle/>
+          <a:p>
+            <a:pPr marL="0" marR="0" lvl="0" indent="0" algn="just" defTabSz="914400" rtl="0" eaLnBrk="0" fontAlgn="base" latinLnBrk="0" hangingPunct="0">
+              <a:lnSpc>
+                <a:spcPct val="100000"/>
+              </a:lnSpc>
+              <a:spcBef>
+                <a:spcPct val="0"/>
+              </a:spcBef>
+              <a:spcAft>
+                <a:spcPct val="0"/>
+              </a:spcAft>
+              <a:buClrTx/>
+              <a:buSzTx/>
+              <a:buFontTx/>
+              <a:buNone/>
+              <a:tabLst/>
+            </a:pPr>
+            <a:endParaRPr kumimoji="0" lang="ru-RU" altLang="ru-RU" i="0" u="none" strike="noStrike" cap="none" normalizeH="0" baseline="0" dirty="0">
+              <a:ln>
+                <a:noFill/>
+              </a:ln>
+              <a:solidFill>
+                <a:schemeClr val="tx1"/>
+              </a:solidFill>
+              <a:effectLst/>
+              <a:latin typeface="+mj-lt"/>
+            </a:endParaRPr>
+          </a:p>
+          <a:p>
+            <a:pPr marL="0" marR="0" lvl="0" indent="0" algn="just" defTabSz="914400" rtl="0" eaLnBrk="0" fontAlgn="base" latinLnBrk="0" hangingPunct="0">
+              <a:lnSpc>
+                <a:spcPct val="100000"/>
+              </a:lnSpc>
+              <a:spcBef>
+                <a:spcPct val="0"/>
+              </a:spcBef>
+              <a:spcAft>
+                <a:spcPct val="0"/>
+              </a:spcAft>
+              <a:buClrTx/>
+              <a:buSzTx/>
+              <a:buFontTx/>
+              <a:buNone/>
+              <a:tabLst/>
+            </a:pPr>
+            <a:r>
+              <a:rPr kumimoji="0" lang="ru-RU" altLang="ru-RU" i="0" u="none" strike="noStrike" cap="none" normalizeH="0" baseline="0" dirty="0">
+                <a:ln>
+                  <a:noFill/>
+                </a:ln>
+                <a:solidFill>
+                  <a:schemeClr val="tx1"/>
+                </a:solidFill>
+                <a:effectLst/>
+                <a:latin typeface="+mj-lt"/>
+              </a:rPr>
+              <a:t>Представь, что мы учим робота отличать пиццу от не-пиццы. У робота есть три датчика на входе: круглая?, есть сыр?, есть тесто?</a:t>
+            </a:r>
+          </a:p>
+          <a:p>
+            <a:pPr marL="0" marR="0" lvl="0" indent="0" algn="just" defTabSz="914400" rtl="0" eaLnBrk="0" fontAlgn="base" latinLnBrk="0" hangingPunct="0">
+              <a:lnSpc>
+                <a:spcPct val="100000"/>
+              </a:lnSpc>
+              <a:spcBef>
+                <a:spcPct val="0"/>
+              </a:spcBef>
+              <a:spcAft>
+                <a:spcPct val="0"/>
+              </a:spcAft>
+              <a:buClrTx/>
+              <a:buSzTx/>
+              <a:buFontTx/>
+              <a:buNone/>
+              <a:tabLst/>
+            </a:pPr>
+            <a:endParaRPr kumimoji="0" lang="ru-RU" altLang="ru-RU" i="0" u="none" strike="noStrike" cap="none" normalizeH="0" baseline="0" dirty="0">
+              <a:ln>
+                <a:noFill/>
+              </a:ln>
+              <a:solidFill>
+                <a:schemeClr val="tx1"/>
+              </a:solidFill>
+              <a:effectLst/>
+              <a:latin typeface="+mj-lt"/>
+            </a:endParaRPr>
+          </a:p>
+          <a:p>
+            <a:pPr marL="0" marR="0" lvl="0" indent="0" algn="just" defTabSz="914400" rtl="0" eaLnBrk="0" fontAlgn="base" latinLnBrk="0" hangingPunct="0">
+              <a:lnSpc>
+                <a:spcPct val="100000"/>
+              </a:lnSpc>
+              <a:spcBef>
+                <a:spcPct val="0"/>
+              </a:spcBef>
+              <a:spcAft>
+                <a:spcPct val="0"/>
+              </a:spcAft>
+              <a:buClrTx/>
+              <a:buSzTx/>
+              <a:buFontTx/>
+              <a:buNone/>
+              <a:tabLst/>
+            </a:pPr>
+            <a:r>
+              <a:rPr kumimoji="0" lang="ru-RU" altLang="ru-RU" i="0" u="none" strike="noStrike" cap="none" normalizeH="0" baseline="0" dirty="0">
+                <a:ln>
+                  <a:noFill/>
+                </a:ln>
+                <a:solidFill>
+                  <a:schemeClr val="tx1"/>
+                </a:solidFill>
+                <a:effectLst/>
+                <a:latin typeface="+mj-lt"/>
+              </a:rPr>
+              <a:t>Без скрытого слоя робот смотрит прямо на ответ: берёт три числа и сразу решает — пицца или нет. Это работает для простых правил.</a:t>
+            </a:r>
+          </a:p>
+          <a:p>
+            <a:pPr marL="0" marR="0" lvl="0" indent="0" algn="just" defTabSz="914400" rtl="0" eaLnBrk="0" fontAlgn="base" latinLnBrk="0" hangingPunct="0">
+              <a:lnSpc>
+                <a:spcPct val="100000"/>
+              </a:lnSpc>
+              <a:spcBef>
+                <a:spcPct val="0"/>
+              </a:spcBef>
+              <a:spcAft>
+                <a:spcPct val="0"/>
+              </a:spcAft>
+              <a:buClrTx/>
+              <a:buSzTx/>
+              <a:buFontTx/>
+              <a:buNone/>
+              <a:tabLst/>
+            </a:pPr>
+            <a:endParaRPr kumimoji="0" lang="ru-RU" altLang="ru-RU" i="0" u="none" strike="noStrike" cap="none" normalizeH="0" baseline="0" dirty="0">
+              <a:ln>
+                <a:noFill/>
+              </a:ln>
+              <a:solidFill>
+                <a:schemeClr val="tx1"/>
+              </a:solidFill>
+              <a:effectLst/>
+              <a:latin typeface="+mj-lt"/>
+            </a:endParaRPr>
+          </a:p>
+          <a:p>
+            <a:pPr marL="0" marR="0" lvl="0" indent="0" algn="just" defTabSz="914400" rtl="0" eaLnBrk="0" fontAlgn="base" latinLnBrk="0" hangingPunct="0">
+              <a:lnSpc>
+                <a:spcPct val="100000"/>
+              </a:lnSpc>
+              <a:spcBef>
+                <a:spcPct val="0"/>
+              </a:spcBef>
+              <a:spcAft>
+                <a:spcPct val="0"/>
+              </a:spcAft>
+              <a:buClrTx/>
+              <a:buSzTx/>
+              <a:buFontTx/>
+              <a:buNone/>
+              <a:tabLst/>
+            </a:pPr>
+            <a:r>
+              <a:rPr kumimoji="0" lang="ru-RU" altLang="ru-RU" i="0" u="none" strike="noStrike" cap="none" normalizeH="0" baseline="0" dirty="0">
+                <a:ln>
+                  <a:noFill/>
+                </a:ln>
+                <a:solidFill>
+                  <a:schemeClr val="tx1"/>
+                </a:solidFill>
+                <a:effectLst/>
+                <a:latin typeface="+mj-lt"/>
+              </a:rPr>
+              <a:t>Но вот задача сложнее: "пицца — это круглое С сыром, ИЛИ прямоугольное С тестом". Это уже нельзя выразить одной формулой вида </a:t>
+            </a:r>
+          </a:p>
+          <a:p>
+            <a:pPr marL="0" marR="0" lvl="0" indent="0" algn="ctr" defTabSz="914400" rtl="0" eaLnBrk="0" fontAlgn="base" latinLnBrk="0" hangingPunct="0">
+              <a:lnSpc>
+                <a:spcPct val="100000"/>
+              </a:lnSpc>
+              <a:spcBef>
+                <a:spcPct val="0"/>
+              </a:spcBef>
+              <a:spcAft>
+                <a:spcPct val="0"/>
+              </a:spcAft>
+              <a:buClrTx/>
+              <a:buSzTx/>
+              <a:buFontTx/>
+              <a:buNone/>
+              <a:tabLst/>
+            </a:pPr>
+            <a:r>
+              <a:rPr kumimoji="0" lang="ru-RU" altLang="ru-RU" i="0" u="none" strike="noStrike" cap="none" normalizeH="0" baseline="0" dirty="0" err="1">
+                <a:ln>
+                  <a:noFill/>
+                </a:ln>
+                <a:solidFill>
+                  <a:schemeClr val="tx1"/>
+                </a:solidFill>
+                <a:effectLst/>
+                <a:latin typeface="+mj-lt"/>
+              </a:rPr>
+              <a:t>а×круглая</a:t>
+            </a:r>
+            <a:r>
+              <a:rPr kumimoji="0" lang="ru-RU" altLang="ru-RU" i="0" u="none" strike="noStrike" cap="none" normalizeH="0" baseline="0" dirty="0">
+                <a:ln>
+                  <a:noFill/>
+                </a:ln>
+                <a:solidFill>
+                  <a:schemeClr val="tx1"/>
+                </a:solidFill>
+                <a:effectLst/>
+                <a:latin typeface="+mj-lt"/>
+              </a:rPr>
+              <a:t> + </a:t>
+            </a:r>
+            <a:r>
+              <a:rPr kumimoji="0" lang="ru-RU" altLang="ru-RU" i="0" u="none" strike="noStrike" cap="none" normalizeH="0" baseline="0" dirty="0" err="1">
+                <a:ln>
+                  <a:noFill/>
+                </a:ln>
+                <a:solidFill>
+                  <a:schemeClr val="tx1"/>
+                </a:solidFill>
+                <a:effectLst/>
+                <a:latin typeface="+mj-lt"/>
+              </a:rPr>
+              <a:t>б×сыр</a:t>
+            </a:r>
+            <a:r>
+              <a:rPr kumimoji="0" lang="ru-RU" altLang="ru-RU" i="0" u="none" strike="noStrike" cap="none" normalizeH="0" baseline="0" dirty="0">
+                <a:ln>
+                  <a:noFill/>
+                </a:ln>
+                <a:solidFill>
+                  <a:schemeClr val="tx1"/>
+                </a:solidFill>
+                <a:effectLst/>
+                <a:latin typeface="+mj-lt"/>
+              </a:rPr>
+              <a:t> + </a:t>
+            </a:r>
+            <a:r>
+              <a:rPr kumimoji="0" lang="ru-RU" altLang="ru-RU" i="0" u="none" strike="noStrike" cap="none" normalizeH="0" baseline="0" dirty="0" err="1">
+                <a:ln>
+                  <a:noFill/>
+                </a:ln>
+                <a:solidFill>
+                  <a:schemeClr val="tx1"/>
+                </a:solidFill>
+                <a:effectLst/>
+                <a:latin typeface="+mj-lt"/>
+              </a:rPr>
+              <a:t>в×тесто</a:t>
+            </a:r>
+            <a:r>
+              <a:rPr kumimoji="0" lang="ru-RU" altLang="ru-RU" i="0" u="none" strike="noStrike" cap="none" normalizeH="0" baseline="0" dirty="0">
+                <a:ln>
+                  <a:noFill/>
+                </a:ln>
+                <a:solidFill>
+                  <a:schemeClr val="tx1"/>
+                </a:solidFill>
+                <a:effectLst/>
+                <a:latin typeface="+mj-lt"/>
+              </a:rPr>
+              <a:t>. </a:t>
+            </a:r>
+          </a:p>
+          <a:p>
+            <a:pPr marL="0" marR="0" lvl="0" indent="0" algn="just" defTabSz="914400" rtl="0" eaLnBrk="0" fontAlgn="base" latinLnBrk="0" hangingPunct="0">
+              <a:lnSpc>
+                <a:spcPct val="100000"/>
+              </a:lnSpc>
+              <a:spcBef>
+                <a:spcPct val="0"/>
+              </a:spcBef>
+              <a:spcAft>
+                <a:spcPct val="0"/>
+              </a:spcAft>
+              <a:buClrTx/>
+              <a:buSzTx/>
+              <a:buFontTx/>
+              <a:buNone/>
+              <a:tabLst/>
+            </a:pPr>
+            <a:endParaRPr lang="ru-RU" altLang="ru-RU" dirty="0">
+              <a:latin typeface="+mj-lt"/>
+            </a:endParaRPr>
+          </a:p>
+          <a:p>
+            <a:pPr marL="0" marR="0" lvl="0" indent="0" algn="just" defTabSz="914400" rtl="0" eaLnBrk="0" fontAlgn="base" latinLnBrk="0" hangingPunct="0">
+              <a:lnSpc>
+                <a:spcPct val="100000"/>
+              </a:lnSpc>
+              <a:spcBef>
+                <a:spcPct val="0"/>
+              </a:spcBef>
+              <a:spcAft>
+                <a:spcPct val="0"/>
+              </a:spcAft>
+              <a:buClrTx/>
+              <a:buSzTx/>
+              <a:buFontTx/>
+              <a:buNone/>
+              <a:tabLst/>
+            </a:pPr>
+            <a:r>
+              <a:rPr kumimoji="0" lang="ru-RU" altLang="ru-RU" i="0" u="none" strike="noStrike" cap="none" normalizeH="0" baseline="0" dirty="0">
+                <a:ln>
+                  <a:noFill/>
+                </a:ln>
+                <a:solidFill>
+                  <a:schemeClr val="tx1"/>
+                </a:solidFill>
+                <a:effectLst/>
+                <a:latin typeface="+mj-lt"/>
+              </a:rPr>
+              <a:t>Слишком сложно для прямой линии.</a:t>
+            </a:r>
+          </a:p>
+          <a:p>
+            <a:pPr marL="0" marR="0" lvl="0" indent="0" algn="just" defTabSz="914400" rtl="0" eaLnBrk="0" fontAlgn="base" latinLnBrk="0" hangingPunct="0">
+              <a:lnSpc>
+                <a:spcPct val="100000"/>
+              </a:lnSpc>
+              <a:spcBef>
+                <a:spcPct val="0"/>
+              </a:spcBef>
+              <a:spcAft>
+                <a:spcPct val="0"/>
+              </a:spcAft>
+              <a:buClrTx/>
+              <a:buSzTx/>
+              <a:buFontTx/>
+              <a:buNone/>
+              <a:tabLst/>
+            </a:pPr>
+            <a:endParaRPr kumimoji="0" lang="ru-RU" altLang="ru-RU" i="0" u="none" strike="noStrike" cap="none" normalizeH="0" baseline="0" dirty="0">
+              <a:ln>
+                <a:noFill/>
+              </a:ln>
+              <a:solidFill>
+                <a:schemeClr val="tx1"/>
+              </a:solidFill>
+              <a:effectLst/>
+              <a:latin typeface="+mj-lt"/>
+            </a:endParaRPr>
+          </a:p>
+          <a:p>
+            <a:pPr marL="0" marR="0" lvl="0" indent="0" algn="just" defTabSz="914400" rtl="0" eaLnBrk="0" fontAlgn="base" latinLnBrk="0" hangingPunct="0">
+              <a:lnSpc>
+                <a:spcPct val="100000"/>
+              </a:lnSpc>
+              <a:spcBef>
+                <a:spcPct val="0"/>
+              </a:spcBef>
+              <a:spcAft>
+                <a:spcPct val="0"/>
+              </a:spcAft>
+              <a:buClrTx/>
+              <a:buSzTx/>
+              <a:buFontTx/>
+              <a:buNone/>
+              <a:tabLst/>
+            </a:pPr>
+            <a:r>
+              <a:rPr kumimoji="0" lang="ru-RU" altLang="ru-RU" i="0" u="none" strike="noStrike" cap="none" normalizeH="0" baseline="0" dirty="0">
+                <a:ln>
+                  <a:noFill/>
+                </a:ln>
+                <a:solidFill>
+                  <a:schemeClr val="tx1"/>
+                </a:solidFill>
+                <a:effectLst/>
+                <a:latin typeface="+mj-lt"/>
+              </a:rPr>
+              <a:t>Скрытый слой — это промежуточные понятия, которые сеть придумывает сама. Например:</a:t>
+            </a:r>
+          </a:p>
+          <a:p>
+            <a:pPr marL="0" marR="0" lvl="0" indent="0" algn="just" defTabSz="914400" rtl="0" eaLnBrk="0" fontAlgn="base" latinLnBrk="0" hangingPunct="0">
+              <a:lnSpc>
+                <a:spcPct val="100000"/>
+              </a:lnSpc>
+              <a:spcBef>
+                <a:spcPct val="0"/>
+              </a:spcBef>
+              <a:spcAft>
+                <a:spcPct val="0"/>
+              </a:spcAft>
+              <a:buClrTx/>
+              <a:buSzTx/>
+              <a:buFontTx/>
+              <a:buChar char="•"/>
+              <a:tabLst/>
+            </a:pPr>
+            <a:r>
+              <a:rPr kumimoji="0" lang="ru-RU" altLang="ru-RU" i="0" u="none" strike="noStrike" cap="none" normalizeH="0" baseline="0" dirty="0">
+                <a:ln>
+                  <a:noFill/>
+                </a:ln>
+                <a:solidFill>
+                  <a:schemeClr val="tx1"/>
+                </a:solidFill>
+                <a:effectLst/>
+                <a:latin typeface="+mj-lt"/>
+              </a:rPr>
+              <a:t> Нейрон 1 скрытого слоя выучивает понятие </a:t>
+            </a:r>
+            <a:r>
+              <a:rPr kumimoji="0" lang="ru-RU" altLang="ru-RU" i="1" u="none" strike="noStrike" cap="none" normalizeH="0" baseline="0" dirty="0">
+                <a:ln>
+                  <a:noFill/>
+                </a:ln>
+                <a:solidFill>
+                  <a:schemeClr val="tx1"/>
+                </a:solidFill>
+                <a:effectLst/>
+                <a:latin typeface="+mj-lt"/>
+              </a:rPr>
+              <a:t>"похоже на итальянское"</a:t>
+            </a:r>
+            <a:r>
+              <a:rPr kumimoji="0" lang="ru-RU" altLang="ru-RU" i="0" u="none" strike="noStrike" cap="none" normalizeH="0" baseline="0" dirty="0">
+                <a:ln>
+                  <a:noFill/>
+                </a:ln>
+                <a:solidFill>
+                  <a:schemeClr val="tx1"/>
+                </a:solidFill>
+                <a:effectLst/>
+                <a:latin typeface="+mj-lt"/>
+              </a:rPr>
+              <a:t> </a:t>
+            </a:r>
+          </a:p>
+          <a:p>
+            <a:pPr marL="0" marR="0" lvl="0" indent="0" algn="just" defTabSz="914400" rtl="0" eaLnBrk="0" fontAlgn="base" latinLnBrk="0" hangingPunct="0">
+              <a:lnSpc>
+                <a:spcPct val="100000"/>
+              </a:lnSpc>
+              <a:spcBef>
+                <a:spcPct val="0"/>
+              </a:spcBef>
+              <a:spcAft>
+                <a:spcPct val="0"/>
+              </a:spcAft>
+              <a:buClrTx/>
+              <a:buSzTx/>
+              <a:buFontTx/>
+              <a:buChar char="•"/>
+              <a:tabLst/>
+            </a:pPr>
+            <a:r>
+              <a:rPr kumimoji="0" lang="ru-RU" altLang="ru-RU" i="0" u="none" strike="noStrike" cap="none" normalizeH="0" baseline="0" dirty="0">
+                <a:ln>
+                  <a:noFill/>
+                </a:ln>
+                <a:solidFill>
+                  <a:schemeClr val="tx1"/>
+                </a:solidFill>
+                <a:effectLst/>
+                <a:latin typeface="+mj-lt"/>
+              </a:rPr>
+              <a:t> Нейрон 2 — </a:t>
+            </a:r>
+            <a:r>
+              <a:rPr kumimoji="0" lang="ru-RU" altLang="ru-RU" i="1" u="none" strike="noStrike" cap="none" normalizeH="0" baseline="0" dirty="0">
+                <a:ln>
+                  <a:noFill/>
+                </a:ln>
+                <a:solidFill>
+                  <a:schemeClr val="tx1"/>
+                </a:solidFill>
+                <a:effectLst/>
+                <a:latin typeface="+mj-lt"/>
+              </a:rPr>
+              <a:t>"есть хлебная основа"</a:t>
+            </a:r>
+            <a:r>
+              <a:rPr kumimoji="0" lang="ru-RU" altLang="ru-RU" i="0" u="none" strike="noStrike" cap="none" normalizeH="0" baseline="0" dirty="0">
+                <a:ln>
+                  <a:noFill/>
+                </a:ln>
+                <a:solidFill>
+                  <a:schemeClr val="tx1"/>
+                </a:solidFill>
+                <a:effectLst/>
+                <a:latin typeface="+mj-lt"/>
+              </a:rPr>
+              <a:t> </a:t>
+            </a:r>
+          </a:p>
+          <a:p>
+            <a:pPr marL="0" marR="0" lvl="0" indent="0" algn="just" defTabSz="914400" rtl="0" eaLnBrk="0" fontAlgn="base" latinLnBrk="0" hangingPunct="0">
+              <a:lnSpc>
+                <a:spcPct val="100000"/>
+              </a:lnSpc>
+              <a:spcBef>
+                <a:spcPct val="0"/>
+              </a:spcBef>
+              <a:spcAft>
+                <a:spcPct val="0"/>
+              </a:spcAft>
+              <a:buClrTx/>
+              <a:buSzTx/>
+              <a:buFontTx/>
+              <a:buChar char="•"/>
+              <a:tabLst/>
+            </a:pPr>
+            <a:r>
+              <a:rPr kumimoji="0" lang="ru-RU" altLang="ru-RU" i="0" u="none" strike="noStrike" cap="none" normalizeH="0" baseline="0" dirty="0">
+                <a:ln>
+                  <a:noFill/>
+                </a:ln>
+                <a:solidFill>
+                  <a:schemeClr val="tx1"/>
+                </a:solidFill>
+                <a:effectLst/>
+                <a:latin typeface="+mj-lt"/>
+              </a:rPr>
+              <a:t> Нейрон 3 — </a:t>
+            </a:r>
+            <a:r>
+              <a:rPr kumimoji="0" lang="ru-RU" altLang="ru-RU" i="1" u="none" strike="noStrike" cap="none" normalizeH="0" baseline="0" dirty="0">
+                <a:ln>
+                  <a:noFill/>
+                </a:ln>
+                <a:solidFill>
+                  <a:schemeClr val="tx1"/>
+                </a:solidFill>
+                <a:effectLst/>
+                <a:latin typeface="+mj-lt"/>
+              </a:rPr>
+              <a:t>"расплавленный </a:t>
+            </a:r>
+            <a:r>
+              <a:rPr kumimoji="0" lang="ru-RU" altLang="ru-RU" i="1" u="none" strike="noStrike" cap="none" normalizeH="0" baseline="0" dirty="0" err="1">
+                <a:ln>
+                  <a:noFill/>
+                </a:ln>
+                <a:solidFill>
+                  <a:schemeClr val="tx1"/>
+                </a:solidFill>
+                <a:effectLst/>
+                <a:latin typeface="+mj-lt"/>
+              </a:rPr>
+              <a:t>топпинг</a:t>
+            </a:r>
+            <a:r>
+              <a:rPr kumimoji="0" lang="ru-RU" altLang="ru-RU" i="1" u="none" strike="noStrike" cap="none" normalizeH="0" baseline="0" dirty="0">
+                <a:ln>
+                  <a:noFill/>
+                </a:ln>
+                <a:solidFill>
+                  <a:schemeClr val="tx1"/>
+                </a:solidFill>
+                <a:effectLst/>
+                <a:latin typeface="+mj-lt"/>
+              </a:rPr>
+              <a:t>"</a:t>
+            </a:r>
+            <a:r>
+              <a:rPr kumimoji="0" lang="ru-RU" altLang="ru-RU" i="0" u="none" strike="noStrike" cap="none" normalizeH="0" baseline="0" dirty="0">
+                <a:ln>
+                  <a:noFill/>
+                </a:ln>
+                <a:solidFill>
+                  <a:schemeClr val="tx1"/>
+                </a:solidFill>
+                <a:effectLst/>
+                <a:latin typeface="+mj-lt"/>
+              </a:rPr>
+              <a:t> </a:t>
+            </a:r>
+          </a:p>
+          <a:p>
+            <a:pPr marL="0" marR="0" lvl="0" indent="0" algn="just" defTabSz="914400" rtl="0" eaLnBrk="0" fontAlgn="base" latinLnBrk="0" hangingPunct="0">
+              <a:lnSpc>
+                <a:spcPct val="100000"/>
+              </a:lnSpc>
+              <a:spcBef>
+                <a:spcPct val="0"/>
+              </a:spcBef>
+              <a:spcAft>
+                <a:spcPct val="0"/>
+              </a:spcAft>
+              <a:buClrTx/>
+              <a:buSzTx/>
+              <a:buFontTx/>
+              <a:buNone/>
+              <a:tabLst/>
+            </a:pPr>
+            <a:r>
+              <a:rPr kumimoji="0" lang="ru-RU" altLang="ru-RU" i="0" u="none" strike="noStrike" cap="none" normalizeH="0" baseline="0" dirty="0">
+                <a:ln>
+                  <a:noFill/>
+                </a:ln>
+                <a:solidFill>
+                  <a:schemeClr val="tx1"/>
+                </a:solidFill>
+                <a:effectLst/>
+                <a:latin typeface="+mj-lt"/>
+              </a:rPr>
+              <a:t>Потом выходной слой смотрит уже не на сырые пиксели, а на эти высокоуровневые признаки — и решить становится легко.</a:t>
+            </a:r>
+          </a:p>
+        </p:txBody>
+      </p:sp>
+    </p:spTree>
+    <p:extLst>
+      <p:ext uri="{BB962C8B-B14F-4D97-AF65-F5344CB8AC3E}">
+        <p14:creationId xmlns:p14="http://schemas.microsoft.com/office/powerpoint/2010/main" val="696065321"/>
+      </p:ext>
+    </p:extLst>
+  </p:cSld>
+  <p:clrMapOvr>
+    <a:masterClrMapping/>
+  </p:clrMapOvr>
+</p:sld>
+</file>
+
+<file path=ppt/slides/slide58.xml><?xml version="1.0" encoding="utf-8"?>
+<p:sld xmlns:a="http://schemas.openxmlformats.org/drawingml/2006/main" xmlns:r="http://schemas.openxmlformats.org/officeDocument/2006/relationships" xmlns:p="http://schemas.openxmlformats.org/presentationml/2006/main">
+  <p:cSld>
+    <p:bg>
+      <p:bgPr>
+        <a:solidFill>
+          <a:srgbClr val="972996"/>
+        </a:solidFill>
+        <a:effectLst/>
+      </p:bgPr>
+    </p:bg>
+    <p:spTree>
+      <p:nvGrpSpPr>
+        <p:cNvPr id="1" name=""/>
+        <p:cNvGrpSpPr/>
+        <p:nvPr/>
+      </p:nvGrpSpPr>
+      <p:grpSpPr>
+        <a:xfrm>
+          <a:off x="0" y="0"/>
+          <a:ext cx="0" cy="0"/>
+          <a:chOff x="0" y="0"/>
+          <a:chExt cx="0" cy="0"/>
+        </a:xfrm>
+      </p:grpSpPr>
+      <p:pic>
+        <p:nvPicPr>
+          <p:cNvPr id="4" name="Picture 3" descr="logo.png"/>
+          <p:cNvPicPr>
+            <a:picLocks noChangeAspect="1"/>
+          </p:cNvPicPr>
+          <p:nvPr/>
+        </p:nvPicPr>
+        <p:blipFill>
+          <a:blip r:embed="rId2"/>
+          <a:stretch>
+            <a:fillRect/>
+          </a:stretch>
+        </p:blipFill>
+        <p:spPr>
+          <a:xfrm>
+            <a:off x="12344400" y="274320"/>
+            <a:ext cx="1097280" cy="1080473"/>
+          </a:xfrm>
+          <a:prstGeom prst="rect">
+            <a:avLst/>
+          </a:prstGeom>
+        </p:spPr>
+      </p:pic>
+      <p:sp>
+        <p:nvSpPr>
+          <p:cNvPr id="5" name="Rectangle 4"/>
+          <p:cNvSpPr/>
+          <p:nvPr/>
+        </p:nvSpPr>
+        <p:spPr>
+          <a:xfrm>
+            <a:off x="0" y="7772400"/>
+            <a:ext cx="14630400" cy="457200"/>
+          </a:xfrm>
+          <a:prstGeom prst="rect">
+            <a:avLst/>
+          </a:prstGeom>
+          <a:solidFill>
+            <a:srgbClr val="E6E6E6"/>
+          </a:solidFill>
+          <a:ln>
+            <a:noFill/>
+          </a:ln>
+        </p:spPr>
+        <p:style>
+          <a:lnRef idx="1">
+            <a:schemeClr val="accent1"/>
+          </a:lnRef>
+          <a:fillRef idx="3">
+            <a:schemeClr val="accent1"/>
+          </a:fillRef>
+          <a:effectRef idx="2">
+            <a:schemeClr val="accent1"/>
+          </a:effectRef>
+          <a:fontRef idx="minor">
+            <a:schemeClr val="lt1"/>
+          </a:fontRef>
+        </p:style>
+        <p:txBody>
+          <a:bodyPr rtlCol="0" anchor="ctr"/>
+          <a:lstStyle/>
+          <a:p>
+            <a:pPr algn="ctr"/>
+            <a:endParaRPr/>
+          </a:p>
+        </p:txBody>
+      </p:sp>
+      <p:sp>
+        <p:nvSpPr>
+          <p:cNvPr id="3" name="TextBox 2">
+            <a:extLst>
+              <a:ext uri="{FF2B5EF4-FFF2-40B4-BE49-F238E27FC236}">
+                <a16:creationId xmlns:a16="http://schemas.microsoft.com/office/drawing/2014/main" id="{C315D28A-F529-C361-6B0C-54FC6D10368B}"/>
+              </a:ext>
+            </a:extLst>
+          </p:cNvPr>
+          <p:cNvSpPr txBox="1"/>
+          <p:nvPr/>
+        </p:nvSpPr>
+        <p:spPr>
+          <a:xfrm>
+            <a:off x="625737" y="289929"/>
+            <a:ext cx="3575018" cy="769441"/>
+          </a:xfrm>
+          <a:prstGeom prst="rect">
+            <a:avLst/>
+          </a:prstGeom>
+          <a:noFill/>
+        </p:spPr>
+        <p:txBody>
+          <a:bodyPr wrap="none">
+            <a:spAutoFit/>
+          </a:bodyPr>
+          <a:lstStyle/>
+          <a:p>
+            <a:r>
+              <a:rPr lang="ru-RU" sz="4400" dirty="0">
+                <a:solidFill>
+                  <a:schemeClr val="bg1"/>
+                </a:solidFill>
+              </a:rPr>
+              <a:t>Скрытый слой</a:t>
+            </a:r>
+            <a:endParaRPr lang="ru-RU" sz="4400" b="1" dirty="0">
+              <a:solidFill>
+                <a:schemeClr val="bg1"/>
+              </a:solidFill>
+            </a:endParaRPr>
+          </a:p>
+        </p:txBody>
+      </p:sp>
+      <p:sp>
+        <p:nvSpPr>
+          <p:cNvPr id="8" name="Rectangle 3">
+            <a:extLst>
+              <a:ext uri="{FF2B5EF4-FFF2-40B4-BE49-F238E27FC236}">
+                <a16:creationId xmlns:a16="http://schemas.microsoft.com/office/drawing/2014/main" id="{60EAC65B-5542-8CF3-BA33-3620AD8DBB80}"/>
+              </a:ext>
+            </a:extLst>
+          </p:cNvPr>
+          <p:cNvSpPr>
+            <a:spLocks noChangeArrowheads="1"/>
+          </p:cNvSpPr>
+          <p:nvPr/>
+        </p:nvSpPr>
+        <p:spPr bwMode="auto">
+          <a:xfrm>
+            <a:off x="572067" y="1443945"/>
+            <a:ext cx="11462532" cy="4524315"/>
+          </a:xfrm>
+          <a:prstGeom prst="rect">
+            <a:avLst/>
+          </a:prstGeom>
+          <a:noFill/>
+          <a:ln>
+            <a:noFill/>
+          </a:ln>
+          <a:effectLst/>
+          <a:extLst>
+            <a:ext uri="{909E8E84-426E-40DD-AFC4-6F175D3DCCD1}">
+              <a14:hiddenFill xmlns:a14="http://schemas.microsoft.com/office/drawing/2010/main">
+                <a:solidFill>
+                  <a:schemeClr val="accent1"/>
+                </a:solidFill>
+              </a14:hiddenFill>
+            </a:ext>
+            <a:ext uri="{91240B29-F687-4F45-9708-019B960494DF}">
+              <a14:hiddenLine xmlns:a14="http://schemas.microsoft.com/office/drawing/2010/main" w="9525">
+                <a:solidFill>
+                  <a:schemeClr val="tx1"/>
+                </a:solidFill>
+                <a:miter lim="800000"/>
+                <a:headEnd/>
+                <a:tailEnd/>
+              </a14:hiddenLine>
+            </a:ext>
+            <a:ext uri="{AF507438-7753-43E0-B8FC-AC1667EBCBE1}">
+              <a14:hiddenEffects xmlns:a14="http://schemas.microsoft.com/office/drawing/2010/main">
+                <a:effectLst>
+                  <a:outerShdw dist="35921" dir="2700000" algn="ctr" rotWithShape="0">
+                    <a:schemeClr val="bg2"/>
+                  </a:outerShdw>
+                </a:effectLst>
+              </a14:hiddenEffects>
+            </a:ext>
+          </a:extLst>
+        </p:spPr>
+        <p:txBody>
+          <a:bodyPr vert="horz" wrap="square" lIns="91440" tIns="45720" rIns="91440" bIns="45720" numCol="1" anchor="ctr" anchorCtr="0" compatLnSpc="1">
+            <a:prstTxWarp prst="textNoShape">
+              <a:avLst/>
+            </a:prstTxWarp>
+            <a:spAutoFit/>
+          </a:bodyPr>
+          <a:lstStyle/>
+          <a:p>
+            <a:pPr marL="0" marR="0" lvl="0" indent="0" algn="just" defTabSz="914400" rtl="0" eaLnBrk="0" fontAlgn="base" latinLnBrk="0" hangingPunct="0">
+              <a:lnSpc>
+                <a:spcPct val="100000"/>
+              </a:lnSpc>
+              <a:spcBef>
+                <a:spcPct val="0"/>
+              </a:spcBef>
+              <a:spcAft>
+                <a:spcPct val="0"/>
+              </a:spcAft>
+              <a:buClrTx/>
+              <a:buSzTx/>
+              <a:buFontTx/>
+              <a:buNone/>
+              <a:tabLst/>
+            </a:pPr>
+            <a:r>
+              <a:rPr kumimoji="0" lang="ru-RU" altLang="ru-RU" i="0" u="none" strike="noStrike" cap="none" normalizeH="0" baseline="0" dirty="0">
+                <a:ln>
+                  <a:noFill/>
+                </a:ln>
+                <a:solidFill>
+                  <a:schemeClr val="bg1"/>
+                </a:solidFill>
+                <a:effectLst/>
+                <a:latin typeface="+mj-lt"/>
+              </a:rPr>
+              <a:t>Без скрытого слоя сеть делает только одно: берёт входы, умножает на веса и суммирует. Это всегда линейная функция:</a:t>
+            </a:r>
+          </a:p>
+          <a:p>
+            <a:pPr marL="0" marR="0" lvl="0" indent="0" algn="ctr" defTabSz="914400" rtl="0" eaLnBrk="0" fontAlgn="base" latinLnBrk="0" hangingPunct="0">
+              <a:lnSpc>
+                <a:spcPct val="100000"/>
+              </a:lnSpc>
+              <a:spcBef>
+                <a:spcPct val="0"/>
+              </a:spcBef>
+              <a:spcAft>
+                <a:spcPct val="0"/>
+              </a:spcAft>
+              <a:buClrTx/>
+              <a:buSzTx/>
+              <a:buFontTx/>
+              <a:buNone/>
+              <a:tabLst/>
+            </a:pPr>
+            <a:r>
+              <a:rPr kumimoji="0" lang="ru-RU" altLang="ru-RU" i="0" u="none" strike="noStrike" cap="none" normalizeH="0" baseline="0" dirty="0">
+                <a:ln>
+                  <a:noFill/>
+                </a:ln>
+                <a:solidFill>
+                  <a:schemeClr val="bg1"/>
+                </a:solidFill>
+                <a:effectLst/>
+                <a:latin typeface="+mj-lt"/>
+              </a:rPr>
+              <a:t>выход = w₁·x₁ + w₂·x₂ + ... + b</a:t>
+            </a:r>
+          </a:p>
+          <a:p>
+            <a:pPr marL="0" marR="0" lvl="0" indent="0" algn="just" defTabSz="914400" rtl="0" eaLnBrk="0" fontAlgn="base" latinLnBrk="0" hangingPunct="0">
+              <a:lnSpc>
+                <a:spcPct val="100000"/>
+              </a:lnSpc>
+              <a:spcBef>
+                <a:spcPct val="0"/>
+              </a:spcBef>
+              <a:spcAft>
+                <a:spcPct val="0"/>
+              </a:spcAft>
+              <a:buClrTx/>
+              <a:buSzTx/>
+              <a:buFontTx/>
+              <a:buNone/>
+              <a:tabLst/>
+            </a:pPr>
+            <a:r>
+              <a:rPr kumimoji="0" lang="ru-RU" altLang="ru-RU" i="0" u="none" strike="noStrike" cap="none" normalizeH="0" baseline="0" dirty="0">
+                <a:ln>
+                  <a:noFill/>
+                </a:ln>
+                <a:solidFill>
+                  <a:schemeClr val="bg1"/>
+                </a:solidFill>
+                <a:effectLst/>
+                <a:latin typeface="+mj-lt"/>
+              </a:rPr>
+              <a:t>Даже если поставить два таких слоя подряд — ничего не изменится. Два линейных действия = одно линейное действие. </a:t>
+            </a:r>
+          </a:p>
+          <a:p>
+            <a:pPr marL="0" marR="0" lvl="0" indent="0" algn="just" defTabSz="914400" rtl="0" eaLnBrk="0" fontAlgn="base" latinLnBrk="0" hangingPunct="0">
+              <a:lnSpc>
+                <a:spcPct val="100000"/>
+              </a:lnSpc>
+              <a:spcBef>
+                <a:spcPct val="0"/>
+              </a:spcBef>
+              <a:spcAft>
+                <a:spcPct val="0"/>
+              </a:spcAft>
+              <a:buClrTx/>
+              <a:buSzTx/>
+              <a:buFontTx/>
+              <a:buNone/>
+              <a:tabLst/>
+            </a:pPr>
+            <a:endParaRPr lang="ru-RU" altLang="ru-RU" dirty="0">
+              <a:solidFill>
+                <a:schemeClr val="bg1"/>
+              </a:solidFill>
+              <a:latin typeface="+mj-lt"/>
+            </a:endParaRPr>
+          </a:p>
+          <a:p>
+            <a:pPr marL="0" marR="0" lvl="0" indent="0" algn="just" defTabSz="914400" rtl="0" eaLnBrk="0" fontAlgn="base" latinLnBrk="0" hangingPunct="0">
+              <a:lnSpc>
+                <a:spcPct val="100000"/>
+              </a:lnSpc>
+              <a:spcBef>
+                <a:spcPct val="0"/>
+              </a:spcBef>
+              <a:spcAft>
+                <a:spcPct val="0"/>
+              </a:spcAft>
+              <a:buClrTx/>
+              <a:buSzTx/>
+              <a:buFontTx/>
+              <a:buNone/>
+              <a:tabLst/>
+            </a:pPr>
+            <a:r>
+              <a:rPr kumimoji="0" lang="ru-RU" altLang="ru-RU" i="0" u="none" strike="noStrike" cap="none" normalizeH="0" baseline="0" dirty="0">
+                <a:ln>
+                  <a:noFill/>
+                </a:ln>
+                <a:solidFill>
+                  <a:schemeClr val="bg1"/>
+                </a:solidFill>
+                <a:effectLst/>
+                <a:latin typeface="+mj-lt"/>
+              </a:rPr>
+              <a:t>Это просто другая прямая линия. Сколько слоёв ни добавляй — всё равно прямая.</a:t>
+            </a:r>
+          </a:p>
+          <a:p>
+            <a:pPr marL="0" marR="0" lvl="0" indent="0" algn="just" defTabSz="914400" rtl="0" eaLnBrk="0" fontAlgn="base" latinLnBrk="0" hangingPunct="0">
+              <a:lnSpc>
+                <a:spcPct val="100000"/>
+              </a:lnSpc>
+              <a:spcBef>
+                <a:spcPct val="0"/>
+              </a:spcBef>
+              <a:spcAft>
+                <a:spcPct val="0"/>
+              </a:spcAft>
+              <a:buClrTx/>
+              <a:buSzTx/>
+              <a:buFontTx/>
+              <a:buNone/>
+              <a:tabLst/>
+            </a:pPr>
+            <a:endParaRPr kumimoji="0" lang="ru-RU" altLang="ru-RU" i="0" u="none" strike="noStrike" cap="none" normalizeH="0" baseline="0" dirty="0">
+              <a:ln>
+                <a:noFill/>
+              </a:ln>
+              <a:solidFill>
+                <a:schemeClr val="bg1"/>
+              </a:solidFill>
+              <a:effectLst/>
+              <a:latin typeface="+mj-lt"/>
+            </a:endParaRPr>
+          </a:p>
+          <a:p>
+            <a:pPr marL="0" marR="0" lvl="0" indent="0" algn="just" defTabSz="914400" rtl="0" eaLnBrk="0" fontAlgn="base" latinLnBrk="0" hangingPunct="0">
+              <a:lnSpc>
+                <a:spcPct val="100000"/>
+              </a:lnSpc>
+              <a:spcBef>
+                <a:spcPct val="0"/>
+              </a:spcBef>
+              <a:spcAft>
+                <a:spcPct val="0"/>
+              </a:spcAft>
+              <a:buClrTx/>
+              <a:buSzTx/>
+              <a:buFontTx/>
+              <a:buNone/>
+              <a:tabLst/>
+            </a:pPr>
+            <a:r>
+              <a:rPr kumimoji="0" lang="ru-RU" altLang="ru-RU" i="0" u="none" strike="noStrike" cap="none" normalizeH="0" baseline="0" dirty="0">
+                <a:ln>
+                  <a:noFill/>
+                </a:ln>
+                <a:solidFill>
+                  <a:schemeClr val="bg1"/>
+                </a:solidFill>
+                <a:effectLst/>
+                <a:latin typeface="+mj-lt"/>
+              </a:rPr>
+              <a:t>Скрытый слой + </a:t>
+            </a:r>
+            <a:r>
+              <a:rPr kumimoji="0" lang="ru-RU" altLang="ru-RU" i="0" u="none" strike="noStrike" cap="none" normalizeH="0" baseline="0" dirty="0" err="1">
+                <a:ln>
+                  <a:noFill/>
+                </a:ln>
+                <a:solidFill>
+                  <a:schemeClr val="bg1"/>
+                </a:solidFill>
+                <a:effectLst/>
+                <a:latin typeface="+mj-lt"/>
+              </a:rPr>
+              <a:t>ReLU</a:t>
+            </a:r>
+            <a:r>
+              <a:rPr kumimoji="0" lang="ru-RU" altLang="ru-RU" i="0" u="none" strike="noStrike" cap="none" normalizeH="0" baseline="0" dirty="0">
+                <a:ln>
+                  <a:noFill/>
+                </a:ln>
+                <a:solidFill>
+                  <a:schemeClr val="bg1"/>
+                </a:solidFill>
+                <a:effectLst/>
+                <a:latin typeface="+mj-lt"/>
+              </a:rPr>
+              <a:t> ломает эту линейность. В коде:</a:t>
+            </a:r>
+          </a:p>
+          <a:p>
+            <a:pPr marL="0" marR="0" lvl="0" indent="0" algn="just" defTabSz="914400" rtl="0" eaLnBrk="0" fontAlgn="base" latinLnBrk="0" hangingPunct="0">
+              <a:lnSpc>
+                <a:spcPct val="100000"/>
+              </a:lnSpc>
+              <a:spcBef>
+                <a:spcPct val="0"/>
+              </a:spcBef>
+              <a:spcAft>
+                <a:spcPct val="0"/>
+              </a:spcAft>
+              <a:buClrTx/>
+              <a:buSzTx/>
+              <a:buFontTx/>
+              <a:buNone/>
+              <a:tabLst/>
+            </a:pPr>
+            <a:endParaRPr kumimoji="0" lang="ru-RU" altLang="ru-RU" i="0" u="none" strike="noStrike" cap="none" normalizeH="0" baseline="0" dirty="0">
+              <a:ln>
+                <a:noFill/>
+              </a:ln>
+              <a:solidFill>
+                <a:schemeClr val="bg1"/>
+              </a:solidFill>
+              <a:effectLst/>
+              <a:latin typeface="+mj-lt"/>
+            </a:endParaRPr>
+          </a:p>
+          <a:p>
+            <a:pPr marL="0" marR="0" lvl="0" indent="0" algn="just" defTabSz="914400" rtl="0" eaLnBrk="0" fontAlgn="base" latinLnBrk="0" hangingPunct="0">
+              <a:lnSpc>
+                <a:spcPct val="100000"/>
+              </a:lnSpc>
+              <a:spcBef>
+                <a:spcPct val="0"/>
+              </a:spcBef>
+              <a:spcAft>
+                <a:spcPct val="0"/>
+              </a:spcAft>
+              <a:buClrTx/>
+              <a:buSzTx/>
+              <a:buFontTx/>
+              <a:buNone/>
+              <a:tabLst/>
+            </a:pPr>
+            <a:r>
+              <a:rPr kumimoji="0" lang="ru-RU" altLang="ru-RU" i="0" u="none" strike="noStrike" cap="none" normalizeH="0" baseline="0" dirty="0" err="1">
+                <a:ln>
+                  <a:noFill/>
+                </a:ln>
+                <a:solidFill>
+                  <a:schemeClr val="bg1"/>
+                </a:solidFill>
+                <a:effectLst/>
+                <a:latin typeface="+mj-lt"/>
+              </a:rPr>
+              <a:t>hidden</a:t>
+            </a:r>
+            <a:r>
+              <a:rPr kumimoji="0" lang="ru-RU" altLang="ru-RU" i="0" u="none" strike="noStrike" cap="none" normalizeH="0" baseline="0" dirty="0">
+                <a:ln>
+                  <a:noFill/>
+                </a:ln>
+                <a:solidFill>
+                  <a:schemeClr val="bg1"/>
+                </a:solidFill>
+                <a:effectLst/>
+                <a:latin typeface="+mj-lt"/>
+              </a:rPr>
+              <a:t> = </a:t>
+            </a:r>
+            <a:r>
+              <a:rPr kumimoji="0" lang="ru-RU" altLang="ru-RU" i="0" u="none" strike="noStrike" cap="none" normalizeH="0" baseline="0" dirty="0" err="1">
+                <a:ln>
+                  <a:noFill/>
+                </a:ln>
+                <a:solidFill>
+                  <a:schemeClr val="bg1"/>
+                </a:solidFill>
+                <a:effectLst/>
+                <a:latin typeface="+mj-lt"/>
+              </a:rPr>
+              <a:t>relu</a:t>
+            </a:r>
+            <a:r>
+              <a:rPr kumimoji="0" lang="ru-RU" altLang="ru-RU" i="0" u="none" strike="noStrike" cap="none" normalizeH="0" baseline="0" dirty="0">
+                <a:ln>
+                  <a:noFill/>
+                </a:ln>
+                <a:solidFill>
+                  <a:schemeClr val="bg1"/>
+                </a:solidFill>
+                <a:effectLst/>
+                <a:latin typeface="+mj-lt"/>
+              </a:rPr>
+              <a:t>(</a:t>
+            </a:r>
+            <a:r>
+              <a:rPr kumimoji="0" lang="ru-RU" altLang="ru-RU" i="0" u="none" strike="noStrike" cap="none" normalizeH="0" baseline="0" dirty="0" err="1">
+                <a:ln>
+                  <a:noFill/>
+                </a:ln>
+                <a:solidFill>
+                  <a:schemeClr val="bg1"/>
+                </a:solidFill>
+                <a:effectLst/>
+                <a:latin typeface="+mj-lt"/>
+              </a:rPr>
+              <a:t>layer</a:t>
+            </a:r>
+            <a:r>
+              <a:rPr kumimoji="0" lang="ru-RU" altLang="ru-RU" i="0" u="none" strike="noStrike" cap="none" normalizeH="0" baseline="0" dirty="0">
+                <a:ln>
+                  <a:noFill/>
+                </a:ln>
+                <a:solidFill>
+                  <a:schemeClr val="bg1"/>
+                </a:solidFill>
+                <a:effectLst/>
+                <a:latin typeface="+mj-lt"/>
+              </a:rPr>
+              <a:t>(x, w1, b1)) # ← вот здесь происходит "излом" </a:t>
+            </a:r>
+          </a:p>
+          <a:p>
+            <a:pPr marL="0" marR="0" lvl="0" indent="0" algn="just" defTabSz="914400" rtl="0" eaLnBrk="0" fontAlgn="base" latinLnBrk="0" hangingPunct="0">
+              <a:lnSpc>
+                <a:spcPct val="100000"/>
+              </a:lnSpc>
+              <a:spcBef>
+                <a:spcPct val="0"/>
+              </a:spcBef>
+              <a:spcAft>
+                <a:spcPct val="0"/>
+              </a:spcAft>
+              <a:buClrTx/>
+              <a:buSzTx/>
+              <a:buFontTx/>
+              <a:buNone/>
+              <a:tabLst/>
+            </a:pPr>
+            <a:r>
+              <a:rPr kumimoji="0" lang="ru-RU" altLang="ru-RU" i="0" u="none" strike="noStrike" cap="none" normalizeH="0" baseline="0" dirty="0" err="1">
+                <a:ln>
+                  <a:noFill/>
+                </a:ln>
+                <a:solidFill>
+                  <a:schemeClr val="bg1"/>
+                </a:solidFill>
+                <a:effectLst/>
+                <a:latin typeface="+mj-lt"/>
+              </a:rPr>
+              <a:t>output</a:t>
+            </a:r>
+            <a:r>
+              <a:rPr kumimoji="0" lang="ru-RU" altLang="ru-RU" i="0" u="none" strike="noStrike" cap="none" normalizeH="0" baseline="0" dirty="0">
+                <a:ln>
+                  <a:noFill/>
+                </a:ln>
+                <a:solidFill>
+                  <a:schemeClr val="bg1"/>
+                </a:solidFill>
+                <a:effectLst/>
+                <a:latin typeface="+mj-lt"/>
+              </a:rPr>
+              <a:t> = </a:t>
+            </a:r>
+            <a:r>
+              <a:rPr kumimoji="0" lang="ru-RU" altLang="ru-RU" i="0" u="none" strike="noStrike" cap="none" normalizeH="0" baseline="0" dirty="0" err="1">
+                <a:ln>
+                  <a:noFill/>
+                </a:ln>
+                <a:solidFill>
+                  <a:schemeClr val="bg1"/>
+                </a:solidFill>
+                <a:effectLst/>
+                <a:latin typeface="+mj-lt"/>
+              </a:rPr>
+              <a:t>layer</a:t>
+            </a:r>
+            <a:r>
+              <a:rPr kumimoji="0" lang="ru-RU" altLang="ru-RU" i="0" u="none" strike="noStrike" cap="none" normalizeH="0" baseline="0" dirty="0">
+                <a:ln>
+                  <a:noFill/>
+                </a:ln>
+                <a:solidFill>
+                  <a:schemeClr val="bg1"/>
+                </a:solidFill>
+                <a:effectLst/>
+                <a:latin typeface="+mj-lt"/>
+              </a:rPr>
+              <a:t>(</a:t>
+            </a:r>
+            <a:r>
+              <a:rPr kumimoji="0" lang="ru-RU" altLang="ru-RU" i="0" u="none" strike="noStrike" cap="none" normalizeH="0" baseline="0" dirty="0" err="1">
+                <a:ln>
+                  <a:noFill/>
+                </a:ln>
+                <a:solidFill>
+                  <a:schemeClr val="bg1"/>
+                </a:solidFill>
+                <a:effectLst/>
+                <a:latin typeface="+mj-lt"/>
+              </a:rPr>
+              <a:t>hidden</a:t>
+            </a:r>
+            <a:r>
+              <a:rPr kumimoji="0" lang="ru-RU" altLang="ru-RU" i="0" u="none" strike="noStrike" cap="none" normalizeH="0" baseline="0" dirty="0">
+                <a:ln>
+                  <a:noFill/>
+                </a:ln>
+                <a:solidFill>
+                  <a:schemeClr val="bg1"/>
+                </a:solidFill>
+                <a:effectLst/>
+                <a:latin typeface="+mj-lt"/>
+              </a:rPr>
+              <a:t>, w2, b2)</a:t>
+            </a:r>
+          </a:p>
+          <a:p>
+            <a:pPr marL="0" marR="0" lvl="0" indent="0" algn="just" defTabSz="914400" rtl="0" eaLnBrk="0" fontAlgn="base" latinLnBrk="0" hangingPunct="0">
+              <a:lnSpc>
+                <a:spcPct val="100000"/>
+              </a:lnSpc>
+              <a:spcBef>
+                <a:spcPct val="0"/>
+              </a:spcBef>
+              <a:spcAft>
+                <a:spcPct val="0"/>
+              </a:spcAft>
+              <a:buClrTx/>
+              <a:buSzTx/>
+              <a:buFontTx/>
+              <a:buNone/>
+              <a:tabLst/>
+            </a:pPr>
+            <a:endParaRPr lang="ru-RU" altLang="ru-RU" dirty="0">
+              <a:solidFill>
+                <a:schemeClr val="bg1"/>
+              </a:solidFill>
+              <a:latin typeface="+mj-lt"/>
+            </a:endParaRPr>
+          </a:p>
+          <a:p>
+            <a:pPr marL="0" marR="0" lvl="0" indent="0" algn="just" defTabSz="914400" rtl="0" eaLnBrk="0" fontAlgn="base" latinLnBrk="0" hangingPunct="0">
+              <a:lnSpc>
+                <a:spcPct val="100000"/>
+              </a:lnSpc>
+              <a:spcBef>
+                <a:spcPct val="0"/>
+              </a:spcBef>
+              <a:spcAft>
+                <a:spcPct val="0"/>
+              </a:spcAft>
+              <a:buClrTx/>
+              <a:buSzTx/>
+              <a:buFontTx/>
+              <a:buNone/>
+              <a:tabLst/>
+            </a:pPr>
+            <a:endParaRPr kumimoji="0" lang="ru-RU" altLang="ru-RU" i="0" u="none" strike="noStrike" cap="none" normalizeH="0" baseline="0" dirty="0">
+              <a:ln>
+                <a:noFill/>
+              </a:ln>
+              <a:solidFill>
+                <a:schemeClr val="bg1"/>
+              </a:solidFill>
+              <a:effectLst/>
+              <a:latin typeface="+mj-lt"/>
+            </a:endParaRPr>
+          </a:p>
+          <a:p>
+            <a:pPr marL="0" marR="0" lvl="0" indent="0" algn="just" defTabSz="914400" rtl="0" eaLnBrk="0" fontAlgn="base" latinLnBrk="0" hangingPunct="0">
+              <a:lnSpc>
+                <a:spcPct val="100000"/>
+              </a:lnSpc>
+              <a:spcBef>
+                <a:spcPct val="0"/>
+              </a:spcBef>
+              <a:spcAft>
+                <a:spcPct val="0"/>
+              </a:spcAft>
+              <a:buClrTx/>
+              <a:buSzTx/>
+              <a:buFontTx/>
+              <a:buNone/>
+              <a:tabLst/>
+            </a:pPr>
+            <a:r>
+              <a:rPr kumimoji="0" lang="ru-RU" altLang="ru-RU" i="0" u="none" strike="noStrike" cap="none" normalizeH="0" baseline="0" dirty="0" err="1">
+                <a:ln>
+                  <a:noFill/>
+                </a:ln>
+                <a:solidFill>
+                  <a:schemeClr val="bg1"/>
+                </a:solidFill>
+                <a:effectLst/>
+                <a:latin typeface="+mj-lt"/>
+              </a:rPr>
+              <a:t>ReLU</a:t>
+            </a:r>
+            <a:r>
+              <a:rPr kumimoji="0" lang="ru-RU" altLang="ru-RU" i="0" u="none" strike="noStrike" cap="none" normalizeH="0" baseline="0" dirty="0">
+                <a:ln>
+                  <a:noFill/>
+                </a:ln>
+                <a:solidFill>
+                  <a:schemeClr val="bg1"/>
+                </a:solidFill>
+                <a:effectLst/>
+                <a:latin typeface="+mj-lt"/>
+              </a:rPr>
+              <a:t> отрезает отрицательные значения — и граница решения перестаёт быть прямой. Теперь сеть может "сгибать" пространство, создавая произвольно сложные границы между классами.</a:t>
+            </a:r>
+          </a:p>
+        </p:txBody>
+      </p:sp>
+    </p:spTree>
+    <p:extLst>
+      <p:ext uri="{BB962C8B-B14F-4D97-AF65-F5344CB8AC3E}">
+        <p14:creationId xmlns:p14="http://schemas.microsoft.com/office/powerpoint/2010/main" val="3328765793"/>
+      </p:ext>
+    </p:extLst>
+  </p:cSld>
+  <p:clrMapOvr>
+    <a:masterClrMapping/>
+  </p:clrMapOvr>
+</p:sld>
+</file>
+
+<file path=ppt/slides/slide59.xml><?xml version="1.0" encoding="utf-8"?>
+<p:sld xmlns:a="http://schemas.openxmlformats.org/drawingml/2006/main" xmlns:r="http://schemas.openxmlformats.org/officeDocument/2006/relationships" xmlns:p="http://schemas.openxmlformats.org/presentationml/2006/main">
+  <p:cSld>
+    <p:spTree>
+      <p:nvGrpSpPr>
+        <p:cNvPr id="1" name=""/>
+        <p:cNvGrpSpPr/>
+        <p:nvPr/>
+      </p:nvGrpSpPr>
+      <p:grpSpPr>
+        <a:xfrm>
+          <a:off x="0" y="0"/>
+          <a:ext cx="0" cy="0"/>
+          <a:chOff x="0" y="0"/>
+          <a:chExt cx="0" cy="0"/>
+        </a:xfrm>
+      </p:grpSpPr>
+      <p:pic>
+        <p:nvPicPr>
+          <p:cNvPr id="4" name="Picture 3" descr="logo.png"/>
+          <p:cNvPicPr>
+            <a:picLocks noChangeAspect="1"/>
+          </p:cNvPicPr>
+          <p:nvPr/>
+        </p:nvPicPr>
+        <p:blipFill>
+          <a:blip r:embed="rId2"/>
+          <a:stretch>
+            <a:fillRect/>
+          </a:stretch>
+        </p:blipFill>
+        <p:spPr>
+          <a:xfrm>
+            <a:off x="12344400" y="274320"/>
+            <a:ext cx="1097280" cy="1080473"/>
+          </a:xfrm>
+          <a:prstGeom prst="rect">
+            <a:avLst/>
+          </a:prstGeom>
+        </p:spPr>
+      </p:pic>
+      <p:sp>
+        <p:nvSpPr>
+          <p:cNvPr id="5" name="Rectangle 4"/>
+          <p:cNvSpPr/>
+          <p:nvPr/>
+        </p:nvSpPr>
+        <p:spPr>
+          <a:xfrm>
+            <a:off x="0" y="7772400"/>
+            <a:ext cx="14630400" cy="457200"/>
+          </a:xfrm>
+          <a:prstGeom prst="rect">
+            <a:avLst/>
+          </a:prstGeom>
+          <a:solidFill>
+            <a:srgbClr val="640064"/>
+          </a:solidFill>
+          <a:ln>
+            <a:noFill/>
+          </a:ln>
+        </p:spPr>
+        <p:style>
+          <a:lnRef idx="1">
+            <a:schemeClr val="accent1"/>
+          </a:lnRef>
+          <a:fillRef idx="3">
+            <a:schemeClr val="accent1"/>
+          </a:fillRef>
+          <a:effectRef idx="2">
+            <a:schemeClr val="accent1"/>
+          </a:effectRef>
+          <a:fontRef idx="minor">
+            <a:schemeClr val="lt1"/>
+          </a:fontRef>
+        </p:style>
+        <p:txBody>
+          <a:bodyPr rtlCol="0" anchor="ctr"/>
+          <a:lstStyle/>
+          <a:p>
+            <a:pPr algn="ctr"/>
+            <a:endParaRPr>
+              <a:solidFill>
+                <a:schemeClr val="tx1"/>
+              </a:solidFill>
+            </a:endParaRPr>
+          </a:p>
+        </p:txBody>
+      </p:sp>
+      <p:sp>
+        <p:nvSpPr>
+          <p:cNvPr id="7" name="TextBox 6">
+            <a:extLst>
+              <a:ext uri="{FF2B5EF4-FFF2-40B4-BE49-F238E27FC236}">
+                <a16:creationId xmlns:a16="http://schemas.microsoft.com/office/drawing/2014/main" id="{EA77F26D-0F9B-DFF5-2FB4-9E508F48AFC7}"/>
+              </a:ext>
+            </a:extLst>
+          </p:cNvPr>
+          <p:cNvSpPr txBox="1"/>
+          <p:nvPr/>
+        </p:nvSpPr>
+        <p:spPr>
+          <a:xfrm>
+            <a:off x="705491" y="330403"/>
+            <a:ext cx="11408419" cy="769441"/>
+          </a:xfrm>
+          <a:prstGeom prst="rect">
+            <a:avLst/>
+          </a:prstGeom>
+          <a:noFill/>
+        </p:spPr>
+        <p:txBody>
+          <a:bodyPr wrap="square">
+            <a:spAutoFit/>
+          </a:bodyPr>
+          <a:lstStyle/>
+          <a:p>
+            <a:r>
+              <a:rPr lang="ru-RU" sz="4400" b="1" dirty="0"/>
+              <a:t>Общий обзор</a:t>
+            </a:r>
+          </a:p>
+        </p:txBody>
+      </p:sp>
+      <p:sp>
+        <p:nvSpPr>
+          <p:cNvPr id="2" name="Rectangle 1">
+            <a:extLst>
+              <a:ext uri="{FF2B5EF4-FFF2-40B4-BE49-F238E27FC236}">
+                <a16:creationId xmlns:a16="http://schemas.microsoft.com/office/drawing/2014/main" id="{A7CB8B6A-C238-71DC-D309-73921177E9CA}"/>
+              </a:ext>
+            </a:extLst>
+          </p:cNvPr>
+          <p:cNvSpPr>
+            <a:spLocks noChangeArrowheads="1"/>
+          </p:cNvSpPr>
+          <p:nvPr/>
+        </p:nvSpPr>
+        <p:spPr bwMode="auto">
+          <a:xfrm>
+            <a:off x="238048" y="1329466"/>
+            <a:ext cx="6487706" cy="5909310"/>
+          </a:xfrm>
+          <a:prstGeom prst="rect">
+            <a:avLst/>
+          </a:prstGeom>
+          <a:noFill/>
+          <a:ln>
+            <a:noFill/>
+          </a:ln>
+          <a:effectLst/>
+          <a:extLst>
+            <a:ext uri="{909E8E84-426E-40DD-AFC4-6F175D3DCCD1}">
+              <a14:hiddenFill xmlns:a14="http://schemas.microsoft.com/office/drawing/2010/main">
+                <a:solidFill>
+                  <a:schemeClr val="accent1"/>
+                </a:solidFill>
+              </a14:hiddenFill>
+            </a:ext>
+            <a:ext uri="{91240B29-F687-4F45-9708-019B960494DF}">
+              <a14:hiddenLine xmlns:a14="http://schemas.microsoft.com/office/drawing/2010/main" w="9525">
+                <a:solidFill>
+                  <a:schemeClr val="tx1"/>
+                </a:solidFill>
+                <a:miter lim="800000"/>
+                <a:headEnd/>
+                <a:tailEnd/>
+              </a14:hiddenLine>
+            </a:ext>
+            <a:ext uri="{AF507438-7753-43E0-B8FC-AC1667EBCBE1}">
+              <a14:hiddenEffects xmlns:a14="http://schemas.microsoft.com/office/drawing/2010/main">
+                <a:effectLst>
+                  <a:outerShdw dist="35921" dir="2700000" algn="ctr" rotWithShape="0">
+                    <a:schemeClr val="bg2"/>
+                  </a:outerShdw>
+                </a:effectLst>
+              </a14:hiddenEffects>
+            </a:ext>
+          </a:extLst>
+        </p:spPr>
+        <p:txBody>
+          <a:bodyPr vert="horz" wrap="square" lIns="91440" tIns="45720" rIns="91440" bIns="45720" numCol="1" anchor="ctr" anchorCtr="0" compatLnSpc="1">
+            <a:prstTxWarp prst="textNoShape">
+              <a:avLst/>
+            </a:prstTxWarp>
+            <a:spAutoFit/>
+          </a:bodyPr>
+          <a:lstStyle/>
+          <a:p>
+            <a:r>
+              <a:rPr lang="ru-RU" dirty="0"/>
+              <a:t>Входной вектор: </a:t>
+            </a:r>
+            <a:r>
+              <a:rPr lang="en-US" b="1" dirty="0"/>
+              <a:t>x</a:t>
+            </a:r>
+            <a:r>
+              <a:rPr lang="en-US" dirty="0"/>
+              <a:t> ∈ ℝ¹⁵ (15 </a:t>
+            </a:r>
+            <a:r>
+              <a:rPr lang="ru-RU" dirty="0"/>
+              <a:t>пикселей цифры)</a:t>
+            </a:r>
+          </a:p>
+          <a:p>
+            <a:r>
+              <a:rPr lang="ru-RU" dirty="0"/>
+              <a:t>Матрица весов первого слоя: </a:t>
+            </a:r>
+            <a:r>
+              <a:rPr lang="en-US" b="1" dirty="0"/>
+              <a:t>W₁</a:t>
+            </a:r>
+            <a:r>
+              <a:rPr lang="en-US" dirty="0"/>
+              <a:t> ∈ ℝ²⁰ˣ¹⁵</a:t>
+            </a:r>
+          </a:p>
+          <a:p>
+            <a:r>
+              <a:rPr lang="ru-RU" dirty="0"/>
+              <a:t>Вектор смещений первого слоя: </a:t>
+            </a:r>
+            <a:r>
+              <a:rPr lang="en-US" b="1" dirty="0"/>
+              <a:t>b₁</a:t>
+            </a:r>
+            <a:r>
+              <a:rPr lang="en-US" dirty="0"/>
+              <a:t> ∈ ℝ²⁰</a:t>
+            </a:r>
+          </a:p>
+          <a:p>
+            <a:r>
+              <a:rPr lang="ru-RU" dirty="0"/>
+              <a:t>Матрица весов второго слоя: </a:t>
+            </a:r>
+            <a:r>
+              <a:rPr lang="en-US" b="1" dirty="0"/>
+              <a:t>W₂</a:t>
+            </a:r>
+            <a:r>
+              <a:rPr lang="en-US" dirty="0"/>
+              <a:t> ∈ ℝ¹⁰ˣ²⁰</a:t>
+            </a:r>
+          </a:p>
+          <a:p>
+            <a:r>
+              <a:rPr lang="ru-RU" dirty="0"/>
+              <a:t>Вектор смещений второго слоя: </a:t>
+            </a:r>
+            <a:r>
+              <a:rPr lang="en-US" b="1" dirty="0"/>
+              <a:t>b₂</a:t>
+            </a:r>
+            <a:r>
+              <a:rPr lang="en-US" dirty="0"/>
+              <a:t> ∈ ℝ¹⁰</a:t>
+            </a:r>
+            <a:endParaRPr lang="ru-RU" dirty="0"/>
+          </a:p>
+          <a:p>
+            <a:endParaRPr lang="ru-RU" dirty="0"/>
+          </a:p>
+          <a:p>
+            <a:endParaRPr lang="ru-RU" dirty="0"/>
+          </a:p>
+          <a:p>
+            <a:r>
+              <a:rPr lang="ru-RU" dirty="0"/>
+              <a:t>Прямой проход</a:t>
+            </a:r>
+          </a:p>
+          <a:p>
+            <a:r>
+              <a:rPr lang="ru-RU" dirty="0"/>
+              <a:t>Шаг 1 — скрытый слой:</a:t>
+            </a:r>
+          </a:p>
+          <a:p>
+            <a:r>
+              <a:rPr lang="ru-RU" dirty="0"/>
+              <a:t>	</a:t>
+            </a:r>
+            <a:r>
+              <a:rPr lang="en-US" dirty="0"/>
+              <a:t>z₁ = W₁·x + b₁        (z₁ ∈ ℝ²⁰)</a:t>
+            </a:r>
+          </a:p>
+          <a:p>
+            <a:r>
+              <a:rPr lang="ru-RU" dirty="0"/>
+              <a:t>	</a:t>
+            </a:r>
+            <a:r>
+              <a:rPr lang="en-US" dirty="0"/>
+              <a:t>h  = </a:t>
+            </a:r>
+            <a:r>
+              <a:rPr lang="en-US" dirty="0" err="1"/>
+              <a:t>ReLU</a:t>
+            </a:r>
+            <a:r>
+              <a:rPr lang="en-US" dirty="0"/>
+              <a:t>(z₁)          (h ∈ ℝ²⁰)</a:t>
+            </a:r>
+            <a:endParaRPr lang="ru-RU" dirty="0"/>
+          </a:p>
+          <a:p>
+            <a:r>
+              <a:rPr lang="ru-RU" dirty="0"/>
+              <a:t>где </a:t>
+            </a:r>
+            <a:r>
+              <a:rPr lang="ru-RU" dirty="0" err="1"/>
+              <a:t>ReLU</a:t>
+            </a:r>
+            <a:r>
+              <a:rPr lang="ru-RU" dirty="0"/>
+              <a:t> применяется поэлементно: </a:t>
+            </a:r>
+            <a:r>
+              <a:rPr lang="ru-RU" dirty="0" err="1"/>
+              <a:t>ReLU</a:t>
+            </a:r>
+            <a:r>
+              <a:rPr lang="ru-RU" dirty="0"/>
+              <a:t>(t) = </a:t>
+            </a:r>
+            <a:r>
+              <a:rPr lang="ru-RU" dirty="0" err="1"/>
+              <a:t>max</a:t>
+            </a:r>
+            <a:r>
+              <a:rPr lang="ru-RU" dirty="0"/>
+              <a:t>(0, t)</a:t>
+            </a:r>
+          </a:p>
+          <a:p>
+            <a:r>
+              <a:rPr lang="ru-RU" dirty="0"/>
+              <a:t>Шаг 2 — выходной слой:</a:t>
+            </a:r>
+          </a:p>
+          <a:p>
+            <a:r>
+              <a:rPr lang="ru-RU" dirty="0"/>
+              <a:t>	z₂ = W₂·h + b₂        (z₂ ∈ ℝ¹⁰)</a:t>
+            </a:r>
+          </a:p>
+          <a:p>
+            <a:r>
+              <a:rPr lang="ru-RU" dirty="0"/>
+              <a:t>Итого вся сеть — одна формула:</a:t>
+            </a:r>
+          </a:p>
+          <a:p>
+            <a:r>
+              <a:rPr lang="ru-RU" dirty="0"/>
+              <a:t>	f(x) = W₂ · </a:t>
+            </a:r>
+            <a:r>
+              <a:rPr lang="ru-RU" dirty="0" err="1"/>
+              <a:t>ReLU</a:t>
+            </a:r>
+            <a:r>
+              <a:rPr lang="ru-RU" dirty="0"/>
+              <a:t>(W₁·x + b₁) + b₂</a:t>
+            </a:r>
+          </a:p>
+          <a:p>
+            <a:endParaRPr lang="ru-RU" dirty="0"/>
+          </a:p>
+          <a:p>
+            <a:r>
+              <a:rPr lang="ru-RU" dirty="0"/>
+              <a:t>Функция потерь</a:t>
+            </a:r>
+          </a:p>
+          <a:p>
+            <a:r>
+              <a:rPr lang="ru-RU" dirty="0"/>
+              <a:t>Используется среднеквадратичная ошибка (MSE). Для одной цифры с номером d:</a:t>
+            </a:r>
+          </a:p>
+          <a:p>
+            <a:r>
+              <a:rPr lang="ru-RU" dirty="0"/>
+              <a:t>L = Σᵢ (f(x)ᵢ − yᵢ)²</a:t>
+            </a:r>
+            <a:endParaRPr lang="en-US" dirty="0"/>
+          </a:p>
+        </p:txBody>
+      </p:sp>
+      <p:sp>
+        <p:nvSpPr>
+          <p:cNvPr id="10" name="Rectangle 1">
+            <a:extLst>
+              <a:ext uri="{FF2B5EF4-FFF2-40B4-BE49-F238E27FC236}">
+                <a16:creationId xmlns:a16="http://schemas.microsoft.com/office/drawing/2014/main" id="{EA41EE42-F444-DA93-C399-C07CEF07B967}"/>
+              </a:ext>
+            </a:extLst>
+          </p:cNvPr>
+          <p:cNvSpPr>
+            <a:spLocks noChangeArrowheads="1"/>
+          </p:cNvSpPr>
+          <p:nvPr/>
+        </p:nvSpPr>
+        <p:spPr bwMode="auto">
+          <a:xfrm>
+            <a:off x="7232073" y="1467965"/>
+            <a:ext cx="6487706" cy="4524315"/>
+          </a:xfrm>
+          <a:prstGeom prst="rect">
+            <a:avLst/>
+          </a:prstGeom>
+          <a:noFill/>
+          <a:ln>
+            <a:noFill/>
+          </a:ln>
+          <a:effectLst/>
+          <a:extLst>
+            <a:ext uri="{909E8E84-426E-40DD-AFC4-6F175D3DCCD1}">
+              <a14:hiddenFill xmlns:a14="http://schemas.microsoft.com/office/drawing/2010/main">
+                <a:solidFill>
+                  <a:schemeClr val="accent1"/>
+                </a:solidFill>
+              </a14:hiddenFill>
+            </a:ext>
+            <a:ext uri="{91240B29-F687-4F45-9708-019B960494DF}">
+              <a14:hiddenLine xmlns:a14="http://schemas.microsoft.com/office/drawing/2010/main" w="9525">
+                <a:solidFill>
+                  <a:schemeClr val="tx1"/>
+                </a:solidFill>
+                <a:miter lim="800000"/>
+                <a:headEnd/>
+                <a:tailEnd/>
+              </a14:hiddenLine>
+            </a:ext>
+            <a:ext uri="{AF507438-7753-43E0-B8FC-AC1667EBCBE1}">
+              <a14:hiddenEffects xmlns:a14="http://schemas.microsoft.com/office/drawing/2010/main">
+                <a:effectLst>
+                  <a:outerShdw dist="35921" dir="2700000" algn="ctr" rotWithShape="0">
+                    <a:schemeClr val="bg2"/>
+                  </a:outerShdw>
+                </a:effectLst>
+              </a14:hiddenEffects>
+            </a:ext>
+          </a:extLst>
+        </p:spPr>
+        <p:txBody>
+          <a:bodyPr vert="horz" wrap="square" lIns="91440" tIns="45720" rIns="91440" bIns="45720" numCol="1" anchor="ctr" anchorCtr="0" compatLnSpc="1">
+            <a:prstTxWarp prst="textNoShape">
+              <a:avLst/>
+            </a:prstTxWarp>
+            <a:spAutoFit/>
+          </a:bodyPr>
+          <a:lstStyle/>
+          <a:p>
+            <a:r>
+              <a:rPr lang="ru-RU" dirty="0"/>
+              <a:t>Обучение — градиентный спуск</a:t>
+            </a:r>
+          </a:p>
+          <a:p>
+            <a:r>
+              <a:rPr lang="ru-RU" dirty="0"/>
+              <a:t>Ошибка выходного слоя (уже посчитана в коде как </a:t>
+            </a:r>
+            <a:r>
+              <a:rPr lang="en-US" dirty="0"/>
+              <a:t>errors):</a:t>
+            </a:r>
+          </a:p>
+          <a:p>
+            <a:r>
+              <a:rPr lang="ru-RU" dirty="0"/>
+              <a:t>	</a:t>
+            </a:r>
+            <a:r>
+              <a:rPr lang="el-GR" dirty="0"/>
+              <a:t>δ₂ = </a:t>
+            </a:r>
+            <a:r>
+              <a:rPr lang="en-US" dirty="0"/>
+              <a:t>f(x) − y        (</a:t>
+            </a:r>
+            <a:r>
+              <a:rPr lang="el-GR" dirty="0"/>
+              <a:t>δ₂ ∈ ℝ¹⁰)</a:t>
+            </a:r>
+          </a:p>
+          <a:p>
+            <a:r>
+              <a:rPr lang="ru-RU" dirty="0"/>
+              <a:t>Обновление </a:t>
+            </a:r>
+            <a:r>
+              <a:rPr lang="en-US" dirty="0"/>
+              <a:t>W₂ </a:t>
+            </a:r>
+            <a:r>
+              <a:rPr lang="ru-RU" dirty="0"/>
+              <a:t>и </a:t>
+            </a:r>
+            <a:r>
+              <a:rPr lang="en-US" dirty="0"/>
+              <a:t>b₂:</a:t>
+            </a:r>
+          </a:p>
+          <a:p>
+            <a:r>
+              <a:rPr lang="ru-RU" dirty="0"/>
+              <a:t>	</a:t>
+            </a:r>
+            <a:r>
+              <a:rPr lang="en-US" dirty="0"/>
+              <a:t>W₂ ← W₂ − </a:t>
+            </a:r>
+            <a:r>
+              <a:rPr lang="el-GR" dirty="0"/>
+              <a:t>α · δ₂ · </a:t>
+            </a:r>
+            <a:r>
+              <a:rPr lang="en-US" dirty="0"/>
+              <a:t>hᵀ</a:t>
+            </a:r>
+          </a:p>
+          <a:p>
+            <a:r>
+              <a:rPr lang="ru-RU" dirty="0"/>
+              <a:t>	</a:t>
+            </a:r>
+            <a:r>
+              <a:rPr lang="en-US" dirty="0"/>
+              <a:t>b₂ ← b₂ − </a:t>
+            </a:r>
+            <a:r>
+              <a:rPr lang="el-GR" dirty="0"/>
+              <a:t>α · δ₂</a:t>
+            </a:r>
+          </a:p>
+          <a:p>
+            <a:r>
+              <a:rPr lang="ru-RU" dirty="0"/>
+              <a:t>Ошибка скрытого слоя (обратное распространение через </a:t>
+            </a:r>
+            <a:r>
+              <a:rPr lang="en-US" dirty="0" err="1"/>
+              <a:t>ReLU</a:t>
+            </a:r>
+            <a:r>
+              <a:rPr lang="en-US" dirty="0"/>
+              <a:t>):</a:t>
+            </a:r>
+          </a:p>
+          <a:p>
+            <a:r>
+              <a:rPr lang="ru-RU" dirty="0"/>
+              <a:t>	</a:t>
+            </a:r>
+            <a:r>
+              <a:rPr lang="el-GR" dirty="0"/>
+              <a:t>δ₁ = (</a:t>
+            </a:r>
+            <a:r>
+              <a:rPr lang="en-US" dirty="0"/>
+              <a:t>W₂ᵀ · </a:t>
+            </a:r>
+            <a:r>
+              <a:rPr lang="el-GR" dirty="0"/>
+              <a:t>δ₂) ⊙ </a:t>
+            </a:r>
+            <a:r>
+              <a:rPr lang="en-US" dirty="0" err="1"/>
+              <a:t>ReLU</a:t>
+            </a:r>
+            <a:r>
+              <a:rPr lang="en-US" dirty="0"/>
+              <a:t>'(z₁)</a:t>
+            </a:r>
+          </a:p>
+          <a:p>
+            <a:endParaRPr lang="ru-RU" dirty="0"/>
+          </a:p>
+          <a:p>
+            <a:r>
+              <a:rPr lang="ru-RU" dirty="0"/>
+              <a:t>Производная </a:t>
+            </a:r>
+            <a:r>
+              <a:rPr lang="en-US" dirty="0" err="1"/>
+              <a:t>ReLU</a:t>
+            </a:r>
+            <a:r>
+              <a:rPr lang="en-US" dirty="0"/>
+              <a:t>:</a:t>
+            </a:r>
+          </a:p>
+          <a:p>
+            <a:r>
+              <a:rPr lang="en-US" dirty="0" err="1"/>
+              <a:t>ReLU</a:t>
+            </a:r>
+            <a:r>
+              <a:rPr lang="en-US" dirty="0"/>
+              <a:t>'(t) = 1, </a:t>
+            </a:r>
+            <a:r>
+              <a:rPr lang="ru-RU" dirty="0"/>
+              <a:t>если </a:t>
+            </a:r>
+            <a:r>
+              <a:rPr lang="en-US" dirty="0"/>
+              <a:t>t &gt; 0</a:t>
+            </a:r>
+          </a:p>
+          <a:p>
+            <a:r>
+              <a:rPr lang="en-US" dirty="0"/>
+              <a:t>           0, </a:t>
+            </a:r>
+            <a:r>
+              <a:rPr lang="ru-RU" dirty="0"/>
+              <a:t>если </a:t>
+            </a:r>
+            <a:r>
+              <a:rPr lang="en-US" dirty="0"/>
+              <a:t>t ≤ 0</a:t>
+            </a:r>
+          </a:p>
+          <a:p>
+            <a:r>
+              <a:rPr lang="ru-RU" dirty="0"/>
+              <a:t>Именно это в коде: </a:t>
+            </a:r>
+            <a:r>
+              <a:rPr lang="en-US" dirty="0"/>
+              <a:t>if hidden[j] == 0: </a:t>
+            </a:r>
+            <a:r>
+              <a:rPr lang="en-US" dirty="0" err="1"/>
+              <a:t>hidden_errors</a:t>
+            </a:r>
+            <a:r>
+              <a:rPr lang="en-US" dirty="0"/>
+              <a:t>[j] = 0</a:t>
+            </a:r>
+          </a:p>
+          <a:p>
+            <a:r>
+              <a:rPr lang="ru-RU" dirty="0"/>
+              <a:t>Обновление </a:t>
+            </a:r>
+            <a:r>
+              <a:rPr lang="en-US" dirty="0"/>
+              <a:t>W₁ </a:t>
+            </a:r>
+            <a:r>
+              <a:rPr lang="ru-RU" dirty="0"/>
+              <a:t>и </a:t>
+            </a:r>
+            <a:r>
+              <a:rPr lang="en-US" dirty="0"/>
+              <a:t>b₁:</a:t>
+            </a:r>
+          </a:p>
+          <a:p>
+            <a:r>
+              <a:rPr lang="en-US" dirty="0"/>
+              <a:t>W₁ ← W₁ − </a:t>
+            </a:r>
+            <a:r>
+              <a:rPr lang="el-GR" dirty="0"/>
+              <a:t>α · δ₁ · </a:t>
+            </a:r>
+            <a:r>
+              <a:rPr lang="en-US" dirty="0"/>
+              <a:t>xᵀ</a:t>
+            </a:r>
+          </a:p>
+          <a:p>
+            <a:r>
+              <a:rPr lang="en-US" dirty="0"/>
+              <a:t>b₁ ← b₁ − </a:t>
+            </a:r>
+            <a:r>
+              <a:rPr lang="el-GR" dirty="0"/>
+              <a:t>α · δ₁</a:t>
+            </a:r>
+            <a:endParaRPr lang="en-US" dirty="0"/>
+          </a:p>
+        </p:txBody>
+      </p:sp>
+      <p:sp>
+        <p:nvSpPr>
+          <p:cNvPr id="13" name="TextBox 12">
+            <a:extLst>
+              <a:ext uri="{FF2B5EF4-FFF2-40B4-BE49-F238E27FC236}">
+                <a16:creationId xmlns:a16="http://schemas.microsoft.com/office/drawing/2014/main" id="{8BCBC7DD-3A9B-FF1B-CE1F-6956D51D973C}"/>
+              </a:ext>
+            </a:extLst>
+          </p:cNvPr>
+          <p:cNvSpPr txBox="1"/>
+          <p:nvPr/>
+        </p:nvSpPr>
+        <p:spPr>
+          <a:xfrm>
+            <a:off x="7118717" y="6474814"/>
+            <a:ext cx="7360542" cy="1323439"/>
+          </a:xfrm>
+          <a:prstGeom prst="rect">
+            <a:avLst/>
+          </a:prstGeom>
+          <a:noFill/>
+        </p:spPr>
+        <p:txBody>
+          <a:bodyPr wrap="square">
+            <a:spAutoFit/>
+          </a:bodyPr>
+          <a:lstStyle/>
+          <a:p>
+            <a:r>
+              <a:rPr lang="ru-RU" sz="1600" i="1" dirty="0"/>
+              <a:t>Σ — знак алгебраической суммы. Он означает, что нужно сложить все числа от нижнего до верхнего, а перед этим сделать с ними то, что написано после знака Σ</a:t>
+            </a:r>
+          </a:p>
+          <a:p>
+            <a:r>
+              <a:rPr lang="el-GR" sz="1600" i="1" dirty="0"/>
+              <a:t>δ</a:t>
+            </a:r>
+            <a:r>
+              <a:rPr lang="ru-RU" sz="1600" i="1" dirty="0"/>
+              <a:t> – дельта. градиент ошибки в обратном распространении</a:t>
+            </a:r>
+          </a:p>
+          <a:p>
+            <a:r>
+              <a:rPr lang="ru-RU" sz="1600" dirty="0"/>
+              <a:t>⊙ — поэлементное умножение</a:t>
+            </a:r>
+            <a:endParaRPr lang="ru-RU" sz="1600" i="1" dirty="0"/>
+          </a:p>
+        </p:txBody>
+      </p:sp>
+    </p:spTree>
+    <p:extLst>
+      <p:ext uri="{BB962C8B-B14F-4D97-AF65-F5344CB8AC3E}">
+        <p14:creationId xmlns:p14="http://schemas.microsoft.com/office/powerpoint/2010/main" val="2785295111"/>
+      </p:ext>
+    </p:extLst>
+  </p:cSld>
+  <p:clrMapOvr>
+    <a:masterClrMapping/>
+  </p:clrMapOvr>
+</p:sld>
+</file>
+
 <file path=ppt/slides/slide6.xml><?xml version="1.0" encoding="utf-8"?>
 <p:sld xmlns:a="http://schemas.openxmlformats.org/drawingml/2006/main" xmlns:r="http://schemas.openxmlformats.org/officeDocument/2006/relationships" xmlns:p="http://schemas.openxmlformats.org/presentationml/2006/main">
   <p:cSld>
@@ -35814,6 +40338,312 @@
     <p:extLst>
       <p:ext uri="{BB962C8B-B14F-4D97-AF65-F5344CB8AC3E}">
         <p14:creationId xmlns:p14="http://schemas.microsoft.com/office/powerpoint/2010/main" val="1875830163"/>
+      </p:ext>
+    </p:extLst>
+  </p:cSld>
+  <p:clrMapOvr>
+    <a:masterClrMapping/>
+  </p:clrMapOvr>
+</p:sld>
+</file>
+
+<file path=ppt/slides/slide60.xml><?xml version="1.0" encoding="utf-8"?>
+<p:sld xmlns:a="http://schemas.openxmlformats.org/drawingml/2006/main" xmlns:r="http://schemas.openxmlformats.org/officeDocument/2006/relationships" xmlns:p="http://schemas.openxmlformats.org/presentationml/2006/main">
+  <p:cSld>
+    <p:bg>
+      <p:bgPr>
+        <a:solidFill>
+          <a:srgbClr val="972996"/>
+        </a:solidFill>
+        <a:effectLst/>
+      </p:bgPr>
+    </p:bg>
+    <p:spTree>
+      <p:nvGrpSpPr>
+        <p:cNvPr id="1" name=""/>
+        <p:cNvGrpSpPr/>
+        <p:nvPr/>
+      </p:nvGrpSpPr>
+      <p:grpSpPr>
+        <a:xfrm>
+          <a:off x="0" y="0"/>
+          <a:ext cx="0" cy="0"/>
+          <a:chOff x="0" y="0"/>
+          <a:chExt cx="0" cy="0"/>
+        </a:xfrm>
+      </p:grpSpPr>
+      <p:pic>
+        <p:nvPicPr>
+          <p:cNvPr id="4" name="Picture 3" descr="logo.png"/>
+          <p:cNvPicPr>
+            <a:picLocks noChangeAspect="1"/>
+          </p:cNvPicPr>
+          <p:nvPr/>
+        </p:nvPicPr>
+        <p:blipFill>
+          <a:blip r:embed="rId2"/>
+          <a:stretch>
+            <a:fillRect/>
+          </a:stretch>
+        </p:blipFill>
+        <p:spPr>
+          <a:xfrm>
+            <a:off x="12344400" y="274320"/>
+            <a:ext cx="1097280" cy="1080473"/>
+          </a:xfrm>
+          <a:prstGeom prst="rect">
+            <a:avLst/>
+          </a:prstGeom>
+        </p:spPr>
+      </p:pic>
+      <p:sp>
+        <p:nvSpPr>
+          <p:cNvPr id="5" name="Rectangle 4"/>
+          <p:cNvSpPr/>
+          <p:nvPr/>
+        </p:nvSpPr>
+        <p:spPr>
+          <a:xfrm>
+            <a:off x="0" y="7772400"/>
+            <a:ext cx="14630400" cy="457200"/>
+          </a:xfrm>
+          <a:prstGeom prst="rect">
+            <a:avLst/>
+          </a:prstGeom>
+          <a:solidFill>
+            <a:srgbClr val="E6E6E6"/>
+          </a:solidFill>
+          <a:ln>
+            <a:noFill/>
+          </a:ln>
+        </p:spPr>
+        <p:style>
+          <a:lnRef idx="1">
+            <a:schemeClr val="accent1"/>
+          </a:lnRef>
+          <a:fillRef idx="3">
+            <a:schemeClr val="accent1"/>
+          </a:fillRef>
+          <a:effectRef idx="2">
+            <a:schemeClr val="accent1"/>
+          </a:effectRef>
+          <a:fontRef idx="minor">
+            <a:schemeClr val="lt1"/>
+          </a:fontRef>
+        </p:style>
+        <p:txBody>
+          <a:bodyPr rtlCol="0" anchor="ctr"/>
+          <a:lstStyle/>
+          <a:p>
+            <a:pPr algn="ctr"/>
+            <a:endParaRPr/>
+          </a:p>
+        </p:txBody>
+      </p:sp>
+      <p:sp>
+        <p:nvSpPr>
+          <p:cNvPr id="3" name="TextBox 2">
+            <a:extLst>
+              <a:ext uri="{FF2B5EF4-FFF2-40B4-BE49-F238E27FC236}">
+                <a16:creationId xmlns:a16="http://schemas.microsoft.com/office/drawing/2014/main" id="{C315D28A-F529-C361-6B0C-54FC6D10368B}"/>
+              </a:ext>
+            </a:extLst>
+          </p:cNvPr>
+          <p:cNvSpPr txBox="1"/>
+          <p:nvPr/>
+        </p:nvSpPr>
+        <p:spPr>
+          <a:xfrm>
+            <a:off x="625737" y="289929"/>
+            <a:ext cx="2848472" cy="769441"/>
+          </a:xfrm>
+          <a:prstGeom prst="rect">
+            <a:avLst/>
+          </a:prstGeom>
+          <a:noFill/>
+        </p:spPr>
+        <p:txBody>
+          <a:bodyPr wrap="none">
+            <a:spAutoFit/>
+          </a:bodyPr>
+          <a:lstStyle/>
+          <a:p>
+            <a:r>
+              <a:rPr lang="ru-RU" sz="4400" b="1" dirty="0">
+                <a:solidFill>
+                  <a:schemeClr val="bg1"/>
+                </a:solidFill>
+              </a:rPr>
+              <a:t>Всё вместе</a:t>
+            </a:r>
+          </a:p>
+        </p:txBody>
+      </p:sp>
+      <p:sp>
+        <p:nvSpPr>
+          <p:cNvPr id="9" name="TextBox 8">
+            <a:extLst>
+              <a:ext uri="{FF2B5EF4-FFF2-40B4-BE49-F238E27FC236}">
+                <a16:creationId xmlns:a16="http://schemas.microsoft.com/office/drawing/2014/main" id="{B2D521DC-1CFB-D652-E601-12379A6F323B}"/>
+              </a:ext>
+            </a:extLst>
+          </p:cNvPr>
+          <p:cNvSpPr txBox="1"/>
+          <p:nvPr/>
+        </p:nvSpPr>
+        <p:spPr>
+          <a:xfrm>
+            <a:off x="1881699" y="1508520"/>
+            <a:ext cx="7360542" cy="4401205"/>
+          </a:xfrm>
+          <a:prstGeom prst="rect">
+            <a:avLst/>
+          </a:prstGeom>
+          <a:noFill/>
+        </p:spPr>
+        <p:txBody>
+          <a:bodyPr wrap="square">
+            <a:spAutoFit/>
+          </a:bodyPr>
+          <a:lstStyle/>
+          <a:p>
+            <a:r>
+              <a:rPr lang="ru-RU" sz="2800" dirty="0">
+                <a:solidFill>
+                  <a:schemeClr val="bg1"/>
+                </a:solidFill>
+              </a:rPr>
+              <a:t>для каждой эпохи:</a:t>
+            </a:r>
+          </a:p>
+          <a:p>
+            <a:r>
+              <a:rPr lang="ru-RU" sz="2800" dirty="0">
+                <a:solidFill>
+                  <a:schemeClr val="bg1"/>
+                </a:solidFill>
+              </a:rPr>
+              <a:t>    для каждой цифры d = 0..9:</a:t>
+            </a:r>
+          </a:p>
+          <a:p>
+            <a:r>
+              <a:rPr lang="ru-RU" sz="2800" dirty="0">
+                <a:solidFill>
+                  <a:schemeClr val="bg1"/>
+                </a:solidFill>
+              </a:rPr>
+              <a:t>        h  = </a:t>
+            </a:r>
+            <a:r>
+              <a:rPr lang="ru-RU" sz="2800" dirty="0" err="1">
+                <a:solidFill>
+                  <a:schemeClr val="bg1"/>
+                </a:solidFill>
+              </a:rPr>
+              <a:t>ReLU</a:t>
+            </a:r>
+            <a:r>
+              <a:rPr lang="ru-RU" sz="2800" dirty="0">
+                <a:solidFill>
+                  <a:schemeClr val="bg1"/>
+                </a:solidFill>
+              </a:rPr>
+              <a:t>(W₁·x + b₁)</a:t>
+            </a:r>
+          </a:p>
+          <a:p>
+            <a:r>
+              <a:rPr lang="ru-RU" sz="2800" dirty="0">
+                <a:solidFill>
+                  <a:schemeClr val="bg1"/>
+                </a:solidFill>
+              </a:rPr>
+              <a:t>        ŷ  = W₂·h + b₂</a:t>
+            </a:r>
+          </a:p>
+          <a:p>
+            <a:r>
+              <a:rPr lang="ru-RU" sz="2800" dirty="0">
+                <a:solidFill>
+                  <a:schemeClr val="bg1"/>
+                </a:solidFill>
+              </a:rPr>
+              <a:t>        δ₂ = ŷ − y</a:t>
+            </a:r>
+          </a:p>
+          <a:p>
+            <a:r>
+              <a:rPr lang="ru-RU" sz="2800" dirty="0">
+                <a:solidFill>
+                  <a:schemeClr val="bg1"/>
+                </a:solidFill>
+              </a:rPr>
+              <a:t>        δ₁ = (W₂ᵀ·δ₂) ⊙ </a:t>
+            </a:r>
+            <a:r>
+              <a:rPr lang="ru-RU" sz="2800" dirty="0" err="1">
+                <a:solidFill>
+                  <a:schemeClr val="bg1"/>
+                </a:solidFill>
+              </a:rPr>
+              <a:t>ReLU</a:t>
+            </a:r>
+            <a:r>
+              <a:rPr lang="ru-RU" sz="2800" dirty="0">
+                <a:solidFill>
+                  <a:schemeClr val="bg1"/>
+                </a:solidFill>
+              </a:rPr>
+              <a:t>'(W₁·x + b₁)</a:t>
+            </a:r>
+          </a:p>
+          <a:p>
+            <a:r>
+              <a:rPr lang="ru-RU" sz="2800" dirty="0">
+                <a:solidFill>
+                  <a:schemeClr val="bg1"/>
+                </a:solidFill>
+              </a:rPr>
+              <a:t>        W₂ ← W₂ − α·δ₂·hᵀ</a:t>
+            </a:r>
+          </a:p>
+          <a:p>
+            <a:r>
+              <a:rPr lang="ru-RU" sz="2800" dirty="0">
+                <a:solidFill>
+                  <a:schemeClr val="bg1"/>
+                </a:solidFill>
+              </a:rPr>
+              <a:t>        W₁ ← W₁ − α·δ₁·xᵀ</a:t>
+            </a:r>
+          </a:p>
+          <a:p>
+            <a:r>
+              <a:rPr lang="ru-RU" sz="2800" dirty="0">
+                <a:solidFill>
+                  <a:schemeClr val="bg1"/>
+                </a:solidFill>
+              </a:rPr>
+              <a:t>        b₂ ← b₂ − α·δ₂</a:t>
+            </a:r>
+          </a:p>
+          <a:p>
+            <a:r>
+              <a:rPr lang="ru-RU" sz="2800" dirty="0">
+                <a:solidFill>
+                  <a:schemeClr val="bg1"/>
+                </a:solidFill>
+              </a:rPr>
+              <a:t>        b₁ ← b₁ − α·δ₁</a:t>
+            </a:r>
+          </a:p>
+        </p:txBody>
+      </p:sp>
+    </p:spTree>
+    <p:extLst>
+      <p:ext uri="{BB962C8B-B14F-4D97-AF65-F5344CB8AC3E}">
+        <p14:creationId xmlns:p14="http://schemas.microsoft.com/office/powerpoint/2010/main" val="4032280851"/>
       </p:ext>
     </p:extLst>
   </p:cSld>
